--- a/1-2-encoding/1-2-3-image-encoding/image-encoding-v1.pptx
+++ b/1-2-encoding/1-2-3-image-encoding/image-encoding-v1.pptx
@@ -525,9 +525,11 @@
           <a:p>
             <a:r>
               <a:rPr lang="en-US" dirty="0"/>
-              <a:t>页面目的：开场，明确本课要解决“照片怎样变成0和1”的问题。
-逐字稿：同学们，今天我们不直接背定义，而是追踪一张图片从“能看见的画面”到“电脑里的数据”的过程。请先保留一个问题：图片文件里究竟保存了什么？这节课结束时，你要能用采样、量化、编码三个词解释它。
-转场：我们先从四种常见说法开始。</a:t>
+              <a:t>页面目的：开场，建立本课核心问题。
+逐字稿：同学们，今天我们追踪一张图片怎样从看得见的画面变成计算机里的数据。我们不先背定义，而是一步一步观察：位置怎样变成像素，颜色怎样变成有限值，最后怎样写成 bits 和 bytes。
+停顿与追问：请学生只记住核心问题：图片文件里到底保存了什么？
+预期回答：学生会说像素、颜色、数字或0和1。
+转场：先从四张卡片开始。</a:t>
             </a:r>
             <a:endParaRPr lang="en-US" dirty="0"/>
           </a:p>
@@ -615,9 +617,11 @@
           <a:p>
             <a:r>
               <a:rPr lang="en-US" dirty="0"/>
-              <a:t>页面目的：揭示接缝两侧实际RGB tuple，解释边界消失。
-逐字稿：我们取红色块最后一列的点(72,40)，和绿色块第一列的点(73,40)。16色版本里，左边是(255,0,0)，右边是(0,255,0)，所以边界仍有颜色差异。2色版本里，两侧都是(71,42,71)，颜色相同，所以这条靠颜色差异形成的接缝消失了。注意：像素位置没有减少，变化发生在每个位置允许取哪些颜色值。
-转场：如果只剩16个颜色状态，给它们编号至少要几bit？</a:t>
+              <a:t>页面目的：Q3 数值证据页，揭示接缝两侧RGB。
+逐字稿：我们取红色块最后一列的点(72,40)和绿色块第一列的点(73,40)。16色版本里，左右RGB不同，所以边界还有颜色差异。2色版本里，两侧都是(71,42,71)，因此由颜色差异形成的接缝消失。注意：pixel positions 没有减少，变化发生在每个位置允许取哪些颜色值。
+停顿与追问：追问：这和Q1的采样丢失有什么不同？
+预期回答：学生应区分空间位置减少与颜色值合并。
+转场：由此进入Q4：如果只剩16个状态，如何编号？</a:t>
             </a:r>
             <a:endParaRPr lang="en-US" dirty="0"/>
           </a:p>
@@ -705,10 +709,11 @@
           <a:p>
             <a:r>
               <a:rPr lang="en-US" dirty="0"/>
-              <a:t>页面目的：纯问题页，不能提前给出2^b推导。
-逐字稿：我们刚看到，颜色种数减少会改变画面，但还没有检查文件怎样保存。现在做一个假设：给16种允许的颜色各分配一个不同的、固定长度的二进制标签。最少需要几bit？2bit够不够？3bit够不够？4bit为什么可能刚好够？
-停顿：让学生先预测。
-转场：我们从能列出的状态数量推回需要的bit数。</a:t>
+              <a:t>页面目的：Q4 独立问题页，只问2/3bit够不够，不揭示4bit答案。
+逐字稿：Q3只让我们看到颜色种数减少会改变画面，但还没有检查文件怎样保存。现在假设给16种颜色各分配一个不同的、固定长度的二进制标签。请判断：2bit够吗？3bit够吗？你准备用什么方法判断？
+停顿与追问：停顿让学生先试；追问可以列出多少个二进制状态。
+预期回答：学生可能猜4bit，但需要用状态数量证明。
+转场：下一页枚举状态数，推导2^b。</a:t>
             </a:r>
             <a:endParaRPr lang="en-US" dirty="0"/>
           </a:p>
@@ -796,9 +801,11 @@
           <a:p>
             <a:r>
               <a:rPr lang="en-US" dirty="0"/>
-              <a:t>页面目的：由枚举状态推导2^b。
-逐字稿：1bit只有0和1，两个状态。2bits有00、01、10、11，四个状态。3bits是8个状态，还不够标记16种颜色。4bits是16个状态，刚好可以给16种颜色各贴一个不同标签。所以规律是可表示状态数等于2的b次方。注意，这只说明“可以这样编码”，不等于刚才的图像文件已经真的用4bits per pixel保存。
-转场：如果一个像素不是16个标签，而是R、G、B三个通道呢？</a:t>
+              <a:t>页面目的：Q4 证据页，用状态数量推出4bit。
+逐字稿：1bit只有2个状态；2bits有4个状态；3bits有8个状态，仍不够给16种颜色各贴一个不同标签；4bits有16个状态，刚好够。于是一般规律是可表示状态数等于2的b次方。注意，这只说明可以这样编码，不等于刚才的文件已经用4bits保存。
+停顿与追问：让学生复述为什么3bit不够；追问真实文件是否一定用4bit。
+预期回答：学生应说真实存储取决于格式和编码约定。
+转场：进入RGB：如果不是16个标签，而是三个通道呢？</a:t>
             </a:r>
             <a:endParaRPr lang="en-US" dirty="0"/>
           </a:p>
@@ -886,10 +893,11 @@
           <a:p>
             <a:r>
               <a:rPr lang="en-US" dirty="0"/>
-              <a:t>页面目的：先预测24-bit color含义，不先给答案。
-逐字稿：看到24-bit color，你第一反应是什么？它最多表示多少种颜色？A是24种，B是256种，C是2的24次方，D是现在还不能确定。请先投票并说理由。关键追问：这里的24描述的是颜色数量，还是描述一个像素用了多少个bit？
-停顿：收集理由。
-转场：我们看RGB三个通道。</a:t>
+              <a:t>页面目的：Q5 投票页，先暴露对24-bit的误解。
+逐字稿：看到24-bit color，你认为最多能表示多少种颜色？A是24种，B是256种，C是2的24次方，D是现在还不能确定。请先投票，并说明“24”到底是在描述颜色数量还是一个像素用了多少bit。
+停顿与追问：停顿收集理由，不判断对错。
+预期回答：学生可能选A或B，也可能猜C但说不清理由。
+转场：下一页用RGB三个通道推导。</a:t>
             </a:r>
             <a:endParaRPr lang="en-US" dirty="0"/>
           </a:p>
@@ -977,9 +985,11 @@
           <a:p>
             <a:r>
               <a:rPr lang="en-US" dirty="0"/>
-              <a:t>页面目的：从三个8-bit通道推导2^24。
-逐字稿：常见24-bit RGB把一个像素拆成三个通道：R、G、B。每个通道8bit，因此每个通道有256种取值。三个通道组合就是256×256×256，也就是2的24次方，约1677万种可能的RGB组合。所以24-bit color不是24种颜色，而是一个像素的表示位数是24bit。
-转场：下一步，把一个RGB像素具体写成0和1。</a:t>
+              <a:t>页面目的：Q5 证据页，从8+8+8推出2^24。
+逐字稿：常见24-bit RGB把一个像素拆成三个通道：R、G、B。每个通道8bit，表示0到255，共256种。三个通道组合是256乘256乘256，也就是2的24次方，约1677万种RGB组合。所以24-bit描述的是每像素位数，不是24种颜色。
+停顿与追问：追问：如果每通道不是8bit，颜色组合数会怎样变？
+预期回答：学生能说明通道数值组合导致颜色数指数增长。
+转场：下一步具体看一个RGB像素怎样写成0和1。</a:t>
             </a:r>
             <a:endParaRPr lang="en-US" dirty="0"/>
           </a:p>
@@ -1067,10 +1077,11 @@
           <a:p>
             <a:r>
               <a:rPr lang="en-US" dirty="0"/>
-              <a:t>页面目的：纯问题页，先让学生预测三个十进制数如何写成二进制。
-逐字稿：现在只看一个像素，RGB等于(255,128,0)。问题：如果每个通道都是8bit，那么这三个数各自会写成怎样的二进制？请先试着写，至少判断255应该是什么样。
-停顿：让学生尝试。
-转场：我们逐个揭示。</a:t>
+              <a:t>页面目的：Q6 独立问题页，先尝试转换。
+逐字稿：现在只看一个像素：RGB等于(255,128,0)。如果每个通道固定8bit，请你先试着写出R、G、B三个二进制值。至少判断255会是什么样。
+停顿与追问：停顿；允许学生只写一部分。
+预期回答：学生可能知道255是11111111，128较难。
+转场：下一页逐个揭示，并引出encoding。</a:t>
             </a:r>
             <a:endParaRPr lang="en-US" dirty="0"/>
           </a:p>
@@ -1158,10 +1169,11 @@
           <a:p>
             <a:r>
               <a:rPr lang="en-US" dirty="0"/>
-              <a:t>页面目的：揭示一个像素的RGB到bits，形成Encoding概念。
-逐字稿：255写成8个1，128是10000000，0要写成00000000，因为每个通道固定8位。连起来，概念上的RGB表示就是这三段bits。这里引入编码：编码不是只把东西变成0和1，还包括按约定长度和顺序组织这些值。
-追问：真正的图片文件是不是只把这些bits连起来就完了？
-转场：我们看一个真实BMP文件。</a:t>
+              <a:t>页面目的：Q6 证据页，揭示RGB到bits。
+逐字稿：255写成八个1；128写成10000000；0也要写满8位，是00000000。这样一个RGB像素就可以表示成三段8bit。这里的关键是：编码不只是变成0和1，还包括按照约定的长度和顺序组织数值。
+停顿与追问：追问：如果不约定长度，会出现什么问题？
+预期回答：学生会意识到软件无法知道每段从哪里开始。
+转场：转入真实文件：图片文件是不是只从像素开始？</a:t>
             </a:r>
             <a:endParaRPr lang="en-US" dirty="0"/>
           </a:p>
@@ -1249,10 +1261,11 @@
           <a:p>
             <a:r>
               <a:rPr lang="en-US" dirty="0"/>
-              <a:t>页面目的：提出文件格式问题，不提前展开padding。
-逐字稿：我们已经知道一个像素可以写成bits。但真正的图片文件是不是从第一个像素开始？请看一个真实BMP。问题只有一个：如果像素数据不是从文件开头开始，那么前面的bytes在做什么？
-停顿：让学生猜：文件类型、宽高、每像素位数、偏移位置。
-转场：看两个证据。</a:t>
+              <a:t>页面目的：Q7 问题页，提出文件格式信息。
+逐字稿：我们已经知道一个像素怎样写成bits。可是一个真正的图片文件是不是从第一个像素开始？请看真实文件q7-3x2-24bit.bmp。问题只有一个：如果像素数据前还有一段bytes，那些bytes可能在做什么？
+停顿与追问：停顿让学生猜。
+预期回答：学生可能说文件类型、宽高、每像素位数、像素起始位置。
+转场：下一页展示BM和offset证据。</a:t>
             </a:r>
             <a:endParaRPr lang="en-US" dirty="0"/>
           </a:p>
@@ -1340,9 +1353,11 @@
           <a:p>
             <a:r>
               <a:rPr lang="en-US" dirty="0"/>
-              <a:t>页面目的：展示BM和offset 54，建立文件格式信息概念。
-逐字稿：文件开头的42 4D对应BM，说明这是按BMP规则组织的数据。接着，header在0x0A位置有36 00 00 00，老师已提前解码为pixel-data offset等于54bytes。也就是说，真正的像素数组从第54个byte之后开始。前面的bytes不是画面颜色，而是文件标识、宽高、bit数、像素数据位置等格式信息。
-转场：知道格式信息后，我们来算未压缩像素值数据量。</a:t>
+              <a:t>页面目的：Q7 证据页，建立header/image info概念。
+逐字稿：文件开头的42 4D对应BM，说明这是BMP文件。header在0x0A处有36 00 00 00，老师已经提前解码，表示pixel-data offset等于54bytes。这说明文件前54个bytes不是颜色，而是告诉软件如何解释图像的数据。
+停顿与追问：追问：这些信息里可能有哪些？
+预期回答：学生说出文件类型、宽高、bit depth、像素数据位置。
+转场：进入未压缩像素数据量计算。</a:t>
             </a:r>
             <a:endParaRPr lang="en-US" dirty="0"/>
           </a:p>
@@ -1430,10 +1445,11 @@
           <a:p>
             <a:r>
               <a:rPr lang="en-US" dirty="0"/>
-              <a:t>页面目的：选择题问题页，选项保持中性，不标正确答案。
-逐字稿：现在进入本课最重要的计算。不要急着算完整，请先估计。一张1920×1080、24-bit RGB图片，如果只算未压缩像素值本身，大约多大？四个选项都用同样样式，先投票。
-停顿：统计学生选择。
-转场：我们按三个问题一步步算。</a:t>
+              <a:t>页面目的：Q8 估算问题页，所有选项保持中性。
+逐字稿：这是本节最重要的计算。先不算完整，先估计：1920×1080、24-bit RGB，如果只算未压缩像素值本身，大约多大？四个选项样式完全一样，请先投票。
+停顿与追问：统计选择；追问估算依据。
+预期回答：学生可能忽略bit到byte换算。
+转场：下一页按三步计算。</a:t>
             </a:r>
             <a:endParaRPr lang="en-US" dirty="0"/>
           </a:p>
@@ -1521,11 +1537,11 @@
           <a:p>
             <a:r>
               <a:rPr lang="en-US" dirty="0"/>
-              <a:t>页面目的：让学生先暴露初始模型，不把四个答案当作单选。
-逐字稿：请看四张卡片。它们都可能是对图片的描述，但描述的层次不一样。现在不要问“哪个唯一正确”，请你先把它们排成一个从“我们看到的图像”到“计算机保存的数据”的顺序。给你三十秒，和同桌说一句理由。
-停顿：等待学生排序。
-预期回答：学生可能把0和1放最前，也可能把像素和颜色混在一起。
-转场：我们先不公布顺序，后面每走一步就会回来修正这四张卡片。</a:t>
+              <a:t>页面目的：暴露学生对图像文件的初始模型。
+逐字稿：请看四张卡片。它们都可能是对图片的描述，但描述层次不同。现在请不要选唯一正确答案，而是把它们排成从“看到的画面”到“计算机保存的数据”的顺序。
+停顿与追问：给三十秒同桌讨论；追问：为什么把这张卡放前面？
+预期回答：可能把0和1放最前，也可能把像素和颜色混在一起。
+转场：先不公布顺序，后面用证据不断修正。</a:t>
             </a:r>
             <a:endParaRPr lang="en-US" dirty="0"/>
           </a:p>
@@ -1613,9 +1629,11 @@
           <a:p>
             <a:r>
               <a:rPr lang="en-US" dirty="0"/>
-              <a:t>页面目的：逐步推导Q8答案并标出B。
-逐字稿：第一步，像素数是1920×1080，等于2,073,600。第二步，24-bit RGB每像素24bit，也就是3bytes。第三步，乘起来得到6,220,800 bytes，约6.22MB。如果按MiB算约5.93MiB。所以最接近的是B，约6MB。注意，这里算的是未压缩像素值数据量，不是任意图片文件的磁盘大小。
-转场：最后做一个快速迁移。</a:t>
+              <a:t>页面目的：Q8 证据页，逐步计算答案。
+逐字稿：第一步，像素数是1920乘1080，等于2,073,600。第二步，24-bit RGB每像素24bit，也就是3bytes。第三步，相乘得到6,220,800 bytes，约6.22MB。因此最接近B，约6MB。请注意，这里算的是未压缩像素值数据量，不是任意文件的磁盘大小。
+停顿与追问：追问：如果按MiB会稍小，为什么？
+预期回答：学生能提到单位换算差异。
+转场：用Q9做快速迁移。</a:t>
             </a:r>
             <a:endParaRPr lang="en-US" dirty="0"/>
           </a:p>
@@ -1703,10 +1721,11 @@
           <a:p>
             <a:r>
               <a:rPr lang="en-US" dirty="0"/>
-              <a:t>页面目的：迁移题问题页，不提前给出4倍。
-逐字稿：原图是800×600，新图是1600×1200，bits per pixel不变。问题：未压缩像素值数据量变成几倍？请先不要算细节，先用直觉判断：是2倍还是4倍？为什么？
-停顿：收集预测。
-转场：看比例。</a:t>
+              <a:t>页面目的：Q9 迁移问题页，不提前给出4倍。
+逐字稿：原图800×600，新图1600×1200，bits per pixel不变。请先直觉判断：数据量变成2倍还是4倍？为什么？不要先算很细，只想像二维面积怎样变化。
+停顿与追问：停顿让学生预测。
+预期回答：学生可能只看到一个方向翻倍而答2倍。
+转场：下一页用比例说明。</a:t>
             </a:r>
             <a:endParaRPr lang="en-US" dirty="0"/>
           </a:p>
@@ -1794,9 +1813,11 @@
           <a:p>
             <a:r>
               <a:rPr lang="en-US" dirty="0"/>
-              <a:t>页面目的：给出迁移计算。
-逐字稿：像素数不是只看宽，也不是只看高，而是宽×高。新旧像素数之比是1600×1200除以800×600，宽方向2倍，高方向2倍，乘起来就是4倍。只要bits per pixel不变，未压缩像素值数据量也变成4倍。
-转场：回到开头四张卡片，重新整理图像编码链条。</a:t>
+              <a:t>页面目的：Q9 证据页，二维倍数相乘。
+逐字稿：像素总数是宽乘高，不是只看宽或只看高。新旧比值是1600×1200除以800×600，宽方向2倍，高方向2倍，乘起来是4倍。如果bits per pixel不变，未压缩像素值数据量也变成4倍。
+停顿与追问：追问：如果只把宽翻倍会怎样？
+预期回答：学生应能迁移到2倍。
+转场：回到Q0四张卡片，整理全课。</a:t>
             </a:r>
             <a:endParaRPr lang="en-US" dirty="0"/>
           </a:p>
@@ -1884,10 +1905,11 @@
           <a:p>
             <a:r>
               <a:rPr lang="en-US" dirty="0"/>
-              <a:t>页面目的：回到开头，形成完整表示链。
-逐字稿：我们回到开头四张卡片。现在它们不再是互相竞争的答案，而是表示链中的不同层次。先有像素位置，接着每个位置有颜色值，这些颜色值可以写成数字，最后按约定组织成bits和bytes。请你用一句话解释每一箭头发生了什么：采样决定位置，量化决定可取颜色，编码决定怎样写成和组织成bits/bytes。
-预期回答：学生能区分三个环节。
-转场：最后留下本课模型。</a:t>
+              <a:t>页面目的：Q12 问题页，先让学生重新排序，不提前显示链条。
+逐字稿：我们回到开头的四张卡片。现在请不要看答案，先自己重新排序：像素、颜色值、数字、0和1分别在图像表示链的哪一层？请用一句话解释两个相邻卡片之间发生了什么。
+停顿与追问：给学生30秒；追问某个箭头代表采样、量化还是编码。
+预期回答：学生应比Q0更能区分层次。
+转场：下一页揭示链条并收束全课。</a:t>
             </a:r>
             <a:endParaRPr lang="en-US" dirty="0"/>
           </a:p>
@@ -1975,9 +1997,11 @@
           <a:p>
             <a:r>
               <a:rPr lang="en-US" dirty="0"/>
-              <a:t>页面目的：收束全课，留下模型与两个公式。
-逐字稿：今天的核心不是背术语，而是理解三件事。Sampling回答在哪里取值、取多少位置；Quantization回答每个位置允许哪些离散值；Encoding回答这些值怎样表示并组织成bits和bytes。计算数据量时先问：像素数是多少？每个像素多少bit？单位怎样换算？这就是从图片到0和1的基本路径。
-结束：下一步我们会把这套模型迁移到更多图像文件和压缩情境中。</a:t>
+              <a:t>页面目的：Q12 揭示页，形成完整表示链和最终公式。
+逐字稿：比较合理的链条是：像素位置、颜色值、数字表示、bits和bytes。Sampling回答在哪里取值、取多少位置；Quantization回答每个位置允许哪些离散颜色；Encoding回答这些值怎样表示并组织成bits和bytes。最后记住两条：像素数等于W×H；像素值数据量等于W×H×b bits。24-bit RGB时就是W×H×3 bytes。
+停顿与追问：请学生用自己的话复述三个环节。
+预期回答：学生应能区分采样、量化、编码。
+转场：本节课结束，后续可迁移到压缩和更多文件格式。</a:t>
             </a:r>
             <a:endParaRPr lang="en-US" dirty="0"/>
           </a:p>
@@ -2065,10 +2089,11 @@
           <a:p>
             <a:r>
               <a:rPr lang="en-US" dirty="0"/>
-              <a:t>页面目的：先预测，不马上展示证据。
-逐字稿：接下来我们比较同一张测试图的不同版本。注意条件：投影时它们会显示成差不多一样大。问题是，如果显示尺寸一样，为什么看起来还会不同？请先预测：哪一张保留细节最多？8×8又是什么意思？
-停顿：请学生写下预测。
-转场：现在我们用两页证据图比较，不运行代码，保证节奏。</a:t>
+              <a:t>页面目的：Q1 独立问题页，先预测再看证据。
+逐字稿：接下来我们比较同一张测试图的不同版本。请注意，投影时它们显示成一样大。问题是：如果显示尺寸一样，为什么看起来还会不同？请先预测哪一张保留细节最多，低像素数时最先丢失什么。
+停顿与追问：停顿30秒；追问8×8到底表示什么。
+预期回答：学生一般会说像素少、细节少，但可能把显示尺寸和图像像素尺寸混淆。
+转场：现在只看PPTX中的证据页，不先运行代码。</a:t>
             </a:r>
             <a:endParaRPr lang="en-US" dirty="0"/>
           </a:p>
@@ -2156,10 +2181,11 @@
           <a:p>
             <a:r>
               <a:rPr lang="en-US" dirty="0"/>
-              <a:t>页面目的：比较256、64、32三张图，看到细节逐渐变粗糙。
-逐字稿：这三张图显示尺寸相同，但背后的像素数量不同。先看256×256，它作为比较基准。到64×64，整体结构还在，但边缘已经开始有方格感。到32×32，圆的轮廓和斜线的台阶更明显。请注意：我们没有把图片显示得更小，只是描述这张图的像素位置变少了。
-追问：哪些细节开始变得不稳定？
-转场：下一页继续从32×32往更低比较。</a:t>
+              <a:t>页面目的：证据页A，比较256、64、32。
+逐字稿：这页仍然是同一个问题。我们只加入证据A：256、64、32。三张图显示尺寸相同。请先看256作为基准，再看64，最后看32。你会发现整体结构还在，但圆和斜线开始方格化。
+停顿与追问：停顿让学生指出变化；追问：显示尺寸一样，变化来自哪里？
+预期回答：学生应指出像素数量减少，空间细节减少。
+转场：下一页用32作为衔接，继续比较更低像素数。</a:t>
             </a:r>
             <a:endParaRPr lang="en-US" dirty="0"/>
           </a:p>
@@ -2247,10 +2273,11 @@
           <a:p>
             <a:r>
               <a:rPr lang="en-US" dirty="0"/>
-              <a:t>页面目的：用32作为衔接，比较32、16、8。
-逐字稿：这页把32×32重复放在左侧，帮助我们连续比较。到16×16，圆还勉强可辨，但已经很粗糙，斜线也变成明显阶梯。到8×8，很多细节不是“更粗糙”，而是几乎认不出来。这里形成第一个概念：采样决定取多少空间位置，分辨率在本课指宽×高的像素尺寸。
-预期回答：学生能说出像素数量减少导致空间细节减少。
-转场：不过，分辨率是不是图像质量的唯一因素？</a:t>
+              <a:t>页面目的：证据页B，比较32、16、8，32重复作视觉锚点。
+逐字稿：这页左边仍然是32×32，作为衔接。到16×16时，圆和斜线明显粗糙，细节条纹大量丢失。到8×8时，有些结构已经不只是粗糙，而是难以辨认。这说明采样点太少时，空间结构本身会丢失。
+停顿与追问：追问：8×8上哪些内容还看得见，哪些已经消失？
+预期回答：学生能说出大色块相对稳定，小细节和曲线先丢失。
+转场：给出概念：Sampling 决定在哪里取值、取多少位置。</a:t>
             </a:r>
             <a:endParaRPr lang="en-US" dirty="0"/>
           </a:p>
@@ -2338,10 +2365,11 @@
           <a:p>
             <a:r>
               <a:rPr lang="en-US" dirty="0"/>
-              <a:t>页面目的：提出认知冲突，不先给反例。
-逐字稿：现在判断一句话：1920×1080的图片一定比800×600更清晰。你同意吗？请先举手，或者写下“同意/不同意/要看条件”。关键是说明理由。
-停顿：收集两三个理由。
-转场：我们看一组同场景图片，它们的文件像素尺寸是真的不同。</a:t>
+              <a:t>页面目的：Q2 独立判断题，先让学生表态。
+逐字稿：请判断这句话：1600×1200 的图片一定比 800×600 更清晰。你同意吗？先不要急着解释，先写下同意、不同意，或者“要看条件”。
+停顿与追问：停顿并统计；追问：你把清晰度归因于什么？
+预期回答：很多学生会倾向像素越多越清晰。
+转场：下一页展示同场景、同4:3构图的反例。</a:t>
             </a:r>
             <a:endParaRPr lang="en-US" dirty="0"/>
           </a:p>
@@ -2429,10 +2457,11 @@
           <a:p>
             <a:r>
               <a:rPr lang="en-US" dirty="0"/>
-              <a:t>页面目的：用真实尺寸图片证明像素数不是质量唯一因素。
-逐字稿：左边文件是1920×1080，像素数量更大，但我故意让它严重失焦；右边文件是800×600，像素数量更少，但边缘和细节更清楚。所以“分辨率越高一定越清晰”不严谨。更准确的说法是：在同一场景、同一范围、其他条件相同时，更多采样通常保留更多空间细节。
-追问：除了像素数，还有哪些因素影响质量？
-转场：刚才只改了空间位置。接下来像素数不变，只改颜色。</a:t>
+              <a:t>页面目的：Q2 证据页，用同场景同构图反例排除形变变量。
+逐字稿：左边是1600×1200，像素数更高，但加入了高斯模糊；右边是800×600，像素数更低，但边缘清晰。两张都是4:3，同一场景构图，所以不是形状比例造成差异。结论是：像素数不是图像质量唯一因素。
+停顿与追问：先让学生只观察，之后再揭示结论；追问还有哪些因素影响质量。
+预期回答：学生应提到对焦、模糊、压缩、噪声、颜色等。
+转场：转入Q3：像素数量不变，只改颜色会怎样？</a:t>
             </a:r>
             <a:endParaRPr lang="en-US" dirty="0"/>
           </a:p>
@@ -2520,10 +2549,11 @@
           <a:p>
             <a:r>
               <a:rPr lang="en-US" dirty="0"/>
-              <a:t>页面目的：预测量化可能改变视觉边界，但不提前说原因。
-逐字稿：现在像素位置不变，仍然是同一张256×256图。我们只限制整幅图最多能使用多少种颜色。请预测：如果颜色种数越来越少，红色块和绿色块紧贴的接缝会一直看得见吗？为什么？
-停顿：学生表态。
-转场：先看图，不看数值。</a:t>
+              <a:t>页面目的：Q3 独立预测页，不提前给出原因。
+逐字稿：现在 pixel dimensions 不变，仍然是同一张256×256图。我们只限制整幅图最多能出现多少种颜色。请预测：红色块和绿色块紧贴在一起时，颜色种数越来越少，红绿接缝会一直看得见吗？为什么？
+停顿与追问：请学生先表态；追问：如果像素位置没变，边界是不是一定还在？
+预期回答：学生可能认为像素没少，边界应当还在。
+转场：下一页只看图，不先公布RGB数值。</a:t>
             </a:r>
             <a:endParaRPr lang="en-US" dirty="0"/>
           </a:p>
@@ -2611,10 +2641,11 @@
           <a:p>
             <a:r>
               <a:rPr lang="en-US" dirty="0"/>
-              <a:t>页面目的：先观察图像，不提前给RGB答案。
-逐字稿：左边是原图，中间最多16种颜色，右边最多2种颜色。先不要看数值，只观察：渐变发生了什么？红绿接缝在16色和2色中有什么不同？像素位置有没有减少？
-预期回答：16色仍能区分红绿，2色里红绿边界消失或明显变弱。
-转场：接下来我们用接缝两侧两个像素的RGB值验证解释。</a:t>
+              <a:t>页面目的：Q3 先看图片现象，不显示RGB数值。
+逐字稿：这页仍然是同一个问题，我们先只看图。左边是原图，中间最多16种颜色，右边最多2种颜色。请观察渐变、色块和红绿接缝。16色时接缝还比较明显；2色时接缝可能消失或变得难以判断。
+停顿与追问：停顿让学生说现象；追问：这是不是因为像素位置少了？
+预期回答：学生应发现像素数没变，但颜色被合并了。
+转场：下一页再用接缝两侧像素的RGB值验证。</a:t>
             </a:r>
             <a:endParaRPr lang="en-US" dirty="0"/>
           </a:p>
@@ -2996,7 +3027,7 @@
         <p:spPr>
           <a:xfrm>
             <a:off x="0" y="0"/>
-            <a:ext cx="12191695" cy="101498"/>
+            <a:ext cx="12191695" cy="100584"/>
           </a:xfrm>
           <a:prstGeom prst="rect">
             <a:avLst/>
@@ -3020,8 +3051,8 @@
         </p:nvSpPr>
         <p:spPr>
           <a:xfrm>
-            <a:off x="0" y="6756502"/>
-            <a:ext cx="12191695" cy="101498"/>
+            <a:off x="0" y="6757416"/>
+            <a:ext cx="12191695" cy="100584"/>
           </a:xfrm>
           <a:prstGeom prst="rect">
             <a:avLst/>
@@ -3045,34 +3076,36 @@
         </p:nvSpPr>
         <p:spPr>
           <a:xfrm>
-            <a:off x="658368" y="2057400"/>
-            <a:ext cx="10972800" cy="822960"/>
-          </a:xfrm>
-          <a:prstGeom prst="rect">
-            <a:avLst/>
-          </a:prstGeom>
-          <a:noFill/>
-          <a:ln/>
-        </p:spPr>
-        <p:txBody>
-          <a:bodyPr wrap="square" rtlCol="0" anchor="ctr"/>
+            <a:off x="731520" y="2011680"/>
+            <a:ext cx="10789920" cy="868680"/>
+          </a:xfrm>
+          <a:prstGeom prst="rect">
+            <a:avLst/>
+          </a:prstGeom>
+          <a:noFill/>
+          <a:ln/>
+        </p:spPr>
+        <p:txBody>
+          <a:bodyPr wrap="square" rtlCol="0" anchor="ctr">
+            <a:normAutofit/>
+          </a:bodyPr>
           <a:lstStyle/>
           <a:p>
             <a:pPr algn="ctr" indent="0" marL="0">
               <a:buNone/>
             </a:pPr>
             <a:r>
-              <a:rPr lang="en-US" sz="6000" b="1" dirty="0">
+              <a:rPr lang="en-US" sz="5800" b="1" dirty="0">
                 <a:solidFill>
                   <a:srgbClr val="262626"/>
                 </a:solidFill>
-                <a:latin typeface="Alibaba PuHuiTi 3.0 115 Black" pitchFamily="34" charset="0"/>
-                <a:ea typeface="Alibaba PuHuiTi 3.0 115 Black" pitchFamily="34" charset="-122"/>
-                <a:cs typeface="Alibaba PuHuiTi 3.0 115 Black" pitchFamily="34" charset="-120"/>
+                <a:latin typeface="Alibaba PuHuiTi 3.0 85 Bold" pitchFamily="34" charset="0"/>
+                <a:ea typeface="Alibaba PuHuiTi 3.0 85 Bold" pitchFamily="34" charset="-122"/>
+                <a:cs typeface="Alibaba PuHuiTi 3.0 85 Bold" pitchFamily="34" charset="-120"/>
               </a:rPr>
               <a:t>图像编码</a:t>
             </a:r>
-            <a:endParaRPr lang="en-US" sz="6000" dirty="0"/>
+            <a:endParaRPr lang="en-US" sz="5800" dirty="0"/>
           </a:p>
         </p:txBody>
       </p:sp>
@@ -3084,26 +3117,28 @@
         </p:nvSpPr>
         <p:spPr>
           <a:xfrm>
-            <a:off x="658368" y="2971800"/>
-            <a:ext cx="10972800" cy="502920"/>
-          </a:xfrm>
-          <a:prstGeom prst="rect">
-            <a:avLst/>
-          </a:prstGeom>
-          <a:noFill/>
-          <a:ln/>
-        </p:spPr>
-        <p:txBody>
-          <a:bodyPr wrap="square" rtlCol="0" anchor="ctr"/>
+            <a:off x="731520" y="2926080"/>
+            <a:ext cx="10789920" cy="411480"/>
+          </a:xfrm>
+          <a:prstGeom prst="rect">
+            <a:avLst/>
+          </a:prstGeom>
+          <a:noFill/>
+          <a:ln/>
+        </p:spPr>
+        <p:txBody>
+          <a:bodyPr wrap="square" rtlCol="0" anchor="ctr">
+            <a:normAutofit/>
+          </a:bodyPr>
           <a:lstStyle/>
           <a:p>
             <a:pPr algn="ctr" indent="0" marL="0">
               <a:buNone/>
             </a:pPr>
             <a:r>
-              <a:rPr lang="en-US" sz="2800" dirty="0">
-                <a:solidFill>
-                  <a:srgbClr val="808080"/>
+              <a:rPr lang="en-US" sz="2700" dirty="0">
+                <a:solidFill>
+                  <a:srgbClr val="686868"/>
                 </a:solidFill>
                 <a:latin typeface="Alibaba PuHuiTi 3.0 55 Regular" pitchFamily="34" charset="0"/>
                 <a:ea typeface="Alibaba PuHuiTi 3.0 55 Regular" pitchFamily="34" charset="-122"/>
@@ -3111,7 +3146,7 @@
               </a:rPr>
               <a:t>Sampling · Quantization · Encoding</a:t>
             </a:r>
-            <a:endParaRPr lang="en-US" sz="2800" dirty="0"/>
+            <a:endParaRPr lang="en-US" sz="2700" dirty="0"/>
           </a:p>
         </p:txBody>
       </p:sp>
@@ -3123,17 +3158,19 @@
         </p:nvSpPr>
         <p:spPr>
           <a:xfrm>
-            <a:off x="658368" y="3703320"/>
-            <a:ext cx="10972800" cy="457200"/>
-          </a:xfrm>
-          <a:prstGeom prst="rect">
-            <a:avLst/>
-          </a:prstGeom>
-          <a:noFill/>
-          <a:ln/>
-        </p:spPr>
-        <p:txBody>
-          <a:bodyPr wrap="square" rtlCol="0" anchor="ctr"/>
+            <a:off x="731520" y="3657600"/>
+            <a:ext cx="10789920" cy="411480"/>
+          </a:xfrm>
+          <a:prstGeom prst="rect">
+            <a:avLst/>
+          </a:prstGeom>
+          <a:noFill/>
+          <a:ln/>
+        </p:spPr>
+        <p:txBody>
+          <a:bodyPr wrap="square" rtlCol="0" anchor="ctr">
+            <a:normAutofit/>
+          </a:bodyPr>
           <a:lstStyle/>
           <a:p>
             <a:pPr algn="ctr" indent="0" marL="0">
@@ -3195,7 +3232,7 @@
         <p:spPr>
           <a:xfrm>
             <a:off x="0" y="0"/>
-            <a:ext cx="12191695" cy="101498"/>
+            <a:ext cx="12191695" cy="100584"/>
           </a:xfrm>
           <a:prstGeom prst="rect">
             <a:avLst/>
@@ -3219,8 +3256,8 @@
         </p:nvSpPr>
         <p:spPr>
           <a:xfrm>
-            <a:off x="0" y="6756502"/>
-            <a:ext cx="12191695" cy="101498"/>
+            <a:off x="0" y="6757416"/>
+            <a:ext cx="12191695" cy="100584"/>
           </a:xfrm>
           <a:prstGeom prst="rect">
             <a:avLst/>
@@ -3244,8 +3281,8 @@
         </p:nvSpPr>
         <p:spPr>
           <a:xfrm>
-            <a:off x="608076" y="502920"/>
-            <a:ext cx="10972800" cy="685800"/>
+            <a:off x="594360" y="438912"/>
+            <a:ext cx="11064240" cy="621792"/>
           </a:xfrm>
           <a:prstGeom prst="rect">
             <a:avLst/>
@@ -3263,7 +3300,7 @@
               <a:buNone/>
             </a:pPr>
             <a:r>
-              <a:rPr lang="en-US" sz="3400" b="1" dirty="0">
+              <a:rPr lang="en-US" sz="3000" b="1" dirty="0">
                 <a:solidFill>
                   <a:srgbClr val="262626"/>
                 </a:solidFill>
@@ -3271,9 +3308,9 @@
                 <a:ea typeface="Alibaba PuHuiTi 3.0 115 Black" pitchFamily="34" charset="-122"/>
                 <a:cs typeface="Alibaba PuHuiTi 3.0 115 Black" pitchFamily="34" charset="-120"/>
               </a:rPr>
-              <a:t>Q3 再看证据：接缝两侧的 RGB 是否相同？</a:t>
-            </a:r>
-            <a:endParaRPr lang="en-US" sz="3400" dirty="0"/>
+              <a:t>Q3 像素数量完全一样，红绿接缝还会一直看得见吗？</a:t>
+            </a:r>
+            <a:endParaRPr lang="en-US" sz="3000" dirty="0"/>
           </a:p>
         </p:txBody>
       </p:sp>
@@ -3285,561 +3322,18 @@
         </p:nvSpPr>
         <p:spPr>
           <a:xfrm>
-            <a:off x="1005840" y="1600200"/>
-            <a:ext cx="10149840" cy="713232"/>
-          </a:xfrm>
-          <a:prstGeom prst="rect">
-            <a:avLst/>
-          </a:prstGeom>
-          <a:solidFill>
-            <a:srgbClr val="F0ECFF"/>
-          </a:solidFill>
-          <a:ln w="10160">
-            <a:solidFill>
-              <a:srgbClr val="D7D7E6"/>
-            </a:solidFill>
-            <a:prstDash val="solid"/>
-          </a:ln>
-        </p:spPr>
-      </p:sp>
-      <p:sp>
-        <p:nvSpPr>
-          <p:cNvPr id="7" name="Text 4"/>
-          <p:cNvSpPr/>
-          <p:nvPr/>
-        </p:nvSpPr>
-        <p:spPr>
-          <a:xfrm>
-            <a:off x="1005840" y="1728216"/>
-            <a:ext cx="1737360" cy="457200"/>
-          </a:xfrm>
-          <a:prstGeom prst="rect">
-            <a:avLst/>
-          </a:prstGeom>
-          <a:noFill/>
-          <a:ln/>
-        </p:spPr>
-        <p:txBody>
-          <a:bodyPr wrap="square" rtlCol="0" anchor="ctr"/>
-          <a:lstStyle/>
-          <a:p>
-            <a:pPr algn="ctr" indent="0" marL="0">
-              <a:buNone/>
-            </a:pPr>
-            <a:r>
-              <a:rPr lang="en-US" sz="1800" b="1" dirty="0">
-                <a:solidFill>
-                  <a:srgbClr val="262626"/>
-                </a:solidFill>
-                <a:latin typeface="Alibaba PuHuiTi 3.0 85 Bold" pitchFamily="34" charset="0"/>
-                <a:ea typeface="Alibaba PuHuiTi 3.0 85 Bold" pitchFamily="34" charset="-122"/>
-                <a:cs typeface="Alibaba PuHuiTi 3.0 85 Bold" pitchFamily="34" charset="-120"/>
-              </a:rPr>
-              <a:t>版本</a:t>
-            </a:r>
-            <a:endParaRPr lang="en-US" sz="1800" dirty="0"/>
-          </a:p>
-        </p:txBody>
-      </p:sp>
-      <p:sp>
-        <p:nvSpPr>
-          <p:cNvPr id="8" name="Text 5"/>
-          <p:cNvSpPr/>
-          <p:nvPr/>
-        </p:nvSpPr>
-        <p:spPr>
-          <a:xfrm>
-            <a:off x="3017520" y="1728216"/>
-            <a:ext cx="2377440" cy="457200"/>
-          </a:xfrm>
-          <a:prstGeom prst="rect">
-            <a:avLst/>
-          </a:prstGeom>
-          <a:noFill/>
-          <a:ln/>
-        </p:spPr>
-        <p:txBody>
-          <a:bodyPr wrap="square" rtlCol="0" anchor="ctr"/>
-          <a:lstStyle/>
-          <a:p>
-            <a:pPr algn="ctr" indent="0" marL="0">
-              <a:buNone/>
-            </a:pPr>
-            <a:r>
-              <a:rPr lang="en-US" sz="1800" b="1" dirty="0">
-                <a:solidFill>
-                  <a:srgbClr val="262626"/>
-                </a:solidFill>
-                <a:latin typeface="Alibaba PuHuiTi 3.0 85 Bold" pitchFamily="34" charset="0"/>
-                <a:ea typeface="Alibaba PuHuiTi 3.0 85 Bold" pitchFamily="34" charset="-122"/>
-                <a:cs typeface="Alibaba PuHuiTi 3.0 85 Bold" pitchFamily="34" charset="-120"/>
-              </a:rPr>
-              <a:t>left (72,40)</a:t>
-            </a:r>
-            <a:endParaRPr lang="en-US" sz="1800" dirty="0"/>
-          </a:p>
-        </p:txBody>
-      </p:sp>
-      <p:sp>
-        <p:nvSpPr>
-          <p:cNvPr id="9" name="Text 6"/>
-          <p:cNvSpPr/>
-          <p:nvPr/>
-        </p:nvSpPr>
-        <p:spPr>
-          <a:xfrm>
-            <a:off x="5577840" y="1728216"/>
-            <a:ext cx="2377440" cy="457200"/>
-          </a:xfrm>
-          <a:prstGeom prst="rect">
-            <a:avLst/>
-          </a:prstGeom>
-          <a:noFill/>
-          <a:ln/>
-        </p:spPr>
-        <p:txBody>
-          <a:bodyPr wrap="square" rtlCol="0" anchor="ctr"/>
-          <a:lstStyle/>
-          <a:p>
-            <a:pPr algn="ctr" indent="0" marL="0">
-              <a:buNone/>
-            </a:pPr>
-            <a:r>
-              <a:rPr lang="en-US" sz="1800" b="1" dirty="0">
-                <a:solidFill>
-                  <a:srgbClr val="262626"/>
-                </a:solidFill>
-                <a:latin typeface="Alibaba PuHuiTi 3.0 85 Bold" pitchFamily="34" charset="0"/>
-                <a:ea typeface="Alibaba PuHuiTi 3.0 85 Bold" pitchFamily="34" charset="-122"/>
-                <a:cs typeface="Alibaba PuHuiTi 3.0 85 Bold" pitchFamily="34" charset="-120"/>
-              </a:rPr>
-              <a:t>right (73,40)</a:t>
-            </a:r>
-            <a:endParaRPr lang="en-US" sz="1800" dirty="0"/>
-          </a:p>
-        </p:txBody>
-      </p:sp>
-      <p:sp>
-        <p:nvSpPr>
-          <p:cNvPr id="10" name="Text 7"/>
-          <p:cNvSpPr/>
-          <p:nvPr/>
-        </p:nvSpPr>
-        <p:spPr>
-          <a:xfrm>
-            <a:off x="8321040" y="1728216"/>
-            <a:ext cx="2377440" cy="457200"/>
-          </a:xfrm>
-          <a:prstGeom prst="rect">
-            <a:avLst/>
-          </a:prstGeom>
-          <a:noFill/>
-          <a:ln/>
-        </p:spPr>
-        <p:txBody>
-          <a:bodyPr wrap="square" rtlCol="0" anchor="ctr"/>
-          <a:lstStyle/>
-          <a:p>
-            <a:pPr algn="ctr" indent="0" marL="0">
-              <a:buNone/>
-            </a:pPr>
-            <a:r>
-              <a:rPr lang="en-US" sz="1800" b="1" dirty="0">
-                <a:solidFill>
-                  <a:srgbClr val="262626"/>
-                </a:solidFill>
-                <a:latin typeface="Alibaba PuHuiTi 3.0 85 Bold" pitchFamily="34" charset="0"/>
-                <a:ea typeface="Alibaba PuHuiTi 3.0 85 Bold" pitchFamily="34" charset="-122"/>
-                <a:cs typeface="Alibaba PuHuiTi 3.0 85 Bold" pitchFamily="34" charset="-120"/>
-              </a:rPr>
-              <a:t>是否相同</a:t>
-            </a:r>
-            <a:endParaRPr lang="en-US" sz="1800" dirty="0"/>
-          </a:p>
-        </p:txBody>
-      </p:sp>
-      <p:sp>
-        <p:nvSpPr>
-          <p:cNvPr id="11" name="Shape 8"/>
-          <p:cNvSpPr/>
-          <p:nvPr/>
-        </p:nvSpPr>
-        <p:spPr>
-          <a:xfrm>
-            <a:off x="1005840" y="2377440"/>
-            <a:ext cx="10149840" cy="713232"/>
-          </a:xfrm>
-          <a:prstGeom prst="rect">
-            <a:avLst/>
-          </a:prstGeom>
-          <a:solidFill>
-            <a:srgbClr val="FFFFFF"/>
-          </a:solidFill>
-          <a:ln w="10160">
-            <a:solidFill>
-              <a:srgbClr val="D7D7E6"/>
-            </a:solidFill>
-            <a:prstDash val="solid"/>
-          </a:ln>
-        </p:spPr>
-      </p:sp>
-      <p:sp>
-        <p:nvSpPr>
-          <p:cNvPr id="12" name="Text 9"/>
-          <p:cNvSpPr/>
-          <p:nvPr/>
-        </p:nvSpPr>
-        <p:spPr>
-          <a:xfrm>
-            <a:off x="1005840" y="2505456"/>
-            <a:ext cx="1737360" cy="457200"/>
-          </a:xfrm>
-          <a:prstGeom prst="rect">
-            <a:avLst/>
-          </a:prstGeom>
-          <a:noFill/>
-          <a:ln/>
-        </p:spPr>
-        <p:txBody>
-          <a:bodyPr wrap="square" rtlCol="0" anchor="ctr"/>
-          <a:lstStyle/>
-          <a:p>
-            <a:pPr algn="ctr" indent="0" marL="0">
-              <a:buNone/>
-            </a:pPr>
-            <a:r>
-              <a:rPr lang="en-US" sz="1800" dirty="0">
-                <a:solidFill>
-                  <a:srgbClr val="262626"/>
-                </a:solidFill>
-                <a:latin typeface="Alibaba PuHuiTi 3.0 55 Regular" pitchFamily="34" charset="0"/>
-                <a:ea typeface="Alibaba PuHuiTi 3.0 55 Regular" pitchFamily="34" charset="-122"/>
-                <a:cs typeface="Alibaba PuHuiTi 3.0 55 Regular" pitchFamily="34" charset="-120"/>
-              </a:rPr>
-              <a:t>16 colors</a:t>
-            </a:r>
-            <a:endParaRPr lang="en-US" sz="1800" dirty="0"/>
-          </a:p>
-        </p:txBody>
-      </p:sp>
-      <p:sp>
-        <p:nvSpPr>
-          <p:cNvPr id="13" name="Text 10"/>
-          <p:cNvSpPr/>
-          <p:nvPr/>
-        </p:nvSpPr>
-        <p:spPr>
-          <a:xfrm>
-            <a:off x="3017520" y="2505456"/>
-            <a:ext cx="2377440" cy="457200"/>
-          </a:xfrm>
-          <a:prstGeom prst="rect">
-            <a:avLst/>
-          </a:prstGeom>
-          <a:noFill/>
-          <a:ln/>
-        </p:spPr>
-        <p:txBody>
-          <a:bodyPr wrap="square" rtlCol="0" anchor="ctr"/>
-          <a:lstStyle/>
-          <a:p>
-            <a:pPr algn="ctr" indent="0" marL="0">
-              <a:buNone/>
-            </a:pPr>
-            <a:r>
-              <a:rPr lang="en-US" sz="1800" dirty="0">
-                <a:solidFill>
-                  <a:srgbClr val="262626"/>
-                </a:solidFill>
-                <a:latin typeface="Alibaba PuHuiTi 3.0 55 Regular" pitchFamily="34" charset="0"/>
-                <a:ea typeface="Alibaba PuHuiTi 3.0 55 Regular" pitchFamily="34" charset="-122"/>
-                <a:cs typeface="Alibaba PuHuiTi 3.0 55 Regular" pitchFamily="34" charset="-120"/>
-              </a:rPr>
-              <a:t>(255, 0, 0)</a:t>
-            </a:r>
-            <a:endParaRPr lang="en-US" sz="1800" dirty="0"/>
-          </a:p>
-        </p:txBody>
-      </p:sp>
-      <p:sp>
-        <p:nvSpPr>
-          <p:cNvPr id="14" name="Text 11"/>
-          <p:cNvSpPr/>
-          <p:nvPr/>
-        </p:nvSpPr>
-        <p:spPr>
-          <a:xfrm>
-            <a:off x="5577840" y="2505456"/>
-            <a:ext cx="2377440" cy="457200"/>
-          </a:xfrm>
-          <a:prstGeom prst="rect">
-            <a:avLst/>
-          </a:prstGeom>
-          <a:noFill/>
-          <a:ln/>
-        </p:spPr>
-        <p:txBody>
-          <a:bodyPr wrap="square" rtlCol="0" anchor="ctr"/>
-          <a:lstStyle/>
-          <a:p>
-            <a:pPr algn="ctr" indent="0" marL="0">
-              <a:buNone/>
-            </a:pPr>
-            <a:r>
-              <a:rPr lang="en-US" sz="1800" dirty="0">
-                <a:solidFill>
-                  <a:srgbClr val="262626"/>
-                </a:solidFill>
-                <a:latin typeface="Alibaba PuHuiTi 3.0 55 Regular" pitchFamily="34" charset="0"/>
-                <a:ea typeface="Alibaba PuHuiTi 3.0 55 Regular" pitchFamily="34" charset="-122"/>
-                <a:cs typeface="Alibaba PuHuiTi 3.0 55 Regular" pitchFamily="34" charset="-120"/>
-              </a:rPr>
-              <a:t>(0, 255, 0)</a:t>
-            </a:r>
-            <a:endParaRPr lang="en-US" sz="1800" dirty="0"/>
-          </a:p>
-        </p:txBody>
-      </p:sp>
-      <p:sp>
-        <p:nvSpPr>
-          <p:cNvPr id="15" name="Text 12"/>
-          <p:cNvSpPr/>
-          <p:nvPr/>
-        </p:nvSpPr>
-        <p:spPr>
-          <a:xfrm>
-            <a:off x="8321040" y="2505456"/>
-            <a:ext cx="2377440" cy="457200"/>
-          </a:xfrm>
-          <a:prstGeom prst="rect">
-            <a:avLst/>
-          </a:prstGeom>
-          <a:noFill/>
-          <a:ln/>
-        </p:spPr>
-        <p:txBody>
-          <a:bodyPr wrap="square" rtlCol="0" anchor="ctr"/>
-          <a:lstStyle/>
-          <a:p>
-            <a:pPr algn="ctr" indent="0" marL="0">
-              <a:buNone/>
-            </a:pPr>
-            <a:r>
-              <a:rPr lang="en-US" sz="1800" b="1" dirty="0">
-                <a:solidFill>
-                  <a:srgbClr val="262626"/>
-                </a:solidFill>
-                <a:latin typeface="Alibaba PuHuiTi 3.0 55 Regular" pitchFamily="34" charset="0"/>
-                <a:ea typeface="Alibaba PuHuiTi 3.0 55 Regular" pitchFamily="34" charset="-122"/>
-                <a:cs typeface="Alibaba PuHuiTi 3.0 55 Regular" pitchFamily="34" charset="-120"/>
-              </a:rPr>
-              <a:t>不同</a:t>
-            </a:r>
-            <a:endParaRPr lang="en-US" sz="1800" dirty="0"/>
-          </a:p>
-        </p:txBody>
-      </p:sp>
-      <p:sp>
-        <p:nvSpPr>
-          <p:cNvPr id="16" name="Shape 13"/>
-          <p:cNvSpPr/>
-          <p:nvPr/>
-        </p:nvSpPr>
-        <p:spPr>
-          <a:xfrm>
-            <a:off x="1005840" y="3154680"/>
-            <a:ext cx="10149840" cy="713232"/>
-          </a:xfrm>
-          <a:prstGeom prst="rect">
-            <a:avLst/>
-          </a:prstGeom>
-          <a:solidFill>
-            <a:srgbClr val="FFF1F1"/>
-          </a:solidFill>
-          <a:ln w="10160">
-            <a:solidFill>
-              <a:srgbClr val="D7D7E6"/>
-            </a:solidFill>
-            <a:prstDash val="solid"/>
-          </a:ln>
-        </p:spPr>
-      </p:sp>
-      <p:sp>
-        <p:nvSpPr>
-          <p:cNvPr id="17" name="Text 14"/>
-          <p:cNvSpPr/>
-          <p:nvPr/>
-        </p:nvSpPr>
-        <p:spPr>
-          <a:xfrm>
-            <a:off x="1005840" y="3282696"/>
-            <a:ext cx="1737360" cy="457200"/>
-          </a:xfrm>
-          <a:prstGeom prst="rect">
-            <a:avLst/>
-          </a:prstGeom>
-          <a:noFill/>
-          <a:ln/>
-        </p:spPr>
-        <p:txBody>
-          <a:bodyPr wrap="square" rtlCol="0" anchor="ctr"/>
-          <a:lstStyle/>
-          <a:p>
-            <a:pPr algn="ctr" indent="0" marL="0">
-              <a:buNone/>
-            </a:pPr>
-            <a:r>
-              <a:rPr lang="en-US" sz="1800" dirty="0">
-                <a:solidFill>
-                  <a:srgbClr val="262626"/>
-                </a:solidFill>
-                <a:latin typeface="Alibaba PuHuiTi 3.0 55 Regular" pitchFamily="34" charset="0"/>
-                <a:ea typeface="Alibaba PuHuiTi 3.0 55 Regular" pitchFamily="34" charset="-122"/>
-                <a:cs typeface="Alibaba PuHuiTi 3.0 55 Regular" pitchFamily="34" charset="-120"/>
-              </a:rPr>
-              <a:t>2 colors</a:t>
-            </a:r>
-            <a:endParaRPr lang="en-US" sz="1800" dirty="0"/>
-          </a:p>
-        </p:txBody>
-      </p:sp>
-      <p:sp>
-        <p:nvSpPr>
-          <p:cNvPr id="18" name="Text 15"/>
-          <p:cNvSpPr/>
-          <p:nvPr/>
-        </p:nvSpPr>
-        <p:spPr>
-          <a:xfrm>
-            <a:off x="3017520" y="3282696"/>
-            <a:ext cx="2377440" cy="457200"/>
-          </a:xfrm>
-          <a:prstGeom prst="rect">
-            <a:avLst/>
-          </a:prstGeom>
-          <a:noFill/>
-          <a:ln/>
-        </p:spPr>
-        <p:txBody>
-          <a:bodyPr wrap="square" rtlCol="0" anchor="ctr"/>
-          <a:lstStyle/>
-          <a:p>
-            <a:pPr algn="ctr" indent="0" marL="0">
-              <a:buNone/>
-            </a:pPr>
-            <a:r>
-              <a:rPr lang="en-US" sz="1800" dirty="0">
-                <a:solidFill>
-                  <a:srgbClr val="262626"/>
-                </a:solidFill>
-                <a:latin typeface="Alibaba PuHuiTi 3.0 55 Regular" pitchFamily="34" charset="0"/>
-                <a:ea typeface="Alibaba PuHuiTi 3.0 55 Regular" pitchFamily="34" charset="-122"/>
-                <a:cs typeface="Alibaba PuHuiTi 3.0 55 Regular" pitchFamily="34" charset="-120"/>
-              </a:rPr>
-              <a:t>(71, 42, 71)</a:t>
-            </a:r>
-            <a:endParaRPr lang="en-US" sz="1800" dirty="0"/>
-          </a:p>
-        </p:txBody>
-      </p:sp>
-      <p:sp>
-        <p:nvSpPr>
-          <p:cNvPr id="19" name="Text 16"/>
-          <p:cNvSpPr/>
-          <p:nvPr/>
-        </p:nvSpPr>
-        <p:spPr>
-          <a:xfrm>
-            <a:off x="5577840" y="3282696"/>
-            <a:ext cx="2377440" cy="457200"/>
-          </a:xfrm>
-          <a:prstGeom prst="rect">
-            <a:avLst/>
-          </a:prstGeom>
-          <a:noFill/>
-          <a:ln/>
-        </p:spPr>
-        <p:txBody>
-          <a:bodyPr wrap="square" rtlCol="0" anchor="ctr"/>
-          <a:lstStyle/>
-          <a:p>
-            <a:pPr algn="ctr" indent="0" marL="0">
-              <a:buNone/>
-            </a:pPr>
-            <a:r>
-              <a:rPr lang="en-US" sz="1800" dirty="0">
-                <a:solidFill>
-                  <a:srgbClr val="262626"/>
-                </a:solidFill>
-                <a:latin typeface="Alibaba PuHuiTi 3.0 55 Regular" pitchFamily="34" charset="0"/>
-                <a:ea typeface="Alibaba PuHuiTi 3.0 55 Regular" pitchFamily="34" charset="-122"/>
-                <a:cs typeface="Alibaba PuHuiTi 3.0 55 Regular" pitchFamily="34" charset="-120"/>
-              </a:rPr>
-              <a:t>(71, 42, 71)</a:t>
-            </a:r>
-            <a:endParaRPr lang="en-US" sz="1800" dirty="0"/>
-          </a:p>
-        </p:txBody>
-      </p:sp>
-      <p:sp>
-        <p:nvSpPr>
-          <p:cNvPr id="20" name="Text 17"/>
-          <p:cNvSpPr/>
-          <p:nvPr/>
-        </p:nvSpPr>
-        <p:spPr>
-          <a:xfrm>
-            <a:off x="8321040" y="3282696"/>
-            <a:ext cx="2377440" cy="457200"/>
-          </a:xfrm>
-          <a:prstGeom prst="rect">
-            <a:avLst/>
-          </a:prstGeom>
-          <a:noFill/>
-          <a:ln/>
-        </p:spPr>
-        <p:txBody>
-          <a:bodyPr wrap="square" rtlCol="0" anchor="ctr"/>
-          <a:lstStyle/>
-          <a:p>
-            <a:pPr algn="ctr" indent="0" marL="0">
-              <a:buNone/>
-            </a:pPr>
-            <a:r>
-              <a:rPr lang="en-US" sz="1800" b="1" dirty="0">
-                <a:solidFill>
-                  <a:srgbClr val="FF0000"/>
-                </a:solidFill>
-                <a:latin typeface="Alibaba PuHuiTi 3.0 55 Regular" pitchFamily="34" charset="0"/>
-                <a:ea typeface="Alibaba PuHuiTi 3.0 55 Regular" pitchFamily="34" charset="-122"/>
-                <a:cs typeface="Alibaba PuHuiTi 3.0 55 Regular" pitchFamily="34" charset="-120"/>
-              </a:rPr>
-              <a:t>相同</a:t>
-            </a:r>
-            <a:endParaRPr lang="en-US" sz="1800" dirty="0"/>
-          </a:p>
-        </p:txBody>
-      </p:sp>
-      <p:sp>
-        <p:nvSpPr>
-          <p:cNvPr id="21" name="Shape 18"/>
-          <p:cNvSpPr/>
-          <p:nvPr/>
-        </p:nvSpPr>
-        <p:spPr>
-          <a:xfrm>
-            <a:off x="2057400" y="4846320"/>
-            <a:ext cx="7955280" cy="502920"/>
+            <a:off x="3977640" y="1170432"/>
+            <a:ext cx="4297680" cy="411480"/>
           </a:xfrm>
           <a:prstGeom prst="roundRect">
             <a:avLst>
-              <a:gd name="adj" fmla="val 29091"/>
+              <a:gd name="adj" fmla="val 40000"/>
             </a:avLst>
           </a:prstGeom>
           <a:solidFill>
-            <a:srgbClr val="F7F4FF"/>
-          </a:solidFill>
-          <a:ln w="15240">
+            <a:srgbClr val="F6F3FF"/>
+          </a:solidFill>
+          <a:ln w="13970">
             <a:solidFill>
               <a:srgbClr val="8C64E1"/>
             </a:solidFill>
@@ -3849,30 +3343,32 @@
       </p:sp>
       <p:sp>
         <p:nvSpPr>
-          <p:cNvPr id="22" name="Text 19"/>
-          <p:cNvSpPr/>
-          <p:nvPr/>
-        </p:nvSpPr>
-        <p:spPr>
-          <a:xfrm>
-            <a:off x="2057400" y="4882896"/>
-            <a:ext cx="7955280" cy="457200"/>
-          </a:xfrm>
-          <a:prstGeom prst="rect">
-            <a:avLst/>
-          </a:prstGeom>
-          <a:noFill/>
-          <a:ln/>
-        </p:spPr>
-        <p:txBody>
-          <a:bodyPr wrap="square" rtlCol="0" anchor="ctr"/>
+          <p:cNvPr id="7" name="Text 4"/>
+          <p:cNvSpPr/>
+          <p:nvPr/>
+        </p:nvSpPr>
+        <p:spPr>
+          <a:xfrm>
+            <a:off x="4069080" y="1197864"/>
+            <a:ext cx="4114800" cy="356616"/>
+          </a:xfrm>
+          <a:prstGeom prst="rect">
+            <a:avLst/>
+          </a:prstGeom>
+          <a:noFill/>
+          <a:ln/>
+        </p:spPr>
+        <p:txBody>
+          <a:bodyPr wrap="square" rtlCol="0" anchor="ctr">
+            <a:normAutofit/>
+          </a:bodyPr>
           <a:lstStyle/>
           <a:p>
             <a:pPr algn="ctr" indent="0" marL="0">
               <a:buNone/>
             </a:pPr>
             <a:r>
-              <a:rPr lang="en-US" sz="2000" b="1" dirty="0">
+              <a:rPr lang="en-US" sz="1800" b="1" dirty="0">
                 <a:solidFill>
                   <a:srgbClr val="8C64E1"/>
                 </a:solidFill>
@@ -3880,9 +3376,644 @@
                 <a:ea typeface="Alibaba PuHuiTi 3.0 85 Bold" pitchFamily="34" charset="-122"/>
                 <a:cs typeface="Alibaba PuHuiTi 3.0 85 Bold" pitchFamily="34" charset="-120"/>
               </a:rPr>
+              <a:t>证据 B：再揭示接缝 RGB</a:t>
+            </a:r>
+            <a:endParaRPr lang="en-US" sz="1800" dirty="0"/>
+          </a:p>
+        </p:txBody>
+      </p:sp>
+      <p:sp>
+        <p:nvSpPr>
+          <p:cNvPr id="8" name="Shape 5"/>
+          <p:cNvSpPr/>
+          <p:nvPr/>
+        </p:nvSpPr>
+        <p:spPr>
+          <a:xfrm>
+            <a:off x="960120" y="1920240"/>
+            <a:ext cx="10241280" cy="694944"/>
+          </a:xfrm>
+          <a:prstGeom prst="rect">
+            <a:avLst/>
+          </a:prstGeom>
+          <a:solidFill>
+            <a:srgbClr val="F0ECFF"/>
+          </a:solidFill>
+          <a:ln w="10160">
+            <a:solidFill>
+              <a:srgbClr val="D8D2EA"/>
+            </a:solidFill>
+            <a:prstDash val="solid"/>
+          </a:ln>
+        </p:spPr>
+      </p:sp>
+      <p:sp>
+        <p:nvSpPr>
+          <p:cNvPr id="9" name="Text 6"/>
+          <p:cNvSpPr/>
+          <p:nvPr/>
+        </p:nvSpPr>
+        <p:spPr>
+          <a:xfrm>
+            <a:off x="960120" y="2011680"/>
+            <a:ext cx="1645920" cy="457200"/>
+          </a:xfrm>
+          <a:prstGeom prst="rect">
+            <a:avLst/>
+          </a:prstGeom>
+          <a:noFill/>
+          <a:ln/>
+        </p:spPr>
+        <p:txBody>
+          <a:bodyPr wrap="square" rtlCol="0" anchor="ctr">
+            <a:normAutofit/>
+          </a:bodyPr>
+          <a:lstStyle/>
+          <a:p>
+            <a:pPr algn="ctr" indent="0" marL="0">
+              <a:buNone/>
+            </a:pPr>
+            <a:r>
+              <a:rPr lang="en-US" sz="1800" b="1" dirty="0">
+                <a:solidFill>
+                  <a:srgbClr val="262626"/>
+                </a:solidFill>
+                <a:latin typeface="Alibaba PuHuiTi 3.0 85 Bold" pitchFamily="34" charset="0"/>
+                <a:ea typeface="Alibaba PuHuiTi 3.0 85 Bold" pitchFamily="34" charset="-122"/>
+                <a:cs typeface="Alibaba PuHuiTi 3.0 85 Bold" pitchFamily="34" charset="-120"/>
+              </a:rPr>
+              <a:t>版本</a:t>
+            </a:r>
+            <a:endParaRPr lang="en-US" sz="1800" dirty="0"/>
+          </a:p>
+        </p:txBody>
+      </p:sp>
+      <p:sp>
+        <p:nvSpPr>
+          <p:cNvPr id="10" name="Text 7"/>
+          <p:cNvSpPr/>
+          <p:nvPr/>
+        </p:nvSpPr>
+        <p:spPr>
+          <a:xfrm>
+            <a:off x="2880360" y="2011680"/>
+            <a:ext cx="2377440" cy="457200"/>
+          </a:xfrm>
+          <a:prstGeom prst="rect">
+            <a:avLst/>
+          </a:prstGeom>
+          <a:noFill/>
+          <a:ln/>
+        </p:spPr>
+        <p:txBody>
+          <a:bodyPr wrap="square" rtlCol="0" anchor="ctr">
+            <a:normAutofit/>
+          </a:bodyPr>
+          <a:lstStyle/>
+          <a:p>
+            <a:pPr algn="ctr" indent="0" marL="0">
+              <a:buNone/>
+            </a:pPr>
+            <a:r>
+              <a:rPr lang="en-US" sz="1800" b="1" dirty="0">
+                <a:solidFill>
+                  <a:srgbClr val="262626"/>
+                </a:solidFill>
+                <a:latin typeface="Alibaba PuHuiTi 3.0 85 Bold" pitchFamily="34" charset="0"/>
+                <a:ea typeface="Alibaba PuHuiTi 3.0 85 Bold" pitchFamily="34" charset="-122"/>
+                <a:cs typeface="Alibaba PuHuiTi 3.0 85 Bold" pitchFamily="34" charset="-120"/>
+              </a:rPr>
+              <a:t>left (72,40)</a:t>
+            </a:r>
+            <a:endParaRPr lang="en-US" sz="1800" dirty="0"/>
+          </a:p>
+        </p:txBody>
+      </p:sp>
+      <p:sp>
+        <p:nvSpPr>
+          <p:cNvPr id="11" name="Text 8"/>
+          <p:cNvSpPr/>
+          <p:nvPr/>
+        </p:nvSpPr>
+        <p:spPr>
+          <a:xfrm>
+            <a:off x="5532120" y="2011680"/>
+            <a:ext cx="2377440" cy="457200"/>
+          </a:xfrm>
+          <a:prstGeom prst="rect">
+            <a:avLst/>
+          </a:prstGeom>
+          <a:noFill/>
+          <a:ln/>
+        </p:spPr>
+        <p:txBody>
+          <a:bodyPr wrap="square" rtlCol="0" anchor="ctr">
+            <a:normAutofit/>
+          </a:bodyPr>
+          <a:lstStyle/>
+          <a:p>
+            <a:pPr algn="ctr" indent="0" marL="0">
+              <a:buNone/>
+            </a:pPr>
+            <a:r>
+              <a:rPr lang="en-US" sz="1800" b="1" dirty="0">
+                <a:solidFill>
+                  <a:srgbClr val="262626"/>
+                </a:solidFill>
+                <a:latin typeface="Alibaba PuHuiTi 3.0 85 Bold" pitchFamily="34" charset="0"/>
+                <a:ea typeface="Alibaba PuHuiTi 3.0 85 Bold" pitchFamily="34" charset="-122"/>
+                <a:cs typeface="Alibaba PuHuiTi 3.0 85 Bold" pitchFamily="34" charset="-120"/>
+              </a:rPr>
+              <a:t>right (73,40)</a:t>
+            </a:r>
+            <a:endParaRPr lang="en-US" sz="1800" dirty="0"/>
+          </a:p>
+        </p:txBody>
+      </p:sp>
+      <p:sp>
+        <p:nvSpPr>
+          <p:cNvPr id="12" name="Text 9"/>
+          <p:cNvSpPr/>
+          <p:nvPr/>
+        </p:nvSpPr>
+        <p:spPr>
+          <a:xfrm>
+            <a:off x="8412480" y="2011680"/>
+            <a:ext cx="2286000" cy="457200"/>
+          </a:xfrm>
+          <a:prstGeom prst="rect">
+            <a:avLst/>
+          </a:prstGeom>
+          <a:noFill/>
+          <a:ln/>
+        </p:spPr>
+        <p:txBody>
+          <a:bodyPr wrap="square" rtlCol="0" anchor="ctr">
+            <a:normAutofit/>
+          </a:bodyPr>
+          <a:lstStyle/>
+          <a:p>
+            <a:pPr algn="ctr" indent="0" marL="0">
+              <a:buNone/>
+            </a:pPr>
+            <a:r>
+              <a:rPr lang="en-US" sz="1800" b="1" dirty="0">
+                <a:solidFill>
+                  <a:srgbClr val="262626"/>
+                </a:solidFill>
+                <a:latin typeface="Alibaba PuHuiTi 3.0 85 Bold" pitchFamily="34" charset="0"/>
+                <a:ea typeface="Alibaba PuHuiTi 3.0 85 Bold" pitchFamily="34" charset="-122"/>
+                <a:cs typeface="Alibaba PuHuiTi 3.0 85 Bold" pitchFamily="34" charset="-120"/>
+              </a:rPr>
+              <a:t>是否相同</a:t>
+            </a:r>
+            <a:endParaRPr lang="en-US" sz="1800" dirty="0"/>
+          </a:p>
+        </p:txBody>
+      </p:sp>
+      <p:sp>
+        <p:nvSpPr>
+          <p:cNvPr id="13" name="Shape 10"/>
+          <p:cNvSpPr/>
+          <p:nvPr/>
+        </p:nvSpPr>
+        <p:spPr>
+          <a:xfrm>
+            <a:off x="960120" y="2697480"/>
+            <a:ext cx="10241280" cy="694944"/>
+          </a:xfrm>
+          <a:prstGeom prst="rect">
+            <a:avLst/>
+          </a:prstGeom>
+          <a:solidFill>
+            <a:srgbClr val="FFFFFF"/>
+          </a:solidFill>
+          <a:ln w="10160">
+            <a:solidFill>
+              <a:srgbClr val="D8D2EA"/>
+            </a:solidFill>
+            <a:prstDash val="solid"/>
+          </a:ln>
+        </p:spPr>
+      </p:sp>
+      <p:sp>
+        <p:nvSpPr>
+          <p:cNvPr id="14" name="Text 11"/>
+          <p:cNvSpPr/>
+          <p:nvPr/>
+        </p:nvSpPr>
+        <p:spPr>
+          <a:xfrm>
+            <a:off x="960120" y="2788920"/>
+            <a:ext cx="1645920" cy="457200"/>
+          </a:xfrm>
+          <a:prstGeom prst="rect">
+            <a:avLst/>
+          </a:prstGeom>
+          <a:noFill/>
+          <a:ln/>
+        </p:spPr>
+        <p:txBody>
+          <a:bodyPr wrap="square" rtlCol="0" anchor="ctr">
+            <a:normAutofit/>
+          </a:bodyPr>
+          <a:lstStyle/>
+          <a:p>
+            <a:pPr algn="ctr" indent="0" marL="0">
+              <a:buNone/>
+            </a:pPr>
+            <a:r>
+              <a:rPr lang="en-US" sz="1800" dirty="0">
+                <a:solidFill>
+                  <a:srgbClr val="262626"/>
+                </a:solidFill>
+                <a:latin typeface="Alibaba PuHuiTi 3.0 55 Regular" pitchFamily="34" charset="0"/>
+                <a:ea typeface="Alibaba PuHuiTi 3.0 55 Regular" pitchFamily="34" charset="-122"/>
+                <a:cs typeface="Alibaba PuHuiTi 3.0 55 Regular" pitchFamily="34" charset="-120"/>
+              </a:rPr>
+              <a:t>16 colors</a:t>
+            </a:r>
+            <a:endParaRPr lang="en-US" sz="1800" dirty="0"/>
+          </a:p>
+        </p:txBody>
+      </p:sp>
+      <p:sp>
+        <p:nvSpPr>
+          <p:cNvPr id="15" name="Text 12"/>
+          <p:cNvSpPr/>
+          <p:nvPr/>
+        </p:nvSpPr>
+        <p:spPr>
+          <a:xfrm>
+            <a:off x="2880360" y="2788920"/>
+            <a:ext cx="2377440" cy="457200"/>
+          </a:xfrm>
+          <a:prstGeom prst="rect">
+            <a:avLst/>
+          </a:prstGeom>
+          <a:noFill/>
+          <a:ln/>
+        </p:spPr>
+        <p:txBody>
+          <a:bodyPr wrap="square" rtlCol="0" anchor="ctr">
+            <a:normAutofit/>
+          </a:bodyPr>
+          <a:lstStyle/>
+          <a:p>
+            <a:pPr algn="ctr" indent="0" marL="0">
+              <a:buNone/>
+            </a:pPr>
+            <a:r>
+              <a:rPr lang="en-US" sz="1800" dirty="0">
+                <a:solidFill>
+                  <a:srgbClr val="262626"/>
+                </a:solidFill>
+                <a:latin typeface="Alibaba PuHuiTi 3.0 55 Regular" pitchFamily="34" charset="0"/>
+                <a:ea typeface="Alibaba PuHuiTi 3.0 55 Regular" pitchFamily="34" charset="-122"/>
+                <a:cs typeface="Alibaba PuHuiTi 3.0 55 Regular" pitchFamily="34" charset="-120"/>
+              </a:rPr>
+              <a:t>(255, 0, 0)</a:t>
+            </a:r>
+            <a:endParaRPr lang="en-US" sz="1800" dirty="0"/>
+          </a:p>
+        </p:txBody>
+      </p:sp>
+      <p:sp>
+        <p:nvSpPr>
+          <p:cNvPr id="16" name="Text 13"/>
+          <p:cNvSpPr/>
+          <p:nvPr/>
+        </p:nvSpPr>
+        <p:spPr>
+          <a:xfrm>
+            <a:off x="5532120" y="2788920"/>
+            <a:ext cx="2377440" cy="457200"/>
+          </a:xfrm>
+          <a:prstGeom prst="rect">
+            <a:avLst/>
+          </a:prstGeom>
+          <a:noFill/>
+          <a:ln/>
+        </p:spPr>
+        <p:txBody>
+          <a:bodyPr wrap="square" rtlCol="0" anchor="ctr">
+            <a:normAutofit/>
+          </a:bodyPr>
+          <a:lstStyle/>
+          <a:p>
+            <a:pPr algn="ctr" indent="0" marL="0">
+              <a:buNone/>
+            </a:pPr>
+            <a:r>
+              <a:rPr lang="en-US" sz="1800" dirty="0">
+                <a:solidFill>
+                  <a:srgbClr val="262626"/>
+                </a:solidFill>
+                <a:latin typeface="Alibaba PuHuiTi 3.0 55 Regular" pitchFamily="34" charset="0"/>
+                <a:ea typeface="Alibaba PuHuiTi 3.0 55 Regular" pitchFamily="34" charset="-122"/>
+                <a:cs typeface="Alibaba PuHuiTi 3.0 55 Regular" pitchFamily="34" charset="-120"/>
+              </a:rPr>
+              <a:t>(0, 255, 0)</a:t>
+            </a:r>
+            <a:endParaRPr lang="en-US" sz="1800" dirty="0"/>
+          </a:p>
+        </p:txBody>
+      </p:sp>
+      <p:sp>
+        <p:nvSpPr>
+          <p:cNvPr id="17" name="Text 14"/>
+          <p:cNvSpPr/>
+          <p:nvPr/>
+        </p:nvSpPr>
+        <p:spPr>
+          <a:xfrm>
+            <a:off x="8412480" y="2788920"/>
+            <a:ext cx="2286000" cy="457200"/>
+          </a:xfrm>
+          <a:prstGeom prst="rect">
+            <a:avLst/>
+          </a:prstGeom>
+          <a:noFill/>
+          <a:ln/>
+        </p:spPr>
+        <p:txBody>
+          <a:bodyPr wrap="square" rtlCol="0" anchor="ctr">
+            <a:normAutofit/>
+          </a:bodyPr>
+          <a:lstStyle/>
+          <a:p>
+            <a:pPr algn="ctr" indent="0" marL="0">
+              <a:buNone/>
+            </a:pPr>
+            <a:r>
+              <a:rPr lang="en-US" sz="1800" b="1" dirty="0">
+                <a:solidFill>
+                  <a:srgbClr val="262626"/>
+                </a:solidFill>
+                <a:latin typeface="Alibaba PuHuiTi 3.0 85 Bold" pitchFamily="34" charset="0"/>
+                <a:ea typeface="Alibaba PuHuiTi 3.0 85 Bold" pitchFamily="34" charset="-122"/>
+                <a:cs typeface="Alibaba PuHuiTi 3.0 85 Bold" pitchFamily="34" charset="-120"/>
+              </a:rPr>
+              <a:t>不同</a:t>
+            </a:r>
+            <a:endParaRPr lang="en-US" sz="1800" dirty="0"/>
+          </a:p>
+        </p:txBody>
+      </p:sp>
+      <p:sp>
+        <p:nvSpPr>
+          <p:cNvPr id="18" name="Shape 15"/>
+          <p:cNvSpPr/>
+          <p:nvPr/>
+        </p:nvSpPr>
+        <p:spPr>
+          <a:xfrm>
+            <a:off x="960120" y="3474720"/>
+            <a:ext cx="10241280" cy="694944"/>
+          </a:xfrm>
+          <a:prstGeom prst="rect">
+            <a:avLst/>
+          </a:prstGeom>
+          <a:solidFill>
+            <a:srgbClr val="FFF3F3"/>
+          </a:solidFill>
+          <a:ln w="10160">
+            <a:solidFill>
+              <a:srgbClr val="D8D2EA"/>
+            </a:solidFill>
+            <a:prstDash val="solid"/>
+          </a:ln>
+        </p:spPr>
+      </p:sp>
+      <p:sp>
+        <p:nvSpPr>
+          <p:cNvPr id="19" name="Text 16"/>
+          <p:cNvSpPr/>
+          <p:nvPr/>
+        </p:nvSpPr>
+        <p:spPr>
+          <a:xfrm>
+            <a:off x="960120" y="3566160"/>
+            <a:ext cx="1645920" cy="457200"/>
+          </a:xfrm>
+          <a:prstGeom prst="rect">
+            <a:avLst/>
+          </a:prstGeom>
+          <a:noFill/>
+          <a:ln/>
+        </p:spPr>
+        <p:txBody>
+          <a:bodyPr wrap="square" rtlCol="0" anchor="ctr">
+            <a:normAutofit/>
+          </a:bodyPr>
+          <a:lstStyle/>
+          <a:p>
+            <a:pPr algn="ctr" indent="0" marL="0">
+              <a:buNone/>
+            </a:pPr>
+            <a:r>
+              <a:rPr lang="en-US" sz="1800" dirty="0">
+                <a:solidFill>
+                  <a:srgbClr val="262626"/>
+                </a:solidFill>
+                <a:latin typeface="Alibaba PuHuiTi 3.0 55 Regular" pitchFamily="34" charset="0"/>
+                <a:ea typeface="Alibaba PuHuiTi 3.0 55 Regular" pitchFamily="34" charset="-122"/>
+                <a:cs typeface="Alibaba PuHuiTi 3.0 55 Regular" pitchFamily="34" charset="-120"/>
+              </a:rPr>
+              <a:t>2 colors</a:t>
+            </a:r>
+            <a:endParaRPr lang="en-US" sz="1800" dirty="0"/>
+          </a:p>
+        </p:txBody>
+      </p:sp>
+      <p:sp>
+        <p:nvSpPr>
+          <p:cNvPr id="20" name="Text 17"/>
+          <p:cNvSpPr/>
+          <p:nvPr/>
+        </p:nvSpPr>
+        <p:spPr>
+          <a:xfrm>
+            <a:off x="2880360" y="3566160"/>
+            <a:ext cx="2377440" cy="457200"/>
+          </a:xfrm>
+          <a:prstGeom prst="rect">
+            <a:avLst/>
+          </a:prstGeom>
+          <a:noFill/>
+          <a:ln/>
+        </p:spPr>
+        <p:txBody>
+          <a:bodyPr wrap="square" rtlCol="0" anchor="ctr">
+            <a:normAutofit/>
+          </a:bodyPr>
+          <a:lstStyle/>
+          <a:p>
+            <a:pPr algn="ctr" indent="0" marL="0">
+              <a:buNone/>
+            </a:pPr>
+            <a:r>
+              <a:rPr lang="en-US" sz="1800" dirty="0">
+                <a:solidFill>
+                  <a:srgbClr val="262626"/>
+                </a:solidFill>
+                <a:latin typeface="Alibaba PuHuiTi 3.0 55 Regular" pitchFamily="34" charset="0"/>
+                <a:ea typeface="Alibaba PuHuiTi 3.0 55 Regular" pitchFamily="34" charset="-122"/>
+                <a:cs typeface="Alibaba PuHuiTi 3.0 55 Regular" pitchFamily="34" charset="-120"/>
+              </a:rPr>
+              <a:t>(71, 42, 71)</a:t>
+            </a:r>
+            <a:endParaRPr lang="en-US" sz="1800" dirty="0"/>
+          </a:p>
+        </p:txBody>
+      </p:sp>
+      <p:sp>
+        <p:nvSpPr>
+          <p:cNvPr id="21" name="Text 18"/>
+          <p:cNvSpPr/>
+          <p:nvPr/>
+        </p:nvSpPr>
+        <p:spPr>
+          <a:xfrm>
+            <a:off x="5532120" y="3566160"/>
+            <a:ext cx="2377440" cy="457200"/>
+          </a:xfrm>
+          <a:prstGeom prst="rect">
+            <a:avLst/>
+          </a:prstGeom>
+          <a:noFill/>
+          <a:ln/>
+        </p:spPr>
+        <p:txBody>
+          <a:bodyPr wrap="square" rtlCol="0" anchor="ctr">
+            <a:normAutofit/>
+          </a:bodyPr>
+          <a:lstStyle/>
+          <a:p>
+            <a:pPr algn="ctr" indent="0" marL="0">
+              <a:buNone/>
+            </a:pPr>
+            <a:r>
+              <a:rPr lang="en-US" sz="1800" dirty="0">
+                <a:solidFill>
+                  <a:srgbClr val="262626"/>
+                </a:solidFill>
+                <a:latin typeface="Alibaba PuHuiTi 3.0 55 Regular" pitchFamily="34" charset="0"/>
+                <a:ea typeface="Alibaba PuHuiTi 3.0 55 Regular" pitchFamily="34" charset="-122"/>
+                <a:cs typeface="Alibaba PuHuiTi 3.0 55 Regular" pitchFamily="34" charset="-120"/>
+              </a:rPr>
+              <a:t>(71, 42, 71)</a:t>
+            </a:r>
+            <a:endParaRPr lang="en-US" sz="1800" dirty="0"/>
+          </a:p>
+        </p:txBody>
+      </p:sp>
+      <p:sp>
+        <p:nvSpPr>
+          <p:cNvPr id="22" name="Text 19"/>
+          <p:cNvSpPr/>
+          <p:nvPr/>
+        </p:nvSpPr>
+        <p:spPr>
+          <a:xfrm>
+            <a:off x="8412480" y="3566160"/>
+            <a:ext cx="2286000" cy="457200"/>
+          </a:xfrm>
+          <a:prstGeom prst="rect">
+            <a:avLst/>
+          </a:prstGeom>
+          <a:noFill/>
+          <a:ln/>
+        </p:spPr>
+        <p:txBody>
+          <a:bodyPr wrap="square" rtlCol="0" anchor="ctr">
+            <a:normAutofit/>
+          </a:bodyPr>
+          <a:lstStyle/>
+          <a:p>
+            <a:pPr algn="ctr" indent="0" marL="0">
+              <a:buNone/>
+            </a:pPr>
+            <a:r>
+              <a:rPr lang="en-US" sz="1800" b="1" dirty="0">
+                <a:solidFill>
+                  <a:srgbClr val="D64545"/>
+                </a:solidFill>
+                <a:latin typeface="Alibaba PuHuiTi 3.0 85 Bold" pitchFamily="34" charset="0"/>
+                <a:ea typeface="Alibaba PuHuiTi 3.0 85 Bold" pitchFamily="34" charset="-122"/>
+                <a:cs typeface="Alibaba PuHuiTi 3.0 85 Bold" pitchFamily="34" charset="-120"/>
+              </a:rPr>
+              <a:t>相同</a:t>
+            </a:r>
+            <a:endParaRPr lang="en-US" sz="1800" dirty="0"/>
+          </a:p>
+        </p:txBody>
+      </p:sp>
+      <p:sp>
+        <p:nvSpPr>
+          <p:cNvPr id="23" name="Shape 20"/>
+          <p:cNvSpPr/>
+          <p:nvPr/>
+        </p:nvSpPr>
+        <p:spPr>
+          <a:xfrm>
+            <a:off x="2148840" y="4983480"/>
+            <a:ext cx="7863840" cy="502920"/>
+          </a:xfrm>
+          <a:prstGeom prst="roundRect">
+            <a:avLst>
+              <a:gd name="adj" fmla="val 32727"/>
+            </a:avLst>
+          </a:prstGeom>
+          <a:solidFill>
+            <a:srgbClr val="F6F3FF"/>
+          </a:solidFill>
+          <a:ln w="13970">
+            <a:solidFill>
+              <a:srgbClr val="8C64E1"/>
+            </a:solidFill>
+            <a:prstDash val="solid"/>
+          </a:ln>
+        </p:spPr>
+      </p:sp>
+      <p:sp>
+        <p:nvSpPr>
+          <p:cNvPr id="24" name="Text 21"/>
+          <p:cNvSpPr/>
+          <p:nvPr/>
+        </p:nvSpPr>
+        <p:spPr>
+          <a:xfrm>
+            <a:off x="2240280" y="5010912"/>
+            <a:ext cx="7680960" cy="448056"/>
+          </a:xfrm>
+          <a:prstGeom prst="rect">
+            <a:avLst/>
+          </a:prstGeom>
+          <a:noFill/>
+          <a:ln/>
+        </p:spPr>
+        <p:txBody>
+          <a:bodyPr wrap="square" rtlCol="0" anchor="ctr">
+            <a:normAutofit/>
+          </a:bodyPr>
+          <a:lstStyle/>
+          <a:p>
+            <a:pPr algn="ctr" indent="0" marL="0">
+              <a:buNone/>
+            </a:pPr>
+            <a:r>
+              <a:rPr lang="en-US" sz="1900" b="1" dirty="0">
+                <a:solidFill>
+                  <a:srgbClr val="8C64E1"/>
+                </a:solidFill>
+                <a:latin typeface="Alibaba PuHuiTi 3.0 85 Bold" pitchFamily="34" charset="0"/>
+                <a:ea typeface="Alibaba PuHuiTi 3.0 85 Bold" pitchFamily="34" charset="-122"/>
+                <a:cs typeface="Alibaba PuHuiTi 3.0 85 Bold" pitchFamily="34" charset="-120"/>
+              </a:rPr>
               <a:t>Quantization：每个位置允许哪些离散颜色值？</a:t>
             </a:r>
-            <a:endParaRPr lang="en-US" sz="2000" dirty="0"/>
+            <a:endParaRPr lang="en-US" sz="1900" dirty="0"/>
           </a:p>
         </p:txBody>
       </p:sp>
@@ -3927,7 +4058,7 @@
         <p:spPr>
           <a:xfrm>
             <a:off x="0" y="0"/>
-            <a:ext cx="12191695" cy="101498"/>
+            <a:ext cx="12191695" cy="100584"/>
           </a:xfrm>
           <a:prstGeom prst="rect">
             <a:avLst/>
@@ -3951,8 +4082,8 @@
         </p:nvSpPr>
         <p:spPr>
           <a:xfrm>
-            <a:off x="0" y="6756502"/>
-            <a:ext cx="12191695" cy="101498"/>
+            <a:off x="0" y="6757416"/>
+            <a:ext cx="12191695" cy="100584"/>
           </a:xfrm>
           <a:prstGeom prst="rect">
             <a:avLst/>
@@ -3976,8 +4107,8 @@
         </p:nvSpPr>
         <p:spPr>
           <a:xfrm>
-            <a:off x="608076" y="502920"/>
-            <a:ext cx="10972800" cy="685800"/>
+            <a:off x="594360" y="438912"/>
+            <a:ext cx="11064240" cy="621792"/>
           </a:xfrm>
           <a:prstGeom prst="rect">
             <a:avLst/>
@@ -3995,7 +4126,7 @@
               <a:buNone/>
             </a:pPr>
             <a:r>
-              <a:rPr lang="en-US" sz="3400" b="1" dirty="0">
+              <a:rPr lang="en-US" sz="3000" b="1" dirty="0">
                 <a:solidFill>
                   <a:srgbClr val="262626"/>
                 </a:solidFill>
@@ -4003,9 +4134,9 @@
                 <a:ea typeface="Alibaba PuHuiTi 3.0 115 Black" pitchFamily="34" charset="-122"/>
                 <a:cs typeface="Alibaba PuHuiTi 3.0 115 Black" pitchFamily="34" charset="-120"/>
               </a:rPr>
-              <a:t>Q4 如果只允许 16 种颜色，最少需要几 bit 给它们编号？</a:t>
-            </a:r>
-            <a:endParaRPr lang="en-US" sz="3400" dirty="0"/>
+              <a:t>Q4 如果只允许 16 种颜色，最少需要几 bit？</a:t>
+            </a:r>
+            <a:endParaRPr lang="en-US" sz="3000" dirty="0"/>
           </a:p>
         </p:txBody>
       </p:sp>
@@ -4017,32 +4148,32 @@
         </p:nvSpPr>
         <p:spPr>
           <a:xfrm>
-            <a:off x="868680" y="1600200"/>
-            <a:ext cx="10241280" cy="822960"/>
-          </a:xfrm>
-          <a:prstGeom prst="rect">
-            <a:avLst/>
-          </a:prstGeom>
-          <a:noFill/>
-          <a:ln/>
-        </p:spPr>
-        <p:txBody>
-          <a:bodyPr wrap="square" rtlCol="0" anchor="ctr">
-            <a:normAutofit/>
-          </a:bodyPr>
-          <a:lstStyle/>
-          <a:p>
-            <a:pPr algn="l" indent="0" marL="0">
+            <a:off x="1005840" y="1645920"/>
+            <a:ext cx="10149840" cy="640080"/>
+          </a:xfrm>
+          <a:prstGeom prst="rect">
+            <a:avLst/>
+          </a:prstGeom>
+          <a:noFill/>
+          <a:ln/>
+        </p:spPr>
+        <p:txBody>
+          <a:bodyPr wrap="square" rtlCol="0" anchor="ctr">
+            <a:normAutofit/>
+          </a:bodyPr>
+          <a:lstStyle/>
+          <a:p>
+            <a:pPr algn="ctr" indent="0" marL="0">
               <a:buNone/>
             </a:pPr>
             <a:r>
               <a:rPr lang="en-US" sz="2400" b="1" dirty="0">
                 <a:solidFill>
-                  <a:srgbClr val="000000"/>
-                </a:solidFill>
-                <a:latin typeface="Alibaba PuHuiTi 3.0 55 Regular" pitchFamily="34" charset="0"/>
-                <a:ea typeface="Alibaba PuHuiTi 3.0 55 Regular" pitchFamily="34" charset="-122"/>
-                <a:cs typeface="Alibaba PuHuiTi 3.0 55 Regular" pitchFamily="34" charset="-120"/>
+                  <a:srgbClr val="262626"/>
+                </a:solidFill>
+                <a:latin typeface="Alibaba PuHuiTi 3.0 85 Bold" pitchFamily="34" charset="0"/>
+                <a:ea typeface="Alibaba PuHuiTi 3.0 85 Bold" pitchFamily="34" charset="-122"/>
+                <a:cs typeface="Alibaba PuHuiTi 3.0 85 Bold" pitchFamily="34" charset="-120"/>
               </a:rPr>
               <a:t>假设：给 16 种颜色各分配一个不同的、固定长度的二进制标签。</a:t>
             </a:r>
@@ -4058,18 +4189,18 @@
         </p:nvSpPr>
         <p:spPr>
           <a:xfrm>
-            <a:off x="3291840" y="2743200"/>
-            <a:ext cx="5486400" cy="1005840"/>
+            <a:off x="3154680" y="2743200"/>
+            <a:ext cx="5852160" cy="1234440"/>
           </a:xfrm>
           <a:prstGeom prst="roundRect">
             <a:avLst>
-              <a:gd name="adj" fmla="val 10909"/>
+              <a:gd name="adj" fmla="val 8889"/>
             </a:avLst>
           </a:prstGeom>
           <a:solidFill>
             <a:srgbClr val="FFFFFF"/>
           </a:solidFill>
-          <a:ln w="15240">
+          <a:ln w="13970">
             <a:solidFill>
               <a:srgbClr val="8C64E1"/>
             </a:solidFill>
@@ -4085,8 +4216,8 @@
         </p:nvSpPr>
         <p:spPr>
           <a:xfrm>
-            <a:off x="3429000" y="2852928"/>
-            <a:ext cx="5212080" cy="786384"/>
+            <a:off x="3264408" y="2834640"/>
+            <a:ext cx="5632704" cy="1051560"/>
           </a:xfrm>
           <a:prstGeom prst="rect">
             <a:avLst/>
@@ -4104,7 +4235,7 @@
               <a:buNone/>
             </a:pPr>
             <a:r>
-              <a:rPr lang="en-US" sz="3200" b="1" dirty="0">
+              <a:rPr lang="en-US" sz="3000" b="1" dirty="0">
                 <a:solidFill>
                   <a:srgbClr val="262626"/>
                 </a:solidFill>
@@ -4112,50 +4243,26 @@
                 <a:ea typeface="Alibaba PuHuiTi 3.0 85 Bold" pitchFamily="34" charset="-122"/>
                 <a:cs typeface="Alibaba PuHuiTi 3.0 85 Bold" pitchFamily="34" charset="-120"/>
               </a:rPr>
-              <a:t>最少需要几 bit？</a:t>
-            </a:r>
-            <a:endParaRPr lang="en-US" sz="3200" dirty="0"/>
-          </a:p>
-        </p:txBody>
-      </p:sp>
-      <p:sp>
-        <p:nvSpPr>
-          <p:cNvPr id="9" name="Text 6"/>
-          <p:cNvSpPr/>
-          <p:nvPr/>
-        </p:nvSpPr>
-        <p:spPr>
-          <a:xfrm>
-            <a:off x="1737360" y="4251960"/>
-            <a:ext cx="8686800" cy="502920"/>
-          </a:xfrm>
-          <a:prstGeom prst="rect">
-            <a:avLst/>
-          </a:prstGeom>
-          <a:noFill/>
-          <a:ln/>
-        </p:spPr>
-        <p:txBody>
-          <a:bodyPr wrap="square" rtlCol="0" anchor="ctr">
-            <a:normAutofit/>
-          </a:bodyPr>
-          <a:lstStyle/>
+              <a:t>2 bit、3 bit 够吗？</a:t>
+            </a:r>
+            <a:endParaRPr lang="en-US" sz="3000" dirty="0"/>
+          </a:p>
           <a:p>
             <a:pPr algn="ctr" indent="0" marL="0">
               <a:buNone/>
             </a:pPr>
             <a:r>
-              <a:rPr lang="en-US" sz="2400" dirty="0">
-                <a:solidFill>
-                  <a:srgbClr val="000000"/>
-                </a:solidFill>
-                <a:latin typeface="Alibaba PuHuiTi 3.0 55 Regular" pitchFamily="34" charset="0"/>
-                <a:ea typeface="Alibaba PuHuiTi 3.0 55 Regular" pitchFamily="34" charset="-122"/>
-                <a:cs typeface="Alibaba PuHuiTi 3.0 55 Regular" pitchFamily="34" charset="-120"/>
-              </a:rPr>
-              <a:t>2 bit 够不够？    3 bit 呢？    4 bit 为什么刚好够？</a:t>
-            </a:r>
-            <a:endParaRPr lang="en-US" sz="2400" dirty="0"/>
+              <a:rPr lang="en-US" sz="3000" b="1" dirty="0">
+                <a:solidFill>
+                  <a:srgbClr val="262626"/>
+                </a:solidFill>
+                <a:latin typeface="Alibaba PuHuiTi 3.0 85 Bold" pitchFamily="34" charset="0"/>
+                <a:ea typeface="Alibaba PuHuiTi 3.0 85 Bold" pitchFamily="34" charset="-122"/>
+                <a:cs typeface="Alibaba PuHuiTi 3.0 85 Bold" pitchFamily="34" charset="-120"/>
+              </a:rPr>
+              <a:t>怎样判断？</a:t>
+            </a:r>
+            <a:endParaRPr lang="en-US" sz="3000" dirty="0"/>
           </a:p>
         </p:txBody>
       </p:sp>
@@ -4200,7 +4307,7 @@
         <p:spPr>
           <a:xfrm>
             <a:off x="0" y="0"/>
-            <a:ext cx="12191695" cy="101498"/>
+            <a:ext cx="12191695" cy="100584"/>
           </a:xfrm>
           <a:prstGeom prst="rect">
             <a:avLst/>
@@ -4224,8 +4331,8 @@
         </p:nvSpPr>
         <p:spPr>
           <a:xfrm>
-            <a:off x="0" y="6756502"/>
-            <a:ext cx="12191695" cy="101498"/>
+            <a:off x="0" y="6757416"/>
+            <a:ext cx="12191695" cy="100584"/>
           </a:xfrm>
           <a:prstGeom prst="rect">
             <a:avLst/>
@@ -4249,8 +4356,8 @@
         </p:nvSpPr>
         <p:spPr>
           <a:xfrm>
-            <a:off x="608076" y="502920"/>
-            <a:ext cx="10972800" cy="685800"/>
+            <a:off x="594360" y="438912"/>
+            <a:ext cx="11064240" cy="621792"/>
           </a:xfrm>
           <a:prstGeom prst="rect">
             <a:avLst/>
@@ -4268,7 +4375,7 @@
               <a:buNone/>
             </a:pPr>
             <a:r>
-              <a:rPr lang="en-US" sz="3400" b="1" dirty="0">
+              <a:rPr lang="en-US" sz="3000" b="1" dirty="0">
                 <a:solidFill>
                   <a:srgbClr val="262626"/>
                 </a:solidFill>
@@ -4276,9 +4383,9 @@
                 <a:ea typeface="Alibaba PuHuiTi 3.0 115 Black" pitchFamily="34" charset="-122"/>
                 <a:cs typeface="Alibaba PuHuiTi 3.0 115 Black" pitchFamily="34" charset="-120"/>
               </a:rPr>
-              <a:t>Q4 证据：bit 数决定可表示状态数</a:t>
-            </a:r>
-            <a:endParaRPr lang="en-US" sz="3400" dirty="0"/>
+              <a:t>Q4 如果只允许 16 种颜色，最少需要几 bit？</a:t>
+            </a:r>
+            <a:endParaRPr lang="en-US" sz="3000" dirty="0"/>
           </a:p>
         </p:txBody>
       </p:sp>
@@ -4290,468 +4397,18 @@
         </p:nvSpPr>
         <p:spPr>
           <a:xfrm>
-            <a:off x="822960" y="1417320"/>
-            <a:ext cx="2286000" cy="594360"/>
+            <a:off x="3977640" y="1170432"/>
+            <a:ext cx="4297680" cy="411480"/>
           </a:xfrm>
           <a:prstGeom prst="roundRect">
             <a:avLst>
-              <a:gd name="adj" fmla="val 18462"/>
+              <a:gd name="adj" fmla="val 40000"/>
             </a:avLst>
           </a:prstGeom>
           <a:solidFill>
-            <a:srgbClr val="FFFFFF"/>
-          </a:solidFill>
-          <a:ln w="15240">
-            <a:solidFill>
-              <a:srgbClr val="D7D7E6"/>
-            </a:solidFill>
-            <a:prstDash val="solid"/>
-          </a:ln>
-        </p:spPr>
-      </p:sp>
-      <p:sp>
-        <p:nvSpPr>
-          <p:cNvPr id="7" name="Text 4"/>
-          <p:cNvSpPr/>
-          <p:nvPr/>
-        </p:nvSpPr>
-        <p:spPr>
-          <a:xfrm>
-            <a:off x="960120" y="1527048"/>
-            <a:ext cx="2011680" cy="374904"/>
-          </a:xfrm>
-          <a:prstGeom prst="rect">
-            <a:avLst/>
-          </a:prstGeom>
-          <a:noFill/>
-          <a:ln/>
-        </p:spPr>
-        <p:txBody>
-          <a:bodyPr wrap="square" rtlCol="0" anchor="ctr">
-            <a:normAutofit/>
-          </a:bodyPr>
-          <a:lstStyle/>
-          <a:p>
-            <a:pPr algn="ctr" indent="0" marL="0">
-              <a:buNone/>
-            </a:pPr>
-            <a:r>
-              <a:rPr lang="en-US" sz="1800" b="1" dirty="0">
-                <a:solidFill>
-                  <a:srgbClr val="262626"/>
-                </a:solidFill>
-                <a:latin typeface="Alibaba PuHuiTi 3.0 85 Bold" pitchFamily="34" charset="0"/>
-                <a:ea typeface="Alibaba PuHuiTi 3.0 85 Bold" pitchFamily="34" charset="-122"/>
-                <a:cs typeface="Alibaba PuHuiTi 3.0 85 Bold" pitchFamily="34" charset="-120"/>
-              </a:rPr>
-              <a:t>1 bit</a:t>
-            </a:r>
-            <a:endParaRPr lang="en-US" sz="1800" dirty="0"/>
-          </a:p>
-        </p:txBody>
-      </p:sp>
-      <p:sp>
-        <p:nvSpPr>
-          <p:cNvPr id="8" name="Text 5"/>
-          <p:cNvSpPr/>
-          <p:nvPr/>
-        </p:nvSpPr>
-        <p:spPr>
-          <a:xfrm>
-            <a:off x="822960" y="2240280"/>
-            <a:ext cx="2286000" cy="365760"/>
-          </a:xfrm>
-          <a:prstGeom prst="rect">
-            <a:avLst/>
-          </a:prstGeom>
-          <a:noFill/>
-          <a:ln/>
-        </p:spPr>
-        <p:txBody>
-          <a:bodyPr wrap="square" rtlCol="0" anchor="ctr">
-            <a:normAutofit/>
-          </a:bodyPr>
-          <a:lstStyle/>
-          <a:p>
-            <a:pPr algn="ctr" indent="0" marL="0">
-              <a:buNone/>
-            </a:pPr>
-            <a:r>
-              <a:rPr lang="en-US" sz="2200" b="1" dirty="0">
-                <a:solidFill>
-                  <a:srgbClr val="262626"/>
-                </a:solidFill>
-                <a:latin typeface="Alibaba PuHuiTi 3.0 55 Regular" pitchFamily="34" charset="0"/>
-                <a:ea typeface="Alibaba PuHuiTi 3.0 55 Regular" pitchFamily="34" charset="-122"/>
-                <a:cs typeface="Alibaba PuHuiTi 3.0 55 Regular" pitchFamily="34" charset="-120"/>
-              </a:rPr>
-              <a:t>2 states</a:t>
-            </a:r>
-            <a:endParaRPr lang="en-US" sz="2200" dirty="0"/>
-          </a:p>
-        </p:txBody>
-      </p:sp>
-      <p:sp>
-        <p:nvSpPr>
-          <p:cNvPr id="9" name="Text 6"/>
-          <p:cNvSpPr/>
-          <p:nvPr/>
-        </p:nvSpPr>
-        <p:spPr>
-          <a:xfrm>
-            <a:off x="822960" y="2834640"/>
-            <a:ext cx="2286000" cy="548640"/>
-          </a:xfrm>
-          <a:prstGeom prst="rect">
-            <a:avLst/>
-          </a:prstGeom>
-          <a:noFill/>
-          <a:ln/>
-        </p:spPr>
-        <p:txBody>
-          <a:bodyPr wrap="square" rtlCol="0" anchor="ctr">
-            <a:normAutofit/>
-          </a:bodyPr>
-          <a:lstStyle/>
-          <a:p>
-            <a:pPr algn="ctr" indent="0" marL="0">
-              <a:buNone/>
-            </a:pPr>
-            <a:r>
-              <a:rPr lang="en-US" sz="1600" dirty="0">
-                <a:solidFill>
-                  <a:srgbClr val="262626"/>
-                </a:solidFill>
-                <a:latin typeface="Alibaba PuHuiTi 3.0 55 Regular" pitchFamily="34" charset="0"/>
-                <a:ea typeface="Alibaba PuHuiTi 3.0 55 Regular" pitchFamily="34" charset="-122"/>
-                <a:cs typeface="Alibaba PuHuiTi 3.0 55 Regular" pitchFamily="34" charset="-120"/>
-              </a:rPr>
-              <a:t>0  1</a:t>
-            </a:r>
-            <a:endParaRPr lang="en-US" sz="1600" dirty="0"/>
-          </a:p>
-        </p:txBody>
-      </p:sp>
-      <p:sp>
-        <p:nvSpPr>
-          <p:cNvPr id="10" name="Shape 7"/>
-          <p:cNvSpPr/>
-          <p:nvPr/>
-        </p:nvSpPr>
-        <p:spPr>
-          <a:xfrm>
-            <a:off x="3657600" y="1417320"/>
-            <a:ext cx="2286000" cy="594360"/>
-          </a:xfrm>
-          <a:prstGeom prst="roundRect">
-            <a:avLst>
-              <a:gd name="adj" fmla="val 18462"/>
-            </a:avLst>
-          </a:prstGeom>
-          <a:solidFill>
-            <a:srgbClr val="FFFFFF"/>
-          </a:solidFill>
-          <a:ln w="15240">
-            <a:solidFill>
-              <a:srgbClr val="D7D7E6"/>
-            </a:solidFill>
-            <a:prstDash val="solid"/>
-          </a:ln>
-        </p:spPr>
-      </p:sp>
-      <p:sp>
-        <p:nvSpPr>
-          <p:cNvPr id="11" name="Text 8"/>
-          <p:cNvSpPr/>
-          <p:nvPr/>
-        </p:nvSpPr>
-        <p:spPr>
-          <a:xfrm>
-            <a:off x="3794760" y="1527048"/>
-            <a:ext cx="2011680" cy="374904"/>
-          </a:xfrm>
-          <a:prstGeom prst="rect">
-            <a:avLst/>
-          </a:prstGeom>
-          <a:noFill/>
-          <a:ln/>
-        </p:spPr>
-        <p:txBody>
-          <a:bodyPr wrap="square" rtlCol="0" anchor="ctr">
-            <a:normAutofit/>
-          </a:bodyPr>
-          <a:lstStyle/>
-          <a:p>
-            <a:pPr algn="ctr" indent="0" marL="0">
-              <a:buNone/>
-            </a:pPr>
-            <a:r>
-              <a:rPr lang="en-US" sz="1800" b="1" dirty="0">
-                <a:solidFill>
-                  <a:srgbClr val="262626"/>
-                </a:solidFill>
-                <a:latin typeface="Alibaba PuHuiTi 3.0 85 Bold" pitchFamily="34" charset="0"/>
-                <a:ea typeface="Alibaba PuHuiTi 3.0 85 Bold" pitchFamily="34" charset="-122"/>
-                <a:cs typeface="Alibaba PuHuiTi 3.0 85 Bold" pitchFamily="34" charset="-120"/>
-              </a:rPr>
-              <a:t>2 bits</a:t>
-            </a:r>
-            <a:endParaRPr lang="en-US" sz="1800" dirty="0"/>
-          </a:p>
-        </p:txBody>
-      </p:sp>
-      <p:sp>
-        <p:nvSpPr>
-          <p:cNvPr id="12" name="Text 9"/>
-          <p:cNvSpPr/>
-          <p:nvPr/>
-        </p:nvSpPr>
-        <p:spPr>
-          <a:xfrm>
-            <a:off x="3657600" y="2240280"/>
-            <a:ext cx="2286000" cy="365760"/>
-          </a:xfrm>
-          <a:prstGeom prst="rect">
-            <a:avLst/>
-          </a:prstGeom>
-          <a:noFill/>
-          <a:ln/>
-        </p:spPr>
-        <p:txBody>
-          <a:bodyPr wrap="square" rtlCol="0" anchor="ctr">
-            <a:normAutofit/>
-          </a:bodyPr>
-          <a:lstStyle/>
-          <a:p>
-            <a:pPr algn="ctr" indent="0" marL="0">
-              <a:buNone/>
-            </a:pPr>
-            <a:r>
-              <a:rPr lang="en-US" sz="2200" b="1" dirty="0">
-                <a:solidFill>
-                  <a:srgbClr val="262626"/>
-                </a:solidFill>
-                <a:latin typeface="Alibaba PuHuiTi 3.0 55 Regular" pitchFamily="34" charset="0"/>
-                <a:ea typeface="Alibaba PuHuiTi 3.0 55 Regular" pitchFamily="34" charset="-122"/>
-                <a:cs typeface="Alibaba PuHuiTi 3.0 55 Regular" pitchFamily="34" charset="-120"/>
-              </a:rPr>
-              <a:t>4 states</a:t>
-            </a:r>
-            <a:endParaRPr lang="en-US" sz="2200" dirty="0"/>
-          </a:p>
-        </p:txBody>
-      </p:sp>
-      <p:sp>
-        <p:nvSpPr>
-          <p:cNvPr id="13" name="Text 10"/>
-          <p:cNvSpPr/>
-          <p:nvPr/>
-        </p:nvSpPr>
-        <p:spPr>
-          <a:xfrm>
-            <a:off x="3657600" y="2834640"/>
-            <a:ext cx="2286000" cy="548640"/>
-          </a:xfrm>
-          <a:prstGeom prst="rect">
-            <a:avLst/>
-          </a:prstGeom>
-          <a:noFill/>
-          <a:ln/>
-        </p:spPr>
-        <p:txBody>
-          <a:bodyPr wrap="square" rtlCol="0" anchor="ctr">
-            <a:normAutofit/>
-          </a:bodyPr>
-          <a:lstStyle/>
-          <a:p>
-            <a:pPr algn="ctr" indent="0" marL="0">
-              <a:buNone/>
-            </a:pPr>
-            <a:r>
-              <a:rPr lang="en-US" sz="1600" dirty="0">
-                <a:solidFill>
-                  <a:srgbClr val="262626"/>
-                </a:solidFill>
-                <a:latin typeface="Alibaba PuHuiTi 3.0 55 Regular" pitchFamily="34" charset="0"/>
-                <a:ea typeface="Alibaba PuHuiTi 3.0 55 Regular" pitchFamily="34" charset="-122"/>
-                <a:cs typeface="Alibaba PuHuiTi 3.0 55 Regular" pitchFamily="34" charset="-120"/>
-              </a:rPr>
-              <a:t>00  01  10  11</a:t>
-            </a:r>
-            <a:endParaRPr lang="en-US" sz="1600" dirty="0"/>
-          </a:p>
-        </p:txBody>
-      </p:sp>
-      <p:sp>
-        <p:nvSpPr>
-          <p:cNvPr id="14" name="Shape 11"/>
-          <p:cNvSpPr/>
-          <p:nvPr/>
-        </p:nvSpPr>
-        <p:spPr>
-          <a:xfrm>
-            <a:off x="6492240" y="1417320"/>
-            <a:ext cx="2286000" cy="594360"/>
-          </a:xfrm>
-          <a:prstGeom prst="roundRect">
-            <a:avLst>
-              <a:gd name="adj" fmla="val 18462"/>
-            </a:avLst>
-          </a:prstGeom>
-          <a:solidFill>
-            <a:srgbClr val="FFFFFF"/>
-          </a:solidFill>
-          <a:ln w="15240">
-            <a:solidFill>
-              <a:srgbClr val="D7D7E6"/>
-            </a:solidFill>
-            <a:prstDash val="solid"/>
-          </a:ln>
-        </p:spPr>
-      </p:sp>
-      <p:sp>
-        <p:nvSpPr>
-          <p:cNvPr id="15" name="Text 12"/>
-          <p:cNvSpPr/>
-          <p:nvPr/>
-        </p:nvSpPr>
-        <p:spPr>
-          <a:xfrm>
-            <a:off x="6629400" y="1527048"/>
-            <a:ext cx="2011680" cy="374904"/>
-          </a:xfrm>
-          <a:prstGeom prst="rect">
-            <a:avLst/>
-          </a:prstGeom>
-          <a:noFill/>
-          <a:ln/>
-        </p:spPr>
-        <p:txBody>
-          <a:bodyPr wrap="square" rtlCol="0" anchor="ctr">
-            <a:normAutofit/>
-          </a:bodyPr>
-          <a:lstStyle/>
-          <a:p>
-            <a:pPr algn="ctr" indent="0" marL="0">
-              <a:buNone/>
-            </a:pPr>
-            <a:r>
-              <a:rPr lang="en-US" sz="1800" b="1" dirty="0">
-                <a:solidFill>
-                  <a:srgbClr val="262626"/>
-                </a:solidFill>
-                <a:latin typeface="Alibaba PuHuiTi 3.0 85 Bold" pitchFamily="34" charset="0"/>
-                <a:ea typeface="Alibaba PuHuiTi 3.0 85 Bold" pitchFamily="34" charset="-122"/>
-                <a:cs typeface="Alibaba PuHuiTi 3.0 85 Bold" pitchFamily="34" charset="-120"/>
-              </a:rPr>
-              <a:t>3 bits</a:t>
-            </a:r>
-            <a:endParaRPr lang="en-US" sz="1800" dirty="0"/>
-          </a:p>
-        </p:txBody>
-      </p:sp>
-      <p:sp>
-        <p:nvSpPr>
-          <p:cNvPr id="16" name="Text 13"/>
-          <p:cNvSpPr/>
-          <p:nvPr/>
-        </p:nvSpPr>
-        <p:spPr>
-          <a:xfrm>
-            <a:off x="6492240" y="2240280"/>
-            <a:ext cx="2286000" cy="365760"/>
-          </a:xfrm>
-          <a:prstGeom prst="rect">
-            <a:avLst/>
-          </a:prstGeom>
-          <a:noFill/>
-          <a:ln/>
-        </p:spPr>
-        <p:txBody>
-          <a:bodyPr wrap="square" rtlCol="0" anchor="ctr">
-            <a:normAutofit/>
-          </a:bodyPr>
-          <a:lstStyle/>
-          <a:p>
-            <a:pPr algn="ctr" indent="0" marL="0">
-              <a:buNone/>
-            </a:pPr>
-            <a:r>
-              <a:rPr lang="en-US" sz="2200" b="1" dirty="0">
-                <a:solidFill>
-                  <a:srgbClr val="262626"/>
-                </a:solidFill>
-                <a:latin typeface="Alibaba PuHuiTi 3.0 55 Regular" pitchFamily="34" charset="0"/>
-                <a:ea typeface="Alibaba PuHuiTi 3.0 55 Regular" pitchFamily="34" charset="-122"/>
-                <a:cs typeface="Alibaba PuHuiTi 3.0 55 Regular" pitchFamily="34" charset="-120"/>
-              </a:rPr>
-              <a:t>8 states</a:t>
-            </a:r>
-            <a:endParaRPr lang="en-US" sz="2200" dirty="0"/>
-          </a:p>
-        </p:txBody>
-      </p:sp>
-      <p:sp>
-        <p:nvSpPr>
-          <p:cNvPr id="17" name="Text 14"/>
-          <p:cNvSpPr/>
-          <p:nvPr/>
-        </p:nvSpPr>
-        <p:spPr>
-          <a:xfrm>
-            <a:off x="6492240" y="2834640"/>
-            <a:ext cx="2286000" cy="548640"/>
-          </a:xfrm>
-          <a:prstGeom prst="rect">
-            <a:avLst/>
-          </a:prstGeom>
-          <a:noFill/>
-          <a:ln/>
-        </p:spPr>
-        <p:txBody>
-          <a:bodyPr wrap="square" rtlCol="0" anchor="ctr">
-            <a:normAutofit/>
-          </a:bodyPr>
-          <a:lstStyle/>
-          <a:p>
-            <a:pPr algn="ctr" indent="0" marL="0">
-              <a:buNone/>
-            </a:pPr>
-            <a:r>
-              <a:rPr lang="en-US" sz="1600" dirty="0">
-                <a:solidFill>
-                  <a:srgbClr val="262626"/>
-                </a:solidFill>
-                <a:latin typeface="Alibaba PuHuiTi 3.0 55 Regular" pitchFamily="34" charset="0"/>
-                <a:ea typeface="Alibaba PuHuiTi 3.0 55 Regular" pitchFamily="34" charset="-122"/>
-                <a:cs typeface="Alibaba PuHuiTi 3.0 55 Regular" pitchFamily="34" charset="-120"/>
-              </a:rPr>
-              <a:t>还不够</a:t>
-            </a:r>
-            <a:endParaRPr lang="en-US" sz="1600" dirty="0"/>
-          </a:p>
-        </p:txBody>
-      </p:sp>
-      <p:sp>
-        <p:nvSpPr>
-          <p:cNvPr id="18" name="Shape 15"/>
-          <p:cNvSpPr/>
-          <p:nvPr/>
-        </p:nvSpPr>
-        <p:spPr>
-          <a:xfrm>
-            <a:off x="9326880" y="1417320"/>
-            <a:ext cx="2286000" cy="594360"/>
-          </a:xfrm>
-          <a:prstGeom prst="roundRect">
-            <a:avLst>
-              <a:gd name="adj" fmla="val 18462"/>
-            </a:avLst>
-          </a:prstGeom>
-          <a:solidFill>
-            <a:srgbClr val="F7F4FF"/>
-          </a:solidFill>
-          <a:ln w="15240">
+            <a:srgbClr val="F6F3FF"/>
+          </a:solidFill>
+          <a:ln w="13970">
             <a:solidFill>
               <a:srgbClr val="8C64E1"/>
             </a:solidFill>
@@ -4761,14 +4418,14 @@
       </p:sp>
       <p:sp>
         <p:nvSpPr>
-          <p:cNvPr id="19" name="Text 16"/>
-          <p:cNvSpPr/>
-          <p:nvPr/>
-        </p:nvSpPr>
-        <p:spPr>
-          <a:xfrm>
-            <a:off x="9464040" y="1527048"/>
-            <a:ext cx="2011680" cy="374904"/>
+          <p:cNvPr id="7" name="Text 4"/>
+          <p:cNvSpPr/>
+          <p:nvPr/>
+        </p:nvSpPr>
+        <p:spPr>
+          <a:xfrm>
+            <a:off x="4069080" y="1197864"/>
+            <a:ext cx="4114800" cy="356616"/>
           </a:xfrm>
           <a:prstGeom prst="rect">
             <a:avLst/>
@@ -4794,7 +4451,7 @@
                 <a:ea typeface="Alibaba PuHuiTi 3.0 85 Bold" pitchFamily="34" charset="-122"/>
                 <a:cs typeface="Alibaba PuHuiTi 3.0 85 Bold" pitchFamily="34" charset="-120"/>
               </a:rPr>
-              <a:t>4 bits</a:t>
+              <a:t>证据：枚举状态数量</a:t>
             </a:r>
             <a:endParaRPr lang="en-US" sz="1800" dirty="0"/>
           </a:p>
@@ -4802,106 +4459,351 @@
       </p:sp>
       <p:sp>
         <p:nvSpPr>
-          <p:cNvPr id="20" name="Text 17"/>
-          <p:cNvSpPr/>
-          <p:nvPr/>
-        </p:nvSpPr>
-        <p:spPr>
-          <a:xfrm>
-            <a:off x="9326880" y="2240280"/>
-            <a:ext cx="2286000" cy="365760"/>
-          </a:xfrm>
-          <a:prstGeom prst="rect">
-            <a:avLst/>
-          </a:prstGeom>
-          <a:noFill/>
-          <a:ln/>
-        </p:spPr>
-        <p:txBody>
-          <a:bodyPr wrap="square" rtlCol="0" anchor="ctr">
-            <a:normAutofit/>
-          </a:bodyPr>
-          <a:lstStyle/>
-          <a:p>
-            <a:pPr algn="ctr" indent="0" marL="0">
-              <a:buNone/>
-            </a:pPr>
-            <a:r>
-              <a:rPr lang="en-US" sz="2200" b="1" dirty="0">
-                <a:solidFill>
-                  <a:srgbClr val="8C64E1"/>
-                </a:solidFill>
-                <a:latin typeface="Alibaba PuHuiTi 3.0 55 Regular" pitchFamily="34" charset="0"/>
-                <a:ea typeface="Alibaba PuHuiTi 3.0 55 Regular" pitchFamily="34" charset="-122"/>
-                <a:cs typeface="Alibaba PuHuiTi 3.0 55 Regular" pitchFamily="34" charset="-120"/>
-              </a:rPr>
-              <a:t>16 states</a:t>
-            </a:r>
-            <a:endParaRPr lang="en-US" sz="2200" dirty="0"/>
-          </a:p>
-        </p:txBody>
-      </p:sp>
-      <p:sp>
-        <p:nvSpPr>
-          <p:cNvPr id="21" name="Text 18"/>
-          <p:cNvSpPr/>
-          <p:nvPr/>
-        </p:nvSpPr>
-        <p:spPr>
-          <a:xfrm>
-            <a:off x="9326880" y="2834640"/>
-            <a:ext cx="2286000" cy="548640"/>
-          </a:xfrm>
-          <a:prstGeom prst="rect">
-            <a:avLst/>
-          </a:prstGeom>
-          <a:noFill/>
-          <a:ln/>
-        </p:spPr>
-        <p:txBody>
-          <a:bodyPr wrap="square" rtlCol="0" anchor="ctr">
-            <a:normAutofit/>
-          </a:bodyPr>
-          <a:lstStyle/>
-          <a:p>
-            <a:pPr algn="ctr" indent="0" marL="0">
-              <a:buNone/>
-            </a:pPr>
-            <a:r>
-              <a:rPr lang="en-US" sz="1600" dirty="0">
-                <a:solidFill>
-                  <a:srgbClr val="262626"/>
-                </a:solidFill>
-                <a:latin typeface="Alibaba PuHuiTi 3.0 55 Regular" pitchFamily="34" charset="0"/>
-                <a:ea typeface="Alibaba PuHuiTi 3.0 55 Regular" pitchFamily="34" charset="-122"/>
-                <a:cs typeface="Alibaba PuHuiTi 3.0 55 Regular" pitchFamily="34" charset="-120"/>
-              </a:rPr>
-              <a:t>刚好够</a:t>
-            </a:r>
-            <a:endParaRPr lang="en-US" sz="1600" dirty="0"/>
-          </a:p>
-        </p:txBody>
-      </p:sp>
-      <p:sp>
-        <p:nvSpPr>
-          <p:cNvPr id="22" name="Shape 19"/>
-          <p:cNvSpPr/>
-          <p:nvPr/>
-        </p:nvSpPr>
-        <p:spPr>
-          <a:xfrm>
-            <a:off x="3291840" y="4937760"/>
-            <a:ext cx="5577840" cy="640080"/>
+          <p:cNvPr id="8" name="Shape 5"/>
+          <p:cNvSpPr/>
+          <p:nvPr/>
+        </p:nvSpPr>
+        <p:spPr>
+          <a:xfrm>
+            <a:off x="914400" y="1965960"/>
+            <a:ext cx="2148840" cy="621792"/>
           </a:xfrm>
           <a:prstGeom prst="roundRect">
             <a:avLst>
-              <a:gd name="adj" fmla="val 22857"/>
+              <a:gd name="adj" fmla="val 17647"/>
             </a:avLst>
           </a:prstGeom>
           <a:solidFill>
-            <a:srgbClr val="F7F4FF"/>
-          </a:solidFill>
-          <a:ln w="15240">
+            <a:srgbClr val="FFFFFF"/>
+          </a:solidFill>
+          <a:ln w="13970">
+            <a:solidFill>
+              <a:srgbClr val="D8D2EA"/>
+            </a:solidFill>
+            <a:prstDash val="solid"/>
+          </a:ln>
+        </p:spPr>
+      </p:sp>
+      <p:sp>
+        <p:nvSpPr>
+          <p:cNvPr id="9" name="Text 6"/>
+          <p:cNvSpPr/>
+          <p:nvPr/>
+        </p:nvSpPr>
+        <p:spPr>
+          <a:xfrm>
+            <a:off x="1024128" y="2057400"/>
+            <a:ext cx="1929384" cy="438912"/>
+          </a:xfrm>
+          <a:prstGeom prst="rect">
+            <a:avLst/>
+          </a:prstGeom>
+          <a:noFill/>
+          <a:ln/>
+        </p:spPr>
+        <p:txBody>
+          <a:bodyPr wrap="square" rtlCol="0" anchor="ctr">
+            <a:normAutofit/>
+          </a:bodyPr>
+          <a:lstStyle/>
+          <a:p>
+            <a:pPr algn="ctr" indent="0" marL="0">
+              <a:buNone/>
+            </a:pPr>
+            <a:r>
+              <a:rPr lang="en-US" sz="2000" b="1" dirty="0">
+                <a:solidFill>
+                  <a:srgbClr val="262626"/>
+                </a:solidFill>
+                <a:latin typeface="Alibaba PuHuiTi 3.0 85 Bold" pitchFamily="34" charset="0"/>
+                <a:ea typeface="Alibaba PuHuiTi 3.0 85 Bold" pitchFamily="34" charset="-122"/>
+                <a:cs typeface="Alibaba PuHuiTi 3.0 85 Bold" pitchFamily="34" charset="-120"/>
+              </a:rPr>
+              <a:t>1 bit</a:t>
+            </a:r>
+            <a:endParaRPr lang="en-US" sz="2000" dirty="0"/>
+          </a:p>
+        </p:txBody>
+      </p:sp>
+      <p:sp>
+        <p:nvSpPr>
+          <p:cNvPr id="10" name="Text 7"/>
+          <p:cNvSpPr/>
+          <p:nvPr/>
+        </p:nvSpPr>
+        <p:spPr>
+          <a:xfrm>
+            <a:off x="914400" y="2788920"/>
+            <a:ext cx="2148840" cy="411480"/>
+          </a:xfrm>
+          <a:prstGeom prst="rect">
+            <a:avLst/>
+          </a:prstGeom>
+          <a:noFill/>
+          <a:ln/>
+        </p:spPr>
+        <p:txBody>
+          <a:bodyPr wrap="square" rtlCol="0" anchor="ctr">
+            <a:normAutofit/>
+          </a:bodyPr>
+          <a:lstStyle/>
+          <a:p>
+            <a:pPr algn="ctr" indent="0" marL="0">
+              <a:buNone/>
+            </a:pPr>
+            <a:r>
+              <a:rPr lang="en-US" sz="2300" b="1" dirty="0">
+                <a:solidFill>
+                  <a:srgbClr val="262626"/>
+                </a:solidFill>
+                <a:latin typeface="Alibaba PuHuiTi 3.0 85 Bold" pitchFamily="34" charset="0"/>
+                <a:ea typeface="Alibaba PuHuiTi 3.0 85 Bold" pitchFamily="34" charset="-122"/>
+                <a:cs typeface="Alibaba PuHuiTi 3.0 85 Bold" pitchFamily="34" charset="-120"/>
+              </a:rPr>
+              <a:t>2 states</a:t>
+            </a:r>
+            <a:endParaRPr lang="en-US" sz="2300" dirty="0"/>
+          </a:p>
+        </p:txBody>
+      </p:sp>
+      <p:sp>
+        <p:nvSpPr>
+          <p:cNvPr id="11" name="Shape 8"/>
+          <p:cNvSpPr/>
+          <p:nvPr/>
+        </p:nvSpPr>
+        <p:spPr>
+          <a:xfrm>
+            <a:off x="3703320" y="1965960"/>
+            <a:ext cx="2148840" cy="621792"/>
+          </a:xfrm>
+          <a:prstGeom prst="roundRect">
+            <a:avLst>
+              <a:gd name="adj" fmla="val 17647"/>
+            </a:avLst>
+          </a:prstGeom>
+          <a:solidFill>
+            <a:srgbClr val="FFFFFF"/>
+          </a:solidFill>
+          <a:ln w="13970">
+            <a:solidFill>
+              <a:srgbClr val="D8D2EA"/>
+            </a:solidFill>
+            <a:prstDash val="solid"/>
+          </a:ln>
+        </p:spPr>
+      </p:sp>
+      <p:sp>
+        <p:nvSpPr>
+          <p:cNvPr id="12" name="Text 9"/>
+          <p:cNvSpPr/>
+          <p:nvPr/>
+        </p:nvSpPr>
+        <p:spPr>
+          <a:xfrm>
+            <a:off x="3813048" y="2057400"/>
+            <a:ext cx="1929384" cy="438912"/>
+          </a:xfrm>
+          <a:prstGeom prst="rect">
+            <a:avLst/>
+          </a:prstGeom>
+          <a:noFill/>
+          <a:ln/>
+        </p:spPr>
+        <p:txBody>
+          <a:bodyPr wrap="square" rtlCol="0" anchor="ctr">
+            <a:normAutofit/>
+          </a:bodyPr>
+          <a:lstStyle/>
+          <a:p>
+            <a:pPr algn="ctr" indent="0" marL="0">
+              <a:buNone/>
+            </a:pPr>
+            <a:r>
+              <a:rPr lang="en-US" sz="2000" b="1" dirty="0">
+                <a:solidFill>
+                  <a:srgbClr val="262626"/>
+                </a:solidFill>
+                <a:latin typeface="Alibaba PuHuiTi 3.0 85 Bold" pitchFamily="34" charset="0"/>
+                <a:ea typeface="Alibaba PuHuiTi 3.0 85 Bold" pitchFamily="34" charset="-122"/>
+                <a:cs typeface="Alibaba PuHuiTi 3.0 85 Bold" pitchFamily="34" charset="-120"/>
+              </a:rPr>
+              <a:t>2 bits</a:t>
+            </a:r>
+            <a:endParaRPr lang="en-US" sz="2000" dirty="0"/>
+          </a:p>
+        </p:txBody>
+      </p:sp>
+      <p:sp>
+        <p:nvSpPr>
+          <p:cNvPr id="13" name="Text 10"/>
+          <p:cNvSpPr/>
+          <p:nvPr/>
+        </p:nvSpPr>
+        <p:spPr>
+          <a:xfrm>
+            <a:off x="3703320" y="2788920"/>
+            <a:ext cx="2148840" cy="411480"/>
+          </a:xfrm>
+          <a:prstGeom prst="rect">
+            <a:avLst/>
+          </a:prstGeom>
+          <a:noFill/>
+          <a:ln/>
+        </p:spPr>
+        <p:txBody>
+          <a:bodyPr wrap="square" rtlCol="0" anchor="ctr">
+            <a:normAutofit/>
+          </a:bodyPr>
+          <a:lstStyle/>
+          <a:p>
+            <a:pPr algn="ctr" indent="0" marL="0">
+              <a:buNone/>
+            </a:pPr>
+            <a:r>
+              <a:rPr lang="en-US" sz="2300" b="1" dirty="0">
+                <a:solidFill>
+                  <a:srgbClr val="262626"/>
+                </a:solidFill>
+                <a:latin typeface="Alibaba PuHuiTi 3.0 85 Bold" pitchFamily="34" charset="0"/>
+                <a:ea typeface="Alibaba PuHuiTi 3.0 85 Bold" pitchFamily="34" charset="-122"/>
+                <a:cs typeface="Alibaba PuHuiTi 3.0 85 Bold" pitchFamily="34" charset="-120"/>
+              </a:rPr>
+              <a:t>4 states</a:t>
+            </a:r>
+            <a:endParaRPr lang="en-US" sz="2300" dirty="0"/>
+          </a:p>
+        </p:txBody>
+      </p:sp>
+      <p:sp>
+        <p:nvSpPr>
+          <p:cNvPr id="14" name="Shape 11"/>
+          <p:cNvSpPr/>
+          <p:nvPr/>
+        </p:nvSpPr>
+        <p:spPr>
+          <a:xfrm>
+            <a:off x="6492240" y="1965960"/>
+            <a:ext cx="2148840" cy="621792"/>
+          </a:xfrm>
+          <a:prstGeom prst="roundRect">
+            <a:avLst>
+              <a:gd name="adj" fmla="val 17647"/>
+            </a:avLst>
+          </a:prstGeom>
+          <a:solidFill>
+            <a:srgbClr val="FFFFFF"/>
+          </a:solidFill>
+          <a:ln w="13970">
+            <a:solidFill>
+              <a:srgbClr val="D8D2EA"/>
+            </a:solidFill>
+            <a:prstDash val="solid"/>
+          </a:ln>
+        </p:spPr>
+      </p:sp>
+      <p:sp>
+        <p:nvSpPr>
+          <p:cNvPr id="15" name="Text 12"/>
+          <p:cNvSpPr/>
+          <p:nvPr/>
+        </p:nvSpPr>
+        <p:spPr>
+          <a:xfrm>
+            <a:off x="6601968" y="2057400"/>
+            <a:ext cx="1929384" cy="438912"/>
+          </a:xfrm>
+          <a:prstGeom prst="rect">
+            <a:avLst/>
+          </a:prstGeom>
+          <a:noFill/>
+          <a:ln/>
+        </p:spPr>
+        <p:txBody>
+          <a:bodyPr wrap="square" rtlCol="0" anchor="ctr">
+            <a:normAutofit/>
+          </a:bodyPr>
+          <a:lstStyle/>
+          <a:p>
+            <a:pPr algn="ctr" indent="0" marL="0">
+              <a:buNone/>
+            </a:pPr>
+            <a:r>
+              <a:rPr lang="en-US" sz="2000" b="1" dirty="0">
+                <a:solidFill>
+                  <a:srgbClr val="262626"/>
+                </a:solidFill>
+                <a:latin typeface="Alibaba PuHuiTi 3.0 85 Bold" pitchFamily="34" charset="0"/>
+                <a:ea typeface="Alibaba PuHuiTi 3.0 85 Bold" pitchFamily="34" charset="-122"/>
+                <a:cs typeface="Alibaba PuHuiTi 3.0 85 Bold" pitchFamily="34" charset="-120"/>
+              </a:rPr>
+              <a:t>3 bits</a:t>
+            </a:r>
+            <a:endParaRPr lang="en-US" sz="2000" dirty="0"/>
+          </a:p>
+        </p:txBody>
+      </p:sp>
+      <p:sp>
+        <p:nvSpPr>
+          <p:cNvPr id="16" name="Text 13"/>
+          <p:cNvSpPr/>
+          <p:nvPr/>
+        </p:nvSpPr>
+        <p:spPr>
+          <a:xfrm>
+            <a:off x="6492240" y="2788920"/>
+            <a:ext cx="2148840" cy="411480"/>
+          </a:xfrm>
+          <a:prstGeom prst="rect">
+            <a:avLst/>
+          </a:prstGeom>
+          <a:noFill/>
+          <a:ln/>
+        </p:spPr>
+        <p:txBody>
+          <a:bodyPr wrap="square" rtlCol="0" anchor="ctr">
+            <a:normAutofit/>
+          </a:bodyPr>
+          <a:lstStyle/>
+          <a:p>
+            <a:pPr algn="ctr" indent="0" marL="0">
+              <a:buNone/>
+            </a:pPr>
+            <a:r>
+              <a:rPr lang="en-US" sz="2300" b="1" dirty="0">
+                <a:solidFill>
+                  <a:srgbClr val="262626"/>
+                </a:solidFill>
+                <a:latin typeface="Alibaba PuHuiTi 3.0 85 Bold" pitchFamily="34" charset="0"/>
+                <a:ea typeface="Alibaba PuHuiTi 3.0 85 Bold" pitchFamily="34" charset="-122"/>
+                <a:cs typeface="Alibaba PuHuiTi 3.0 85 Bold" pitchFamily="34" charset="-120"/>
+              </a:rPr>
+              <a:t>8 states</a:t>
+            </a:r>
+            <a:endParaRPr lang="en-US" sz="2300" dirty="0"/>
+          </a:p>
+        </p:txBody>
+      </p:sp>
+      <p:sp>
+        <p:nvSpPr>
+          <p:cNvPr id="17" name="Shape 14"/>
+          <p:cNvSpPr/>
+          <p:nvPr/>
+        </p:nvSpPr>
+        <p:spPr>
+          <a:xfrm>
+            <a:off x="9281160" y="1965960"/>
+            <a:ext cx="2148840" cy="621792"/>
+          </a:xfrm>
+          <a:prstGeom prst="roundRect">
+            <a:avLst>
+              <a:gd name="adj" fmla="val 17647"/>
+            </a:avLst>
+          </a:prstGeom>
+          <a:solidFill>
+            <a:srgbClr val="F6F3FF"/>
+          </a:solidFill>
+          <a:ln w="13970">
             <a:solidFill>
               <a:srgbClr val="8C64E1"/>
             </a:solidFill>
@@ -4911,30 +4813,32 @@
       </p:sp>
       <p:sp>
         <p:nvSpPr>
-          <p:cNvPr id="23" name="Text 20"/>
-          <p:cNvSpPr/>
-          <p:nvPr/>
-        </p:nvSpPr>
-        <p:spPr>
-          <a:xfrm>
-            <a:off x="3291840" y="4974336"/>
-            <a:ext cx="5577840" cy="594360"/>
-          </a:xfrm>
-          <a:prstGeom prst="rect">
-            <a:avLst/>
-          </a:prstGeom>
-          <a:noFill/>
-          <a:ln/>
-        </p:spPr>
-        <p:txBody>
-          <a:bodyPr wrap="square" rtlCol="0" anchor="ctr"/>
+          <p:cNvPr id="18" name="Text 15"/>
+          <p:cNvSpPr/>
+          <p:nvPr/>
+        </p:nvSpPr>
+        <p:spPr>
+          <a:xfrm>
+            <a:off x="9390888" y="2057400"/>
+            <a:ext cx="1929384" cy="438912"/>
+          </a:xfrm>
+          <a:prstGeom prst="rect">
+            <a:avLst/>
+          </a:prstGeom>
+          <a:noFill/>
+          <a:ln/>
+        </p:spPr>
+        <p:txBody>
+          <a:bodyPr wrap="square" rtlCol="0" anchor="ctr">
+            <a:normAutofit/>
+          </a:bodyPr>
           <a:lstStyle/>
           <a:p>
             <a:pPr algn="ctr" indent="0" marL="0">
               <a:buNone/>
             </a:pPr>
             <a:r>
-              <a:rPr lang="en-US" sz="2800" b="1" dirty="0">
+              <a:rPr lang="en-US" sz="2000" b="1" dirty="0">
                 <a:solidFill>
                   <a:srgbClr val="8C64E1"/>
                 </a:solidFill>
@@ -4942,9 +4846,118 @@
                 <a:ea typeface="Alibaba PuHuiTi 3.0 85 Bold" pitchFamily="34" charset="-122"/>
                 <a:cs typeface="Alibaba PuHuiTi 3.0 85 Bold" pitchFamily="34" charset="-120"/>
               </a:rPr>
+              <a:t>4 bits</a:t>
+            </a:r>
+            <a:endParaRPr lang="en-US" sz="2000" dirty="0"/>
+          </a:p>
+        </p:txBody>
+      </p:sp>
+      <p:sp>
+        <p:nvSpPr>
+          <p:cNvPr id="19" name="Text 16"/>
+          <p:cNvSpPr/>
+          <p:nvPr/>
+        </p:nvSpPr>
+        <p:spPr>
+          <a:xfrm>
+            <a:off x="9281160" y="2788920"/>
+            <a:ext cx="2148840" cy="411480"/>
+          </a:xfrm>
+          <a:prstGeom prst="rect">
+            <a:avLst/>
+          </a:prstGeom>
+          <a:noFill/>
+          <a:ln/>
+        </p:spPr>
+        <p:txBody>
+          <a:bodyPr wrap="square" rtlCol="0" anchor="ctr">
+            <a:normAutofit/>
+          </a:bodyPr>
+          <a:lstStyle/>
+          <a:p>
+            <a:pPr algn="ctr" indent="0" marL="0">
+              <a:buNone/>
+            </a:pPr>
+            <a:r>
+              <a:rPr lang="en-US" sz="2300" b="1" dirty="0">
+                <a:solidFill>
+                  <a:srgbClr val="8C64E1"/>
+                </a:solidFill>
+                <a:latin typeface="Alibaba PuHuiTi 3.0 85 Bold" pitchFamily="34" charset="0"/>
+                <a:ea typeface="Alibaba PuHuiTi 3.0 85 Bold" pitchFamily="34" charset="-122"/>
+                <a:cs typeface="Alibaba PuHuiTi 3.0 85 Bold" pitchFamily="34" charset="-120"/>
+              </a:rPr>
+              <a:t>16 states</a:t>
+            </a:r>
+            <a:endParaRPr lang="en-US" sz="2300" dirty="0"/>
+          </a:p>
+        </p:txBody>
+      </p:sp>
+      <p:sp>
+        <p:nvSpPr>
+          <p:cNvPr id="20" name="Shape 17"/>
+          <p:cNvSpPr/>
+          <p:nvPr/>
+        </p:nvSpPr>
+        <p:spPr>
+          <a:xfrm>
+            <a:off x="3474720" y="4663440"/>
+            <a:ext cx="5212080" cy="594360"/>
+          </a:xfrm>
+          <a:prstGeom prst="roundRect">
+            <a:avLst>
+              <a:gd name="adj" fmla="val 27692"/>
+            </a:avLst>
+          </a:prstGeom>
+          <a:solidFill>
+            <a:srgbClr val="F6F3FF"/>
+          </a:solidFill>
+          <a:ln w="13970">
+            <a:solidFill>
+              <a:srgbClr val="8C64E1"/>
+            </a:solidFill>
+            <a:prstDash val="solid"/>
+          </a:ln>
+        </p:spPr>
+      </p:sp>
+      <p:sp>
+        <p:nvSpPr>
+          <p:cNvPr id="21" name="Text 18"/>
+          <p:cNvSpPr/>
+          <p:nvPr/>
+        </p:nvSpPr>
+        <p:spPr>
+          <a:xfrm>
+            <a:off x="3566160" y="4690872"/>
+            <a:ext cx="5029200" cy="539496"/>
+          </a:xfrm>
+          <a:prstGeom prst="rect">
+            <a:avLst/>
+          </a:prstGeom>
+          <a:noFill/>
+          <a:ln/>
+        </p:spPr>
+        <p:txBody>
+          <a:bodyPr wrap="square" rtlCol="0" anchor="ctr">
+            <a:normAutofit/>
+          </a:bodyPr>
+          <a:lstStyle/>
+          <a:p>
+            <a:pPr algn="ctr" indent="0" marL="0">
+              <a:buNone/>
+            </a:pPr>
+            <a:r>
+              <a:rPr lang="en-US" sz="2700" b="1" dirty="0">
+                <a:solidFill>
+                  <a:srgbClr val="8C64E1"/>
+                </a:solidFill>
+                <a:latin typeface="Alibaba PuHuiTi 3.0 85 Bold" pitchFamily="34" charset="0"/>
+                <a:ea typeface="Alibaba PuHuiTi 3.0 85 Bold" pitchFamily="34" charset="-122"/>
+                <a:cs typeface="Alibaba PuHuiTi 3.0 85 Bold" pitchFamily="34" charset="-120"/>
+              </a:rPr>
               <a:t>可表示状态数 = 2^b</a:t>
             </a:r>
-            <a:endParaRPr lang="en-US" sz="2800" dirty="0"/>
+            <a:endParaRPr lang="en-US" sz="2700" dirty="0"/>
           </a:p>
         </p:txBody>
       </p:sp>
@@ -4989,7 +5002,7 @@
         <p:spPr>
           <a:xfrm>
             <a:off x="0" y="0"/>
-            <a:ext cx="12191695" cy="101498"/>
+            <a:ext cx="12191695" cy="100584"/>
           </a:xfrm>
           <a:prstGeom prst="rect">
             <a:avLst/>
@@ -5013,8 +5026,8 @@
         </p:nvSpPr>
         <p:spPr>
           <a:xfrm>
-            <a:off x="0" y="6756502"/>
-            <a:ext cx="12191695" cy="101498"/>
+            <a:off x="0" y="6757416"/>
+            <a:ext cx="12191695" cy="100584"/>
           </a:xfrm>
           <a:prstGeom prst="rect">
             <a:avLst/>
@@ -5038,8 +5051,8 @@
         </p:nvSpPr>
         <p:spPr>
           <a:xfrm>
-            <a:off x="608076" y="502920"/>
-            <a:ext cx="10972800" cy="685800"/>
+            <a:off x="594360" y="438912"/>
+            <a:ext cx="11064240" cy="621792"/>
           </a:xfrm>
           <a:prstGeom prst="rect">
             <a:avLst/>
@@ -5057,7 +5070,7 @@
               <a:buNone/>
             </a:pPr>
             <a:r>
-              <a:rPr lang="en-US" sz="3400" b="1" dirty="0">
+              <a:rPr lang="en-US" sz="3000" b="1" dirty="0">
                 <a:solidFill>
                   <a:srgbClr val="262626"/>
                 </a:solidFill>
@@ -5067,7 +5080,7 @@
               </a:rPr>
               <a:t>Q5 “24-bit color” 是 24 种颜色吗？</a:t>
             </a:r>
-            <a:endParaRPr lang="en-US" sz="3400" dirty="0"/>
+            <a:endParaRPr lang="en-US" sz="3000" dirty="0"/>
           </a:p>
         </p:txBody>
       </p:sp>
@@ -5079,20 +5092,20 @@
         </p:nvSpPr>
         <p:spPr>
           <a:xfrm>
-            <a:off x="1920240" y="1554480"/>
-            <a:ext cx="8229600" cy="566928"/>
+            <a:off x="1920240" y="1508760"/>
+            <a:ext cx="8229600" cy="548640"/>
           </a:xfrm>
           <a:prstGeom prst="roundRect">
             <a:avLst>
-              <a:gd name="adj" fmla="val 19355"/>
+              <a:gd name="adj" fmla="val 20000"/>
             </a:avLst>
           </a:prstGeom>
           <a:solidFill>
             <a:srgbClr val="FFFFFF"/>
           </a:solidFill>
-          <a:ln w="15240">
+          <a:ln w="13970">
             <a:solidFill>
-              <a:srgbClr val="D7D7E6"/>
+              <a:srgbClr val="D8D2EA"/>
             </a:solidFill>
             <a:prstDash val="solid"/>
           </a:ln>
@@ -5106,8 +5119,8 @@
         </p:nvSpPr>
         <p:spPr>
           <a:xfrm>
-            <a:off x="2057400" y="1664208"/>
-            <a:ext cx="7955280" cy="347472"/>
+            <a:off x="2029968" y="1600200"/>
+            <a:ext cx="8010144" cy="365760"/>
           </a:xfrm>
           <a:prstGeom prst="rect">
             <a:avLst/>
@@ -5147,20 +5160,20 @@
         </p:nvSpPr>
         <p:spPr>
           <a:xfrm>
-            <a:off x="1920240" y="2331720"/>
-            <a:ext cx="8229600" cy="566928"/>
+            <a:off x="1920240" y="2258568"/>
+            <a:ext cx="8229600" cy="548640"/>
           </a:xfrm>
           <a:prstGeom prst="roundRect">
             <a:avLst>
-              <a:gd name="adj" fmla="val 19355"/>
+              <a:gd name="adj" fmla="val 20000"/>
             </a:avLst>
           </a:prstGeom>
           <a:solidFill>
             <a:srgbClr val="FFFFFF"/>
           </a:solidFill>
-          <a:ln w="15240">
+          <a:ln w="13970">
             <a:solidFill>
-              <a:srgbClr val="D7D7E6"/>
+              <a:srgbClr val="D8D2EA"/>
             </a:solidFill>
             <a:prstDash val="solid"/>
           </a:ln>
@@ -5174,8 +5187,8 @@
         </p:nvSpPr>
         <p:spPr>
           <a:xfrm>
-            <a:off x="2057400" y="2441448"/>
-            <a:ext cx="7955280" cy="347472"/>
+            <a:off x="2029968" y="2350008"/>
+            <a:ext cx="8010144" cy="365760"/>
           </a:xfrm>
           <a:prstGeom prst="rect">
             <a:avLst/>
@@ -5215,20 +5228,20 @@
         </p:nvSpPr>
         <p:spPr>
           <a:xfrm>
-            <a:off x="1920240" y="3108960"/>
-            <a:ext cx="8229600" cy="566928"/>
+            <a:off x="1920240" y="3008376"/>
+            <a:ext cx="8229600" cy="548640"/>
           </a:xfrm>
           <a:prstGeom prst="roundRect">
             <a:avLst>
-              <a:gd name="adj" fmla="val 19355"/>
+              <a:gd name="adj" fmla="val 20000"/>
             </a:avLst>
           </a:prstGeom>
           <a:solidFill>
             <a:srgbClr val="FFFFFF"/>
           </a:solidFill>
-          <a:ln w="15240">
+          <a:ln w="13970">
             <a:solidFill>
-              <a:srgbClr val="D7D7E6"/>
+              <a:srgbClr val="D8D2EA"/>
             </a:solidFill>
             <a:prstDash val="solid"/>
           </a:ln>
@@ -5242,8 +5255,8 @@
         </p:nvSpPr>
         <p:spPr>
           <a:xfrm>
-            <a:off x="2057400" y="3218688"/>
-            <a:ext cx="7955280" cy="347472"/>
+            <a:off x="2029968" y="3099816"/>
+            <a:ext cx="8010144" cy="365760"/>
           </a:xfrm>
           <a:prstGeom prst="rect">
             <a:avLst/>
@@ -5283,20 +5296,20 @@
         </p:nvSpPr>
         <p:spPr>
           <a:xfrm>
-            <a:off x="1920240" y="3886200"/>
-            <a:ext cx="8229600" cy="566928"/>
+            <a:off x="1920240" y="3758184"/>
+            <a:ext cx="8229600" cy="548640"/>
           </a:xfrm>
           <a:prstGeom prst="roundRect">
             <a:avLst>
-              <a:gd name="adj" fmla="val 19355"/>
+              <a:gd name="adj" fmla="val 20000"/>
             </a:avLst>
           </a:prstGeom>
           <a:solidFill>
             <a:srgbClr val="FFFFFF"/>
           </a:solidFill>
-          <a:ln w="15240">
+          <a:ln w="13970">
             <a:solidFill>
-              <a:srgbClr val="D7D7E6"/>
+              <a:srgbClr val="D8D2EA"/>
             </a:solidFill>
             <a:prstDash val="solid"/>
           </a:ln>
@@ -5310,8 +5323,8 @@
         </p:nvSpPr>
         <p:spPr>
           <a:xfrm>
-            <a:off x="2057400" y="3995928"/>
-            <a:ext cx="7955280" cy="347472"/>
+            <a:off x="2029968" y="3849624"/>
+            <a:ext cx="8010144" cy="365760"/>
           </a:xfrm>
           <a:prstGeom prst="rect">
             <a:avLst/>
@@ -5351,7 +5364,7 @@
         </p:nvSpPr>
         <p:spPr>
           <a:xfrm>
-            <a:off x="3383280" y="5166360"/>
+            <a:off x="3383280" y="5212080"/>
             <a:ext cx="5486400" cy="365760"/>
           </a:xfrm>
           <a:prstGeom prst="rect">
@@ -5370,13 +5383,13 @@
               <a:buNone/>
             </a:pPr>
             <a:r>
-              <a:rPr lang="en-US" sz="2200" dirty="0">
+              <a:rPr lang="en-US" sz="2200" b="1" dirty="0">
                 <a:solidFill>
                   <a:srgbClr val="8C64E1"/>
                 </a:solidFill>
-                <a:latin typeface="Alibaba PuHuiTi 3.0 55 Regular" pitchFamily="34" charset="0"/>
-                <a:ea typeface="Alibaba PuHuiTi 3.0 55 Regular" pitchFamily="34" charset="-122"/>
-                <a:cs typeface="Alibaba PuHuiTi 3.0 55 Regular" pitchFamily="34" charset="-120"/>
+                <a:latin typeface="Alibaba PuHuiTi 3.0 85 Bold" pitchFamily="34" charset="0"/>
+                <a:ea typeface="Alibaba PuHuiTi 3.0 85 Bold" pitchFamily="34" charset="-122"/>
+                <a:cs typeface="Alibaba PuHuiTi 3.0 85 Bold" pitchFamily="34" charset="-120"/>
               </a:rPr>
               <a:t>先投票，不公布答案。</a:t>
             </a:r>
@@ -5425,7 +5438,7 @@
         <p:spPr>
           <a:xfrm>
             <a:off x="0" y="0"/>
-            <a:ext cx="12191695" cy="101498"/>
+            <a:ext cx="12191695" cy="100584"/>
           </a:xfrm>
           <a:prstGeom prst="rect">
             <a:avLst/>
@@ -5449,8 +5462,8 @@
         </p:nvSpPr>
         <p:spPr>
           <a:xfrm>
-            <a:off x="0" y="6756502"/>
-            <a:ext cx="12191695" cy="101498"/>
+            <a:off x="0" y="6757416"/>
+            <a:ext cx="12191695" cy="100584"/>
           </a:xfrm>
           <a:prstGeom prst="rect">
             <a:avLst/>
@@ -5474,8 +5487,8 @@
         </p:nvSpPr>
         <p:spPr>
           <a:xfrm>
-            <a:off x="608076" y="502920"/>
-            <a:ext cx="10972800" cy="685800"/>
+            <a:off x="594360" y="438912"/>
+            <a:ext cx="11064240" cy="621792"/>
           </a:xfrm>
           <a:prstGeom prst="rect">
             <a:avLst/>
@@ -5493,7 +5506,7 @@
               <a:buNone/>
             </a:pPr>
             <a:r>
-              <a:rPr lang="en-US" sz="3400" b="1" dirty="0">
+              <a:rPr lang="en-US" sz="3000" b="1" dirty="0">
                 <a:solidFill>
                   <a:srgbClr val="262626"/>
                 </a:solidFill>
@@ -5501,9 +5514,9 @@
                 <a:ea typeface="Alibaba PuHuiTi 3.0 115 Black" pitchFamily="34" charset="-122"/>
                 <a:cs typeface="Alibaba PuHuiTi 3.0 115 Black" pitchFamily="34" charset="-120"/>
               </a:rPr>
-              <a:t>Q5 RGB：24 bit 是 8 + 8 + 8</a:t>
-            </a:r>
-            <a:endParaRPr lang="en-US" sz="3400" dirty="0"/>
+              <a:t>Q5 “24-bit color” 是 24 种颜色吗？</a:t>
+            </a:r>
+            <a:endParaRPr lang="en-US" sz="3000" dirty="0"/>
           </a:p>
         </p:txBody>
       </p:sp>
@@ -5515,18 +5528,18 @@
         </p:nvSpPr>
         <p:spPr>
           <a:xfrm>
-            <a:off x="1143000" y="1645920"/>
-            <a:ext cx="2743200" cy="1417320"/>
+            <a:off x="1143000" y="1691640"/>
+            <a:ext cx="2743200" cy="1188720"/>
           </a:xfrm>
           <a:prstGeom prst="roundRect">
             <a:avLst>
-              <a:gd name="adj" fmla="val 7742"/>
+              <a:gd name="adj" fmla="val 9231"/>
             </a:avLst>
           </a:prstGeom>
           <a:solidFill>
             <a:srgbClr val="FFF3F3"/>
           </a:solidFill>
-          <a:ln w="15240">
+          <a:ln w="13970">
             <a:solidFill>
               <a:srgbClr val="E28C8C"/>
             </a:solidFill>
@@ -5542,8 +5555,8 @@
         </p:nvSpPr>
         <p:spPr>
           <a:xfrm>
-            <a:off x="1280160" y="1755648"/>
-            <a:ext cx="2468880" cy="1197864"/>
+            <a:off x="1252728" y="1783080"/>
+            <a:ext cx="2523744" cy="1005840"/>
           </a:xfrm>
           <a:prstGeom prst="rect">
             <a:avLst/>
@@ -5561,7 +5574,7 @@
               <a:buNone/>
             </a:pPr>
             <a:r>
-              <a:rPr lang="en-US" sz="2200" b="1" dirty="0">
+              <a:rPr lang="en-US" sz="2100" b="1" dirty="0">
                 <a:solidFill>
                   <a:srgbClr val="262626"/>
                 </a:solidFill>
@@ -5571,14 +5584,14 @@
               </a:rPr>
               <a:t>R: 8 bits</a:t>
             </a:r>
-            <a:endParaRPr lang="en-US" sz="2200" dirty="0"/>
+            <a:endParaRPr lang="en-US" sz="2100" dirty="0"/>
           </a:p>
           <a:p>
             <a:pPr algn="ctr" indent="0" marL="0">
               <a:buNone/>
             </a:pPr>
             <a:r>
-              <a:rPr lang="en-US" sz="2200" b="1" dirty="0">
+              <a:rPr lang="en-US" sz="2100" b="1" dirty="0">
                 <a:solidFill>
                   <a:srgbClr val="262626"/>
                 </a:solidFill>
@@ -5588,7 +5601,7 @@
               </a:rPr>
               <a:t>0..255</a:t>
             </a:r>
-            <a:endParaRPr lang="en-US" sz="2200" dirty="0"/>
+            <a:endParaRPr lang="en-US" sz="2100" dirty="0"/>
           </a:p>
         </p:txBody>
       </p:sp>
@@ -5600,18 +5613,18 @@
         </p:nvSpPr>
         <p:spPr>
           <a:xfrm>
-            <a:off x="4709160" y="1645920"/>
-            <a:ext cx="2743200" cy="1417320"/>
+            <a:off x="4709160" y="1691640"/>
+            <a:ext cx="2743200" cy="1188720"/>
           </a:xfrm>
           <a:prstGeom prst="roundRect">
             <a:avLst>
-              <a:gd name="adj" fmla="val 7742"/>
+              <a:gd name="adj" fmla="val 9231"/>
             </a:avLst>
           </a:prstGeom>
           <a:solidFill>
-            <a:srgbClr val="F3FFF3"/>
-          </a:solidFill>
-          <a:ln w="15240">
+            <a:srgbClr val="F2FFF2"/>
+          </a:solidFill>
+          <a:ln w="13970">
             <a:solidFill>
               <a:srgbClr val="8ED38E"/>
             </a:solidFill>
@@ -5627,8 +5640,8 @@
         </p:nvSpPr>
         <p:spPr>
           <a:xfrm>
-            <a:off x="4846320" y="1755648"/>
-            <a:ext cx="2468880" cy="1197864"/>
+            <a:off x="4818888" y="1783080"/>
+            <a:ext cx="2523744" cy="1005840"/>
           </a:xfrm>
           <a:prstGeom prst="rect">
             <a:avLst/>
@@ -5646,7 +5659,7 @@
               <a:buNone/>
             </a:pPr>
             <a:r>
-              <a:rPr lang="en-US" sz="2200" b="1" dirty="0">
+              <a:rPr lang="en-US" sz="2100" b="1" dirty="0">
                 <a:solidFill>
                   <a:srgbClr val="262626"/>
                 </a:solidFill>
@@ -5656,14 +5669,14 @@
               </a:rPr>
               <a:t>G: 8 bits</a:t>
             </a:r>
-            <a:endParaRPr lang="en-US" sz="2200" dirty="0"/>
+            <a:endParaRPr lang="en-US" sz="2100" dirty="0"/>
           </a:p>
           <a:p>
             <a:pPr algn="ctr" indent="0" marL="0">
               <a:buNone/>
             </a:pPr>
             <a:r>
-              <a:rPr lang="en-US" sz="2200" b="1" dirty="0">
+              <a:rPr lang="en-US" sz="2100" b="1" dirty="0">
                 <a:solidFill>
                   <a:srgbClr val="262626"/>
                 </a:solidFill>
@@ -5673,7 +5686,7 @@
               </a:rPr>
               <a:t>0..255</a:t>
             </a:r>
-            <a:endParaRPr lang="en-US" sz="2200" dirty="0"/>
+            <a:endParaRPr lang="en-US" sz="2100" dirty="0"/>
           </a:p>
         </p:txBody>
       </p:sp>
@@ -5685,18 +5698,18 @@
         </p:nvSpPr>
         <p:spPr>
           <a:xfrm>
-            <a:off x="8275320" y="1645920"/>
-            <a:ext cx="2743200" cy="1417320"/>
+            <a:off x="8275320" y="1691640"/>
+            <a:ext cx="2743200" cy="1188720"/>
           </a:xfrm>
           <a:prstGeom prst="roundRect">
             <a:avLst>
-              <a:gd name="adj" fmla="val 7742"/>
+              <a:gd name="adj" fmla="val 9231"/>
             </a:avLst>
           </a:prstGeom>
           <a:solidFill>
-            <a:srgbClr val="F3F5FF"/>
-          </a:solidFill>
-          <a:ln w="15240">
+            <a:srgbClr val="F2F5FF"/>
+          </a:solidFill>
+          <a:ln w="13970">
             <a:solidFill>
               <a:srgbClr val="8CA0E2"/>
             </a:solidFill>
@@ -5712,8 +5725,8 @@
         </p:nvSpPr>
         <p:spPr>
           <a:xfrm>
-            <a:off x="8412480" y="1755648"/>
-            <a:ext cx="2468880" cy="1197864"/>
+            <a:off x="8385048" y="1783080"/>
+            <a:ext cx="2523744" cy="1005840"/>
           </a:xfrm>
           <a:prstGeom prst="rect">
             <a:avLst/>
@@ -5731,7 +5744,7 @@
               <a:buNone/>
             </a:pPr>
             <a:r>
-              <a:rPr lang="en-US" sz="2200" b="1" dirty="0">
+              <a:rPr lang="en-US" sz="2100" b="1" dirty="0">
                 <a:solidFill>
                   <a:srgbClr val="262626"/>
                 </a:solidFill>
@@ -5741,14 +5754,14 @@
               </a:rPr>
               <a:t>B: 8 bits</a:t>
             </a:r>
-            <a:endParaRPr lang="en-US" sz="2200" dirty="0"/>
+            <a:endParaRPr lang="en-US" sz="2100" dirty="0"/>
           </a:p>
           <a:p>
             <a:pPr algn="ctr" indent="0" marL="0">
               <a:buNone/>
             </a:pPr>
             <a:r>
-              <a:rPr lang="en-US" sz="2200" b="1" dirty="0">
+              <a:rPr lang="en-US" sz="2100" b="1" dirty="0">
                 <a:solidFill>
                   <a:srgbClr val="262626"/>
                 </a:solidFill>
@@ -5758,7 +5771,7 @@
               </a:rPr>
               <a:t>0..255</a:t>
             </a:r>
-            <a:endParaRPr lang="en-US" sz="2200" dirty="0"/>
+            <a:endParaRPr lang="en-US" sz="2100" dirty="0"/>
           </a:p>
         </p:txBody>
       </p:sp>
@@ -5770,18 +5783,18 @@
         </p:nvSpPr>
         <p:spPr>
           <a:xfrm>
-            <a:off x="2560320" y="3749040"/>
-            <a:ext cx="7040880" cy="566928"/>
+            <a:off x="2606040" y="3703320"/>
+            <a:ext cx="6949440" cy="548640"/>
           </a:xfrm>
           <a:prstGeom prst="roundRect">
             <a:avLst>
-              <a:gd name="adj" fmla="val 25806"/>
+              <a:gd name="adj" fmla="val 30000"/>
             </a:avLst>
           </a:prstGeom>
           <a:solidFill>
-            <a:srgbClr val="F7F4FF"/>
-          </a:solidFill>
-          <a:ln w="15240">
+            <a:srgbClr val="F6F3FF"/>
+          </a:solidFill>
+          <a:ln w="13970">
             <a:solidFill>
               <a:srgbClr val="8C64E1"/>
             </a:solidFill>
@@ -5797,24 +5810,26 @@
         </p:nvSpPr>
         <p:spPr>
           <a:xfrm>
-            <a:off x="2560320" y="3785616"/>
-            <a:ext cx="7040880" cy="521208"/>
-          </a:xfrm>
-          <a:prstGeom prst="rect">
-            <a:avLst/>
-          </a:prstGeom>
-          <a:noFill/>
-          <a:ln/>
-        </p:spPr>
-        <p:txBody>
-          <a:bodyPr wrap="square" rtlCol="0" anchor="ctr"/>
+            <a:off x="2697480" y="3730752"/>
+            <a:ext cx="6766560" cy="493776"/>
+          </a:xfrm>
+          <a:prstGeom prst="rect">
+            <a:avLst/>
+          </a:prstGeom>
+          <a:noFill/>
+          <a:ln/>
+        </p:spPr>
+        <p:txBody>
+          <a:bodyPr wrap="square" rtlCol="0" anchor="ctr">
+            <a:normAutofit/>
+          </a:bodyPr>
           <a:lstStyle/>
           <a:p>
             <a:pPr algn="ctr" indent="0" marL="0">
               <a:buNone/>
             </a:pPr>
             <a:r>
-              <a:rPr lang="en-US" sz="2400" b="1" dirty="0">
+              <a:rPr lang="en-US" sz="2300" b="1" dirty="0">
                 <a:solidFill>
                   <a:srgbClr val="8C64E1"/>
                 </a:solidFill>
@@ -5824,7 +5839,7 @@
               </a:rPr>
               <a:t>8 + 8 + 8 = 24 bits / pixel</a:t>
             </a:r>
-            <a:endParaRPr lang="en-US" sz="2400" dirty="0"/>
+            <a:endParaRPr lang="en-US" sz="2300" dirty="0"/>
           </a:p>
         </p:txBody>
       </p:sp>
@@ -5836,18 +5851,18 @@
         </p:nvSpPr>
         <p:spPr>
           <a:xfrm>
-            <a:off x="2194560" y="4709160"/>
-            <a:ext cx="7772400" cy="566928"/>
+            <a:off x="2331720" y="4663440"/>
+            <a:ext cx="7498080" cy="548640"/>
           </a:xfrm>
           <a:prstGeom prst="roundRect">
             <a:avLst>
-              <a:gd name="adj" fmla="val 25806"/>
+              <a:gd name="adj" fmla="val 30000"/>
             </a:avLst>
           </a:prstGeom>
           <a:solidFill>
             <a:srgbClr val="FFFFFF"/>
           </a:solidFill>
-          <a:ln w="15240">
+          <a:ln w="13970">
             <a:solidFill>
               <a:srgbClr val="007C9B"/>
             </a:solidFill>
@@ -5863,24 +5878,26 @@
         </p:nvSpPr>
         <p:spPr>
           <a:xfrm>
-            <a:off x="2194560" y="4745736"/>
-            <a:ext cx="7772400" cy="521208"/>
-          </a:xfrm>
-          <a:prstGeom prst="rect">
-            <a:avLst/>
-          </a:prstGeom>
-          <a:noFill/>
-          <a:ln/>
-        </p:spPr>
-        <p:txBody>
-          <a:bodyPr wrap="square" rtlCol="0" anchor="ctr"/>
+            <a:off x="2423160" y="4690872"/>
+            <a:ext cx="7315200" cy="493776"/>
+          </a:xfrm>
+          <a:prstGeom prst="rect">
+            <a:avLst/>
+          </a:prstGeom>
+          <a:noFill/>
+          <a:ln/>
+        </p:spPr>
+        <p:txBody>
+          <a:bodyPr wrap="square" rtlCol="0" anchor="ctr">
+            <a:normAutofit/>
+          </a:bodyPr>
           <a:lstStyle/>
           <a:p>
             <a:pPr algn="ctr" indent="0" marL="0">
               <a:buNone/>
             </a:pPr>
             <a:r>
-              <a:rPr lang="en-US" sz="2300" b="1" dirty="0">
+              <a:rPr lang="en-US" sz="2200" b="1" dirty="0">
                 <a:solidFill>
                   <a:srgbClr val="007C9B"/>
                 </a:solidFill>
@@ -5890,7 +5907,7 @@
               </a:rPr>
               <a:t>256^3 = 2^24 = 16,777,216</a:t>
             </a:r>
-            <a:endParaRPr lang="en-US" sz="2300" dirty="0"/>
+            <a:endParaRPr lang="en-US" sz="2200" dirty="0"/>
           </a:p>
         </p:txBody>
       </p:sp>
@@ -5935,7 +5952,7 @@
         <p:spPr>
           <a:xfrm>
             <a:off x="0" y="0"/>
-            <a:ext cx="12191695" cy="101498"/>
+            <a:ext cx="12191695" cy="100584"/>
           </a:xfrm>
           <a:prstGeom prst="rect">
             <a:avLst/>
@@ -5959,8 +5976,8 @@
         </p:nvSpPr>
         <p:spPr>
           <a:xfrm>
-            <a:off x="0" y="6756502"/>
-            <a:ext cx="12191695" cy="101498"/>
+            <a:off x="0" y="6757416"/>
+            <a:ext cx="12191695" cy="100584"/>
           </a:xfrm>
           <a:prstGeom prst="rect">
             <a:avLst/>
@@ -5984,8 +6001,8 @@
         </p:nvSpPr>
         <p:spPr>
           <a:xfrm>
-            <a:off x="608076" y="502920"/>
-            <a:ext cx="10972800" cy="685800"/>
+            <a:off x="594360" y="438912"/>
+            <a:ext cx="11064240" cy="621792"/>
           </a:xfrm>
           <a:prstGeom prst="rect">
             <a:avLst/>
@@ -6003,7 +6020,7 @@
               <a:buNone/>
             </a:pPr>
             <a:r>
-              <a:rPr lang="en-US" sz="3400" b="1" dirty="0">
+              <a:rPr lang="en-US" sz="3000" b="1" dirty="0">
                 <a:solidFill>
                   <a:srgbClr val="262626"/>
                 </a:solidFill>
@@ -6013,7 +6030,7 @@
               </a:rPr>
               <a:t>Q6 一个 RGB 像素怎样变成 0 和 1？</a:t>
             </a:r>
-            <a:endParaRPr lang="en-US" sz="3400" dirty="0"/>
+            <a:endParaRPr lang="en-US" sz="3000" dirty="0"/>
           </a:p>
         </p:txBody>
       </p:sp>
@@ -6025,18 +6042,18 @@
         </p:nvSpPr>
         <p:spPr>
           <a:xfrm>
-            <a:off x="2834640" y="1965960"/>
-            <a:ext cx="6492240" cy="914400"/>
+            <a:off x="2743200" y="2057400"/>
+            <a:ext cx="6675120" cy="868680"/>
           </a:xfrm>
           <a:prstGeom prst="roundRect">
             <a:avLst>
-              <a:gd name="adj" fmla="val 12000"/>
+              <a:gd name="adj" fmla="val 12632"/>
             </a:avLst>
           </a:prstGeom>
           <a:solidFill>
             <a:srgbClr val="FFFFFF"/>
           </a:solidFill>
-          <a:ln w="15240">
+          <a:ln w="13970">
             <a:solidFill>
               <a:srgbClr val="8C64E1"/>
             </a:solidFill>
@@ -6052,8 +6069,8 @@
         </p:nvSpPr>
         <p:spPr>
           <a:xfrm>
-            <a:off x="2971800" y="2075688"/>
-            <a:ext cx="6217920" cy="694944"/>
+            <a:off x="2852928" y="2148840"/>
+            <a:ext cx="6455664" cy="685800"/>
           </a:xfrm>
           <a:prstGeom prst="rect">
             <a:avLst/>
@@ -6093,8 +6110,8 @@
         </p:nvSpPr>
         <p:spPr>
           <a:xfrm>
-            <a:off x="2743200" y="3337560"/>
-            <a:ext cx="6766560" cy="914400"/>
+            <a:off x="2423160" y="3429000"/>
+            <a:ext cx="7315200" cy="914400"/>
           </a:xfrm>
           <a:prstGeom prst="rect">
             <a:avLst/>
@@ -6114,7 +6131,7 @@
             <a:r>
               <a:rPr lang="en-US" sz="2400" dirty="0">
                 <a:solidFill>
-                  <a:srgbClr val="000000"/>
+                  <a:srgbClr val="262626"/>
                 </a:solidFill>
                 <a:latin typeface="Alibaba PuHuiTi 3.0 55 Regular" pitchFamily="34" charset="0"/>
                 <a:ea typeface="Alibaba PuHuiTi 3.0 55 Regular" pitchFamily="34" charset="-122"/>
@@ -6131,7 +6148,7 @@
             <a:r>
               <a:rPr lang="en-US" sz="2400" dirty="0">
                 <a:solidFill>
-                  <a:srgbClr val="000000"/>
+                  <a:srgbClr val="262626"/>
                 </a:solidFill>
                 <a:latin typeface="Alibaba PuHuiTi 3.0 55 Regular" pitchFamily="34" charset="0"/>
                 <a:ea typeface="Alibaba PuHuiTi 3.0 55 Regular" pitchFamily="34" charset="-122"/>
@@ -6184,7 +6201,7 @@
         <p:spPr>
           <a:xfrm>
             <a:off x="0" y="0"/>
-            <a:ext cx="12191695" cy="101498"/>
+            <a:ext cx="12191695" cy="100584"/>
           </a:xfrm>
           <a:prstGeom prst="rect">
             <a:avLst/>
@@ -6208,8 +6225,8 @@
         </p:nvSpPr>
         <p:spPr>
           <a:xfrm>
-            <a:off x="0" y="6756502"/>
-            <a:ext cx="12191695" cy="101498"/>
+            <a:off x="0" y="6757416"/>
+            <a:ext cx="12191695" cy="100584"/>
           </a:xfrm>
           <a:prstGeom prst="rect">
             <a:avLst/>
@@ -6233,8 +6250,8 @@
         </p:nvSpPr>
         <p:spPr>
           <a:xfrm>
-            <a:off x="608076" y="502920"/>
-            <a:ext cx="10972800" cy="685800"/>
+            <a:off x="594360" y="438912"/>
+            <a:ext cx="11064240" cy="621792"/>
           </a:xfrm>
           <a:prstGeom prst="rect">
             <a:avLst/>
@@ -6252,7 +6269,7 @@
               <a:buNone/>
             </a:pPr>
             <a:r>
-              <a:rPr lang="en-US" sz="3400" b="1" dirty="0">
+              <a:rPr lang="en-US" sz="3000" b="1" dirty="0">
                 <a:solidFill>
                   <a:srgbClr val="262626"/>
                 </a:solidFill>
@@ -6260,9 +6277,9 @@
                 <a:ea typeface="Alibaba PuHuiTi 3.0 115 Black" pitchFamily="34" charset="-122"/>
                 <a:cs typeface="Alibaba PuHuiTi 3.0 115 Black" pitchFamily="34" charset="-120"/>
               </a:rPr>
-              <a:t>Q6 证据：RGB 数值按约定写成 bits</a:t>
-            </a:r>
-            <a:endParaRPr lang="en-US" sz="3400" dirty="0"/>
+              <a:t>Q6 一个 RGB 像素怎样变成 0 和 1？</a:t>
+            </a:r>
+            <a:endParaRPr lang="en-US" sz="3000" dirty="0"/>
           </a:p>
         </p:txBody>
       </p:sp>
@@ -6274,18 +6291,18 @@
         </p:nvSpPr>
         <p:spPr>
           <a:xfrm>
-            <a:off x="1371600" y="1508760"/>
-            <a:ext cx="914400" cy="594360"/>
+            <a:off x="1371600" y="1554480"/>
+            <a:ext cx="914400" cy="548640"/>
           </a:xfrm>
           <a:prstGeom prst="roundRect">
             <a:avLst>
-              <a:gd name="adj" fmla="val 18462"/>
+              <a:gd name="adj" fmla="val 20000"/>
             </a:avLst>
           </a:prstGeom>
           <a:solidFill>
-            <a:srgbClr val="F7F4FF"/>
-          </a:solidFill>
-          <a:ln w="15240">
+            <a:srgbClr val="F6F3FF"/>
+          </a:solidFill>
+          <a:ln w="13970">
             <a:solidFill>
               <a:srgbClr val="8C64E1"/>
             </a:solidFill>
@@ -6301,8 +6318,8 @@
         </p:nvSpPr>
         <p:spPr>
           <a:xfrm>
-            <a:off x="1508760" y="1618488"/>
-            <a:ext cx="640080" cy="374904"/>
+            <a:off x="1481328" y="1645920"/>
+            <a:ext cx="694944" cy="365760"/>
           </a:xfrm>
           <a:prstGeom prst="rect">
             <a:avLst/>
@@ -6320,7 +6337,7 @@
               <a:buNone/>
             </a:pPr>
             <a:r>
-              <a:rPr lang="en-US" sz="2000" b="1" dirty="0">
+              <a:rPr lang="en-US" sz="1900" b="1" dirty="0">
                 <a:solidFill>
                   <a:srgbClr val="8C64E1"/>
                 </a:solidFill>
@@ -6330,7 +6347,7 @@
               </a:rPr>
               <a:t>R</a:t>
             </a:r>
-            <a:endParaRPr lang="en-US" sz="2000" dirty="0"/>
+            <a:endParaRPr lang="en-US" sz="1900" dirty="0"/>
           </a:p>
         </p:txBody>
       </p:sp>
@@ -6342,8 +6359,8 @@
         </p:nvSpPr>
         <p:spPr>
           <a:xfrm>
-            <a:off x="2743200" y="1600200"/>
-            <a:ext cx="1371600" cy="365760"/>
+            <a:off x="2743200" y="1618488"/>
+            <a:ext cx="1280160" cy="365760"/>
           </a:xfrm>
           <a:prstGeom prst="rect">
             <a:avLst/>
@@ -6361,17 +6378,17 @@
               <a:buNone/>
             </a:pPr>
             <a:r>
-              <a:rPr lang="en-US" sz="2400" b="1" dirty="0">
-                <a:solidFill>
-                  <a:srgbClr val="000000"/>
-                </a:solidFill>
-                <a:latin typeface="Alibaba PuHuiTi 3.0 55 Regular" pitchFamily="34" charset="0"/>
-                <a:ea typeface="Alibaba PuHuiTi 3.0 55 Regular" pitchFamily="34" charset="-122"/>
-                <a:cs typeface="Alibaba PuHuiTi 3.0 55 Regular" pitchFamily="34" charset="-120"/>
+              <a:rPr lang="en-US" sz="2300" b="1" dirty="0">
+                <a:solidFill>
+                  <a:srgbClr val="262626"/>
+                </a:solidFill>
+                <a:latin typeface="Alibaba PuHuiTi 3.0 85 Bold" pitchFamily="34" charset="0"/>
+                <a:ea typeface="Alibaba PuHuiTi 3.0 85 Bold" pitchFamily="34" charset="-122"/>
+                <a:cs typeface="Alibaba PuHuiTi 3.0 85 Bold" pitchFamily="34" charset="-120"/>
               </a:rPr>
               <a:t>255</a:t>
             </a:r>
-            <a:endParaRPr lang="en-US" sz="2400" dirty="0"/>
+            <a:endParaRPr lang="en-US" sz="2300" dirty="0"/>
           </a:p>
         </p:txBody>
       </p:sp>
@@ -6383,8 +6400,8 @@
         </p:nvSpPr>
         <p:spPr>
           <a:xfrm>
-            <a:off x="4754880" y="1600200"/>
-            <a:ext cx="4114800" cy="365760"/>
+            <a:off x="4846320" y="1618488"/>
+            <a:ext cx="4023360" cy="365760"/>
           </a:xfrm>
           <a:prstGeom prst="rect">
             <a:avLst/>
@@ -6402,17 +6419,17 @@
               <a:buNone/>
             </a:pPr>
             <a:r>
-              <a:rPr lang="en-US" sz="2400" b="1" dirty="0">
+              <a:rPr lang="en-US" sz="2300" b="1" dirty="0">
                 <a:solidFill>
                   <a:srgbClr val="007C9B"/>
                 </a:solidFill>
-                <a:latin typeface="Alibaba PuHuiTi 3.0 55 Regular" pitchFamily="34" charset="0"/>
-                <a:ea typeface="Alibaba PuHuiTi 3.0 55 Regular" pitchFamily="34" charset="-122"/>
-                <a:cs typeface="Alibaba PuHuiTi 3.0 55 Regular" pitchFamily="34" charset="-120"/>
+                <a:latin typeface="Alibaba PuHuiTi 3.0 85 Bold" pitchFamily="34" charset="0"/>
+                <a:ea typeface="Alibaba PuHuiTi 3.0 85 Bold" pitchFamily="34" charset="-122"/>
+                <a:cs typeface="Alibaba PuHuiTi 3.0 85 Bold" pitchFamily="34" charset="-120"/>
               </a:rPr>
               <a:t>11111111</a:t>
             </a:r>
-            <a:endParaRPr lang="en-US" sz="2400" dirty="0"/>
+            <a:endParaRPr lang="en-US" sz="2300" dirty="0"/>
           </a:p>
         </p:txBody>
       </p:sp>
@@ -6425,17 +6442,17 @@
         <p:spPr>
           <a:xfrm>
             <a:off x="1371600" y="2377440"/>
-            <a:ext cx="914400" cy="594360"/>
+            <a:ext cx="914400" cy="548640"/>
           </a:xfrm>
           <a:prstGeom prst="roundRect">
             <a:avLst>
-              <a:gd name="adj" fmla="val 18462"/>
+              <a:gd name="adj" fmla="val 20000"/>
             </a:avLst>
           </a:prstGeom>
           <a:solidFill>
-            <a:srgbClr val="F7F4FF"/>
-          </a:solidFill>
-          <a:ln w="15240">
+            <a:srgbClr val="F6F3FF"/>
+          </a:solidFill>
+          <a:ln w="13970">
             <a:solidFill>
               <a:srgbClr val="8C64E1"/>
             </a:solidFill>
@@ -6451,8 +6468,8 @@
         </p:nvSpPr>
         <p:spPr>
           <a:xfrm>
-            <a:off x="1508760" y="2487168"/>
-            <a:ext cx="640080" cy="374904"/>
+            <a:off x="1481328" y="2468880"/>
+            <a:ext cx="694944" cy="365760"/>
           </a:xfrm>
           <a:prstGeom prst="rect">
             <a:avLst/>
@@ -6470,7 +6487,7 @@
               <a:buNone/>
             </a:pPr>
             <a:r>
-              <a:rPr lang="en-US" sz="2000" b="1" dirty="0">
+              <a:rPr lang="en-US" sz="1900" b="1" dirty="0">
                 <a:solidFill>
                   <a:srgbClr val="8C64E1"/>
                 </a:solidFill>
@@ -6480,7 +6497,7 @@
               </a:rPr>
               <a:t>G</a:t>
             </a:r>
-            <a:endParaRPr lang="en-US" sz="2000" dirty="0"/>
+            <a:endParaRPr lang="en-US" sz="1900" dirty="0"/>
           </a:p>
         </p:txBody>
       </p:sp>
@@ -6492,8 +6509,8 @@
         </p:nvSpPr>
         <p:spPr>
           <a:xfrm>
-            <a:off x="2743200" y="2468880"/>
-            <a:ext cx="1371600" cy="365760"/>
+            <a:off x="2743200" y="2441448"/>
+            <a:ext cx="1280160" cy="365760"/>
           </a:xfrm>
           <a:prstGeom prst="rect">
             <a:avLst/>
@@ -6511,17 +6528,17 @@
               <a:buNone/>
             </a:pPr>
             <a:r>
-              <a:rPr lang="en-US" sz="2400" b="1" dirty="0">
-                <a:solidFill>
-                  <a:srgbClr val="000000"/>
-                </a:solidFill>
-                <a:latin typeface="Alibaba PuHuiTi 3.0 55 Regular" pitchFamily="34" charset="0"/>
-                <a:ea typeface="Alibaba PuHuiTi 3.0 55 Regular" pitchFamily="34" charset="-122"/>
-                <a:cs typeface="Alibaba PuHuiTi 3.0 55 Regular" pitchFamily="34" charset="-120"/>
+              <a:rPr lang="en-US" sz="2300" b="1" dirty="0">
+                <a:solidFill>
+                  <a:srgbClr val="262626"/>
+                </a:solidFill>
+                <a:latin typeface="Alibaba PuHuiTi 3.0 85 Bold" pitchFamily="34" charset="0"/>
+                <a:ea typeface="Alibaba PuHuiTi 3.0 85 Bold" pitchFamily="34" charset="-122"/>
+                <a:cs typeface="Alibaba PuHuiTi 3.0 85 Bold" pitchFamily="34" charset="-120"/>
               </a:rPr>
               <a:t>128</a:t>
             </a:r>
-            <a:endParaRPr lang="en-US" sz="2400" dirty="0"/>
+            <a:endParaRPr lang="en-US" sz="2300" dirty="0"/>
           </a:p>
         </p:txBody>
       </p:sp>
@@ -6533,8 +6550,8 @@
         </p:nvSpPr>
         <p:spPr>
           <a:xfrm>
-            <a:off x="4754880" y="2468880"/>
-            <a:ext cx="4114800" cy="365760"/>
+            <a:off x="4846320" y="2441448"/>
+            <a:ext cx="4023360" cy="365760"/>
           </a:xfrm>
           <a:prstGeom prst="rect">
             <a:avLst/>
@@ -6552,17 +6569,17 @@
               <a:buNone/>
             </a:pPr>
             <a:r>
-              <a:rPr lang="en-US" sz="2400" b="1" dirty="0">
+              <a:rPr lang="en-US" sz="2300" b="1" dirty="0">
                 <a:solidFill>
                   <a:srgbClr val="007C9B"/>
                 </a:solidFill>
-                <a:latin typeface="Alibaba PuHuiTi 3.0 55 Regular" pitchFamily="34" charset="0"/>
-                <a:ea typeface="Alibaba PuHuiTi 3.0 55 Regular" pitchFamily="34" charset="-122"/>
-                <a:cs typeface="Alibaba PuHuiTi 3.0 55 Regular" pitchFamily="34" charset="-120"/>
+                <a:latin typeface="Alibaba PuHuiTi 3.0 85 Bold" pitchFamily="34" charset="0"/>
+                <a:ea typeface="Alibaba PuHuiTi 3.0 85 Bold" pitchFamily="34" charset="-122"/>
+                <a:cs typeface="Alibaba PuHuiTi 3.0 85 Bold" pitchFamily="34" charset="-120"/>
               </a:rPr>
               <a:t>10000000</a:t>
             </a:r>
-            <a:endParaRPr lang="en-US" sz="2400" dirty="0"/>
+            <a:endParaRPr lang="en-US" sz="2300" dirty="0"/>
           </a:p>
         </p:txBody>
       </p:sp>
@@ -6574,18 +6591,18 @@
         </p:nvSpPr>
         <p:spPr>
           <a:xfrm>
-            <a:off x="1371600" y="3246120"/>
-            <a:ext cx="914400" cy="594360"/>
+            <a:off x="1371600" y="3200400"/>
+            <a:ext cx="914400" cy="548640"/>
           </a:xfrm>
           <a:prstGeom prst="roundRect">
             <a:avLst>
-              <a:gd name="adj" fmla="val 18462"/>
+              <a:gd name="adj" fmla="val 20000"/>
             </a:avLst>
           </a:prstGeom>
           <a:solidFill>
-            <a:srgbClr val="F7F4FF"/>
-          </a:solidFill>
-          <a:ln w="15240">
+            <a:srgbClr val="F6F3FF"/>
+          </a:solidFill>
+          <a:ln w="13970">
             <a:solidFill>
               <a:srgbClr val="8C64E1"/>
             </a:solidFill>
@@ -6601,8 +6618,8 @@
         </p:nvSpPr>
         <p:spPr>
           <a:xfrm>
-            <a:off x="1508760" y="3355848"/>
-            <a:ext cx="640080" cy="374904"/>
+            <a:off x="1481328" y="3291840"/>
+            <a:ext cx="694944" cy="365760"/>
           </a:xfrm>
           <a:prstGeom prst="rect">
             <a:avLst/>
@@ -6620,7 +6637,7 @@
               <a:buNone/>
             </a:pPr>
             <a:r>
-              <a:rPr lang="en-US" sz="2000" b="1" dirty="0">
+              <a:rPr lang="en-US" sz="1900" b="1" dirty="0">
                 <a:solidFill>
                   <a:srgbClr val="8C64E1"/>
                 </a:solidFill>
@@ -6630,7 +6647,7 @@
               </a:rPr>
               <a:t>B</a:t>
             </a:r>
-            <a:endParaRPr lang="en-US" sz="2000" dirty="0"/>
+            <a:endParaRPr lang="en-US" sz="1900" dirty="0"/>
           </a:p>
         </p:txBody>
       </p:sp>
@@ -6642,8 +6659,8 @@
         </p:nvSpPr>
         <p:spPr>
           <a:xfrm>
-            <a:off x="2743200" y="3337560"/>
-            <a:ext cx="1371600" cy="365760"/>
+            <a:off x="2743200" y="3264408"/>
+            <a:ext cx="1280160" cy="365760"/>
           </a:xfrm>
           <a:prstGeom prst="rect">
             <a:avLst/>
@@ -6661,17 +6678,17 @@
               <a:buNone/>
             </a:pPr>
             <a:r>
-              <a:rPr lang="en-US" sz="2400" b="1" dirty="0">
-                <a:solidFill>
-                  <a:srgbClr val="000000"/>
-                </a:solidFill>
-                <a:latin typeface="Alibaba PuHuiTi 3.0 55 Regular" pitchFamily="34" charset="0"/>
-                <a:ea typeface="Alibaba PuHuiTi 3.0 55 Regular" pitchFamily="34" charset="-122"/>
-                <a:cs typeface="Alibaba PuHuiTi 3.0 55 Regular" pitchFamily="34" charset="-120"/>
+              <a:rPr lang="en-US" sz="2300" b="1" dirty="0">
+                <a:solidFill>
+                  <a:srgbClr val="262626"/>
+                </a:solidFill>
+                <a:latin typeface="Alibaba PuHuiTi 3.0 85 Bold" pitchFamily="34" charset="0"/>
+                <a:ea typeface="Alibaba PuHuiTi 3.0 85 Bold" pitchFamily="34" charset="-122"/>
+                <a:cs typeface="Alibaba PuHuiTi 3.0 85 Bold" pitchFamily="34" charset="-120"/>
               </a:rPr>
               <a:t>0</a:t>
             </a:r>
-            <a:endParaRPr lang="en-US" sz="2400" dirty="0"/>
+            <a:endParaRPr lang="en-US" sz="2300" dirty="0"/>
           </a:p>
         </p:txBody>
       </p:sp>
@@ -6683,8 +6700,8 @@
         </p:nvSpPr>
         <p:spPr>
           <a:xfrm>
-            <a:off x="4754880" y="3337560"/>
-            <a:ext cx="4114800" cy="365760"/>
+            <a:off x="4846320" y="3264408"/>
+            <a:ext cx="4023360" cy="365760"/>
           </a:xfrm>
           <a:prstGeom prst="rect">
             <a:avLst/>
@@ -6702,17 +6719,17 @@
               <a:buNone/>
             </a:pPr>
             <a:r>
-              <a:rPr lang="en-US" sz="2400" b="1" dirty="0">
+              <a:rPr lang="en-US" sz="2300" b="1" dirty="0">
                 <a:solidFill>
                   <a:srgbClr val="007C9B"/>
                 </a:solidFill>
-                <a:latin typeface="Alibaba PuHuiTi 3.0 55 Regular" pitchFamily="34" charset="0"/>
-                <a:ea typeface="Alibaba PuHuiTi 3.0 55 Regular" pitchFamily="34" charset="-122"/>
-                <a:cs typeface="Alibaba PuHuiTi 3.0 55 Regular" pitchFamily="34" charset="-120"/>
+                <a:latin typeface="Alibaba PuHuiTi 3.0 85 Bold" pitchFamily="34" charset="0"/>
+                <a:ea typeface="Alibaba PuHuiTi 3.0 85 Bold" pitchFamily="34" charset="-122"/>
+                <a:cs typeface="Alibaba PuHuiTi 3.0 85 Bold" pitchFamily="34" charset="-120"/>
               </a:rPr>
               <a:t>00000000</a:t>
             </a:r>
-            <a:endParaRPr lang="en-US" sz="2400" dirty="0"/>
+            <a:endParaRPr lang="en-US" sz="2300" dirty="0"/>
           </a:p>
         </p:txBody>
       </p:sp>
@@ -6724,18 +6741,18 @@
         </p:nvSpPr>
         <p:spPr>
           <a:xfrm>
-            <a:off x="1280160" y="4800600"/>
-            <a:ext cx="9692640" cy="566928"/>
+            <a:off x="1920240" y="4800600"/>
+            <a:ext cx="8412480" cy="502920"/>
           </a:xfrm>
           <a:prstGeom prst="roundRect">
             <a:avLst>
-              <a:gd name="adj" fmla="val 25806"/>
+              <a:gd name="adj" fmla="val 32727"/>
             </a:avLst>
           </a:prstGeom>
           <a:solidFill>
-            <a:srgbClr val="F7F4FF"/>
-          </a:solidFill>
-          <a:ln w="15240">
+            <a:srgbClr val="F6F3FF"/>
+          </a:solidFill>
+          <a:ln w="13970">
             <a:solidFill>
               <a:srgbClr val="8C64E1"/>
             </a:solidFill>
@@ -6751,17 +6768,19 @@
         </p:nvSpPr>
         <p:spPr>
           <a:xfrm>
-            <a:off x="1280160" y="4837176"/>
-            <a:ext cx="9692640" cy="521208"/>
-          </a:xfrm>
-          <a:prstGeom prst="rect">
-            <a:avLst/>
-          </a:prstGeom>
-          <a:noFill/>
-          <a:ln/>
-        </p:spPr>
-        <p:txBody>
-          <a:bodyPr wrap="square" rtlCol="0" anchor="ctr"/>
+            <a:off x="2011680" y="4828032"/>
+            <a:ext cx="8229600" cy="448056"/>
+          </a:xfrm>
+          <a:prstGeom prst="rect">
+            <a:avLst/>
+          </a:prstGeom>
+          <a:noFill/>
+          <a:ln/>
+        </p:spPr>
+        <p:txBody>
+          <a:bodyPr wrap="square" rtlCol="0" anchor="ctr">
+            <a:normAutofit/>
+          </a:bodyPr>
           <a:lstStyle/>
           <a:p>
             <a:pPr algn="ctr" indent="0" marL="0">
@@ -6776,7 +6795,7 @@
                 <a:ea typeface="Alibaba PuHuiTi 3.0 85 Bold" pitchFamily="34" charset="-122"/>
                 <a:cs typeface="Alibaba PuHuiTi 3.0 85 Bold" pitchFamily="34" charset="-120"/>
               </a:rPr>
-              <a:t>Encoding：把量化后的数值按约定表示并组织成 bits / bytes</a:t>
+              <a:t>Encoding：按约定表示并组织成 bits / bytes</a:t>
             </a:r>
             <a:endParaRPr lang="en-US" sz="2000" dirty="0"/>
           </a:p>
@@ -6823,7 +6842,7 @@
         <p:spPr>
           <a:xfrm>
             <a:off x="0" y="0"/>
-            <a:ext cx="12191695" cy="101498"/>
+            <a:ext cx="12191695" cy="100584"/>
           </a:xfrm>
           <a:prstGeom prst="rect">
             <a:avLst/>
@@ -6847,8 +6866,8 @@
         </p:nvSpPr>
         <p:spPr>
           <a:xfrm>
-            <a:off x="0" y="6756502"/>
-            <a:ext cx="12191695" cy="101498"/>
+            <a:off x="0" y="6757416"/>
+            <a:ext cx="12191695" cy="100584"/>
           </a:xfrm>
           <a:prstGeom prst="rect">
             <a:avLst/>
@@ -6872,8 +6891,8 @@
         </p:nvSpPr>
         <p:spPr>
           <a:xfrm>
-            <a:off x="608076" y="502920"/>
-            <a:ext cx="10972800" cy="685800"/>
+            <a:off x="594360" y="438912"/>
+            <a:ext cx="11064240" cy="621792"/>
           </a:xfrm>
           <a:prstGeom prst="rect">
             <a:avLst/>
@@ -6891,7 +6910,7 @@
               <a:buNone/>
             </a:pPr>
             <a:r>
-              <a:rPr lang="en-US" sz="3400" b="1" dirty="0">
+              <a:rPr lang="en-US" sz="3000" b="1" dirty="0">
                 <a:solidFill>
                   <a:srgbClr val="262626"/>
                 </a:solidFill>
@@ -6901,7 +6920,7 @@
               </a:rPr>
               <a:t>Q7 真实 BMP 文件中，像素数据之前有什么？</a:t>
             </a:r>
-            <a:endParaRPr lang="en-US" sz="3400" dirty="0"/>
+            <a:endParaRPr lang="en-US" sz="3000" dirty="0"/>
           </a:p>
         </p:txBody>
       </p:sp>
@@ -6913,8 +6932,8 @@
         </p:nvSpPr>
         <p:spPr>
           <a:xfrm>
-            <a:off x="1097280" y="1920240"/>
-            <a:ext cx="9875520" cy="1554480"/>
+            <a:off x="1097280" y="2057400"/>
+            <a:ext cx="9966960" cy="1508760"/>
           </a:xfrm>
           <a:prstGeom prst="rect">
             <a:avLst/>
@@ -6934,11 +6953,11 @@
             <a:r>
               <a:rPr lang="en-US" sz="2600" b="1" dirty="0">
                 <a:solidFill>
-                  <a:srgbClr val="000000"/>
-                </a:solidFill>
-                <a:latin typeface="Alibaba PuHuiTi 3.0 55 Regular" pitchFamily="34" charset="0"/>
-                <a:ea typeface="Alibaba PuHuiTi 3.0 55 Regular" pitchFamily="34" charset="-122"/>
-                <a:cs typeface="Alibaba PuHuiTi 3.0 55 Regular" pitchFamily="34" charset="-120"/>
+                  <a:srgbClr val="262626"/>
+                </a:solidFill>
+                <a:latin typeface="Alibaba PuHuiTi 3.0 85 Bold" pitchFamily="34" charset="0"/>
+                <a:ea typeface="Alibaba PuHuiTi 3.0 85 Bold" pitchFamily="34" charset="-122"/>
+                <a:cs typeface="Alibaba PuHuiTi 3.0 85 Bold" pitchFamily="34" charset="-120"/>
               </a:rPr>
               <a:t>真实文件：assets/q7-3x2-24bit.bmp</a:t>
             </a:r>
@@ -6957,11 +6976,11 @@
             <a:r>
               <a:rPr lang="en-US" sz="2600" b="1" dirty="0">
                 <a:solidFill>
-                  <a:srgbClr val="000000"/>
-                </a:solidFill>
-                <a:latin typeface="Alibaba PuHuiTi 3.0 55 Regular" pitchFamily="34" charset="0"/>
-                <a:ea typeface="Alibaba PuHuiTi 3.0 55 Regular" pitchFamily="34" charset="-122"/>
-                <a:cs typeface="Alibaba PuHuiTi 3.0 55 Regular" pitchFamily="34" charset="-120"/>
+                  <a:srgbClr val="262626"/>
+                </a:solidFill>
+                <a:latin typeface="Alibaba PuHuiTi 3.0 85 Bold" pitchFamily="34" charset="0"/>
+                <a:ea typeface="Alibaba PuHuiTi 3.0 85 Bold" pitchFamily="34" charset="-122"/>
+                <a:cs typeface="Alibaba PuHuiTi 3.0 85 Bold" pitchFamily="34" charset="-120"/>
               </a:rPr>
               <a:t>问题：pixel data 之前为什么还有一段 bytes？</a:t>
             </a:r>
@@ -7010,7 +7029,7 @@
         <p:spPr>
           <a:xfrm>
             <a:off x="0" y="0"/>
-            <a:ext cx="12191695" cy="101498"/>
+            <a:ext cx="12191695" cy="100584"/>
           </a:xfrm>
           <a:prstGeom prst="rect">
             <a:avLst/>
@@ -7034,8 +7053,8 @@
         </p:nvSpPr>
         <p:spPr>
           <a:xfrm>
-            <a:off x="0" y="6756502"/>
-            <a:ext cx="12191695" cy="101498"/>
+            <a:off x="0" y="6757416"/>
+            <a:ext cx="12191695" cy="100584"/>
           </a:xfrm>
           <a:prstGeom prst="rect">
             <a:avLst/>
@@ -7059,8 +7078,8 @@
         </p:nvSpPr>
         <p:spPr>
           <a:xfrm>
-            <a:off x="608076" y="502920"/>
-            <a:ext cx="10972800" cy="685800"/>
+            <a:off x="594360" y="438912"/>
+            <a:ext cx="11064240" cy="621792"/>
           </a:xfrm>
           <a:prstGeom prst="rect">
             <a:avLst/>
@@ -7078,7 +7097,7 @@
               <a:buNone/>
             </a:pPr>
             <a:r>
-              <a:rPr lang="en-US" sz="3400" b="1" dirty="0">
+              <a:rPr lang="en-US" sz="3000" b="1" dirty="0">
                 <a:solidFill>
                   <a:srgbClr val="262626"/>
                 </a:solidFill>
@@ -7086,9 +7105,9 @@
                 <a:ea typeface="Alibaba PuHuiTi 3.0 115 Black" pitchFamily="34" charset="-122"/>
                 <a:cs typeface="Alibaba PuHuiTi 3.0 115 Black" pitchFamily="34" charset="-120"/>
               </a:rPr>
-              <a:t>Q7 证据：BMP header 告诉软件怎样解释数据</a:t>
-            </a:r>
-            <a:endParaRPr lang="en-US" sz="3400" dirty="0"/>
+              <a:t>Q7 真实 BMP 文件中，像素数据之前有什么？</a:t>
+            </a:r>
+            <a:endParaRPr lang="en-US" sz="3000" dirty="0"/>
           </a:p>
         </p:txBody>
       </p:sp>
@@ -7100,18 +7119,18 @@
         </p:nvSpPr>
         <p:spPr>
           <a:xfrm>
-            <a:off x="1097280" y="1691640"/>
-            <a:ext cx="4206240" cy="914400"/>
+            <a:off x="1097280" y="1280160"/>
+            <a:ext cx="1280160" cy="384048"/>
           </a:xfrm>
           <a:prstGeom prst="roundRect">
             <a:avLst>
-              <a:gd name="adj" fmla="val 12000"/>
+              <a:gd name="adj" fmla="val 42857"/>
             </a:avLst>
           </a:prstGeom>
           <a:solidFill>
-            <a:srgbClr val="FFFFFF"/>
-          </a:solidFill>
-          <a:ln w="15240">
+            <a:srgbClr val="F6F3FF"/>
+          </a:solidFill>
+          <a:ln w="13970">
             <a:solidFill>
               <a:srgbClr val="8C64E1"/>
             </a:solidFill>
@@ -7127,8 +7146,8 @@
         </p:nvSpPr>
         <p:spPr>
           <a:xfrm>
-            <a:off x="1234440" y="1801368"/>
-            <a:ext cx="3931920" cy="694944"/>
+            <a:off x="1188720" y="1307592"/>
+            <a:ext cx="1097280" cy="329184"/>
           </a:xfrm>
           <a:prstGeom prst="rect">
             <a:avLst/>
@@ -7146,7 +7165,7 @@
               <a:buNone/>
             </a:pPr>
             <a:r>
-              <a:rPr lang="en-US" sz="2600" b="1" dirty="0">
+              <a:rPr lang="en-US" sz="1600" b="1" dirty="0">
                 <a:solidFill>
                   <a:srgbClr val="8C64E1"/>
                 </a:solidFill>
@@ -7154,9 +7173,9 @@
                 <a:ea typeface="Alibaba PuHuiTi 3.0 85 Bold" pitchFamily="34" charset="-122"/>
                 <a:cs typeface="Alibaba PuHuiTi 3.0 85 Bold" pitchFamily="34" charset="-120"/>
               </a:rPr>
-              <a:t>42 4D  →  "BM"</a:t>
-            </a:r>
-            <a:endParaRPr lang="en-US" sz="2600" dirty="0"/>
+              <a:t>证据</a:t>
+            </a:r>
+            <a:endParaRPr lang="en-US" sz="1600" dirty="0"/>
           </a:p>
         </p:txBody>
       </p:sp>
@@ -7168,18 +7187,18 @@
         </p:nvSpPr>
         <p:spPr>
           <a:xfrm>
-            <a:off x="6400800" y="1417320"/>
-            <a:ext cx="4480560" cy="1920240"/>
+            <a:off x="1097280" y="1828800"/>
+            <a:ext cx="4206240" cy="868680"/>
           </a:xfrm>
           <a:prstGeom prst="roundRect">
             <a:avLst>
-              <a:gd name="adj" fmla="val 5714"/>
+              <a:gd name="adj" fmla="val 12632"/>
             </a:avLst>
           </a:prstGeom>
           <a:solidFill>
-            <a:srgbClr val="F7F4FF"/>
-          </a:solidFill>
-          <a:ln w="15240">
+            <a:srgbClr val="FFFFFF"/>
+          </a:solidFill>
+          <a:ln w="13970">
             <a:solidFill>
               <a:srgbClr val="8C64E1"/>
             </a:solidFill>
@@ -7195,8 +7214,8 @@
         </p:nvSpPr>
         <p:spPr>
           <a:xfrm>
-            <a:off x="6537960" y="1527048"/>
-            <a:ext cx="4206240" cy="1700784"/>
+            <a:off x="1207008" y="1920240"/>
+            <a:ext cx="3986784" cy="685800"/>
           </a:xfrm>
           <a:prstGeom prst="rect">
             <a:avLst/>
@@ -7214,24 +7233,75 @@
               <a:buNone/>
             </a:pPr>
             <a:r>
-              <a:rPr lang="en-US" sz="2000" b="1" dirty="0">
-                <a:solidFill>
-                  <a:srgbClr val="262626"/>
+              <a:rPr lang="en-US" sz="2500" b="1" dirty="0">
+                <a:solidFill>
+                  <a:srgbClr val="8C64E1"/>
                 </a:solidFill>
                 <a:latin typeface="Alibaba PuHuiTi 3.0 85 Bold" pitchFamily="34" charset="0"/>
                 <a:ea typeface="Alibaba PuHuiTi 3.0 85 Bold" pitchFamily="34" charset="-122"/>
                 <a:cs typeface="Alibaba PuHuiTi 3.0 85 Bold" pitchFamily="34" charset="-120"/>
               </a:rPr>
-              <a:t>header bytes at 0x0A</a:t>
-            </a:r>
-            <a:endParaRPr lang="en-US" sz="2000" dirty="0"/>
-          </a:p>
+              <a:t>42 4D  →  "BM"</a:t>
+            </a:r>
+            <a:endParaRPr lang="en-US" sz="2500" dirty="0"/>
+          </a:p>
+        </p:txBody>
+      </p:sp>
+      <p:sp>
+        <p:nvSpPr>
+          <p:cNvPr id="10" name="Shape 7"/>
+          <p:cNvSpPr/>
+          <p:nvPr/>
+        </p:nvSpPr>
+        <p:spPr>
+          <a:xfrm>
+            <a:off x="6400800" y="1508760"/>
+            <a:ext cx="4480560" cy="1828800"/>
+          </a:xfrm>
+          <a:prstGeom prst="roundRect">
+            <a:avLst>
+              <a:gd name="adj" fmla="val 6000"/>
+            </a:avLst>
+          </a:prstGeom>
+          <a:solidFill>
+            <a:srgbClr val="F6F3FF"/>
+          </a:solidFill>
+          <a:ln w="13970">
+            <a:solidFill>
+              <a:srgbClr val="8C64E1"/>
+            </a:solidFill>
+            <a:prstDash val="solid"/>
+          </a:ln>
+        </p:spPr>
+      </p:sp>
+      <p:sp>
+        <p:nvSpPr>
+          <p:cNvPr id="11" name="Text 8"/>
+          <p:cNvSpPr/>
+          <p:nvPr/>
+        </p:nvSpPr>
+        <p:spPr>
+          <a:xfrm>
+            <a:off x="6510528" y="1600200"/>
+            <a:ext cx="4261104" cy="1645920"/>
+          </a:xfrm>
+          <a:prstGeom prst="rect">
+            <a:avLst/>
+          </a:prstGeom>
+          <a:noFill/>
+          <a:ln/>
+        </p:spPr>
+        <p:txBody>
+          <a:bodyPr wrap="square" rtlCol="0" anchor="ctr">
+            <a:normAutofit/>
+          </a:bodyPr>
+          <a:lstStyle/>
           <a:p>
             <a:pPr algn="ctr" indent="0" marL="0">
               <a:buNone/>
             </a:pPr>
             <a:r>
-              <a:rPr lang="en-US" sz="2000" b="1" dirty="0">
+              <a:rPr lang="en-US" sz="1900" b="1" dirty="0">
                 <a:solidFill>
                   <a:srgbClr val="262626"/>
                 </a:solidFill>
@@ -7239,16 +7309,16 @@
                 <a:ea typeface="Alibaba PuHuiTi 3.0 85 Bold" pitchFamily="34" charset="-122"/>
                 <a:cs typeface="Alibaba PuHuiTi 3.0 85 Bold" pitchFamily="34" charset="-120"/>
               </a:rPr>
-              <a:t>36 00 00 00</a:t>
-            </a:r>
-            <a:endParaRPr lang="en-US" sz="2000" dirty="0"/>
+              <a:t>header bytes at 0x0A</a:t>
+            </a:r>
+            <a:endParaRPr lang="en-US" sz="1900" dirty="0"/>
           </a:p>
           <a:p>
             <a:pPr algn="ctr" indent="0" marL="0">
               <a:buNone/>
             </a:pPr>
             <a:r>
-              <a:rPr lang="en-US" sz="2000" b="1" dirty="0">
+              <a:rPr lang="en-US" sz="1900" b="1" dirty="0">
                 <a:solidFill>
                   <a:srgbClr val="262626"/>
                 </a:solidFill>
@@ -7256,16 +7326,16 @@
                 <a:ea typeface="Alibaba PuHuiTi 3.0 85 Bold" pitchFamily="34" charset="-122"/>
                 <a:cs typeface="Alibaba PuHuiTi 3.0 85 Bold" pitchFamily="34" charset="-120"/>
               </a:rPr>
-              <a:t>↓</a:t>
-            </a:r>
-            <a:endParaRPr lang="en-US" sz="2000" dirty="0"/>
+              <a:t>36 00 00 00</a:t>
+            </a:r>
+            <a:endParaRPr lang="en-US" sz="1900" dirty="0"/>
           </a:p>
           <a:p>
             <a:pPr algn="ctr" indent="0" marL="0">
               <a:buNone/>
             </a:pPr>
             <a:r>
-              <a:rPr lang="en-US" sz="2000" b="1" dirty="0">
+              <a:rPr lang="en-US" sz="1900" b="1" dirty="0">
                 <a:solidFill>
                   <a:srgbClr val="262626"/>
                 </a:solidFill>
@@ -7273,32 +7343,49 @@
                 <a:ea typeface="Alibaba PuHuiTi 3.0 85 Bold" pitchFamily="34" charset="-122"/>
                 <a:cs typeface="Alibaba PuHuiTi 3.0 85 Bold" pitchFamily="34" charset="-120"/>
               </a:rPr>
+              <a:t>↓</a:t>
+            </a:r>
+            <a:endParaRPr lang="en-US" sz="1900" dirty="0"/>
+          </a:p>
+          <a:p>
+            <a:pPr algn="ctr" indent="0" marL="0">
+              <a:buNone/>
+            </a:pPr>
+            <a:r>
+              <a:rPr lang="en-US" sz="1900" b="1" dirty="0">
+                <a:solidFill>
+                  <a:srgbClr val="262626"/>
+                </a:solidFill>
+                <a:latin typeface="Alibaba PuHuiTi 3.0 85 Bold" pitchFamily="34" charset="0"/>
+                <a:ea typeface="Alibaba PuHuiTi 3.0 85 Bold" pitchFamily="34" charset="-122"/>
+                <a:cs typeface="Alibaba PuHuiTi 3.0 85 Bold" pitchFamily="34" charset="-120"/>
+              </a:rPr>
               <a:t>pixel-data offset = 54 bytes</a:t>
             </a:r>
-            <a:endParaRPr lang="en-US" sz="2000" dirty="0"/>
-          </a:p>
-        </p:txBody>
-      </p:sp>
-      <p:sp>
-        <p:nvSpPr>
-          <p:cNvPr id="10" name="Shape 7"/>
-          <p:cNvSpPr/>
-          <p:nvPr/>
-        </p:nvSpPr>
-        <p:spPr>
-          <a:xfrm>
-            <a:off x="2788920" y="4800600"/>
-            <a:ext cx="6583680" cy="566928"/>
+            <a:endParaRPr lang="en-US" sz="1900" dirty="0"/>
+          </a:p>
+        </p:txBody>
+      </p:sp>
+      <p:sp>
+        <p:nvSpPr>
+          <p:cNvPr id="12" name="Shape 9"/>
+          <p:cNvSpPr/>
+          <p:nvPr/>
+        </p:nvSpPr>
+        <p:spPr>
+          <a:xfrm>
+            <a:off x="2926080" y="4892040"/>
+            <a:ext cx="6309360" cy="502920"/>
           </a:xfrm>
           <a:prstGeom prst="roundRect">
             <a:avLst>
-              <a:gd name="adj" fmla="val 25806"/>
+              <a:gd name="adj" fmla="val 32727"/>
             </a:avLst>
           </a:prstGeom>
           <a:solidFill>
             <a:srgbClr val="FFFFFF"/>
           </a:solidFill>
-          <a:ln w="15240">
+          <a:ln w="13970">
             <a:solidFill>
               <a:srgbClr val="007C9B"/>
             </a:solidFill>
@@ -7308,30 +7395,32 @@
       </p:sp>
       <p:sp>
         <p:nvSpPr>
-          <p:cNvPr id="11" name="Text 8"/>
-          <p:cNvSpPr/>
-          <p:nvPr/>
-        </p:nvSpPr>
-        <p:spPr>
-          <a:xfrm>
-            <a:off x="2788920" y="4837176"/>
-            <a:ext cx="6583680" cy="521208"/>
-          </a:xfrm>
-          <a:prstGeom prst="rect">
-            <a:avLst/>
-          </a:prstGeom>
-          <a:noFill/>
-          <a:ln/>
-        </p:spPr>
-        <p:txBody>
-          <a:bodyPr wrap="square" rtlCol="0" anchor="ctr"/>
+          <p:cNvPr id="13" name="Text 10"/>
+          <p:cNvSpPr/>
+          <p:nvPr/>
+        </p:nvSpPr>
+        <p:spPr>
+          <a:xfrm>
+            <a:off x="3017520" y="4919472"/>
+            <a:ext cx="6126480" cy="448056"/>
+          </a:xfrm>
+          <a:prstGeom prst="rect">
+            <a:avLst/>
+          </a:prstGeom>
+          <a:noFill/>
+          <a:ln/>
+        </p:spPr>
+        <p:txBody>
+          <a:bodyPr wrap="square" rtlCol="0" anchor="ctr">
+            <a:normAutofit/>
+          </a:bodyPr>
           <a:lstStyle/>
           <a:p>
             <a:pPr algn="ctr" indent="0" marL="0">
               <a:buNone/>
             </a:pPr>
             <a:r>
-              <a:rPr lang="en-US" sz="2400" b="1" dirty="0">
+              <a:rPr lang="en-US" sz="2300" b="1" dirty="0">
                 <a:solidFill>
                   <a:srgbClr val="007C9B"/>
                 </a:solidFill>
@@ -7341,7 +7430,7 @@
               </a:rPr>
               <a:t>pixel values ≠ whole image file</a:t>
             </a:r>
-            <a:endParaRPr lang="en-US" sz="2400" dirty="0"/>
+            <a:endParaRPr lang="en-US" sz="2300" dirty="0"/>
           </a:p>
         </p:txBody>
       </p:sp>
@@ -7386,7 +7475,7 @@
         <p:spPr>
           <a:xfrm>
             <a:off x="0" y="0"/>
-            <a:ext cx="12191695" cy="101498"/>
+            <a:ext cx="12191695" cy="100584"/>
           </a:xfrm>
           <a:prstGeom prst="rect">
             <a:avLst/>
@@ -7410,8 +7499,8 @@
         </p:nvSpPr>
         <p:spPr>
           <a:xfrm>
-            <a:off x="0" y="6756502"/>
-            <a:ext cx="12191695" cy="101498"/>
+            <a:off x="0" y="6757416"/>
+            <a:ext cx="12191695" cy="100584"/>
           </a:xfrm>
           <a:prstGeom prst="rect">
             <a:avLst/>
@@ -7435,8 +7524,8 @@
         </p:nvSpPr>
         <p:spPr>
           <a:xfrm>
-            <a:off x="608076" y="502920"/>
-            <a:ext cx="10972800" cy="685800"/>
+            <a:off x="594360" y="438912"/>
+            <a:ext cx="11064240" cy="621792"/>
           </a:xfrm>
           <a:prstGeom prst="rect">
             <a:avLst/>
@@ -7454,7 +7543,7 @@
               <a:buNone/>
             </a:pPr>
             <a:r>
-              <a:rPr lang="en-US" sz="3400" b="1" dirty="0">
+              <a:rPr lang="en-US" sz="3000" b="1" dirty="0">
                 <a:solidFill>
                   <a:srgbClr val="262626"/>
                 </a:solidFill>
@@ -7464,7 +7553,7 @@
               </a:rPr>
               <a:t>Q8 1920×1080、24-bit RGB，不压缩需要多大？</a:t>
             </a:r>
-            <a:endParaRPr lang="en-US" sz="3400" dirty="0"/>
+            <a:endParaRPr lang="en-US" sz="3000" dirty="0"/>
           </a:p>
         </p:txBody>
       </p:sp>
@@ -7476,20 +7565,20 @@
         </p:nvSpPr>
         <p:spPr>
           <a:xfrm>
-            <a:off x="1920240" y="1554480"/>
-            <a:ext cx="8229600" cy="566928"/>
+            <a:off x="1920240" y="1508760"/>
+            <a:ext cx="8229600" cy="548640"/>
           </a:xfrm>
           <a:prstGeom prst="roundRect">
             <a:avLst>
-              <a:gd name="adj" fmla="val 19355"/>
+              <a:gd name="adj" fmla="val 20000"/>
             </a:avLst>
           </a:prstGeom>
           <a:solidFill>
             <a:srgbClr val="FFFFFF"/>
           </a:solidFill>
-          <a:ln w="15240">
+          <a:ln w="13970">
             <a:solidFill>
-              <a:srgbClr val="D7D7E6"/>
+              <a:srgbClr val="D8D2EA"/>
             </a:solidFill>
             <a:prstDash val="solid"/>
           </a:ln>
@@ -7503,8 +7592,8 @@
         </p:nvSpPr>
         <p:spPr>
           <a:xfrm>
-            <a:off x="2057400" y="1664208"/>
-            <a:ext cx="7955280" cy="347472"/>
+            <a:off x="2029968" y="1600200"/>
+            <a:ext cx="8010144" cy="365760"/>
           </a:xfrm>
           <a:prstGeom prst="rect">
             <a:avLst/>
@@ -7544,20 +7633,20 @@
         </p:nvSpPr>
         <p:spPr>
           <a:xfrm>
-            <a:off x="1920240" y="2331720"/>
-            <a:ext cx="8229600" cy="566928"/>
+            <a:off x="1920240" y="2258568"/>
+            <a:ext cx="8229600" cy="548640"/>
           </a:xfrm>
           <a:prstGeom prst="roundRect">
             <a:avLst>
-              <a:gd name="adj" fmla="val 19355"/>
+              <a:gd name="adj" fmla="val 20000"/>
             </a:avLst>
           </a:prstGeom>
           <a:solidFill>
             <a:srgbClr val="FFFFFF"/>
           </a:solidFill>
-          <a:ln w="15240">
+          <a:ln w="13970">
             <a:solidFill>
-              <a:srgbClr val="D7D7E6"/>
+              <a:srgbClr val="D8D2EA"/>
             </a:solidFill>
             <a:prstDash val="solid"/>
           </a:ln>
@@ -7571,8 +7660,8 @@
         </p:nvSpPr>
         <p:spPr>
           <a:xfrm>
-            <a:off x="2057400" y="2441448"/>
-            <a:ext cx="7955280" cy="347472"/>
+            <a:off x="2029968" y="2350008"/>
+            <a:ext cx="8010144" cy="365760"/>
           </a:xfrm>
           <a:prstGeom prst="rect">
             <a:avLst/>
@@ -7612,20 +7701,20 @@
         </p:nvSpPr>
         <p:spPr>
           <a:xfrm>
-            <a:off x="1920240" y="3108960"/>
-            <a:ext cx="8229600" cy="566928"/>
+            <a:off x="1920240" y="3008376"/>
+            <a:ext cx="8229600" cy="548640"/>
           </a:xfrm>
           <a:prstGeom prst="roundRect">
             <a:avLst>
-              <a:gd name="adj" fmla="val 19355"/>
+              <a:gd name="adj" fmla="val 20000"/>
             </a:avLst>
           </a:prstGeom>
           <a:solidFill>
             <a:srgbClr val="FFFFFF"/>
           </a:solidFill>
-          <a:ln w="15240">
+          <a:ln w="13970">
             <a:solidFill>
-              <a:srgbClr val="D7D7E6"/>
+              <a:srgbClr val="D8D2EA"/>
             </a:solidFill>
             <a:prstDash val="solid"/>
           </a:ln>
@@ -7639,8 +7728,8 @@
         </p:nvSpPr>
         <p:spPr>
           <a:xfrm>
-            <a:off x="2057400" y="3218688"/>
-            <a:ext cx="7955280" cy="347472"/>
+            <a:off x="2029968" y="3099816"/>
+            <a:ext cx="8010144" cy="365760"/>
           </a:xfrm>
           <a:prstGeom prst="rect">
             <a:avLst/>
@@ -7680,20 +7769,20 @@
         </p:nvSpPr>
         <p:spPr>
           <a:xfrm>
-            <a:off x="1920240" y="3886200"/>
-            <a:ext cx="8229600" cy="566928"/>
+            <a:off x="1920240" y="3758184"/>
+            <a:ext cx="8229600" cy="548640"/>
           </a:xfrm>
           <a:prstGeom prst="roundRect">
             <a:avLst>
-              <a:gd name="adj" fmla="val 19355"/>
+              <a:gd name="adj" fmla="val 20000"/>
             </a:avLst>
           </a:prstGeom>
           <a:solidFill>
             <a:srgbClr val="FFFFFF"/>
           </a:solidFill>
-          <a:ln w="15240">
+          <a:ln w="13970">
             <a:solidFill>
-              <a:srgbClr val="D7D7E6"/>
+              <a:srgbClr val="D8D2EA"/>
             </a:solidFill>
             <a:prstDash val="solid"/>
           </a:ln>
@@ -7707,8 +7796,8 @@
         </p:nvSpPr>
         <p:spPr>
           <a:xfrm>
-            <a:off x="2057400" y="3995928"/>
-            <a:ext cx="7955280" cy="347472"/>
+            <a:off x="2029968" y="3849624"/>
+            <a:ext cx="8010144" cy="365760"/>
           </a:xfrm>
           <a:prstGeom prst="rect">
             <a:avLst/>
@@ -7748,8 +7837,8 @@
         </p:nvSpPr>
         <p:spPr>
           <a:xfrm>
-            <a:off x="1920240" y="5166360"/>
-            <a:ext cx="8229600" cy="347472"/>
+            <a:off x="2011680" y="5212080"/>
+            <a:ext cx="8229600" cy="320040"/>
           </a:xfrm>
           <a:prstGeom prst="rect">
             <a:avLst/>
@@ -7769,7 +7858,7 @@
             <a:r>
               <a:rPr lang="en-US" sz="2000" dirty="0">
                 <a:solidFill>
-                  <a:srgbClr val="808080"/>
+                  <a:srgbClr val="686868"/>
                 </a:solidFill>
                 <a:latin typeface="Alibaba PuHuiTi 3.0 55 Regular" pitchFamily="34" charset="0"/>
                 <a:ea typeface="Alibaba PuHuiTi 3.0 55 Regular" pitchFamily="34" charset="-122"/>
@@ -7822,7 +7911,7 @@
         <p:spPr>
           <a:xfrm>
             <a:off x="0" y="0"/>
-            <a:ext cx="12191695" cy="101498"/>
+            <a:ext cx="12191695" cy="100584"/>
           </a:xfrm>
           <a:prstGeom prst="rect">
             <a:avLst/>
@@ -7846,8 +7935,8 @@
         </p:nvSpPr>
         <p:spPr>
           <a:xfrm>
-            <a:off x="0" y="6756502"/>
-            <a:ext cx="12191695" cy="101498"/>
+            <a:off x="0" y="6757416"/>
+            <a:ext cx="12191695" cy="100584"/>
           </a:xfrm>
           <a:prstGeom prst="rect">
             <a:avLst/>
@@ -7871,8 +7960,8 @@
         </p:nvSpPr>
         <p:spPr>
           <a:xfrm>
-            <a:off x="608076" y="502920"/>
-            <a:ext cx="10972800" cy="685800"/>
+            <a:off x="594360" y="438912"/>
+            <a:ext cx="11064240" cy="621792"/>
           </a:xfrm>
           <a:prstGeom prst="rect">
             <a:avLst/>
@@ -7890,7 +7979,7 @@
               <a:buNone/>
             </a:pPr>
             <a:r>
-              <a:rPr lang="en-US" sz="3400" b="1" dirty="0">
+              <a:rPr lang="en-US" sz="3000" b="1" dirty="0">
                 <a:solidFill>
                   <a:srgbClr val="262626"/>
                 </a:solidFill>
@@ -7900,7 +7989,7 @@
               </a:rPr>
               <a:t>Q0 这四种说法分别在描述图像的哪一层？</a:t>
             </a:r>
-            <a:endParaRPr lang="en-US" sz="3400" dirty="0"/>
+            <a:endParaRPr lang="en-US" sz="3000" dirty="0"/>
           </a:p>
         </p:txBody>
       </p:sp>
@@ -7912,20 +8001,20 @@
         </p:nvSpPr>
         <p:spPr>
           <a:xfrm>
-            <a:off x="822960" y="1965960"/>
-            <a:ext cx="2377440" cy="960120"/>
+            <a:off x="822960" y="1874520"/>
+            <a:ext cx="2331720" cy="914400"/>
           </a:xfrm>
           <a:prstGeom prst="roundRect">
             <a:avLst>
-              <a:gd name="adj" fmla="val 11429"/>
+              <a:gd name="adj" fmla="val 12000"/>
             </a:avLst>
           </a:prstGeom>
           <a:solidFill>
             <a:srgbClr val="FFFFFF"/>
           </a:solidFill>
-          <a:ln w="15240">
+          <a:ln w="13970">
             <a:solidFill>
-              <a:srgbClr val="BFC8D9"/>
+              <a:srgbClr val="C7CEDD"/>
             </a:solidFill>
             <a:prstDash val="solid"/>
           </a:ln>
@@ -7939,8 +8028,8 @@
         </p:nvSpPr>
         <p:spPr>
           <a:xfrm>
-            <a:off x="960120" y="2075688"/>
-            <a:ext cx="2103120" cy="740664"/>
+            <a:off x="932688" y="1965960"/>
+            <a:ext cx="2112264" cy="731520"/>
           </a:xfrm>
           <a:prstGeom prst="rect">
             <a:avLst/>
@@ -7980,20 +8069,20 @@
         </p:nvSpPr>
         <p:spPr>
           <a:xfrm>
-            <a:off x="3383280" y="3154680"/>
-            <a:ext cx="2377440" cy="960120"/>
+            <a:off x="3429000" y="3063240"/>
+            <a:ext cx="2331720" cy="914400"/>
           </a:xfrm>
           <a:prstGeom prst="roundRect">
             <a:avLst>
-              <a:gd name="adj" fmla="val 11429"/>
+              <a:gd name="adj" fmla="val 12000"/>
             </a:avLst>
           </a:prstGeom>
           <a:solidFill>
-            <a:srgbClr val="F8F8FC"/>
-          </a:solidFill>
-          <a:ln w="15240">
+            <a:srgbClr val="F8F7FD"/>
+          </a:solidFill>
+          <a:ln w="13970">
             <a:solidFill>
-              <a:srgbClr val="D6D0F3"/>
+              <a:srgbClr val="C9BFF0"/>
             </a:solidFill>
             <a:prstDash val="solid"/>
           </a:ln>
@@ -8007,8 +8096,8 @@
         </p:nvSpPr>
         <p:spPr>
           <a:xfrm>
-            <a:off x="3520440" y="3264408"/>
-            <a:ext cx="2103120" cy="740664"/>
+            <a:off x="3538728" y="3154680"/>
+            <a:ext cx="2112264" cy="731520"/>
           </a:xfrm>
           <a:prstGeom prst="rect">
             <a:avLst/>
@@ -8048,20 +8137,20 @@
         </p:nvSpPr>
         <p:spPr>
           <a:xfrm>
-            <a:off x="5943600" y="1965960"/>
-            <a:ext cx="2377440" cy="960120"/>
+            <a:off x="5989320" y="1874520"/>
+            <a:ext cx="2331720" cy="914400"/>
           </a:xfrm>
           <a:prstGeom prst="roundRect">
             <a:avLst>
-              <a:gd name="adj" fmla="val 11429"/>
+              <a:gd name="adj" fmla="val 12000"/>
             </a:avLst>
           </a:prstGeom>
           <a:solidFill>
             <a:srgbClr val="FFFFFF"/>
           </a:solidFill>
-          <a:ln w="15240">
+          <a:ln w="13970">
             <a:solidFill>
-              <a:srgbClr val="BFC8D9"/>
+              <a:srgbClr val="C7CEDD"/>
             </a:solidFill>
             <a:prstDash val="solid"/>
           </a:ln>
@@ -8075,8 +8164,8 @@
         </p:nvSpPr>
         <p:spPr>
           <a:xfrm>
-            <a:off x="6080760" y="2075688"/>
-            <a:ext cx="2103120" cy="740664"/>
+            <a:off x="6099048" y="1965960"/>
+            <a:ext cx="2112264" cy="731520"/>
           </a:xfrm>
           <a:prstGeom prst="rect">
             <a:avLst/>
@@ -8116,20 +8205,20 @@
         </p:nvSpPr>
         <p:spPr>
           <a:xfrm>
-            <a:off x="8503920" y="3154680"/>
-            <a:ext cx="2377440" cy="960120"/>
+            <a:off x="8549640" y="3063240"/>
+            <a:ext cx="2331720" cy="914400"/>
           </a:xfrm>
           <a:prstGeom prst="roundRect">
             <a:avLst>
-              <a:gd name="adj" fmla="val 11429"/>
+              <a:gd name="adj" fmla="val 12000"/>
             </a:avLst>
           </a:prstGeom>
           <a:solidFill>
-            <a:srgbClr val="F8F8FC"/>
-          </a:solidFill>
-          <a:ln w="15240">
+            <a:srgbClr val="F8F7FD"/>
+          </a:solidFill>
+          <a:ln w="13970">
             <a:solidFill>
-              <a:srgbClr val="D6D0F3"/>
+              <a:srgbClr val="C9BFF0"/>
             </a:solidFill>
             <a:prstDash val="solid"/>
           </a:ln>
@@ -8143,8 +8232,8 @@
         </p:nvSpPr>
         <p:spPr>
           <a:xfrm>
-            <a:off x="8641080" y="3264408"/>
-            <a:ext cx="2103120" cy="740664"/>
+            <a:off x="8659368" y="3154680"/>
+            <a:ext cx="2112264" cy="731520"/>
           </a:xfrm>
           <a:prstGeom prst="rect">
             <a:avLst/>
@@ -8178,30 +8267,59 @@
       </p:sp>
       <p:sp>
         <p:nvSpPr>
-          <p:cNvPr id="14" name="Text 11"/>
-          <p:cNvSpPr/>
-          <p:nvPr/>
-        </p:nvSpPr>
-        <p:spPr>
-          <a:xfrm>
-            <a:off x="1097280" y="5120640"/>
-            <a:ext cx="9966960" cy="411480"/>
-          </a:xfrm>
-          <a:prstGeom prst="rect">
-            <a:avLst/>
-          </a:prstGeom>
-          <a:noFill/>
-          <a:ln/>
-        </p:spPr>
-        <p:txBody>
-          <a:bodyPr wrap="square" rtlCol="0" anchor="ctr"/>
+          <p:cNvPr id="14" name="Shape 11"/>
+          <p:cNvSpPr/>
+          <p:nvPr/>
+        </p:nvSpPr>
+        <p:spPr>
+          <a:xfrm>
+            <a:off x="2377440" y="5166360"/>
+            <a:ext cx="7498080" cy="502920"/>
+          </a:xfrm>
+          <a:prstGeom prst="roundRect">
+            <a:avLst>
+              <a:gd name="adj" fmla="val 32727"/>
+            </a:avLst>
+          </a:prstGeom>
+          <a:solidFill>
+            <a:srgbClr val="F6F3FF"/>
+          </a:solidFill>
+          <a:ln w="13970">
+            <a:solidFill>
+              <a:srgbClr val="8C64E1"/>
+            </a:solidFill>
+            <a:prstDash val="solid"/>
+          </a:ln>
+        </p:spPr>
+      </p:sp>
+      <p:sp>
+        <p:nvSpPr>
+          <p:cNvPr id="15" name="Text 12"/>
+          <p:cNvSpPr/>
+          <p:nvPr/>
+        </p:nvSpPr>
+        <p:spPr>
+          <a:xfrm>
+            <a:off x="2468880" y="5193792"/>
+            <a:ext cx="7315200" cy="448056"/>
+          </a:xfrm>
+          <a:prstGeom prst="rect">
+            <a:avLst/>
+          </a:prstGeom>
+          <a:noFill/>
+          <a:ln/>
+        </p:spPr>
+        <p:txBody>
+          <a:bodyPr wrap="square" rtlCol="0" anchor="ctr">
+            <a:normAutofit/>
+          </a:bodyPr>
           <a:lstStyle/>
           <a:p>
             <a:pPr algn="ctr" indent="0" marL="0">
               <a:buNone/>
             </a:pPr>
             <a:r>
-              <a:rPr lang="en-US" sz="2200" dirty="0">
+              <a:rPr lang="en-US" sz="2100" b="1" dirty="0">
                 <a:solidFill>
                   <a:srgbClr val="8C64E1"/>
                 </a:solidFill>
@@ -8209,9 +8327,9 @@
                 <a:ea typeface="Alibaba PuHuiTi 3.0 85 Bold" pitchFamily="34" charset="-122"/>
                 <a:cs typeface="Alibaba PuHuiTi 3.0 85 Bold" pitchFamily="34" charset="-120"/>
               </a:rPr>
-              <a:t>先排序，不公布答案：学完后再修改。</a:t>
-            </a:r>
-            <a:endParaRPr lang="en-US" sz="2200" dirty="0"/>
+              <a:t>先排序，不公布答案；Q12 再回来修改</a:t>
+            </a:r>
+            <a:endParaRPr lang="en-US" sz="2100" dirty="0"/>
           </a:p>
         </p:txBody>
       </p:sp>
@@ -8256,7 +8374,7 @@
         <p:spPr>
           <a:xfrm>
             <a:off x="0" y="0"/>
-            <a:ext cx="12191695" cy="101498"/>
+            <a:ext cx="12191695" cy="100584"/>
           </a:xfrm>
           <a:prstGeom prst="rect">
             <a:avLst/>
@@ -8280,8 +8398,8 @@
         </p:nvSpPr>
         <p:spPr>
           <a:xfrm>
-            <a:off x="0" y="6756502"/>
-            <a:ext cx="12191695" cy="101498"/>
+            <a:off x="0" y="6757416"/>
+            <a:ext cx="12191695" cy="100584"/>
           </a:xfrm>
           <a:prstGeom prst="rect">
             <a:avLst/>
@@ -8305,8 +8423,8 @@
         </p:nvSpPr>
         <p:spPr>
           <a:xfrm>
-            <a:off x="608076" y="502920"/>
-            <a:ext cx="10972800" cy="685800"/>
+            <a:off x="594360" y="438912"/>
+            <a:ext cx="11064240" cy="621792"/>
           </a:xfrm>
           <a:prstGeom prst="rect">
             <a:avLst/>
@@ -8324,7 +8442,7 @@
               <a:buNone/>
             </a:pPr>
             <a:r>
-              <a:rPr lang="en-US" sz="3400" b="1" dirty="0">
+              <a:rPr lang="en-US" sz="3000" b="1" dirty="0">
                 <a:solidFill>
                   <a:srgbClr val="262626"/>
                 </a:solidFill>
@@ -8332,155 +8450,32 @@
                 <a:ea typeface="Alibaba PuHuiTi 3.0 115 Black" pitchFamily="34" charset="-122"/>
                 <a:cs typeface="Alibaba PuHuiTi 3.0 115 Black" pitchFamily="34" charset="-120"/>
               </a:rPr>
-              <a:t>Q8 计算：先算像素，再算每像素 bytes</a:t>
-            </a:r>
-            <a:endParaRPr lang="en-US" sz="3400" dirty="0"/>
-          </a:p>
-        </p:txBody>
-      </p:sp>
-      <p:sp>
-        <p:nvSpPr>
-          <p:cNvPr id="6" name="Text 3"/>
-          <p:cNvSpPr/>
-          <p:nvPr/>
-        </p:nvSpPr>
-        <p:spPr>
-          <a:xfrm>
-            <a:off x="1005840" y="1417320"/>
-            <a:ext cx="10058400" cy="411480"/>
-          </a:xfrm>
-          <a:prstGeom prst="rect">
-            <a:avLst/>
-          </a:prstGeom>
-          <a:noFill/>
-          <a:ln/>
-        </p:spPr>
-        <p:txBody>
-          <a:bodyPr wrap="square" rtlCol="0" anchor="ctr">
-            <a:normAutofit/>
-          </a:bodyPr>
-          <a:lstStyle/>
-          <a:p>
-            <a:pPr algn="ctr" indent="0" marL="0">
-              <a:buNone/>
-            </a:pPr>
-            <a:r>
-              <a:rPr lang="en-US" sz="2400" b="1" dirty="0">
-                <a:solidFill>
-                  <a:srgbClr val="000000"/>
-                </a:solidFill>
-                <a:latin typeface="Alibaba PuHuiTi 3.0 55 Regular" pitchFamily="34" charset="0"/>
-                <a:ea typeface="Alibaba PuHuiTi 3.0 55 Regular" pitchFamily="34" charset="-122"/>
-                <a:cs typeface="Alibaba PuHuiTi 3.0 55 Regular" pitchFamily="34" charset="-120"/>
-              </a:rPr>
-              <a:t>1920 × 1080 = 2,073,600 pixels</a:t>
-            </a:r>
-            <a:endParaRPr lang="en-US" sz="2400" dirty="0"/>
-          </a:p>
-        </p:txBody>
-      </p:sp>
-      <p:sp>
-        <p:nvSpPr>
-          <p:cNvPr id="7" name="Text 4"/>
-          <p:cNvSpPr/>
-          <p:nvPr/>
-        </p:nvSpPr>
-        <p:spPr>
-          <a:xfrm>
-            <a:off x="1005840" y="2148840"/>
-            <a:ext cx="10058400" cy="411480"/>
-          </a:xfrm>
-          <a:prstGeom prst="rect">
-            <a:avLst/>
-          </a:prstGeom>
-          <a:noFill/>
-          <a:ln/>
-        </p:spPr>
-        <p:txBody>
-          <a:bodyPr wrap="square" rtlCol="0" anchor="ctr">
-            <a:normAutofit/>
-          </a:bodyPr>
-          <a:lstStyle/>
-          <a:p>
-            <a:pPr algn="ctr" indent="0" marL="0">
-              <a:buNone/>
-            </a:pPr>
-            <a:r>
-              <a:rPr lang="en-US" sz="2400" b="1" dirty="0">
-                <a:solidFill>
-                  <a:srgbClr val="000000"/>
-                </a:solidFill>
-                <a:latin typeface="Alibaba PuHuiTi 3.0 55 Regular" pitchFamily="34" charset="0"/>
-                <a:ea typeface="Alibaba PuHuiTi 3.0 55 Regular" pitchFamily="34" charset="-122"/>
-                <a:cs typeface="Alibaba PuHuiTi 3.0 55 Regular" pitchFamily="34" charset="-120"/>
-              </a:rPr>
-              <a:t>24 bits / pixel = 3 bytes / pixel</a:t>
-            </a:r>
-            <a:endParaRPr lang="en-US" sz="2400" dirty="0"/>
-          </a:p>
-        </p:txBody>
-      </p:sp>
-      <p:sp>
-        <p:nvSpPr>
-          <p:cNvPr id="8" name="Text 5"/>
-          <p:cNvSpPr/>
-          <p:nvPr/>
-        </p:nvSpPr>
-        <p:spPr>
-          <a:xfrm>
-            <a:off x="1005840" y="2880360"/>
-            <a:ext cx="10058400" cy="502920"/>
-          </a:xfrm>
-          <a:prstGeom prst="rect">
-            <a:avLst/>
-          </a:prstGeom>
-          <a:noFill/>
-          <a:ln/>
-        </p:spPr>
-        <p:txBody>
-          <a:bodyPr wrap="square" rtlCol="0" anchor="ctr">
-            <a:normAutofit/>
-          </a:bodyPr>
-          <a:lstStyle/>
-          <a:p>
-            <a:pPr algn="ctr" indent="0" marL="0">
-              <a:buNone/>
-            </a:pPr>
-            <a:r>
-              <a:rPr lang="en-US" sz="2600" b="1" dirty="0">
-                <a:solidFill>
-                  <a:srgbClr val="8C64E1"/>
-                </a:solidFill>
-                <a:latin typeface="Alibaba PuHuiTi 3.0 55 Regular" pitchFamily="34" charset="0"/>
-                <a:ea typeface="Alibaba PuHuiTi 3.0 55 Regular" pitchFamily="34" charset="-122"/>
-                <a:cs typeface="Alibaba PuHuiTi 3.0 55 Regular" pitchFamily="34" charset="-120"/>
-              </a:rPr>
-              <a:t>2,073,600 × 3 = 6,220,800 bytes ≈ 6.22 MB</a:t>
-            </a:r>
-            <a:endParaRPr lang="en-US" sz="2600" dirty="0"/>
-          </a:p>
-        </p:txBody>
-      </p:sp>
-      <p:sp>
-        <p:nvSpPr>
-          <p:cNvPr id="9" name="Shape 6"/>
-          <p:cNvSpPr/>
-          <p:nvPr/>
-        </p:nvSpPr>
-        <p:spPr>
-          <a:xfrm>
-            <a:off x="3657600" y="4160520"/>
-            <a:ext cx="4846320" cy="777240"/>
+              <a:t>Q8 1920×1080、24-bit RGB，不压缩需要多大？</a:t>
+            </a:r>
+            <a:endParaRPr lang="en-US" sz="3000" dirty="0"/>
+          </a:p>
+        </p:txBody>
+      </p:sp>
+      <p:sp>
+        <p:nvSpPr>
+          <p:cNvPr id="6" name="Shape 3"/>
+          <p:cNvSpPr/>
+          <p:nvPr/>
+        </p:nvSpPr>
+        <p:spPr>
+          <a:xfrm>
+            <a:off x="3977640" y="1170432"/>
+            <a:ext cx="4297680" cy="411480"/>
           </a:xfrm>
           <a:prstGeom prst="roundRect">
             <a:avLst>
-              <a:gd name="adj" fmla="val 14118"/>
+              <a:gd name="adj" fmla="val 40000"/>
             </a:avLst>
           </a:prstGeom>
           <a:solidFill>
-            <a:srgbClr val="F7F4FF"/>
-          </a:solidFill>
-          <a:ln w="15240">
+            <a:srgbClr val="F6F3FF"/>
+          </a:solidFill>
+          <a:ln w="13970">
             <a:solidFill>
               <a:srgbClr val="8C64E1"/>
             </a:solidFill>
@@ -8490,14 +8485,14 @@
       </p:sp>
       <p:sp>
         <p:nvSpPr>
-          <p:cNvPr id="10" name="Text 7"/>
-          <p:cNvSpPr/>
-          <p:nvPr/>
-        </p:nvSpPr>
-        <p:spPr>
-          <a:xfrm>
-            <a:off x="3794760" y="4270248"/>
-            <a:ext cx="4572000" cy="557784"/>
+          <p:cNvPr id="7" name="Text 4"/>
+          <p:cNvSpPr/>
+          <p:nvPr/>
+        </p:nvSpPr>
+        <p:spPr>
+          <a:xfrm>
+            <a:off x="4069080" y="1197864"/>
+            <a:ext cx="4114800" cy="356616"/>
           </a:xfrm>
           <a:prstGeom prst="rect">
             <a:avLst/>
@@ -8515,7 +8510,7 @@
               <a:buNone/>
             </a:pPr>
             <a:r>
-              <a:rPr lang="en-US" sz="3000" b="1" dirty="0">
+              <a:rPr lang="en-US" sz="1800" b="1" dirty="0">
                 <a:solidFill>
                   <a:srgbClr val="8C64E1"/>
                 </a:solidFill>
@@ -8523,50 +8518,200 @@
                 <a:ea typeface="Alibaba PuHuiTi 3.0 85 Bold" pitchFamily="34" charset="-122"/>
                 <a:cs typeface="Alibaba PuHuiTi 3.0 85 Bold" pitchFamily="34" charset="-120"/>
               </a:rPr>
+              <a:t>证据：三步计算</a:t>
+            </a:r>
+            <a:endParaRPr lang="en-US" sz="1800" dirty="0"/>
+          </a:p>
+        </p:txBody>
+      </p:sp>
+      <p:sp>
+        <p:nvSpPr>
+          <p:cNvPr id="8" name="Text 5"/>
+          <p:cNvSpPr/>
+          <p:nvPr/>
+        </p:nvSpPr>
+        <p:spPr>
+          <a:xfrm>
+            <a:off x="1188720" y="1828800"/>
+            <a:ext cx="9784080" cy="384048"/>
+          </a:xfrm>
+          <a:prstGeom prst="rect">
+            <a:avLst/>
+          </a:prstGeom>
+          <a:noFill/>
+          <a:ln/>
+        </p:spPr>
+        <p:txBody>
+          <a:bodyPr wrap="square" rtlCol="0" anchor="ctr">
+            <a:normAutofit/>
+          </a:bodyPr>
+          <a:lstStyle/>
+          <a:p>
+            <a:pPr algn="ctr" indent="0" marL="0">
+              <a:buNone/>
+            </a:pPr>
+            <a:r>
+              <a:rPr lang="en-US" sz="2400" b="1" dirty="0">
+                <a:solidFill>
+                  <a:srgbClr val="262626"/>
+                </a:solidFill>
+                <a:latin typeface="Alibaba PuHuiTi 3.0 85 Bold" pitchFamily="34" charset="0"/>
+                <a:ea typeface="Alibaba PuHuiTi 3.0 85 Bold" pitchFamily="34" charset="-122"/>
+                <a:cs typeface="Alibaba PuHuiTi 3.0 85 Bold" pitchFamily="34" charset="-120"/>
+              </a:rPr>
+              <a:t>1920 × 1080 = 2,073,600 pixels</a:t>
+            </a:r>
+            <a:endParaRPr lang="en-US" sz="2400" dirty="0"/>
+          </a:p>
+        </p:txBody>
+      </p:sp>
+      <p:sp>
+        <p:nvSpPr>
+          <p:cNvPr id="9" name="Text 6"/>
+          <p:cNvSpPr/>
+          <p:nvPr/>
+        </p:nvSpPr>
+        <p:spPr>
+          <a:xfrm>
+            <a:off x="1188720" y="2560320"/>
+            <a:ext cx="9784080" cy="384048"/>
+          </a:xfrm>
+          <a:prstGeom prst="rect">
+            <a:avLst/>
+          </a:prstGeom>
+          <a:noFill/>
+          <a:ln/>
+        </p:spPr>
+        <p:txBody>
+          <a:bodyPr wrap="square" rtlCol="0" anchor="ctr">
+            <a:normAutofit/>
+          </a:bodyPr>
+          <a:lstStyle/>
+          <a:p>
+            <a:pPr algn="ctr" indent="0" marL="0">
+              <a:buNone/>
+            </a:pPr>
+            <a:r>
+              <a:rPr lang="en-US" sz="2400" b="1" dirty="0">
+                <a:solidFill>
+                  <a:srgbClr val="262626"/>
+                </a:solidFill>
+                <a:latin typeface="Alibaba PuHuiTi 3.0 85 Bold" pitchFamily="34" charset="0"/>
+                <a:ea typeface="Alibaba PuHuiTi 3.0 85 Bold" pitchFamily="34" charset="-122"/>
+                <a:cs typeface="Alibaba PuHuiTi 3.0 85 Bold" pitchFamily="34" charset="-120"/>
+              </a:rPr>
+              <a:t>24 bits / pixel = 3 bytes / pixel</a:t>
+            </a:r>
+            <a:endParaRPr lang="en-US" sz="2400" dirty="0"/>
+          </a:p>
+        </p:txBody>
+      </p:sp>
+      <p:sp>
+        <p:nvSpPr>
+          <p:cNvPr id="10" name="Text 7"/>
+          <p:cNvSpPr/>
+          <p:nvPr/>
+        </p:nvSpPr>
+        <p:spPr>
+          <a:xfrm>
+            <a:off x="914400" y="3337560"/>
+            <a:ext cx="10332720" cy="475488"/>
+          </a:xfrm>
+          <a:prstGeom prst="rect">
+            <a:avLst/>
+          </a:prstGeom>
+          <a:noFill/>
+          <a:ln/>
+        </p:spPr>
+        <p:txBody>
+          <a:bodyPr wrap="square" rtlCol="0" anchor="ctr">
+            <a:normAutofit/>
+          </a:bodyPr>
+          <a:lstStyle/>
+          <a:p>
+            <a:pPr algn="ctr" indent="0" marL="0">
+              <a:buNone/>
+            </a:pPr>
+            <a:r>
+              <a:rPr lang="en-US" sz="2600" b="1" dirty="0">
+                <a:solidFill>
+                  <a:srgbClr val="8C64E1"/>
+                </a:solidFill>
+                <a:latin typeface="Alibaba PuHuiTi 3.0 85 Bold" pitchFamily="34" charset="0"/>
+                <a:ea typeface="Alibaba PuHuiTi 3.0 85 Bold" pitchFamily="34" charset="-122"/>
+                <a:cs typeface="Alibaba PuHuiTi 3.0 85 Bold" pitchFamily="34" charset="-120"/>
+              </a:rPr>
+              <a:t>2,073,600 × 3 = 6,220,800 bytes ≈ 6.22 MB</a:t>
+            </a:r>
+            <a:endParaRPr lang="en-US" sz="2600" dirty="0"/>
+          </a:p>
+        </p:txBody>
+      </p:sp>
+      <p:sp>
+        <p:nvSpPr>
+          <p:cNvPr id="11" name="Shape 8"/>
+          <p:cNvSpPr/>
+          <p:nvPr/>
+        </p:nvSpPr>
+        <p:spPr>
+          <a:xfrm>
+            <a:off x="3749040" y="4526280"/>
+            <a:ext cx="4663440" cy="713232"/>
+          </a:xfrm>
+          <a:prstGeom prst="roundRect">
+            <a:avLst>
+              <a:gd name="adj" fmla="val 15385"/>
+            </a:avLst>
+          </a:prstGeom>
+          <a:solidFill>
+            <a:srgbClr val="F6F3FF"/>
+          </a:solidFill>
+          <a:ln w="13970">
+            <a:solidFill>
+              <a:srgbClr val="8C64E1"/>
+            </a:solidFill>
+            <a:prstDash val="solid"/>
+          </a:ln>
+        </p:spPr>
+      </p:sp>
+      <p:sp>
+        <p:nvSpPr>
+          <p:cNvPr id="12" name="Text 9"/>
+          <p:cNvSpPr/>
+          <p:nvPr/>
+        </p:nvSpPr>
+        <p:spPr>
+          <a:xfrm>
+            <a:off x="3858768" y="4617720"/>
+            <a:ext cx="4443984" cy="530352"/>
+          </a:xfrm>
+          <a:prstGeom prst="rect">
+            <a:avLst/>
+          </a:prstGeom>
+          <a:noFill/>
+          <a:ln/>
+        </p:spPr>
+        <p:txBody>
+          <a:bodyPr wrap="square" rtlCol="0" anchor="ctr">
+            <a:normAutofit/>
+          </a:bodyPr>
+          <a:lstStyle/>
+          <a:p>
+            <a:pPr algn="ctr" indent="0" marL="0">
+              <a:buNone/>
+            </a:pPr>
+            <a:r>
+              <a:rPr lang="en-US" sz="2900" b="1" dirty="0">
+                <a:solidFill>
+                  <a:srgbClr val="8C64E1"/>
+                </a:solidFill>
+                <a:latin typeface="Alibaba PuHuiTi 3.0 85 Bold" pitchFamily="34" charset="0"/>
+                <a:ea typeface="Alibaba PuHuiTi 3.0 85 Bold" pitchFamily="34" charset="-122"/>
+                <a:cs typeface="Alibaba PuHuiTi 3.0 85 Bold" pitchFamily="34" charset="-120"/>
+              </a:rPr>
               <a:t>B. 约 6 MB</a:t>
             </a:r>
-            <a:endParaRPr lang="en-US" sz="3000" dirty="0"/>
-          </a:p>
-        </p:txBody>
-      </p:sp>
-      <p:sp>
-        <p:nvSpPr>
-          <p:cNvPr id="11" name="Text 8"/>
-          <p:cNvSpPr/>
-          <p:nvPr/>
-        </p:nvSpPr>
-        <p:spPr>
-          <a:xfrm>
-            <a:off x="1463040" y="5577840"/>
-            <a:ext cx="9326880" cy="320040"/>
-          </a:xfrm>
-          <a:prstGeom prst="rect">
-            <a:avLst/>
-          </a:prstGeom>
-          <a:noFill/>
-          <a:ln/>
-        </p:spPr>
-        <p:txBody>
-          <a:bodyPr wrap="square" rtlCol="0" anchor="ctr">
-            <a:normAutofit/>
-          </a:bodyPr>
-          <a:lstStyle/>
-          <a:p>
-            <a:pPr algn="ctr" indent="0" marL="0">
-              <a:buNone/>
-            </a:pPr>
-            <a:r>
-              <a:rPr lang="en-US" sz="1600" dirty="0">
-                <a:solidFill>
-                  <a:srgbClr val="808080"/>
-                </a:solidFill>
-                <a:latin typeface="Alibaba PuHuiTi 3.0 55 Regular" pitchFamily="34" charset="0"/>
-                <a:ea typeface="Alibaba PuHuiTi 3.0 55 Regular" pitchFamily="34" charset="-122"/>
-                <a:cs typeface="Alibaba PuHuiTi 3.0 55 Regular" pitchFamily="34" charset="-120"/>
-              </a:rPr>
-              <a:t>计算的是 pixel value data，不自动等于具体文件大小。</a:t>
-            </a:r>
-            <a:endParaRPr lang="en-US" sz="1600" dirty="0"/>
+            <a:endParaRPr lang="en-US" sz="2900" dirty="0"/>
           </a:p>
         </p:txBody>
       </p:sp>
@@ -8611,7 +8756,7 @@
         <p:spPr>
           <a:xfrm>
             <a:off x="0" y="0"/>
-            <a:ext cx="12191695" cy="101498"/>
+            <a:ext cx="12191695" cy="100584"/>
           </a:xfrm>
           <a:prstGeom prst="rect">
             <a:avLst/>
@@ -8635,8 +8780,8 @@
         </p:nvSpPr>
         <p:spPr>
           <a:xfrm>
-            <a:off x="0" y="6756502"/>
-            <a:ext cx="12191695" cy="101498"/>
+            <a:off x="0" y="6757416"/>
+            <a:ext cx="12191695" cy="100584"/>
           </a:xfrm>
           <a:prstGeom prst="rect">
             <a:avLst/>
@@ -8660,8 +8805,8 @@
         </p:nvSpPr>
         <p:spPr>
           <a:xfrm>
-            <a:off x="608076" y="502920"/>
-            <a:ext cx="10972800" cy="685800"/>
+            <a:off x="594360" y="438912"/>
+            <a:ext cx="11064240" cy="621792"/>
           </a:xfrm>
           <a:prstGeom prst="rect">
             <a:avLst/>
@@ -8679,7 +8824,7 @@
               <a:buNone/>
             </a:pPr>
             <a:r>
-              <a:rPr lang="en-US" sz="3400" b="1" dirty="0">
+              <a:rPr lang="en-US" sz="3000" b="1" dirty="0">
                 <a:solidFill>
                   <a:srgbClr val="262626"/>
                 </a:solidFill>
@@ -8689,7 +8834,7 @@
               </a:rPr>
               <a:t>Q9 宽和高都变成 2 倍，数据量变成几倍？</a:t>
             </a:r>
-            <a:endParaRPr lang="en-US" sz="3400" dirty="0"/>
+            <a:endParaRPr lang="en-US" sz="3000" dirty="0"/>
           </a:p>
         </p:txBody>
       </p:sp>
@@ -8701,8 +8846,8 @@
         </p:nvSpPr>
         <p:spPr>
           <a:xfrm>
-            <a:off x="2011680" y="1645920"/>
-            <a:ext cx="3840480" cy="2286000"/>
+            <a:off x="2057400" y="1783080"/>
+            <a:ext cx="3840480" cy="2148840"/>
           </a:xfrm>
           <a:prstGeom prst="rect">
             <a:avLst/>
@@ -8722,11 +8867,11 @@
             <a:r>
               <a:rPr lang="en-US" sz="2600" b="1" dirty="0">
                 <a:solidFill>
-                  <a:srgbClr val="000000"/>
-                </a:solidFill>
-                <a:latin typeface="Alibaba PuHuiTi 3.0 55 Regular" pitchFamily="34" charset="0"/>
-                <a:ea typeface="Alibaba PuHuiTi 3.0 55 Regular" pitchFamily="34" charset="-122"/>
-                <a:cs typeface="Alibaba PuHuiTi 3.0 55 Regular" pitchFamily="34" charset="-120"/>
+                  <a:srgbClr val="262626"/>
+                </a:solidFill>
+                <a:latin typeface="Alibaba PuHuiTi 3.0 85 Bold" pitchFamily="34" charset="0"/>
+                <a:ea typeface="Alibaba PuHuiTi 3.0 85 Bold" pitchFamily="34" charset="-122"/>
+                <a:cs typeface="Alibaba PuHuiTi 3.0 85 Bold" pitchFamily="34" charset="-120"/>
               </a:rPr>
               <a:t>原图：800 × 600</a:t>
             </a:r>
@@ -8739,11 +8884,11 @@
             <a:r>
               <a:rPr lang="en-US" sz="2600" b="1" dirty="0">
                 <a:solidFill>
-                  <a:srgbClr val="000000"/>
-                </a:solidFill>
-                <a:latin typeface="Alibaba PuHuiTi 3.0 55 Regular" pitchFamily="34" charset="0"/>
-                <a:ea typeface="Alibaba PuHuiTi 3.0 55 Regular" pitchFamily="34" charset="-122"/>
-                <a:cs typeface="Alibaba PuHuiTi 3.0 55 Regular" pitchFamily="34" charset="-120"/>
+                  <a:srgbClr val="262626"/>
+                </a:solidFill>
+                <a:latin typeface="Alibaba PuHuiTi 3.0 85 Bold" pitchFamily="34" charset="0"/>
+                <a:ea typeface="Alibaba PuHuiTi 3.0 85 Bold" pitchFamily="34" charset="-122"/>
+                <a:cs typeface="Alibaba PuHuiTi 3.0 85 Bold" pitchFamily="34" charset="-120"/>
               </a:rPr>
               <a:t>新图：1600 × 1200</a:t>
             </a:r>
@@ -8762,11 +8907,11 @@
             <a:r>
               <a:rPr lang="en-US" sz="2600" b="1" dirty="0">
                 <a:solidFill>
-                  <a:srgbClr val="000000"/>
-                </a:solidFill>
-                <a:latin typeface="Alibaba PuHuiTi 3.0 55 Regular" pitchFamily="34" charset="0"/>
-                <a:ea typeface="Alibaba PuHuiTi 3.0 55 Regular" pitchFamily="34" charset="-122"/>
-                <a:cs typeface="Alibaba PuHuiTi 3.0 55 Regular" pitchFamily="34" charset="-120"/>
+                  <a:srgbClr val="262626"/>
+                </a:solidFill>
+                <a:latin typeface="Alibaba PuHuiTi 3.0 85 Bold" pitchFamily="34" charset="0"/>
+                <a:ea typeface="Alibaba PuHuiTi 3.0 85 Bold" pitchFamily="34" charset="-122"/>
+                <a:cs typeface="Alibaba PuHuiTi 3.0 85 Bold" pitchFamily="34" charset="-120"/>
               </a:rPr>
               <a:t>bits per pixel 不变。</a:t>
             </a:r>
@@ -8782,18 +8927,18 @@
         </p:nvSpPr>
         <p:spPr>
           <a:xfrm>
-            <a:off x="6766560" y="2148840"/>
-            <a:ext cx="3383280" cy="1097280"/>
+            <a:off x="6903720" y="2331720"/>
+            <a:ext cx="3200400" cy="1005840"/>
           </a:xfrm>
           <a:prstGeom prst="roundRect">
             <a:avLst>
-              <a:gd name="adj" fmla="val 10000"/>
+              <a:gd name="adj" fmla="val 10909"/>
             </a:avLst>
           </a:prstGeom>
           <a:solidFill>
             <a:srgbClr val="FFFFFF"/>
           </a:solidFill>
-          <a:ln w="15240">
+          <a:ln w="13970">
             <a:solidFill>
               <a:srgbClr val="8C64E1"/>
             </a:solidFill>
@@ -8809,8 +8954,8 @@
         </p:nvSpPr>
         <p:spPr>
           <a:xfrm>
-            <a:off x="6903720" y="2258568"/>
-            <a:ext cx="3108960" cy="877824"/>
+            <a:off x="7013448" y="2423160"/>
+            <a:ext cx="2980944" cy="822960"/>
           </a:xfrm>
           <a:prstGeom prst="rect">
             <a:avLst/>
@@ -8828,7 +8973,7 @@
               <a:buNone/>
             </a:pPr>
             <a:r>
-              <a:rPr lang="en-US" sz="3200" b="1" dirty="0">
+              <a:rPr lang="en-US" sz="3100" b="1" dirty="0">
                 <a:solidFill>
                   <a:srgbClr val="262626"/>
                 </a:solidFill>
@@ -8838,7 +8983,7 @@
               </a:rPr>
               <a:t>变成几倍？</a:t>
             </a:r>
-            <a:endParaRPr lang="en-US" sz="3200" dirty="0"/>
+            <a:endParaRPr lang="en-US" sz="3100" dirty="0"/>
           </a:p>
         </p:txBody>
       </p:sp>
@@ -8883,7 +9028,7 @@
         <p:spPr>
           <a:xfrm>
             <a:off x="0" y="0"/>
-            <a:ext cx="12191695" cy="101498"/>
+            <a:ext cx="12191695" cy="100584"/>
           </a:xfrm>
           <a:prstGeom prst="rect">
             <a:avLst/>
@@ -8907,8 +9052,8 @@
         </p:nvSpPr>
         <p:spPr>
           <a:xfrm>
-            <a:off x="0" y="6756502"/>
-            <a:ext cx="12191695" cy="101498"/>
+            <a:off x="0" y="6757416"/>
+            <a:ext cx="12191695" cy="100584"/>
           </a:xfrm>
           <a:prstGeom prst="rect">
             <a:avLst/>
@@ -8932,8 +9077,8 @@
         </p:nvSpPr>
         <p:spPr>
           <a:xfrm>
-            <a:off x="608076" y="502920"/>
-            <a:ext cx="10972800" cy="685800"/>
+            <a:off x="594360" y="438912"/>
+            <a:ext cx="11064240" cy="621792"/>
           </a:xfrm>
           <a:prstGeom prst="rect">
             <a:avLst/>
@@ -8951,7 +9096,7 @@
               <a:buNone/>
             </a:pPr>
             <a:r>
-              <a:rPr lang="en-US" sz="3400" b="1" dirty="0">
+              <a:rPr lang="en-US" sz="3000" b="1" dirty="0">
                 <a:solidFill>
                   <a:srgbClr val="262626"/>
                 </a:solidFill>
@@ -8959,73 +9104,32 @@
                 <a:ea typeface="Alibaba PuHuiTi 3.0 115 Black" pitchFamily="34" charset="-122"/>
                 <a:cs typeface="Alibaba PuHuiTi 3.0 115 Black" pitchFamily="34" charset="-120"/>
               </a:rPr>
-              <a:t>Q9 答案：二维方向都翻倍，所以是 4 倍</a:t>
-            </a:r>
-            <a:endParaRPr lang="en-US" sz="3400" dirty="0"/>
-          </a:p>
-        </p:txBody>
-      </p:sp>
-      <p:sp>
-        <p:nvSpPr>
-          <p:cNvPr id="6" name="Text 3"/>
-          <p:cNvSpPr/>
-          <p:nvPr/>
-        </p:nvSpPr>
-        <p:spPr>
-          <a:xfrm>
-            <a:off x="1371600" y="1920240"/>
-            <a:ext cx="9418320" cy="594360"/>
-          </a:xfrm>
-          <a:prstGeom prst="rect">
-            <a:avLst/>
-          </a:prstGeom>
-          <a:noFill/>
-          <a:ln/>
-        </p:spPr>
-        <p:txBody>
-          <a:bodyPr wrap="square" rtlCol="0" anchor="ctr">
-            <a:normAutofit/>
-          </a:bodyPr>
-          <a:lstStyle/>
-          <a:p>
-            <a:pPr algn="ctr" indent="0" marL="0">
-              <a:buNone/>
-            </a:pPr>
-            <a:r>
-              <a:rPr lang="en-US" sz="3200" b="1" dirty="0">
-                <a:solidFill>
-                  <a:srgbClr val="8C64E1"/>
-                </a:solidFill>
-                <a:latin typeface="Alibaba PuHuiTi 3.0 55 Regular" pitchFamily="34" charset="0"/>
-                <a:ea typeface="Alibaba PuHuiTi 3.0 55 Regular" pitchFamily="34" charset="-122"/>
-                <a:cs typeface="Alibaba PuHuiTi 3.0 55 Regular" pitchFamily="34" charset="-120"/>
-              </a:rPr>
-              <a:t>(1600 × 1200) / (800 × 600) = 4</a:t>
-            </a:r>
-            <a:endParaRPr lang="en-US" sz="3200" dirty="0"/>
-          </a:p>
-        </p:txBody>
-      </p:sp>
-      <p:sp>
-        <p:nvSpPr>
-          <p:cNvPr id="7" name="Shape 4"/>
-          <p:cNvSpPr/>
-          <p:nvPr/>
-        </p:nvSpPr>
-        <p:spPr>
-          <a:xfrm>
-            <a:off x="2743200" y="3200400"/>
-            <a:ext cx="6675120" cy="594360"/>
+              <a:t>Q9 宽和高都变成 2 倍，数据量变成几倍？</a:t>
+            </a:r>
+            <a:endParaRPr lang="en-US" sz="3000" dirty="0"/>
+          </a:p>
+        </p:txBody>
+      </p:sp>
+      <p:sp>
+        <p:nvSpPr>
+          <p:cNvPr id="6" name="Shape 3"/>
+          <p:cNvSpPr/>
+          <p:nvPr/>
+        </p:nvSpPr>
+        <p:spPr>
+          <a:xfrm>
+            <a:off x="3291840" y="1371600"/>
+            <a:ext cx="5577840" cy="457200"/>
           </a:xfrm>
           <a:prstGeom prst="roundRect">
             <a:avLst>
-              <a:gd name="adj" fmla="val 24615"/>
+              <a:gd name="adj" fmla="val 36000"/>
             </a:avLst>
           </a:prstGeom>
           <a:solidFill>
-            <a:srgbClr val="F7F4FF"/>
-          </a:solidFill>
-          <a:ln w="15240">
+            <a:srgbClr val="F6F3FF"/>
+          </a:solidFill>
+          <a:ln w="13970">
             <a:solidFill>
               <a:srgbClr val="8C64E1"/>
             </a:solidFill>
@@ -9035,30 +9139,32 @@
       </p:sp>
       <p:sp>
         <p:nvSpPr>
-          <p:cNvPr id="8" name="Text 5"/>
-          <p:cNvSpPr/>
-          <p:nvPr/>
-        </p:nvSpPr>
-        <p:spPr>
-          <a:xfrm>
-            <a:off x="2743200" y="3236976"/>
-            <a:ext cx="6675120" cy="548640"/>
-          </a:xfrm>
-          <a:prstGeom prst="rect">
-            <a:avLst/>
-          </a:prstGeom>
-          <a:noFill/>
-          <a:ln/>
-        </p:spPr>
-        <p:txBody>
-          <a:bodyPr wrap="square" rtlCol="0" anchor="ctr"/>
+          <p:cNvPr id="7" name="Text 4"/>
+          <p:cNvSpPr/>
+          <p:nvPr/>
+        </p:nvSpPr>
+        <p:spPr>
+          <a:xfrm>
+            <a:off x="3383280" y="1399032"/>
+            <a:ext cx="5394960" cy="402336"/>
+          </a:xfrm>
+          <a:prstGeom prst="rect">
+            <a:avLst/>
+          </a:prstGeom>
+          <a:noFill/>
+          <a:ln/>
+        </p:spPr>
+        <p:txBody>
+          <a:bodyPr wrap="square" rtlCol="0" anchor="ctr">
+            <a:normAutofit/>
+          </a:bodyPr>
           <a:lstStyle/>
           <a:p>
             <a:pPr algn="ctr" indent="0" marL="0">
               <a:buNone/>
             </a:pPr>
             <a:r>
-              <a:rPr lang="en-US" sz="2400" b="1" dirty="0">
+              <a:rPr lang="en-US" sz="2000" b="1" dirty="0">
                 <a:solidFill>
                   <a:srgbClr val="8C64E1"/>
                 </a:solidFill>
@@ -9066,22 +9172,131 @@
                 <a:ea typeface="Alibaba PuHuiTi 3.0 85 Bold" pitchFamily="34" charset="-122"/>
                 <a:cs typeface="Alibaba PuHuiTi 3.0 85 Bold" pitchFamily="34" charset="-120"/>
               </a:rPr>
+              <a:t>证据：像素总数看 W × H</a:t>
+            </a:r>
+            <a:endParaRPr lang="en-US" sz="2000" dirty="0"/>
+          </a:p>
+        </p:txBody>
+      </p:sp>
+      <p:sp>
+        <p:nvSpPr>
+          <p:cNvPr id="8" name="Text 5"/>
+          <p:cNvSpPr/>
+          <p:nvPr/>
+        </p:nvSpPr>
+        <p:spPr>
+          <a:xfrm>
+            <a:off x="1280160" y="2423160"/>
+            <a:ext cx="9601200" cy="594360"/>
+          </a:xfrm>
+          <a:prstGeom prst="rect">
+            <a:avLst/>
+          </a:prstGeom>
+          <a:noFill/>
+          <a:ln/>
+        </p:spPr>
+        <p:txBody>
+          <a:bodyPr wrap="square" rtlCol="0" anchor="ctr">
+            <a:normAutofit/>
+          </a:bodyPr>
+          <a:lstStyle/>
+          <a:p>
+            <a:pPr algn="ctr" indent="0" marL="0">
+              <a:buNone/>
+            </a:pPr>
+            <a:r>
+              <a:rPr lang="en-US" sz="3200" b="1" dirty="0">
+                <a:solidFill>
+                  <a:srgbClr val="8C64E1"/>
+                </a:solidFill>
+                <a:latin typeface="Alibaba PuHuiTi 3.0 85 Bold" pitchFamily="34" charset="0"/>
+                <a:ea typeface="Alibaba PuHuiTi 3.0 85 Bold" pitchFamily="34" charset="-122"/>
+                <a:cs typeface="Alibaba PuHuiTi 3.0 85 Bold" pitchFamily="34" charset="-120"/>
+              </a:rPr>
+              <a:t>(1600 × 1200) / (800 × 600) = 4</a:t>
+            </a:r>
+            <a:endParaRPr lang="en-US" sz="3200" dirty="0"/>
+          </a:p>
+        </p:txBody>
+      </p:sp>
+      <p:sp>
+        <p:nvSpPr>
+          <p:cNvPr id="9" name="Shape 6"/>
+          <p:cNvSpPr/>
+          <p:nvPr/>
+        </p:nvSpPr>
+        <p:spPr>
+          <a:xfrm>
+            <a:off x="2743200" y="3749040"/>
+            <a:ext cx="6675120" cy="566928"/>
+          </a:xfrm>
+          <a:prstGeom prst="roundRect">
+            <a:avLst>
+              <a:gd name="adj" fmla="val 29032"/>
+            </a:avLst>
+          </a:prstGeom>
+          <a:solidFill>
+            <a:srgbClr val="F6F3FF"/>
+          </a:solidFill>
+          <a:ln w="13970">
+            <a:solidFill>
+              <a:srgbClr val="8C64E1"/>
+            </a:solidFill>
+            <a:prstDash val="solid"/>
+          </a:ln>
+        </p:spPr>
+      </p:sp>
+      <p:sp>
+        <p:nvSpPr>
+          <p:cNvPr id="10" name="Text 7"/>
+          <p:cNvSpPr/>
+          <p:nvPr/>
+        </p:nvSpPr>
+        <p:spPr>
+          <a:xfrm>
+            <a:off x="2834640" y="3776472"/>
+            <a:ext cx="6492240" cy="512064"/>
+          </a:xfrm>
+          <a:prstGeom prst="rect">
+            <a:avLst/>
+          </a:prstGeom>
+          <a:noFill/>
+          <a:ln/>
+        </p:spPr>
+        <p:txBody>
+          <a:bodyPr wrap="square" rtlCol="0" anchor="ctr">
+            <a:normAutofit/>
+          </a:bodyPr>
+          <a:lstStyle/>
+          <a:p>
+            <a:pPr algn="ctr" indent="0" marL="0">
+              <a:buNone/>
+            </a:pPr>
+            <a:r>
+              <a:rPr lang="en-US" sz="2300" b="1" dirty="0">
+                <a:solidFill>
+                  <a:srgbClr val="8C64E1"/>
+                </a:solidFill>
+                <a:latin typeface="Alibaba PuHuiTi 3.0 85 Bold" pitchFamily="34" charset="0"/>
+                <a:ea typeface="Alibaba PuHuiTi 3.0 85 Bold" pitchFamily="34" charset="-122"/>
+                <a:cs typeface="Alibaba PuHuiTi 3.0 85 Bold" pitchFamily="34" charset="-120"/>
+              </a:rPr>
               <a:t>宽 ×2，高 ×2 → 像素总数 ×4</a:t>
             </a:r>
-            <a:endParaRPr lang="en-US" sz="2400" dirty="0"/>
-          </a:p>
-        </p:txBody>
-      </p:sp>
-      <p:sp>
-        <p:nvSpPr>
-          <p:cNvPr id="9" name="Text 6"/>
-          <p:cNvSpPr/>
-          <p:nvPr/>
-        </p:nvSpPr>
-        <p:spPr>
-          <a:xfrm>
-            <a:off x="1463040" y="4663440"/>
-            <a:ext cx="9326880" cy="365760"/>
+            <a:endParaRPr lang="en-US" sz="2300" dirty="0"/>
+          </a:p>
+        </p:txBody>
+      </p:sp>
+      <p:sp>
+        <p:nvSpPr>
+          <p:cNvPr id="11" name="Text 8"/>
+          <p:cNvSpPr/>
+          <p:nvPr/>
+        </p:nvSpPr>
+        <p:spPr>
+          <a:xfrm>
+            <a:off x="1463040" y="4983480"/>
+            <a:ext cx="9326880" cy="320040"/>
           </a:xfrm>
           <a:prstGeom prst="rect">
             <a:avLst/>
@@ -9154,7 +9369,7 @@
         <p:spPr>
           <a:xfrm>
             <a:off x="0" y="0"/>
-            <a:ext cx="12191695" cy="101498"/>
+            <a:ext cx="12191695" cy="100584"/>
           </a:xfrm>
           <a:prstGeom prst="rect">
             <a:avLst/>
@@ -9178,8 +9393,8 @@
         </p:nvSpPr>
         <p:spPr>
           <a:xfrm>
-            <a:off x="0" y="6756502"/>
-            <a:ext cx="12191695" cy="101498"/>
+            <a:off x="0" y="6757416"/>
+            <a:ext cx="12191695" cy="100584"/>
           </a:xfrm>
           <a:prstGeom prst="rect">
             <a:avLst/>
@@ -9203,8 +9418,8 @@
         </p:nvSpPr>
         <p:spPr>
           <a:xfrm>
-            <a:off x="608076" y="502920"/>
-            <a:ext cx="10972800" cy="685800"/>
+            <a:off x="594360" y="438912"/>
+            <a:ext cx="11064240" cy="621792"/>
           </a:xfrm>
           <a:prstGeom prst="rect">
             <a:avLst/>
@@ -9222,7 +9437,7 @@
               <a:buNone/>
             </a:pPr>
             <a:r>
-              <a:rPr lang="en-US" sz="3400" b="1" dirty="0">
+              <a:rPr lang="en-US" sz="3000" b="1" dirty="0">
                 <a:solidFill>
                   <a:srgbClr val="262626"/>
                 </a:solidFill>
@@ -9232,7 +9447,7 @@
               </a:rPr>
               <a:t>Q12 回看 Q0：四种说法现在怎样排序？</a:t>
             </a:r>
-            <a:endParaRPr lang="en-US" sz="3400" dirty="0"/>
+            <a:endParaRPr lang="en-US" sz="3000" dirty="0"/>
           </a:p>
         </p:txBody>
       </p:sp>
@@ -9244,20 +9459,20 @@
         </p:nvSpPr>
         <p:spPr>
           <a:xfrm>
-            <a:off x="777240" y="2148840"/>
-            <a:ext cx="2240280" cy="822960"/>
+            <a:off x="822960" y="1874520"/>
+            <a:ext cx="2331720" cy="914400"/>
           </a:xfrm>
           <a:prstGeom prst="roundRect">
             <a:avLst>
-              <a:gd name="adj" fmla="val 13333"/>
+              <a:gd name="adj" fmla="val 12000"/>
             </a:avLst>
           </a:prstGeom>
           <a:solidFill>
             <a:srgbClr val="FFFFFF"/>
           </a:solidFill>
-          <a:ln w="15240">
+          <a:ln w="13970">
             <a:solidFill>
-              <a:srgbClr val="D7D7E6"/>
+              <a:srgbClr val="C7CEDD"/>
             </a:solidFill>
             <a:prstDash val="solid"/>
           </a:ln>
@@ -9271,8 +9486,8 @@
         </p:nvSpPr>
         <p:spPr>
           <a:xfrm>
-            <a:off x="914400" y="2258568"/>
-            <a:ext cx="1965960" cy="603504"/>
+            <a:off x="932688" y="1965960"/>
+            <a:ext cx="2112264" cy="731520"/>
           </a:xfrm>
           <a:prstGeom prst="rect">
             <a:avLst/>
@@ -9290,7 +9505,7 @@
               <a:buNone/>
             </a:pPr>
             <a:r>
-              <a:rPr lang="en-US" sz="2100" b="1" dirty="0">
+              <a:rPr lang="en-US" sz="1900" b="1" dirty="0">
                 <a:solidFill>
                   <a:srgbClr val="262626"/>
                 </a:solidFill>
@@ -9298,9 +9513,9 @@
                 <a:ea typeface="Alibaba PuHuiTi 3.0 85 Bold" pitchFamily="34" charset="-122"/>
                 <a:cs typeface="Alibaba PuHuiTi 3.0 85 Bold" pitchFamily="34" charset="-120"/>
               </a:rPr>
-              <a:t>像素位置</a:t>
-            </a:r>
-            <a:endParaRPr lang="en-US" sz="2100" dirty="0"/>
+              <a:t>很多 0 和 1</a:t>
+            </a:r>
+            <a:endParaRPr lang="en-US" sz="1900" dirty="0"/>
           </a:p>
         </p:txBody>
       </p:sp>
@@ -9312,45 +9527,20 @@
         </p:nvSpPr>
         <p:spPr>
           <a:xfrm>
-            <a:off x="3017520" y="2560320"/>
-            <a:ext cx="411480" cy="0"/>
-          </a:xfrm>
-          <a:prstGeom prst="line">
-            <a:avLst/>
-          </a:prstGeom>
-          <a:noFill/>
-          <a:ln w="25400">
-            <a:solidFill>
-              <a:srgbClr val="8C64E1"/>
-            </a:solidFill>
-            <a:prstDash val="solid"/>
-            <a:headEnd type="none"/>
-            <a:tailEnd type="triangle"/>
-          </a:ln>
-        </p:spPr>
-      </p:sp>
-      <p:sp>
-        <p:nvSpPr>
-          <p:cNvPr id="9" name="Shape 6"/>
-          <p:cNvSpPr/>
-          <p:nvPr/>
-        </p:nvSpPr>
-        <p:spPr>
-          <a:xfrm>
-            <a:off x="3566160" y="2148840"/>
-            <a:ext cx="2240280" cy="822960"/>
+            <a:off x="3429000" y="3063240"/>
+            <a:ext cx="2331720" cy="914400"/>
           </a:xfrm>
           <a:prstGeom prst="roundRect">
             <a:avLst>
-              <a:gd name="adj" fmla="val 13333"/>
+              <a:gd name="adj" fmla="val 12000"/>
             </a:avLst>
           </a:prstGeom>
           <a:solidFill>
-            <a:srgbClr val="FFFFFF"/>
-          </a:solidFill>
-          <a:ln w="15240">
+            <a:srgbClr val="F8F7FD"/>
+          </a:solidFill>
+          <a:ln w="13970">
             <a:solidFill>
-              <a:srgbClr val="D7D7E6"/>
+              <a:srgbClr val="C9BFF0"/>
             </a:solidFill>
             <a:prstDash val="solid"/>
           </a:ln>
@@ -9358,14 +9548,14 @@
       </p:sp>
       <p:sp>
         <p:nvSpPr>
-          <p:cNvPr id="10" name="Text 7"/>
-          <p:cNvSpPr/>
-          <p:nvPr/>
-        </p:nvSpPr>
-        <p:spPr>
-          <a:xfrm>
-            <a:off x="3703320" y="2258568"/>
-            <a:ext cx="1965960" cy="603504"/>
+          <p:cNvPr id="9" name="Text 6"/>
+          <p:cNvSpPr/>
+          <p:nvPr/>
+        </p:nvSpPr>
+        <p:spPr>
+          <a:xfrm>
+            <a:off x="3538728" y="3154680"/>
+            <a:ext cx="2112264" cy="731520"/>
           </a:xfrm>
           <a:prstGeom prst="rect">
             <a:avLst/>
@@ -9383,7 +9573,7 @@
               <a:buNone/>
             </a:pPr>
             <a:r>
-              <a:rPr lang="en-US" sz="2100" b="1" dirty="0">
+              <a:rPr lang="en-US" sz="1900" b="1" dirty="0">
                 <a:solidFill>
                   <a:srgbClr val="262626"/>
                 </a:solidFill>
@@ -9391,59 +9581,34 @@
                 <a:ea typeface="Alibaba PuHuiTi 3.0 85 Bold" pitchFamily="34" charset="-122"/>
                 <a:cs typeface="Alibaba PuHuiTi 3.0 85 Bold" pitchFamily="34" charset="-120"/>
               </a:rPr>
-              <a:t>颜色值</a:t>
-            </a:r>
-            <a:endParaRPr lang="en-US" sz="2100" dirty="0"/>
-          </a:p>
-        </p:txBody>
-      </p:sp>
-      <p:sp>
-        <p:nvSpPr>
-          <p:cNvPr id="11" name="Shape 8"/>
-          <p:cNvSpPr/>
-          <p:nvPr/>
-        </p:nvSpPr>
-        <p:spPr>
-          <a:xfrm>
-            <a:off x="5806440" y="2560320"/>
-            <a:ext cx="411480" cy="0"/>
-          </a:xfrm>
-          <a:prstGeom prst="line">
-            <a:avLst/>
-          </a:prstGeom>
-          <a:noFill/>
-          <a:ln w="25400">
-            <a:solidFill>
-              <a:srgbClr val="8C64E1"/>
-            </a:solidFill>
-            <a:prstDash val="solid"/>
-            <a:headEnd type="none"/>
-            <a:tailEnd type="triangle"/>
-          </a:ln>
-        </p:spPr>
-      </p:sp>
-      <p:sp>
-        <p:nvSpPr>
-          <p:cNvPr id="12" name="Shape 9"/>
-          <p:cNvSpPr/>
-          <p:nvPr/>
-        </p:nvSpPr>
-        <p:spPr>
-          <a:xfrm>
-            <a:off x="6355080" y="2148840"/>
-            <a:ext cx="2240280" cy="822960"/>
+              <a:t>很多像素 / 小方格</a:t>
+            </a:r>
+            <a:endParaRPr lang="en-US" sz="1900" dirty="0"/>
+          </a:p>
+        </p:txBody>
+      </p:sp>
+      <p:sp>
+        <p:nvSpPr>
+          <p:cNvPr id="10" name="Shape 7"/>
+          <p:cNvSpPr/>
+          <p:nvPr/>
+        </p:nvSpPr>
+        <p:spPr>
+          <a:xfrm>
+            <a:off x="5989320" y="1874520"/>
+            <a:ext cx="2331720" cy="914400"/>
           </a:xfrm>
           <a:prstGeom prst="roundRect">
             <a:avLst>
-              <a:gd name="adj" fmla="val 13333"/>
+              <a:gd name="adj" fmla="val 12000"/>
             </a:avLst>
           </a:prstGeom>
           <a:solidFill>
             <a:srgbClr val="FFFFFF"/>
           </a:solidFill>
-          <a:ln w="15240">
+          <a:ln w="13970">
             <a:solidFill>
-              <a:srgbClr val="D7D7E6"/>
+              <a:srgbClr val="C7CEDD"/>
             </a:solidFill>
             <a:prstDash val="solid"/>
           </a:ln>
@@ -9451,14 +9616,14 @@
       </p:sp>
       <p:sp>
         <p:nvSpPr>
-          <p:cNvPr id="13" name="Text 10"/>
-          <p:cNvSpPr/>
-          <p:nvPr/>
-        </p:nvSpPr>
-        <p:spPr>
-          <a:xfrm>
-            <a:off x="6492240" y="2258568"/>
-            <a:ext cx="1965960" cy="603504"/>
+          <p:cNvPr id="11" name="Text 8"/>
+          <p:cNvSpPr/>
+          <p:nvPr/>
+        </p:nvSpPr>
+        <p:spPr>
+          <a:xfrm>
+            <a:off x="6099048" y="1965960"/>
+            <a:ext cx="2112264" cy="731520"/>
           </a:xfrm>
           <a:prstGeom prst="rect">
             <a:avLst/>
@@ -9476,7 +9641,7 @@
               <a:buNone/>
             </a:pPr>
             <a:r>
-              <a:rPr lang="en-US" sz="2100" b="1" dirty="0">
+              <a:rPr lang="en-US" sz="1900" b="1" dirty="0">
                 <a:solidFill>
                   <a:srgbClr val="262626"/>
                 </a:solidFill>
@@ -9484,57 +9649,100 @@
                 <a:ea typeface="Alibaba PuHuiTi 3.0 85 Bold" pitchFamily="34" charset="-122"/>
                 <a:cs typeface="Alibaba PuHuiTi 3.0 85 Bold" pitchFamily="34" charset="-120"/>
               </a:rPr>
-              <a:t>数字表示</a:t>
-            </a:r>
-            <a:endParaRPr lang="en-US" sz="2100" dirty="0"/>
-          </a:p>
-        </p:txBody>
-      </p:sp>
-      <p:sp>
-        <p:nvSpPr>
-          <p:cNvPr id="14" name="Shape 11"/>
-          <p:cNvSpPr/>
-          <p:nvPr/>
-        </p:nvSpPr>
-        <p:spPr>
-          <a:xfrm>
-            <a:off x="8595360" y="2560320"/>
-            <a:ext cx="411480" cy="0"/>
-          </a:xfrm>
-          <a:prstGeom prst="line">
-            <a:avLst/>
-          </a:prstGeom>
-          <a:noFill/>
-          <a:ln w="25400">
+              <a:t>很多数字</a:t>
+            </a:r>
+            <a:endParaRPr lang="en-US" sz="1900" dirty="0"/>
+          </a:p>
+        </p:txBody>
+      </p:sp>
+      <p:sp>
+        <p:nvSpPr>
+          <p:cNvPr id="12" name="Shape 9"/>
+          <p:cNvSpPr/>
+          <p:nvPr/>
+        </p:nvSpPr>
+        <p:spPr>
+          <a:xfrm>
+            <a:off x="8549640" y="3063240"/>
+            <a:ext cx="2331720" cy="914400"/>
+          </a:xfrm>
+          <a:prstGeom prst="roundRect">
+            <a:avLst>
+              <a:gd name="adj" fmla="val 12000"/>
+            </a:avLst>
+          </a:prstGeom>
+          <a:solidFill>
+            <a:srgbClr val="F8F7FD"/>
+          </a:solidFill>
+          <a:ln w="13970">
             <a:solidFill>
-              <a:srgbClr val="8C64E1"/>
+              <a:srgbClr val="C9BFF0"/>
             </a:solidFill>
             <a:prstDash val="solid"/>
-            <a:headEnd type="none"/>
-            <a:tailEnd type="triangle"/>
           </a:ln>
         </p:spPr>
       </p:sp>
       <p:sp>
         <p:nvSpPr>
-          <p:cNvPr id="15" name="Shape 12"/>
-          <p:cNvSpPr/>
-          <p:nvPr/>
-        </p:nvSpPr>
-        <p:spPr>
-          <a:xfrm>
-            <a:off x="9144000" y="2148840"/>
-            <a:ext cx="2240280" cy="822960"/>
+          <p:cNvPr id="13" name="Text 10"/>
+          <p:cNvSpPr/>
+          <p:nvPr/>
+        </p:nvSpPr>
+        <p:spPr>
+          <a:xfrm>
+            <a:off x="8659368" y="3154680"/>
+            <a:ext cx="2112264" cy="731520"/>
+          </a:xfrm>
+          <a:prstGeom prst="rect">
+            <a:avLst/>
+          </a:prstGeom>
+          <a:noFill/>
+          <a:ln/>
+        </p:spPr>
+        <p:txBody>
+          <a:bodyPr wrap="square" rtlCol="0" anchor="ctr">
+            <a:normAutofit/>
+          </a:bodyPr>
+          <a:lstStyle/>
+          <a:p>
+            <a:pPr algn="ctr" indent="0" marL="0">
+              <a:buNone/>
+            </a:pPr>
+            <a:r>
+              <a:rPr lang="en-US" sz="1900" b="1" dirty="0">
+                <a:solidFill>
+                  <a:srgbClr val="262626"/>
+                </a:solidFill>
+                <a:latin typeface="Alibaba PuHuiTi 3.0 85 Bold" pitchFamily="34" charset="0"/>
+                <a:ea typeface="Alibaba PuHuiTi 3.0 85 Bold" pitchFamily="34" charset="-122"/>
+                <a:cs typeface="Alibaba PuHuiTi 3.0 85 Bold" pitchFamily="34" charset="-120"/>
+              </a:rPr>
+              <a:t>很多颜色值</a:t>
+            </a:r>
+            <a:endParaRPr lang="en-US" sz="1900" dirty="0"/>
+          </a:p>
+        </p:txBody>
+      </p:sp>
+      <p:sp>
+        <p:nvSpPr>
+          <p:cNvPr id="14" name="Shape 11"/>
+          <p:cNvSpPr/>
+          <p:nvPr/>
+        </p:nvSpPr>
+        <p:spPr>
+          <a:xfrm>
+            <a:off x="2194560" y="5166360"/>
+            <a:ext cx="7863840" cy="502920"/>
           </a:xfrm>
           <a:prstGeom prst="roundRect">
             <a:avLst>
-              <a:gd name="adj" fmla="val 13333"/>
+              <a:gd name="adj" fmla="val 32727"/>
             </a:avLst>
           </a:prstGeom>
           <a:solidFill>
-            <a:srgbClr val="F7F4FF"/>
-          </a:solidFill>
-          <a:ln w="15240">
+            <a:srgbClr val="F6F3FF"/>
+          </a:solidFill>
+          <a:ln w="13970">
             <a:solidFill>
               <a:srgbClr val="8C64E1"/>
             </a:solidFill>
@@ -9544,14 +9752,14 @@
       </p:sp>
       <p:sp>
         <p:nvSpPr>
-          <p:cNvPr id="16" name="Text 13"/>
-          <p:cNvSpPr/>
-          <p:nvPr/>
-        </p:nvSpPr>
-        <p:spPr>
-          <a:xfrm>
-            <a:off x="9281160" y="2258568"/>
-            <a:ext cx="1965960" cy="603504"/>
+          <p:cNvPr id="15" name="Text 12"/>
+          <p:cNvSpPr/>
+          <p:nvPr/>
+        </p:nvSpPr>
+        <p:spPr>
+          <a:xfrm>
+            <a:off x="2286000" y="5193792"/>
+            <a:ext cx="7680960" cy="448056"/>
           </a:xfrm>
           <a:prstGeom prst="rect">
             <a:avLst/>
@@ -9577,50 +9785,9 @@
                 <a:ea typeface="Alibaba PuHuiTi 3.0 85 Bold" pitchFamily="34" charset="-122"/>
                 <a:cs typeface="Alibaba PuHuiTi 3.0 85 Bold" pitchFamily="34" charset="-120"/>
               </a:rPr>
-              <a:t>bits / bytes</a:t>
+              <a:t>先自己排序，再解释每一层之间的转换</a:t>
             </a:r>
             <a:endParaRPr lang="en-US" sz="2100" dirty="0"/>
-          </a:p>
-        </p:txBody>
-      </p:sp>
-      <p:sp>
-        <p:nvSpPr>
-          <p:cNvPr id="17" name="Text 14"/>
-          <p:cNvSpPr/>
-          <p:nvPr/>
-        </p:nvSpPr>
-        <p:spPr>
-          <a:xfrm>
-            <a:off x="1097280" y="3977640"/>
-            <a:ext cx="9966960" cy="502920"/>
-          </a:xfrm>
-          <a:prstGeom prst="rect">
-            <a:avLst/>
-          </a:prstGeom>
-          <a:noFill/>
-          <a:ln/>
-        </p:spPr>
-        <p:txBody>
-          <a:bodyPr wrap="square" rtlCol="0" anchor="ctr">
-            <a:normAutofit/>
-          </a:bodyPr>
-          <a:lstStyle/>
-          <a:p>
-            <a:pPr algn="ctr" indent="0" marL="0">
-              <a:buNone/>
-            </a:pPr>
-            <a:r>
-              <a:rPr lang="en-US" sz="2800" b="1" dirty="0">
-                <a:solidFill>
-                  <a:srgbClr val="8C64E1"/>
-                </a:solidFill>
-                <a:latin typeface="Alibaba PuHuiTi 3.0 55 Regular" pitchFamily="34" charset="0"/>
-                <a:ea typeface="Alibaba PuHuiTi 3.0 55 Regular" pitchFamily="34" charset="-122"/>
-                <a:cs typeface="Alibaba PuHuiTi 3.0 55 Regular" pitchFamily="34" charset="-120"/>
-              </a:rPr>
-              <a:t>Sampling → Quantization → Encoding</a:t>
-            </a:r>
-            <a:endParaRPr lang="en-US" sz="2800" dirty="0"/>
           </a:p>
         </p:txBody>
       </p:sp>
@@ -9665,7 +9832,7 @@
         <p:spPr>
           <a:xfrm>
             <a:off x="0" y="0"/>
-            <a:ext cx="12191695" cy="101498"/>
+            <a:ext cx="12191695" cy="100584"/>
           </a:xfrm>
           <a:prstGeom prst="rect">
             <a:avLst/>
@@ -9689,8 +9856,8 @@
         </p:nvSpPr>
         <p:spPr>
           <a:xfrm>
-            <a:off x="0" y="6756502"/>
-            <a:ext cx="12191695" cy="101498"/>
+            <a:off x="0" y="6757416"/>
+            <a:ext cx="12191695" cy="100584"/>
           </a:xfrm>
           <a:prstGeom prst="rect">
             <a:avLst/>
@@ -9714,8 +9881,8 @@
         </p:nvSpPr>
         <p:spPr>
           <a:xfrm>
-            <a:off x="608076" y="502920"/>
-            <a:ext cx="10972800" cy="685800"/>
+            <a:off x="594360" y="438912"/>
+            <a:ext cx="11064240" cy="621792"/>
           </a:xfrm>
           <a:prstGeom prst="rect">
             <a:avLst/>
@@ -9733,7 +9900,7 @@
               <a:buNone/>
             </a:pPr>
             <a:r>
-              <a:rPr lang="en-US" sz="3400" b="1" dirty="0">
+              <a:rPr lang="en-US" sz="3000" b="1" dirty="0">
                 <a:solidFill>
                   <a:srgbClr val="262626"/>
                 </a:solidFill>
@@ -9741,9 +9908,9 @@
                 <a:ea typeface="Alibaba PuHuiTi 3.0 115 Black" pitchFamily="34" charset="-122"/>
                 <a:cs typeface="Alibaba PuHuiTi 3.0 115 Black" pitchFamily="34" charset="-120"/>
               </a:rPr>
-              <a:t>最终模型：图像编码是一条表示链</a:t>
-            </a:r>
-            <a:endParaRPr lang="en-US" sz="3400" dirty="0"/>
+              <a:t>Q12 回看 Q0：四种说法现在怎样排序？</a:t>
+            </a:r>
+            <a:endParaRPr lang="en-US" sz="3000" dirty="0"/>
           </a:p>
         </p:txBody>
       </p:sp>
@@ -9755,20 +9922,20 @@
         </p:nvSpPr>
         <p:spPr>
           <a:xfrm>
-            <a:off x="822960" y="1508760"/>
-            <a:ext cx="2194560" cy="960120"/>
+            <a:off x="594360" y="1417320"/>
+            <a:ext cx="2103120" cy="658368"/>
           </a:xfrm>
           <a:prstGeom prst="roundRect">
             <a:avLst>
-              <a:gd name="adj" fmla="val 11429"/>
+              <a:gd name="adj" fmla="val 16667"/>
             </a:avLst>
           </a:prstGeom>
           <a:solidFill>
             <a:srgbClr val="FFFFFF"/>
           </a:solidFill>
-          <a:ln w="15240">
+          <a:ln w="13970">
             <a:solidFill>
-              <a:srgbClr val="D7D7E6"/>
+              <a:srgbClr val="D8D2EA"/>
             </a:solidFill>
             <a:prstDash val="solid"/>
           </a:ln>
@@ -9782,8 +9949,8 @@
         </p:nvSpPr>
         <p:spPr>
           <a:xfrm>
-            <a:off x="960120" y="1618488"/>
-            <a:ext cx="1920240" cy="740664"/>
+            <a:off x="704088" y="1508760"/>
+            <a:ext cx="1883664" cy="475488"/>
           </a:xfrm>
           <a:prstGeom prst="rect">
             <a:avLst/>
@@ -9801,7 +9968,7 @@
               <a:buNone/>
             </a:pPr>
             <a:r>
-              <a:rPr lang="en-US" sz="1800" b="1" dirty="0">
+              <a:rPr lang="en-US" sz="1900" b="1" dirty="0">
                 <a:solidFill>
                   <a:srgbClr val="262626"/>
                 </a:solidFill>
@@ -9809,9 +9976,9 @@
                 <a:ea typeface="Alibaba PuHuiTi 3.0 85 Bold" pitchFamily="34" charset="-122"/>
                 <a:cs typeface="Alibaba PuHuiTi 3.0 85 Bold" pitchFamily="34" charset="-120"/>
               </a:rPr>
-              <a:t>现实图像</a:t>
-            </a:r>
-            <a:endParaRPr lang="en-US" sz="1800" dirty="0"/>
+              <a:t>像素位置</a:t>
+            </a:r>
+            <a:endParaRPr lang="en-US" sz="1900" dirty="0"/>
           </a:p>
         </p:txBody>
       </p:sp>
@@ -9823,8 +9990,8 @@
         </p:nvSpPr>
         <p:spPr>
           <a:xfrm>
-            <a:off x="3017520" y="1993392"/>
-            <a:ext cx="594360" cy="0"/>
+            <a:off x="2697480" y="1737360"/>
+            <a:ext cx="502920" cy="0"/>
           </a:xfrm>
           <a:prstGeom prst="line">
             <a:avLst/>
@@ -9835,7 +10002,6 @@
               <a:srgbClr val="8C64E1"/>
             </a:solidFill>
             <a:prstDash val="solid"/>
-            <a:headEnd type="none"/>
             <a:tailEnd type="triangle"/>
           </a:ln>
         </p:spPr>
@@ -9848,18 +10014,202 @@
         </p:nvSpPr>
         <p:spPr>
           <a:xfrm>
-            <a:off x="3657600" y="1508760"/>
-            <a:ext cx="2194560" cy="960120"/>
+            <a:off x="3337560" y="1417320"/>
+            <a:ext cx="2103120" cy="658368"/>
           </a:xfrm>
           <a:prstGeom prst="roundRect">
             <a:avLst>
-              <a:gd name="adj" fmla="val 11429"/>
+              <a:gd name="adj" fmla="val 16667"/>
             </a:avLst>
           </a:prstGeom>
           <a:solidFill>
-            <a:srgbClr val="F7F4FF"/>
-          </a:solidFill>
-          <a:ln w="15240">
+            <a:srgbClr val="FFFFFF"/>
+          </a:solidFill>
+          <a:ln w="13970">
+            <a:solidFill>
+              <a:srgbClr val="D8D2EA"/>
+            </a:solidFill>
+            <a:prstDash val="solid"/>
+          </a:ln>
+        </p:spPr>
+      </p:sp>
+      <p:sp>
+        <p:nvSpPr>
+          <p:cNvPr id="10" name="Text 7"/>
+          <p:cNvSpPr/>
+          <p:nvPr/>
+        </p:nvSpPr>
+        <p:spPr>
+          <a:xfrm>
+            <a:off x="3447288" y="1508760"/>
+            <a:ext cx="1883664" cy="475488"/>
+          </a:xfrm>
+          <a:prstGeom prst="rect">
+            <a:avLst/>
+          </a:prstGeom>
+          <a:noFill/>
+          <a:ln/>
+        </p:spPr>
+        <p:txBody>
+          <a:bodyPr wrap="square" rtlCol="0" anchor="ctr">
+            <a:normAutofit/>
+          </a:bodyPr>
+          <a:lstStyle/>
+          <a:p>
+            <a:pPr algn="ctr" indent="0" marL="0">
+              <a:buNone/>
+            </a:pPr>
+            <a:r>
+              <a:rPr lang="en-US" sz="1900" b="1" dirty="0">
+                <a:solidFill>
+                  <a:srgbClr val="262626"/>
+                </a:solidFill>
+                <a:latin typeface="Alibaba PuHuiTi 3.0 85 Bold" pitchFamily="34" charset="0"/>
+                <a:ea typeface="Alibaba PuHuiTi 3.0 85 Bold" pitchFamily="34" charset="-122"/>
+                <a:cs typeface="Alibaba PuHuiTi 3.0 85 Bold" pitchFamily="34" charset="-120"/>
+              </a:rPr>
+              <a:t>颜色值</a:t>
+            </a:r>
+            <a:endParaRPr lang="en-US" sz="1900" dirty="0"/>
+          </a:p>
+        </p:txBody>
+      </p:sp>
+      <p:sp>
+        <p:nvSpPr>
+          <p:cNvPr id="11" name="Shape 8"/>
+          <p:cNvSpPr/>
+          <p:nvPr/>
+        </p:nvSpPr>
+        <p:spPr>
+          <a:xfrm>
+            <a:off x="5440680" y="1737360"/>
+            <a:ext cx="502920" cy="0"/>
+          </a:xfrm>
+          <a:prstGeom prst="line">
+            <a:avLst/>
+          </a:prstGeom>
+          <a:noFill/>
+          <a:ln w="25400">
+            <a:solidFill>
+              <a:srgbClr val="8C64E1"/>
+            </a:solidFill>
+            <a:prstDash val="solid"/>
+            <a:tailEnd type="triangle"/>
+          </a:ln>
+        </p:spPr>
+      </p:sp>
+      <p:sp>
+        <p:nvSpPr>
+          <p:cNvPr id="12" name="Shape 9"/>
+          <p:cNvSpPr/>
+          <p:nvPr/>
+        </p:nvSpPr>
+        <p:spPr>
+          <a:xfrm>
+            <a:off x="6080760" y="1417320"/>
+            <a:ext cx="2103120" cy="658368"/>
+          </a:xfrm>
+          <a:prstGeom prst="roundRect">
+            <a:avLst>
+              <a:gd name="adj" fmla="val 16667"/>
+            </a:avLst>
+          </a:prstGeom>
+          <a:solidFill>
+            <a:srgbClr val="FFFFFF"/>
+          </a:solidFill>
+          <a:ln w="13970">
+            <a:solidFill>
+              <a:srgbClr val="D8D2EA"/>
+            </a:solidFill>
+            <a:prstDash val="solid"/>
+          </a:ln>
+        </p:spPr>
+      </p:sp>
+      <p:sp>
+        <p:nvSpPr>
+          <p:cNvPr id="13" name="Text 10"/>
+          <p:cNvSpPr/>
+          <p:nvPr/>
+        </p:nvSpPr>
+        <p:spPr>
+          <a:xfrm>
+            <a:off x="6190488" y="1508760"/>
+            <a:ext cx="1883664" cy="475488"/>
+          </a:xfrm>
+          <a:prstGeom prst="rect">
+            <a:avLst/>
+          </a:prstGeom>
+          <a:noFill/>
+          <a:ln/>
+        </p:spPr>
+        <p:txBody>
+          <a:bodyPr wrap="square" rtlCol="0" anchor="ctr">
+            <a:normAutofit/>
+          </a:bodyPr>
+          <a:lstStyle/>
+          <a:p>
+            <a:pPr algn="ctr" indent="0" marL="0">
+              <a:buNone/>
+            </a:pPr>
+            <a:r>
+              <a:rPr lang="en-US" sz="1900" b="1" dirty="0">
+                <a:solidFill>
+                  <a:srgbClr val="262626"/>
+                </a:solidFill>
+                <a:latin typeface="Alibaba PuHuiTi 3.0 85 Bold" pitchFamily="34" charset="0"/>
+                <a:ea typeface="Alibaba PuHuiTi 3.0 85 Bold" pitchFamily="34" charset="-122"/>
+                <a:cs typeface="Alibaba PuHuiTi 3.0 85 Bold" pitchFamily="34" charset="-120"/>
+              </a:rPr>
+              <a:t>数字表示</a:t>
+            </a:r>
+            <a:endParaRPr lang="en-US" sz="1900" dirty="0"/>
+          </a:p>
+        </p:txBody>
+      </p:sp>
+      <p:sp>
+        <p:nvSpPr>
+          <p:cNvPr id="14" name="Shape 11"/>
+          <p:cNvSpPr/>
+          <p:nvPr/>
+        </p:nvSpPr>
+        <p:spPr>
+          <a:xfrm>
+            <a:off x="8183880" y="1737360"/>
+            <a:ext cx="502920" cy="0"/>
+          </a:xfrm>
+          <a:prstGeom prst="line">
+            <a:avLst/>
+          </a:prstGeom>
+          <a:noFill/>
+          <a:ln w="25400">
+            <a:solidFill>
+              <a:srgbClr val="8C64E1"/>
+            </a:solidFill>
+            <a:prstDash val="solid"/>
+            <a:tailEnd type="triangle"/>
+          </a:ln>
+        </p:spPr>
+      </p:sp>
+      <p:sp>
+        <p:nvSpPr>
+          <p:cNvPr id="15" name="Shape 12"/>
+          <p:cNvSpPr/>
+          <p:nvPr/>
+        </p:nvSpPr>
+        <p:spPr>
+          <a:xfrm>
+            <a:off x="8823960" y="1417320"/>
+            <a:ext cx="2103120" cy="658368"/>
+          </a:xfrm>
+          <a:prstGeom prst="roundRect">
+            <a:avLst>
+              <a:gd name="adj" fmla="val 16667"/>
+            </a:avLst>
+          </a:prstGeom>
+          <a:solidFill>
+            <a:srgbClr val="F6F3FF"/>
+          </a:solidFill>
+          <a:ln w="13970">
             <a:solidFill>
               <a:srgbClr val="8C64E1"/>
             </a:solidFill>
@@ -9869,14 +10219,14 @@
       </p:sp>
       <p:sp>
         <p:nvSpPr>
-          <p:cNvPr id="10" name="Text 7"/>
-          <p:cNvSpPr/>
-          <p:nvPr/>
-        </p:nvSpPr>
-        <p:spPr>
-          <a:xfrm>
-            <a:off x="3794760" y="1618488"/>
-            <a:ext cx="1920240" cy="740664"/>
+          <p:cNvPr id="16" name="Text 13"/>
+          <p:cNvSpPr/>
+          <p:nvPr/>
+        </p:nvSpPr>
+        <p:spPr>
+          <a:xfrm>
+            <a:off x="8933688" y="1508760"/>
+            <a:ext cx="1883664" cy="475488"/>
           </a:xfrm>
           <a:prstGeom prst="rect">
             <a:avLst/>
@@ -9894,7 +10244,7 @@
               <a:buNone/>
             </a:pPr>
             <a:r>
-              <a:rPr lang="en-US" sz="1800" b="1" dirty="0">
+              <a:rPr lang="en-US" sz="1900" b="1" dirty="0">
                 <a:solidFill>
                   <a:srgbClr val="8C64E1"/>
                 </a:solidFill>
@@ -9902,74 +10252,32 @@
                 <a:ea typeface="Alibaba PuHuiTi 3.0 85 Bold" pitchFamily="34" charset="-122"/>
                 <a:cs typeface="Alibaba PuHuiTi 3.0 85 Bold" pitchFamily="34" charset="-120"/>
               </a:rPr>
-              <a:t>Sampling</a:t>
-            </a:r>
-            <a:endParaRPr lang="en-US" sz="1800" dirty="0"/>
-          </a:p>
-          <a:p>
-            <a:pPr algn="ctr" indent="0" marL="0">
-              <a:buNone/>
-            </a:pPr>
-            <a:r>
-              <a:rPr lang="en-US" sz="1800" b="1" dirty="0">
-                <a:solidFill>
-                  <a:srgbClr val="8C64E1"/>
-                </a:solidFill>
-                <a:latin typeface="Alibaba PuHuiTi 3.0 85 Bold" pitchFamily="34" charset="0"/>
-                <a:ea typeface="Alibaba PuHuiTi 3.0 85 Bold" pitchFamily="34" charset="-122"/>
-                <a:cs typeface="Alibaba PuHuiTi 3.0 85 Bold" pitchFamily="34" charset="-120"/>
-              </a:rPr>
-              <a:t>位置数量</a:t>
-            </a:r>
-            <a:endParaRPr lang="en-US" sz="1800" dirty="0"/>
-          </a:p>
-        </p:txBody>
-      </p:sp>
-      <p:sp>
-        <p:nvSpPr>
-          <p:cNvPr id="11" name="Shape 8"/>
-          <p:cNvSpPr/>
-          <p:nvPr/>
-        </p:nvSpPr>
-        <p:spPr>
-          <a:xfrm>
-            <a:off x="5852160" y="1993392"/>
-            <a:ext cx="594360" cy="0"/>
-          </a:xfrm>
-          <a:prstGeom prst="line">
-            <a:avLst/>
-          </a:prstGeom>
-          <a:noFill/>
-          <a:ln w="25400">
-            <a:solidFill>
-              <a:srgbClr val="8C64E1"/>
-            </a:solidFill>
-            <a:prstDash val="solid"/>
-            <a:headEnd type="none"/>
-            <a:tailEnd type="triangle"/>
-          </a:ln>
-        </p:spPr>
-      </p:sp>
-      <p:sp>
-        <p:nvSpPr>
-          <p:cNvPr id="12" name="Shape 9"/>
-          <p:cNvSpPr/>
-          <p:nvPr/>
-        </p:nvSpPr>
-        <p:spPr>
-          <a:xfrm>
-            <a:off x="6492240" y="1508760"/>
-            <a:ext cx="2194560" cy="960120"/>
+              <a:t>bits / bytes</a:t>
+            </a:r>
+            <a:endParaRPr lang="en-US" sz="1900" dirty="0"/>
+          </a:p>
+        </p:txBody>
+      </p:sp>
+      <p:sp>
+        <p:nvSpPr>
+          <p:cNvPr id="17" name="Shape 14"/>
+          <p:cNvSpPr/>
+          <p:nvPr/>
+        </p:nvSpPr>
+        <p:spPr>
+          <a:xfrm>
+            <a:off x="2240280" y="2743200"/>
+            <a:ext cx="7680960" cy="502920"/>
           </a:xfrm>
           <a:prstGeom prst="roundRect">
             <a:avLst>
-              <a:gd name="adj" fmla="val 11429"/>
+              <a:gd name="adj" fmla="val 32727"/>
             </a:avLst>
           </a:prstGeom>
           <a:solidFill>
-            <a:srgbClr val="F7F4FF"/>
-          </a:solidFill>
-          <a:ln w="15240">
+            <a:srgbClr val="F6F3FF"/>
+          </a:solidFill>
+          <a:ln w="13970">
             <a:solidFill>
               <a:srgbClr val="8C64E1"/>
             </a:solidFill>
@@ -9979,14 +10287,14 @@
       </p:sp>
       <p:sp>
         <p:nvSpPr>
-          <p:cNvPr id="13" name="Text 10"/>
-          <p:cNvSpPr/>
-          <p:nvPr/>
-        </p:nvSpPr>
-        <p:spPr>
-          <a:xfrm>
-            <a:off x="6629400" y="1618488"/>
-            <a:ext cx="1920240" cy="740664"/>
+          <p:cNvPr id="18" name="Text 15"/>
+          <p:cNvSpPr/>
+          <p:nvPr/>
+        </p:nvSpPr>
+        <p:spPr>
+          <a:xfrm>
+            <a:off x="2331720" y="2770632"/>
+            <a:ext cx="7498080" cy="448056"/>
           </a:xfrm>
           <a:prstGeom prst="rect">
             <a:avLst/>
@@ -10004,7 +10312,7 @@
               <a:buNone/>
             </a:pPr>
             <a:r>
-              <a:rPr lang="en-US" sz="1800" b="1" dirty="0">
+              <a:rPr lang="en-US" sz="2400" b="1" dirty="0">
                 <a:solidFill>
                   <a:srgbClr val="8C64E1"/>
                 </a:solidFill>
@@ -10012,74 +10320,100 @@
                 <a:ea typeface="Alibaba PuHuiTi 3.0 85 Bold" pitchFamily="34" charset="-122"/>
                 <a:cs typeface="Alibaba PuHuiTi 3.0 85 Bold" pitchFamily="34" charset="-120"/>
               </a:rPr>
-              <a:t>Quantization</a:t>
-            </a:r>
-            <a:endParaRPr lang="en-US" sz="1800" dirty="0"/>
-          </a:p>
+              <a:t>Sampling → Quantization → Encoding</a:t>
+            </a:r>
+            <a:endParaRPr lang="en-US" sz="2400" dirty="0"/>
+          </a:p>
+        </p:txBody>
+      </p:sp>
+      <p:sp>
+        <p:nvSpPr>
+          <p:cNvPr id="19" name="Shape 16"/>
+          <p:cNvSpPr/>
+          <p:nvPr/>
+        </p:nvSpPr>
+        <p:spPr>
+          <a:xfrm>
+            <a:off x="2057400" y="3794760"/>
+            <a:ext cx="8138160" cy="502920"/>
+          </a:xfrm>
+          <a:prstGeom prst="roundRect">
+            <a:avLst>
+              <a:gd name="adj" fmla="val 32727"/>
+            </a:avLst>
+          </a:prstGeom>
+          <a:solidFill>
+            <a:srgbClr val="FFFFFF"/>
+          </a:solidFill>
+          <a:ln w="13970">
+            <a:solidFill>
+              <a:srgbClr val="007C9B"/>
+            </a:solidFill>
+            <a:prstDash val="solid"/>
+          </a:ln>
+        </p:spPr>
+      </p:sp>
+      <p:sp>
+        <p:nvSpPr>
+          <p:cNvPr id="20" name="Text 17"/>
+          <p:cNvSpPr/>
+          <p:nvPr/>
+        </p:nvSpPr>
+        <p:spPr>
+          <a:xfrm>
+            <a:off x="2148840" y="3822192"/>
+            <a:ext cx="7955280" cy="448056"/>
+          </a:xfrm>
+          <a:prstGeom prst="rect">
+            <a:avLst/>
+          </a:prstGeom>
+          <a:noFill/>
+          <a:ln/>
+        </p:spPr>
+        <p:txBody>
+          <a:bodyPr wrap="square" rtlCol="0" anchor="ctr">
+            <a:normAutofit/>
+          </a:bodyPr>
+          <a:lstStyle/>
           <a:p>
             <a:pPr algn="ctr" indent="0" marL="0">
               <a:buNone/>
             </a:pPr>
             <a:r>
-              <a:rPr lang="en-US" sz="1800" b="1" dirty="0">
-                <a:solidFill>
-                  <a:srgbClr val="8C64E1"/>
+              <a:rPr lang="en-US" sz="2200" b="1" dirty="0">
+                <a:solidFill>
+                  <a:srgbClr val="007C9B"/>
                 </a:solidFill>
                 <a:latin typeface="Alibaba PuHuiTi 3.0 85 Bold" pitchFamily="34" charset="0"/>
                 <a:ea typeface="Alibaba PuHuiTi 3.0 85 Bold" pitchFamily="34" charset="-122"/>
                 <a:cs typeface="Alibaba PuHuiTi 3.0 85 Bold" pitchFamily="34" charset="-120"/>
               </a:rPr>
-              <a:t>离散颜色</a:t>
-            </a:r>
-            <a:endParaRPr lang="en-US" sz="1800" dirty="0"/>
-          </a:p>
-        </p:txBody>
-      </p:sp>
-      <p:sp>
-        <p:nvSpPr>
-          <p:cNvPr id="14" name="Shape 11"/>
-          <p:cNvSpPr/>
-          <p:nvPr/>
-        </p:nvSpPr>
-        <p:spPr>
-          <a:xfrm>
-            <a:off x="8686800" y="1993392"/>
-            <a:ext cx="594360" cy="0"/>
-          </a:xfrm>
-          <a:prstGeom prst="line">
-            <a:avLst/>
-          </a:prstGeom>
-          <a:noFill/>
-          <a:ln w="25400">
-            <a:solidFill>
-              <a:srgbClr val="8C64E1"/>
-            </a:solidFill>
-            <a:prstDash val="solid"/>
-            <a:headEnd type="none"/>
-            <a:tailEnd type="triangle"/>
-          </a:ln>
-        </p:spPr>
-      </p:sp>
-      <p:sp>
-        <p:nvSpPr>
-          <p:cNvPr id="15" name="Shape 12"/>
-          <p:cNvSpPr/>
-          <p:nvPr/>
-        </p:nvSpPr>
-        <p:spPr>
-          <a:xfrm>
-            <a:off x="9326880" y="1508760"/>
-            <a:ext cx="2194560" cy="960120"/>
+              <a:t>像素值数据量 = W × H × b bits</a:t>
+            </a:r>
+            <a:endParaRPr lang="en-US" sz="2200" dirty="0"/>
+          </a:p>
+        </p:txBody>
+      </p:sp>
+      <p:sp>
+        <p:nvSpPr>
+          <p:cNvPr id="21" name="Shape 18"/>
+          <p:cNvSpPr/>
+          <p:nvPr/>
+        </p:nvSpPr>
+        <p:spPr>
+          <a:xfrm>
+            <a:off x="2331720" y="4663440"/>
+            <a:ext cx="7589520" cy="502920"/>
           </a:xfrm>
           <a:prstGeom prst="roundRect">
             <a:avLst>
-              <a:gd name="adj" fmla="val 11429"/>
+              <a:gd name="adj" fmla="val 32727"/>
             </a:avLst>
           </a:prstGeom>
           <a:solidFill>
-            <a:srgbClr val="F7F4FF"/>
-          </a:solidFill>
-          <a:ln w="15240">
+            <a:srgbClr val="F6F3FF"/>
+          </a:solidFill>
+          <a:ln w="13970">
             <a:solidFill>
               <a:srgbClr val="8C64E1"/>
             </a:solidFill>
@@ -10089,14 +10423,14 @@
       </p:sp>
       <p:sp>
         <p:nvSpPr>
-          <p:cNvPr id="16" name="Text 13"/>
-          <p:cNvSpPr/>
-          <p:nvPr/>
-        </p:nvSpPr>
-        <p:spPr>
-          <a:xfrm>
-            <a:off x="9464040" y="1618488"/>
-            <a:ext cx="1920240" cy="740664"/>
+          <p:cNvPr id="22" name="Text 19"/>
+          <p:cNvSpPr/>
+          <p:nvPr/>
+        </p:nvSpPr>
+        <p:spPr>
+          <a:xfrm>
+            <a:off x="2423160" y="4690872"/>
+            <a:ext cx="7406640" cy="448056"/>
           </a:xfrm>
           <a:prstGeom prst="rect">
             <a:avLst/>
@@ -10114,7 +10448,7 @@
               <a:buNone/>
             </a:pPr>
             <a:r>
-              <a:rPr lang="en-US" sz="1800" b="1" dirty="0">
+              <a:rPr lang="en-US" sz="2200" b="1" dirty="0">
                 <a:solidFill>
                   <a:srgbClr val="8C64E1"/>
                 </a:solidFill>
@@ -10122,222 +10456,7 @@
                 <a:ea typeface="Alibaba PuHuiTi 3.0 85 Bold" pitchFamily="34" charset="-122"/>
                 <a:cs typeface="Alibaba PuHuiTi 3.0 85 Bold" pitchFamily="34" charset="-120"/>
               </a:rPr>
-              <a:t>Encoding</a:t>
-            </a:r>
-            <a:endParaRPr lang="en-US" sz="1800" dirty="0"/>
-          </a:p>
-          <a:p>
-            <a:pPr algn="ctr" indent="0" marL="0">
-              <a:buNone/>
-            </a:pPr>
-            <a:r>
-              <a:rPr lang="en-US" sz="1800" b="1" dirty="0">
-                <a:solidFill>
-                  <a:srgbClr val="8C64E1"/>
-                </a:solidFill>
-                <a:latin typeface="Alibaba PuHuiTi 3.0 85 Bold" pitchFamily="34" charset="0"/>
-                <a:ea typeface="Alibaba PuHuiTi 3.0 85 Bold" pitchFamily="34" charset="-122"/>
-                <a:cs typeface="Alibaba PuHuiTi 3.0 85 Bold" pitchFamily="34" charset="-120"/>
-              </a:rPr>
-              <a:t>bits / bytes</a:t>
-            </a:r>
-            <a:endParaRPr lang="en-US" sz="1800" dirty="0"/>
-          </a:p>
-        </p:txBody>
-      </p:sp>
-      <p:sp>
-        <p:nvSpPr>
-          <p:cNvPr id="17" name="Shape 14"/>
-          <p:cNvSpPr/>
-          <p:nvPr/>
-        </p:nvSpPr>
-        <p:spPr>
-          <a:xfrm>
-            <a:off x="1920240" y="3657600"/>
-            <a:ext cx="2743200" cy="502920"/>
-          </a:xfrm>
-          <a:prstGeom prst="roundRect">
-            <a:avLst>
-              <a:gd name="adj" fmla="val 29091"/>
-            </a:avLst>
-          </a:prstGeom>
-          <a:solidFill>
-            <a:srgbClr val="FFFFFF"/>
-          </a:solidFill>
-          <a:ln w="15240">
-            <a:solidFill>
-              <a:srgbClr val="007C9B"/>
-            </a:solidFill>
-            <a:prstDash val="solid"/>
-          </a:ln>
-        </p:spPr>
-      </p:sp>
-      <p:sp>
-        <p:nvSpPr>
-          <p:cNvPr id="18" name="Text 15"/>
-          <p:cNvSpPr/>
-          <p:nvPr/>
-        </p:nvSpPr>
-        <p:spPr>
-          <a:xfrm>
-            <a:off x="1920240" y="3694176"/>
-            <a:ext cx="2743200" cy="457200"/>
-          </a:xfrm>
-          <a:prstGeom prst="rect">
-            <a:avLst/>
-          </a:prstGeom>
-          <a:noFill/>
-          <a:ln/>
-        </p:spPr>
-        <p:txBody>
-          <a:bodyPr wrap="square" rtlCol="0" anchor="ctr"/>
-          <a:lstStyle/>
-          <a:p>
-            <a:pPr algn="ctr" indent="0" marL="0">
-              <a:buNone/>
-            </a:pPr>
-            <a:r>
-              <a:rPr lang="en-US" sz="2000" b="1" dirty="0">
-                <a:solidFill>
-                  <a:srgbClr val="007C9B"/>
-                </a:solidFill>
-                <a:latin typeface="Alibaba PuHuiTi 3.0 85 Bold" pitchFamily="34" charset="0"/>
-                <a:ea typeface="Alibaba PuHuiTi 3.0 85 Bold" pitchFamily="34" charset="-122"/>
-                <a:cs typeface="Alibaba PuHuiTi 3.0 85 Bold" pitchFamily="34" charset="-120"/>
-              </a:rPr>
-              <a:t>像素数 = W × H</a:t>
-            </a:r>
-            <a:endParaRPr lang="en-US" sz="2000" dirty="0"/>
-          </a:p>
-        </p:txBody>
-      </p:sp>
-      <p:sp>
-        <p:nvSpPr>
-          <p:cNvPr id="19" name="Shape 16"/>
-          <p:cNvSpPr/>
-          <p:nvPr/>
-        </p:nvSpPr>
-        <p:spPr>
-          <a:xfrm>
-            <a:off x="4937760" y="3657600"/>
-            <a:ext cx="5212080" cy="502920"/>
-          </a:xfrm>
-          <a:prstGeom prst="roundRect">
-            <a:avLst>
-              <a:gd name="adj" fmla="val 29091"/>
-            </a:avLst>
-          </a:prstGeom>
-          <a:solidFill>
-            <a:srgbClr val="FFFFFF"/>
-          </a:solidFill>
-          <a:ln w="15240">
-            <a:solidFill>
-              <a:srgbClr val="007C9B"/>
-            </a:solidFill>
-            <a:prstDash val="solid"/>
-          </a:ln>
-        </p:spPr>
-      </p:sp>
-      <p:sp>
-        <p:nvSpPr>
-          <p:cNvPr id="20" name="Text 17"/>
-          <p:cNvSpPr/>
-          <p:nvPr/>
-        </p:nvSpPr>
-        <p:spPr>
-          <a:xfrm>
-            <a:off x="4937760" y="3694176"/>
-            <a:ext cx="5212080" cy="457200"/>
-          </a:xfrm>
-          <a:prstGeom prst="rect">
-            <a:avLst/>
-          </a:prstGeom>
-          <a:noFill/>
-          <a:ln/>
-        </p:spPr>
-        <p:txBody>
-          <a:bodyPr wrap="square" rtlCol="0" anchor="ctr"/>
-          <a:lstStyle/>
-          <a:p>
-            <a:pPr algn="ctr" indent="0" marL="0">
-              <a:buNone/>
-            </a:pPr>
-            <a:r>
-              <a:rPr lang="en-US" sz="2000" b="1" dirty="0">
-                <a:solidFill>
-                  <a:srgbClr val="007C9B"/>
-                </a:solidFill>
-                <a:latin typeface="Alibaba PuHuiTi 3.0 85 Bold" pitchFamily="34" charset="0"/>
-                <a:ea typeface="Alibaba PuHuiTi 3.0 85 Bold" pitchFamily="34" charset="-122"/>
-                <a:cs typeface="Alibaba PuHuiTi 3.0 85 Bold" pitchFamily="34" charset="-120"/>
-              </a:rPr>
-              <a:t>像素值数据量 = W × H × b bits</a:t>
-            </a:r>
-            <a:endParaRPr lang="en-US" sz="2000" dirty="0"/>
-          </a:p>
-        </p:txBody>
-      </p:sp>
-      <p:sp>
-        <p:nvSpPr>
-          <p:cNvPr id="21" name="Shape 18"/>
-          <p:cNvSpPr/>
-          <p:nvPr/>
-        </p:nvSpPr>
-        <p:spPr>
-          <a:xfrm>
-            <a:off x="3200400" y="4663440"/>
-            <a:ext cx="5760720" cy="502920"/>
-          </a:xfrm>
-          <a:prstGeom prst="roundRect">
-            <a:avLst>
-              <a:gd name="adj" fmla="val 29091"/>
-            </a:avLst>
-          </a:prstGeom>
-          <a:solidFill>
-            <a:srgbClr val="F7F4FF"/>
-          </a:solidFill>
-          <a:ln w="15240">
-            <a:solidFill>
-              <a:srgbClr val="8C64E1"/>
-            </a:solidFill>
-            <a:prstDash val="solid"/>
-          </a:ln>
-        </p:spPr>
-      </p:sp>
-      <p:sp>
-        <p:nvSpPr>
-          <p:cNvPr id="22" name="Text 19"/>
-          <p:cNvSpPr/>
-          <p:nvPr/>
-        </p:nvSpPr>
-        <p:spPr>
-          <a:xfrm>
-            <a:off x="3200400" y="4700016"/>
-            <a:ext cx="5760720" cy="457200"/>
-          </a:xfrm>
-          <a:prstGeom prst="rect">
-            <a:avLst/>
-          </a:prstGeom>
-          <a:noFill/>
-          <a:ln/>
-        </p:spPr>
-        <p:txBody>
-          <a:bodyPr wrap="square" rtlCol="0" anchor="ctr"/>
-          <a:lstStyle/>
-          <a:p>
-            <a:pPr algn="ctr" indent="0" marL="0">
-              <a:buNone/>
-            </a:pPr>
-            <a:r>
-              <a:rPr lang="en-US" sz="2200" b="1" dirty="0">
-                <a:solidFill>
-                  <a:srgbClr val="8C64E1"/>
-                </a:solidFill>
-                <a:latin typeface="Alibaba PuHuiTi 3.0 85 Bold" pitchFamily="34" charset="0"/>
-                <a:ea typeface="Alibaba PuHuiTi 3.0 85 Bold" pitchFamily="34" charset="-122"/>
-                <a:cs typeface="Alibaba PuHuiTi 3.0 85 Bold" pitchFamily="34" charset="-120"/>
-              </a:rPr>
-              <a:t>24-bit RGB：W × H × 3 bytes</a:t>
+              <a:t>本课 24-bit RGB：W × H × 3 bytes</a:t>
             </a:r>
             <a:endParaRPr lang="en-US" sz="2200" dirty="0"/>
           </a:p>
@@ -10384,7 +10503,7 @@
         <p:spPr>
           <a:xfrm>
             <a:off x="0" y="0"/>
-            <a:ext cx="12191695" cy="101498"/>
+            <a:ext cx="12191695" cy="100584"/>
           </a:xfrm>
           <a:prstGeom prst="rect">
             <a:avLst/>
@@ -10408,8 +10527,8 @@
         </p:nvSpPr>
         <p:spPr>
           <a:xfrm>
-            <a:off x="0" y="6756502"/>
-            <a:ext cx="12191695" cy="101498"/>
+            <a:off x="0" y="6757416"/>
+            <a:ext cx="12191695" cy="100584"/>
           </a:xfrm>
           <a:prstGeom prst="rect">
             <a:avLst/>
@@ -10433,8 +10552,8 @@
         </p:nvSpPr>
         <p:spPr>
           <a:xfrm>
-            <a:off x="608076" y="502920"/>
-            <a:ext cx="10972800" cy="685800"/>
+            <a:off x="594360" y="438912"/>
+            <a:ext cx="11064240" cy="621792"/>
           </a:xfrm>
           <a:prstGeom prst="rect">
             <a:avLst/>
@@ -10452,7 +10571,7 @@
               <a:buNone/>
             </a:pPr>
             <a:r>
-              <a:rPr lang="en-US" sz="3400" b="1" dirty="0">
+              <a:rPr lang="en-US" sz="3000" b="1" dirty="0">
                 <a:solidFill>
                   <a:srgbClr val="262626"/>
                 </a:solidFill>
@@ -10462,7 +10581,7 @@
               </a:rPr>
               <a:t>Q1 如果显示尺寸一样，为什么这些图片看起来不同？</a:t>
             </a:r>
-            <a:endParaRPr lang="en-US" sz="3400" dirty="0"/>
+            <a:endParaRPr lang="en-US" sz="3000" dirty="0"/>
           </a:p>
         </p:txBody>
       </p:sp>
@@ -10474,8 +10593,8 @@
         </p:nvSpPr>
         <p:spPr>
           <a:xfrm>
-            <a:off x="960120" y="1691640"/>
-            <a:ext cx="4572000" cy="1280160"/>
+            <a:off x="914400" y="1645920"/>
+            <a:ext cx="6400800" cy="457200"/>
           </a:xfrm>
           <a:prstGeom prst="rect">
             <a:avLst/>
@@ -10493,65 +10612,76 @@
               <a:buNone/>
             </a:pPr>
             <a:r>
-              <a:rPr lang="en-US" sz="2400" b="1" dirty="0">
-                <a:solidFill>
-                  <a:srgbClr val="000000"/>
+              <a:rPr lang="en-US" sz="2600" b="1" dirty="0">
+                <a:solidFill>
+                  <a:srgbClr val="262626"/>
+                </a:solidFill>
+                <a:latin typeface="Alibaba PuHuiTi 3.0 85 Bold" pitchFamily="34" charset="0"/>
+                <a:ea typeface="Alibaba PuHuiTi 3.0 85 Bold" pitchFamily="34" charset="-122"/>
+                <a:cs typeface="Alibaba PuHuiTi 3.0 85 Bold" pitchFamily="34" charset="-120"/>
+              </a:rPr>
+              <a:t>同一张测试图，显示成一样大。</a:t>
+            </a:r>
+            <a:endParaRPr lang="en-US" sz="2600" dirty="0"/>
+          </a:p>
+        </p:txBody>
+      </p:sp>
+      <p:sp>
+        <p:nvSpPr>
+          <p:cNvPr id="7" name="Text 4"/>
+          <p:cNvSpPr/>
+          <p:nvPr/>
+        </p:nvSpPr>
+        <p:spPr>
+          <a:xfrm>
+            <a:off x="914400" y="2514600"/>
+            <a:ext cx="5760720" cy="1600200"/>
+          </a:xfrm>
+          <a:prstGeom prst="rect">
+            <a:avLst/>
+          </a:prstGeom>
+          <a:noFill/>
+          <a:ln/>
+        </p:spPr>
+        <p:txBody>
+          <a:bodyPr wrap="square" rtlCol="0" anchor="ctr">
+            <a:normAutofit/>
+          </a:bodyPr>
+          <a:lstStyle/>
+          <a:p>
+            <a:pPr algn="l" indent="0" marL="0">
+              <a:buNone/>
+            </a:pPr>
+            <a:r>
+              <a:rPr lang="en-US" sz="2300" dirty="0">
+                <a:solidFill>
+                  <a:srgbClr val="262626"/>
                 </a:solidFill>
                 <a:latin typeface="Alibaba PuHuiTi 3.0 55 Regular" pitchFamily="34" charset="0"/>
                 <a:ea typeface="Alibaba PuHuiTi 3.0 55 Regular" pitchFamily="34" charset="-122"/>
                 <a:cs typeface="Alibaba PuHuiTi 3.0 55 Regular" pitchFamily="34" charset="-120"/>
               </a:rPr>
-              <a:t>同一张测试图，显示成一样大。</a:t>
-            </a:r>
-            <a:endParaRPr lang="en-US" sz="2400" dirty="0"/>
+              <a:t>预测：</a:t>
+            </a:r>
+            <a:endParaRPr lang="en-US" sz="2300" dirty="0"/>
           </a:p>
           <a:p>
             <a:pPr algn="l" indent="0" marL="0">
               <a:buNone/>
             </a:pPr>
-            <a:endParaRPr lang="en-US" sz="2400" dirty="0"/>
-          </a:p>
-          <a:p>
-            <a:pPr algn="l" indent="0" marL="0">
-              <a:buNone/>
-            </a:pPr>
-            <a:r>
-              <a:rPr lang="en-US" sz="2400" b="1" dirty="0">
-                <a:solidFill>
-                  <a:srgbClr val="000000"/>
+            <a:r>
+              <a:rPr lang="en-US" sz="2300" dirty="0">
+                <a:solidFill>
+                  <a:srgbClr val="262626"/>
                 </a:solidFill>
                 <a:latin typeface="Alibaba PuHuiTi 3.0 55 Regular" pitchFamily="34" charset="0"/>
                 <a:ea typeface="Alibaba PuHuiTi 3.0 55 Regular" pitchFamily="34" charset="-122"/>
                 <a:cs typeface="Alibaba PuHuiTi 3.0 55 Regular" pitchFamily="34" charset="-120"/>
               </a:rPr>
-              <a:t>预测：</a:t>
-            </a:r>
-            <a:endParaRPr lang="en-US" sz="2400" dirty="0"/>
-          </a:p>
-        </p:txBody>
-      </p:sp>
-      <p:sp>
-        <p:nvSpPr>
-          <p:cNvPr id="7" name="Text 4"/>
-          <p:cNvSpPr/>
-          <p:nvPr/>
-        </p:nvSpPr>
-        <p:spPr>
-          <a:xfrm>
-            <a:off x="960120" y="3063240"/>
-            <a:ext cx="5486400" cy="1325880"/>
-          </a:xfrm>
-          <a:prstGeom prst="rect">
-            <a:avLst/>
-          </a:prstGeom>
-          <a:noFill/>
-          <a:ln/>
-        </p:spPr>
-        <p:txBody>
-          <a:bodyPr wrap="square" rtlCol="0" anchor="ctr">
-            <a:normAutofit/>
-          </a:bodyPr>
-          <a:lstStyle/>
+              <a:t>1. 哪一张保留最多细节？</a:t>
+            </a:r>
+            <a:endParaRPr lang="en-US" sz="2300" dirty="0"/>
+          </a:p>
           <a:p>
             <a:pPr algn="l" indent="0" marL="0">
               <a:buNone/>
@@ -10559,13 +10689,13 @@
             <a:r>
               <a:rPr lang="en-US" sz="2300" dirty="0">
                 <a:solidFill>
-                  <a:srgbClr val="000000"/>
+                  <a:srgbClr val="262626"/>
                 </a:solidFill>
                 <a:latin typeface="Alibaba PuHuiTi 3.0 55 Regular" pitchFamily="34" charset="0"/>
                 <a:ea typeface="Alibaba PuHuiTi 3.0 55 Regular" pitchFamily="34" charset="-122"/>
                 <a:cs typeface="Alibaba PuHuiTi 3.0 55 Regular" pitchFamily="34" charset="-120"/>
               </a:rPr>
-              <a:t>1. 哪一张能保留最多细节？</a:t>
+              <a:t>2. 8×8 到底表示什么？</a:t>
             </a:r>
             <a:endParaRPr lang="en-US" sz="2300" dirty="0"/>
           </a:p>
@@ -10576,33 +10706,16 @@
             <a:r>
               <a:rPr lang="en-US" sz="2300" dirty="0">
                 <a:solidFill>
-                  <a:srgbClr val="000000"/>
+                  <a:srgbClr val="262626"/>
                 </a:solidFill>
                 <a:latin typeface="Alibaba PuHuiTi 3.0 55 Regular" pitchFamily="34" charset="0"/>
                 <a:ea typeface="Alibaba PuHuiTi 3.0 55 Regular" pitchFamily="34" charset="-122"/>
                 <a:cs typeface="Alibaba PuHuiTi 3.0 55 Regular" pitchFamily="34" charset="-120"/>
               </a:rPr>
-              <a:t>2. 8×8 到底表示什么？</a:t>
+              <a:t>3. 低像素数时，最先丢失什么？</a:t>
             </a:r>
             <a:endParaRPr lang="en-US" sz="2300" dirty="0"/>
           </a:p>
-          <a:p>
-            <a:pPr algn="l" indent="0" marL="0">
-              <a:buNone/>
-            </a:pPr>
-            <a:r>
-              <a:rPr lang="en-US" sz="2300" dirty="0">
-                <a:solidFill>
-                  <a:srgbClr val="000000"/>
-                </a:solidFill>
-                <a:latin typeface="Alibaba PuHuiTi 3.0 55 Regular" pitchFamily="34" charset="0"/>
-                <a:ea typeface="Alibaba PuHuiTi 3.0 55 Regular" pitchFamily="34" charset="-122"/>
-                <a:cs typeface="Alibaba PuHuiTi 3.0 55 Regular" pitchFamily="34" charset="-120"/>
-              </a:rPr>
-              <a:t>3. 低像素数时，最先丢失什么？</a:t>
-            </a:r>
-            <a:endParaRPr lang="en-US" sz="2300" dirty="0"/>
-          </a:p>
         </p:txBody>
       </p:sp>
       <p:sp>
@@ -10613,18 +10726,18 @@
         </p:nvSpPr>
         <p:spPr>
           <a:xfrm>
-            <a:off x="7498080" y="2240280"/>
-            <a:ext cx="2834640" cy="1645920"/>
+            <a:off x="7680960" y="2286000"/>
+            <a:ext cx="2926080" cy="1417320"/>
           </a:xfrm>
           <a:prstGeom prst="roundRect">
             <a:avLst>
-              <a:gd name="adj" fmla="val 6667"/>
+              <a:gd name="adj" fmla="val 7742"/>
             </a:avLst>
           </a:prstGeom>
           <a:solidFill>
-            <a:srgbClr val="F7F4FF"/>
-          </a:solidFill>
-          <a:ln w="15240">
+            <a:srgbClr val="F6F3FF"/>
+          </a:solidFill>
+          <a:ln w="13970">
             <a:solidFill>
               <a:srgbClr val="8C64E1"/>
             </a:solidFill>
@@ -10640,8 +10753,8 @@
         </p:nvSpPr>
         <p:spPr>
           <a:xfrm>
-            <a:off x="7635240" y="2350008"/>
-            <a:ext cx="2560320" cy="1426464"/>
+            <a:off x="7790688" y="2377440"/>
+            <a:ext cx="2706624" cy="1234440"/>
           </a:xfrm>
           <a:prstGeom prst="rect">
             <a:avLst/>
@@ -10659,7 +10772,7 @@
               <a:buNone/>
             </a:pPr>
             <a:r>
-              <a:rPr lang="en-US" sz="2800" b="1" dirty="0">
+              <a:rPr lang="en-US" sz="2700" b="1" dirty="0">
                 <a:solidFill>
                   <a:srgbClr val="8C64E1"/>
                 </a:solidFill>
@@ -10669,14 +10782,14 @@
               </a:rPr>
               <a:t>先预测</a:t>
             </a:r>
-            <a:endParaRPr lang="en-US" sz="2800" dirty="0"/>
+            <a:endParaRPr lang="en-US" sz="2700" dirty="0"/>
           </a:p>
           <a:p>
             <a:pPr algn="ctr" indent="0" marL="0">
               <a:buNone/>
             </a:pPr>
             <a:r>
-              <a:rPr lang="en-US" sz="2800" b="1" dirty="0">
+              <a:rPr lang="en-US" sz="2700" b="1" dirty="0">
                 <a:solidFill>
                   <a:srgbClr val="8C64E1"/>
                 </a:solidFill>
@@ -10686,7 +10799,7 @@
               </a:rPr>
               <a:t>再看证据</a:t>
             </a:r>
-            <a:endParaRPr lang="en-US" sz="2800" dirty="0"/>
+            <a:endParaRPr lang="en-US" sz="2700" dirty="0"/>
           </a:p>
         </p:txBody>
       </p:sp>
@@ -10731,7 +10844,7 @@
         <p:spPr>
           <a:xfrm>
             <a:off x="0" y="0"/>
-            <a:ext cx="12191695" cy="101498"/>
+            <a:ext cx="12191695" cy="100584"/>
           </a:xfrm>
           <a:prstGeom prst="rect">
             <a:avLst/>
@@ -10755,8 +10868,8 @@
         </p:nvSpPr>
         <p:spPr>
           <a:xfrm>
-            <a:off x="0" y="6756502"/>
-            <a:ext cx="12191695" cy="101498"/>
+            <a:off x="0" y="6757416"/>
+            <a:ext cx="12191695" cy="100584"/>
           </a:xfrm>
           <a:prstGeom prst="rect">
             <a:avLst/>
@@ -10780,8 +10893,8 @@
         </p:nvSpPr>
         <p:spPr>
           <a:xfrm>
-            <a:off x="608076" y="502920"/>
-            <a:ext cx="10972800" cy="685800"/>
+            <a:off x="594360" y="438912"/>
+            <a:ext cx="11064240" cy="621792"/>
           </a:xfrm>
           <a:prstGeom prst="rect">
             <a:avLst/>
@@ -10799,7 +10912,7 @@
               <a:buNone/>
             </a:pPr>
             <a:r>
-              <a:rPr lang="en-US" sz="3400" b="1" dirty="0">
+              <a:rPr lang="en-US" sz="3000" b="1" dirty="0">
                 <a:solidFill>
                   <a:srgbClr val="262626"/>
                 </a:solidFill>
@@ -10807,15 +10920,83 @@
                 <a:ea typeface="Alibaba PuHuiTi 3.0 115 Black" pitchFamily="34" charset="-122"/>
                 <a:cs typeface="Alibaba PuHuiTi 3.0 115 Black" pitchFamily="34" charset="-120"/>
               </a:rPr>
-              <a:t>Q1 证据页 A：像素数量减少，细节怎样变化？</a:t>
-            </a:r>
-            <a:endParaRPr lang="en-US" sz="3400" dirty="0"/>
+              <a:t>Q1 如果显示尺寸一样，为什么这些图片看起来不同？</a:t>
+            </a:r>
+            <a:endParaRPr lang="en-US" sz="3000" dirty="0"/>
+          </a:p>
+        </p:txBody>
+      </p:sp>
+      <p:sp>
+        <p:nvSpPr>
+          <p:cNvPr id="6" name="Shape 3"/>
+          <p:cNvSpPr/>
+          <p:nvPr/>
+        </p:nvSpPr>
+        <p:spPr>
+          <a:xfrm>
+            <a:off x="3794760" y="1234440"/>
+            <a:ext cx="4663440" cy="411480"/>
+          </a:xfrm>
+          <a:prstGeom prst="roundRect">
+            <a:avLst>
+              <a:gd name="adj" fmla="val 40000"/>
+            </a:avLst>
+          </a:prstGeom>
+          <a:solidFill>
+            <a:srgbClr val="F6F3FF"/>
+          </a:solidFill>
+          <a:ln w="13970">
+            <a:solidFill>
+              <a:srgbClr val="8C64E1"/>
+            </a:solidFill>
+            <a:prstDash val="solid"/>
+          </a:ln>
+        </p:spPr>
+      </p:sp>
+      <p:sp>
+        <p:nvSpPr>
+          <p:cNvPr id="7" name="Text 4"/>
+          <p:cNvSpPr/>
+          <p:nvPr/>
+        </p:nvSpPr>
+        <p:spPr>
+          <a:xfrm>
+            <a:off x="3886200" y="1261872"/>
+            <a:ext cx="4480560" cy="356616"/>
+          </a:xfrm>
+          <a:prstGeom prst="rect">
+            <a:avLst/>
+          </a:prstGeom>
+          <a:noFill/>
+          <a:ln/>
+        </p:spPr>
+        <p:txBody>
+          <a:bodyPr wrap="square" rtlCol="0" anchor="ctr">
+            <a:normAutofit/>
+          </a:bodyPr>
+          <a:lstStyle/>
+          <a:p>
+            <a:pPr algn="ctr" indent="0" marL="0">
+              <a:buNone/>
+            </a:pPr>
+            <a:r>
+              <a:rPr lang="en-US" sz="1800" b="1" dirty="0">
+                <a:solidFill>
+                  <a:srgbClr val="8C64E1"/>
+                </a:solidFill>
+                <a:latin typeface="Alibaba PuHuiTi 3.0 85 Bold" pitchFamily="34" charset="0"/>
+                <a:ea typeface="Alibaba PuHuiTi 3.0 85 Bold" pitchFamily="34" charset="-122"/>
+                <a:cs typeface="Alibaba PuHuiTi 3.0 85 Bold" pitchFamily="34" charset="-120"/>
+              </a:rPr>
+              <a:t>证据 A：256 / 64 / 32</a:t>
+            </a:r>
+            <a:endParaRPr lang="en-US" sz="1800" dirty="0"/>
           </a:p>
         </p:txBody>
       </p:sp>
       <p:pic>
         <p:nvPicPr>
-          <p:cNvPr id="6" name="Image 0" descr="/mnt/data/fix/1-2-encoding/1-2-3-image-encoding/assets/fallback/sampling-256.png">    </p:cNvPr>
+          <p:cNvPr id="8" name="Image 0" descr="/mnt/data/fix/1-2-encoding/1-2-3-image-encoding/assets/fallback/sampling-256.png">    </p:cNvPr>
           <p:cNvPicPr>
             <a:picLocks noChangeAspect="1"/>
           </p:cNvPicPr>
@@ -10828,8 +11009,8 @@
         </p:blipFill>
         <p:spPr>
           <a:xfrm>
-            <a:off x="822960" y="1600200"/>
-            <a:ext cx="3200400" cy="3200400"/>
+            <a:off x="777240" y="1874520"/>
+            <a:ext cx="3154680" cy="3154680"/>
           </a:xfrm>
           <a:prstGeom prst="rect">
             <a:avLst/>
@@ -10838,14 +11019,14 @@
       </p:pic>
       <p:sp>
         <p:nvSpPr>
-          <p:cNvPr id="7" name="Text 3"/>
-          <p:cNvSpPr/>
-          <p:nvPr/>
-        </p:nvSpPr>
-        <p:spPr>
-          <a:xfrm>
-            <a:off x="822960" y="4855464"/>
-            <a:ext cx="3200400" cy="256032"/>
+          <p:cNvPr id="9" name="Text 5"/>
+          <p:cNvSpPr/>
+          <p:nvPr/>
+        </p:nvSpPr>
+        <p:spPr>
+          <a:xfrm>
+            <a:off x="777240" y="5102352"/>
+            <a:ext cx="3154680" cy="274320"/>
           </a:xfrm>
           <a:prstGeom prst="rect">
             <a:avLst/>
@@ -10863,13 +11044,13 @@
               <a:buNone/>
             </a:pPr>
             <a:r>
-              <a:rPr lang="en-US" sz="1400" dirty="0">
+              <a:rPr lang="en-US" sz="1400" b="1" dirty="0">
                 <a:solidFill>
                   <a:srgbClr val="262626"/>
                 </a:solidFill>
-                <a:latin typeface="Alibaba PuHuiTi 3.0 55 Regular" pitchFamily="34" charset="0"/>
-                <a:ea typeface="Alibaba PuHuiTi 3.0 55 Regular" pitchFamily="34" charset="-122"/>
-                <a:cs typeface="Alibaba PuHuiTi 3.0 55 Regular" pitchFamily="34" charset="-120"/>
+                <a:latin typeface="Alibaba PuHuiTi 3.0 85 Bold" pitchFamily="34" charset="0"/>
+                <a:ea typeface="Alibaba PuHuiTi 3.0 85 Bold" pitchFamily="34" charset="-122"/>
+                <a:cs typeface="Alibaba PuHuiTi 3.0 85 Bold" pitchFamily="34" charset="-120"/>
               </a:rPr>
               <a:t>256×256</a:t>
             </a:r>
@@ -10879,7 +11060,7 @@
       </p:sp>
       <p:pic>
         <p:nvPicPr>
-          <p:cNvPr id="8" name="Image 1" descr="/mnt/data/fix/1-2-encoding/1-2-3-image-encoding/assets/fallback/sampling-64.png">    </p:cNvPr>
+          <p:cNvPr id="10" name="Image 1" descr="/mnt/data/fix/1-2-encoding/1-2-3-image-encoding/assets/fallback/sampling-64.png">    </p:cNvPr>
           <p:cNvPicPr>
             <a:picLocks noChangeAspect="1"/>
           </p:cNvPicPr>
@@ -10892,8 +11073,8 @@
         </p:blipFill>
         <p:spPr>
           <a:xfrm>
-            <a:off x="4480560" y="1600200"/>
-            <a:ext cx="3200400" cy="3200400"/>
+            <a:off x="4480560" y="1874520"/>
+            <a:ext cx="3154680" cy="3154680"/>
           </a:xfrm>
           <a:prstGeom prst="rect">
             <a:avLst/>
@@ -10902,14 +11083,14 @@
       </p:pic>
       <p:sp>
         <p:nvSpPr>
-          <p:cNvPr id="9" name="Text 4"/>
-          <p:cNvSpPr/>
-          <p:nvPr/>
-        </p:nvSpPr>
-        <p:spPr>
-          <a:xfrm>
-            <a:off x="4480560" y="4855464"/>
-            <a:ext cx="3200400" cy="256032"/>
+          <p:cNvPr id="11" name="Text 6"/>
+          <p:cNvSpPr/>
+          <p:nvPr/>
+        </p:nvSpPr>
+        <p:spPr>
+          <a:xfrm>
+            <a:off x="4480560" y="5102352"/>
+            <a:ext cx="3154680" cy="274320"/>
           </a:xfrm>
           <a:prstGeom prst="rect">
             <a:avLst/>
@@ -10927,13 +11108,13 @@
               <a:buNone/>
             </a:pPr>
             <a:r>
-              <a:rPr lang="en-US" sz="1400" dirty="0">
+              <a:rPr lang="en-US" sz="1400" b="1" dirty="0">
                 <a:solidFill>
                   <a:srgbClr val="262626"/>
                 </a:solidFill>
-                <a:latin typeface="Alibaba PuHuiTi 3.0 55 Regular" pitchFamily="34" charset="0"/>
-                <a:ea typeface="Alibaba PuHuiTi 3.0 55 Regular" pitchFamily="34" charset="-122"/>
-                <a:cs typeface="Alibaba PuHuiTi 3.0 55 Regular" pitchFamily="34" charset="-120"/>
+                <a:latin typeface="Alibaba PuHuiTi 3.0 85 Bold" pitchFamily="34" charset="0"/>
+                <a:ea typeface="Alibaba PuHuiTi 3.0 85 Bold" pitchFamily="34" charset="-122"/>
+                <a:cs typeface="Alibaba PuHuiTi 3.0 85 Bold" pitchFamily="34" charset="-120"/>
               </a:rPr>
               <a:t>64×64</a:t>
             </a:r>
@@ -10943,7 +11124,7 @@
       </p:sp>
       <p:pic>
         <p:nvPicPr>
-          <p:cNvPr id="10" name="Image 2" descr="/mnt/data/fix/1-2-encoding/1-2-3-image-encoding/assets/fallback/sampling-32.png">    </p:cNvPr>
+          <p:cNvPr id="12" name="Image 2" descr="/mnt/data/fix/1-2-encoding/1-2-3-image-encoding/assets/fallback/sampling-32.png">    </p:cNvPr>
           <p:cNvPicPr>
             <a:picLocks noChangeAspect="1"/>
           </p:cNvPicPr>
@@ -10956,8 +11137,8 @@
         </p:blipFill>
         <p:spPr>
           <a:xfrm>
-            <a:off x="8138160" y="1600200"/>
-            <a:ext cx="3200400" cy="3200400"/>
+            <a:off x="8183880" y="1874520"/>
+            <a:ext cx="3154680" cy="3154680"/>
           </a:xfrm>
           <a:prstGeom prst="rect">
             <a:avLst/>
@@ -10966,14 +11147,14 @@
       </p:pic>
       <p:sp>
         <p:nvSpPr>
-          <p:cNvPr id="11" name="Text 5"/>
-          <p:cNvSpPr/>
-          <p:nvPr/>
-        </p:nvSpPr>
-        <p:spPr>
-          <a:xfrm>
-            <a:off x="8138160" y="4855464"/>
-            <a:ext cx="3200400" cy="256032"/>
+          <p:cNvPr id="13" name="Text 7"/>
+          <p:cNvSpPr/>
+          <p:nvPr/>
+        </p:nvSpPr>
+        <p:spPr>
+          <a:xfrm>
+            <a:off x="8183880" y="5102352"/>
+            <a:ext cx="3154680" cy="274320"/>
           </a:xfrm>
           <a:prstGeom prst="rect">
             <a:avLst/>
@@ -10991,58 +11172,17 @@
               <a:buNone/>
             </a:pPr>
             <a:r>
-              <a:rPr lang="en-US" sz="1400" dirty="0">
+              <a:rPr lang="en-US" sz="1400" b="1" dirty="0">
                 <a:solidFill>
                   <a:srgbClr val="262626"/>
                 </a:solidFill>
-                <a:latin typeface="Alibaba PuHuiTi 3.0 55 Regular" pitchFamily="34" charset="0"/>
-                <a:ea typeface="Alibaba PuHuiTi 3.0 55 Regular" pitchFamily="34" charset="-122"/>
-                <a:cs typeface="Alibaba PuHuiTi 3.0 55 Regular" pitchFamily="34" charset="-120"/>
+                <a:latin typeface="Alibaba PuHuiTi 3.0 85 Bold" pitchFamily="34" charset="0"/>
+                <a:ea typeface="Alibaba PuHuiTi 3.0 85 Bold" pitchFamily="34" charset="-122"/>
+                <a:cs typeface="Alibaba PuHuiTi 3.0 85 Bold" pitchFamily="34" charset="-120"/>
               </a:rPr>
               <a:t>32×32</a:t>
             </a:r>
             <a:endParaRPr lang="en-US" sz="1400" dirty="0"/>
-          </a:p>
-        </p:txBody>
-      </p:sp>
-      <p:sp>
-        <p:nvSpPr>
-          <p:cNvPr id="12" name="Text 6"/>
-          <p:cNvSpPr/>
-          <p:nvPr/>
-        </p:nvSpPr>
-        <p:spPr>
-          <a:xfrm>
-            <a:off x="1005840" y="5623560"/>
-            <a:ext cx="10149840" cy="320040"/>
-          </a:xfrm>
-          <a:prstGeom prst="rect">
-            <a:avLst/>
-          </a:prstGeom>
-          <a:noFill/>
-          <a:ln/>
-        </p:spPr>
-        <p:txBody>
-          <a:bodyPr wrap="square" rtlCol="0" anchor="ctr">
-            <a:normAutofit/>
-          </a:bodyPr>
-          <a:lstStyle/>
-          <a:p>
-            <a:pPr algn="ctr" indent="0" marL="0">
-              <a:buNone/>
-            </a:pPr>
-            <a:r>
-              <a:rPr lang="en-US" sz="1600" dirty="0">
-                <a:solidFill>
-                  <a:srgbClr val="808080"/>
-                </a:solidFill>
-                <a:latin typeface="Alibaba PuHuiTi 3.0 55 Regular" pitchFamily="34" charset="0"/>
-                <a:ea typeface="Alibaba PuHuiTi 3.0 55 Regular" pitchFamily="34" charset="-122"/>
-                <a:cs typeface="Alibaba PuHuiTi 3.0 55 Regular" pitchFamily="34" charset="-120"/>
-              </a:rPr>
-              <a:t>三图显示尺寸相同：比较的是图像本身的 pixel dimensions</a:t>
-            </a:r>
-            <a:endParaRPr lang="en-US" sz="1600" dirty="0"/>
           </a:p>
         </p:txBody>
       </p:sp>
@@ -11087,7 +11227,7 @@
         <p:spPr>
           <a:xfrm>
             <a:off x="0" y="0"/>
-            <a:ext cx="12191695" cy="101498"/>
+            <a:ext cx="12191695" cy="100584"/>
           </a:xfrm>
           <a:prstGeom prst="rect">
             <a:avLst/>
@@ -11111,8 +11251,8 @@
         </p:nvSpPr>
         <p:spPr>
           <a:xfrm>
-            <a:off x="0" y="6756502"/>
-            <a:ext cx="12191695" cy="101498"/>
+            <a:off x="0" y="6757416"/>
+            <a:ext cx="12191695" cy="100584"/>
           </a:xfrm>
           <a:prstGeom prst="rect">
             <a:avLst/>
@@ -11136,8 +11276,8 @@
         </p:nvSpPr>
         <p:spPr>
           <a:xfrm>
-            <a:off x="608076" y="502920"/>
-            <a:ext cx="10972800" cy="685800"/>
+            <a:off x="594360" y="438912"/>
+            <a:ext cx="11064240" cy="621792"/>
           </a:xfrm>
           <a:prstGeom prst="rect">
             <a:avLst/>
@@ -11155,7 +11295,7 @@
               <a:buNone/>
             </a:pPr>
             <a:r>
-              <a:rPr lang="en-US" sz="3400" b="1" dirty="0">
+              <a:rPr lang="en-US" sz="3000" b="1" dirty="0">
                 <a:solidFill>
                   <a:srgbClr val="262626"/>
                 </a:solidFill>
@@ -11163,15 +11303,83 @@
                 <a:ea typeface="Alibaba PuHuiTi 3.0 115 Black" pitchFamily="34" charset="-122"/>
                 <a:cs typeface="Alibaba PuHuiTi 3.0 115 Black" pitchFamily="34" charset="-120"/>
               </a:rPr>
-              <a:t>Q1 证据页 B：低到一定程度，结构会难以辨认</a:t>
-            </a:r>
-            <a:endParaRPr lang="en-US" sz="3400" dirty="0"/>
+              <a:t>Q1 如果显示尺寸一样，为什么这些图片看起来不同？</a:t>
+            </a:r>
+            <a:endParaRPr lang="en-US" sz="3000" dirty="0"/>
+          </a:p>
+        </p:txBody>
+      </p:sp>
+      <p:sp>
+        <p:nvSpPr>
+          <p:cNvPr id="6" name="Shape 3"/>
+          <p:cNvSpPr/>
+          <p:nvPr/>
+        </p:nvSpPr>
+        <p:spPr>
+          <a:xfrm>
+            <a:off x="3977640" y="1234440"/>
+            <a:ext cx="4297680" cy="411480"/>
+          </a:xfrm>
+          <a:prstGeom prst="roundRect">
+            <a:avLst>
+              <a:gd name="adj" fmla="val 40000"/>
+            </a:avLst>
+          </a:prstGeom>
+          <a:solidFill>
+            <a:srgbClr val="F6F3FF"/>
+          </a:solidFill>
+          <a:ln w="13970">
+            <a:solidFill>
+              <a:srgbClr val="8C64E1"/>
+            </a:solidFill>
+            <a:prstDash val="solid"/>
+          </a:ln>
+        </p:spPr>
+      </p:sp>
+      <p:sp>
+        <p:nvSpPr>
+          <p:cNvPr id="7" name="Text 4"/>
+          <p:cNvSpPr/>
+          <p:nvPr/>
+        </p:nvSpPr>
+        <p:spPr>
+          <a:xfrm>
+            <a:off x="4069080" y="1261872"/>
+            <a:ext cx="4114800" cy="356616"/>
+          </a:xfrm>
+          <a:prstGeom prst="rect">
+            <a:avLst/>
+          </a:prstGeom>
+          <a:noFill/>
+          <a:ln/>
+        </p:spPr>
+        <p:txBody>
+          <a:bodyPr wrap="square" rtlCol="0" anchor="ctr">
+            <a:normAutofit/>
+          </a:bodyPr>
+          <a:lstStyle/>
+          <a:p>
+            <a:pPr algn="ctr" indent="0" marL="0">
+              <a:buNone/>
+            </a:pPr>
+            <a:r>
+              <a:rPr lang="en-US" sz="1800" b="1" dirty="0">
+                <a:solidFill>
+                  <a:srgbClr val="8C64E1"/>
+                </a:solidFill>
+                <a:latin typeface="Alibaba PuHuiTi 3.0 85 Bold" pitchFamily="34" charset="0"/>
+                <a:ea typeface="Alibaba PuHuiTi 3.0 85 Bold" pitchFamily="34" charset="-122"/>
+                <a:cs typeface="Alibaba PuHuiTi 3.0 85 Bold" pitchFamily="34" charset="-120"/>
+              </a:rPr>
+              <a:t>证据 B：32 / 16 / 8</a:t>
+            </a:r>
+            <a:endParaRPr lang="en-US" sz="1800" dirty="0"/>
           </a:p>
         </p:txBody>
       </p:sp>
       <p:pic>
         <p:nvPicPr>
-          <p:cNvPr id="6" name="Image 0" descr="/mnt/data/fix/1-2-encoding/1-2-3-image-encoding/assets/fallback/sampling-32.png">    </p:cNvPr>
+          <p:cNvPr id="8" name="Image 0" descr="/mnt/data/fix/1-2-encoding/1-2-3-image-encoding/assets/fallback/sampling-32.png">    </p:cNvPr>
           <p:cNvPicPr>
             <a:picLocks noChangeAspect="1"/>
           </p:cNvPicPr>
@@ -11184,8 +11392,8 @@
         </p:blipFill>
         <p:spPr>
           <a:xfrm>
-            <a:off x="822960" y="1600200"/>
-            <a:ext cx="3200400" cy="3200400"/>
+            <a:off x="777240" y="1874520"/>
+            <a:ext cx="3154680" cy="3154680"/>
           </a:xfrm>
           <a:prstGeom prst="rect">
             <a:avLst/>
@@ -11194,14 +11402,14 @@
       </p:pic>
       <p:sp>
         <p:nvSpPr>
-          <p:cNvPr id="7" name="Text 3"/>
-          <p:cNvSpPr/>
-          <p:nvPr/>
-        </p:nvSpPr>
-        <p:spPr>
-          <a:xfrm>
-            <a:off x="822960" y="4855464"/>
-            <a:ext cx="3200400" cy="256032"/>
+          <p:cNvPr id="9" name="Text 5"/>
+          <p:cNvSpPr/>
+          <p:nvPr/>
+        </p:nvSpPr>
+        <p:spPr>
+          <a:xfrm>
+            <a:off x="777240" y="5102352"/>
+            <a:ext cx="3154680" cy="274320"/>
           </a:xfrm>
           <a:prstGeom prst="rect">
             <a:avLst/>
@@ -11219,13 +11427,13 @@
               <a:buNone/>
             </a:pPr>
             <a:r>
-              <a:rPr lang="en-US" sz="1400" dirty="0">
+              <a:rPr lang="en-US" sz="1400" b="1" dirty="0">
                 <a:solidFill>
                   <a:srgbClr val="262626"/>
                 </a:solidFill>
-                <a:latin typeface="Alibaba PuHuiTi 3.0 55 Regular" pitchFamily="34" charset="0"/>
-                <a:ea typeface="Alibaba PuHuiTi 3.0 55 Regular" pitchFamily="34" charset="-122"/>
-                <a:cs typeface="Alibaba PuHuiTi 3.0 55 Regular" pitchFamily="34" charset="-120"/>
+                <a:latin typeface="Alibaba PuHuiTi 3.0 85 Bold" pitchFamily="34" charset="0"/>
+                <a:ea typeface="Alibaba PuHuiTi 3.0 85 Bold" pitchFamily="34" charset="-122"/>
+                <a:cs typeface="Alibaba PuHuiTi 3.0 85 Bold" pitchFamily="34" charset="-120"/>
               </a:rPr>
               <a:t>32×32</a:t>
             </a:r>
@@ -11235,7 +11443,7 @@
       </p:sp>
       <p:pic>
         <p:nvPicPr>
-          <p:cNvPr id="8" name="Image 1" descr="/mnt/data/fix/1-2-encoding/1-2-3-image-encoding/assets/fallback/sampling-16.png">    </p:cNvPr>
+          <p:cNvPr id="10" name="Image 1" descr="/mnt/data/fix/1-2-encoding/1-2-3-image-encoding/assets/fallback/sampling-16.png">    </p:cNvPr>
           <p:cNvPicPr>
             <a:picLocks noChangeAspect="1"/>
           </p:cNvPicPr>
@@ -11248,8 +11456,8 @@
         </p:blipFill>
         <p:spPr>
           <a:xfrm>
-            <a:off x="4480560" y="1600200"/>
-            <a:ext cx="3200400" cy="3200400"/>
+            <a:off x="4480560" y="1874520"/>
+            <a:ext cx="3154680" cy="3154680"/>
           </a:xfrm>
           <a:prstGeom prst="rect">
             <a:avLst/>
@@ -11258,14 +11466,14 @@
       </p:pic>
       <p:sp>
         <p:nvSpPr>
-          <p:cNvPr id="9" name="Text 4"/>
-          <p:cNvSpPr/>
-          <p:nvPr/>
-        </p:nvSpPr>
-        <p:spPr>
-          <a:xfrm>
-            <a:off x="4480560" y="4855464"/>
-            <a:ext cx="3200400" cy="256032"/>
+          <p:cNvPr id="11" name="Text 6"/>
+          <p:cNvSpPr/>
+          <p:nvPr/>
+        </p:nvSpPr>
+        <p:spPr>
+          <a:xfrm>
+            <a:off x="4480560" y="5102352"/>
+            <a:ext cx="3154680" cy="274320"/>
           </a:xfrm>
           <a:prstGeom prst="rect">
             <a:avLst/>
@@ -11283,13 +11491,13 @@
               <a:buNone/>
             </a:pPr>
             <a:r>
-              <a:rPr lang="en-US" sz="1400" dirty="0">
+              <a:rPr lang="en-US" sz="1400" b="1" dirty="0">
                 <a:solidFill>
                   <a:srgbClr val="262626"/>
                 </a:solidFill>
-                <a:latin typeface="Alibaba PuHuiTi 3.0 55 Regular" pitchFamily="34" charset="0"/>
-                <a:ea typeface="Alibaba PuHuiTi 3.0 55 Regular" pitchFamily="34" charset="-122"/>
-                <a:cs typeface="Alibaba PuHuiTi 3.0 55 Regular" pitchFamily="34" charset="-120"/>
+                <a:latin typeface="Alibaba PuHuiTi 3.0 85 Bold" pitchFamily="34" charset="0"/>
+                <a:ea typeface="Alibaba PuHuiTi 3.0 85 Bold" pitchFamily="34" charset="-122"/>
+                <a:cs typeface="Alibaba PuHuiTi 3.0 85 Bold" pitchFamily="34" charset="-120"/>
               </a:rPr>
               <a:t>16×16</a:t>
             </a:r>
@@ -11299,7 +11507,7 @@
       </p:sp>
       <p:pic>
         <p:nvPicPr>
-          <p:cNvPr id="10" name="Image 2" descr="/mnt/data/fix/1-2-encoding/1-2-3-image-encoding/assets/fallback/sampling-8.png">    </p:cNvPr>
+          <p:cNvPr id="12" name="Image 2" descr="/mnt/data/fix/1-2-encoding/1-2-3-image-encoding/assets/fallback/sampling-8.png">    </p:cNvPr>
           <p:cNvPicPr>
             <a:picLocks noChangeAspect="1"/>
           </p:cNvPicPr>
@@ -11312,8 +11520,8 @@
         </p:blipFill>
         <p:spPr>
           <a:xfrm>
-            <a:off x="8138160" y="1600200"/>
-            <a:ext cx="3200400" cy="3200400"/>
+            <a:off x="8183880" y="1874520"/>
+            <a:ext cx="3154680" cy="3154680"/>
           </a:xfrm>
           <a:prstGeom prst="rect">
             <a:avLst/>
@@ -11322,14 +11530,14 @@
       </p:pic>
       <p:sp>
         <p:nvSpPr>
-          <p:cNvPr id="11" name="Text 5"/>
-          <p:cNvSpPr/>
-          <p:nvPr/>
-        </p:nvSpPr>
-        <p:spPr>
-          <a:xfrm>
-            <a:off x="8138160" y="4855464"/>
-            <a:ext cx="3200400" cy="256032"/>
+          <p:cNvPr id="13" name="Text 7"/>
+          <p:cNvSpPr/>
+          <p:nvPr/>
+        </p:nvSpPr>
+        <p:spPr>
+          <a:xfrm>
+            <a:off x="8183880" y="5102352"/>
+            <a:ext cx="3154680" cy="274320"/>
           </a:xfrm>
           <a:prstGeom prst="rect">
             <a:avLst/>
@@ -11347,13 +11555,13 @@
               <a:buNone/>
             </a:pPr>
             <a:r>
-              <a:rPr lang="en-US" sz="1400" dirty="0">
+              <a:rPr lang="en-US" sz="1400" b="1" dirty="0">
                 <a:solidFill>
                   <a:srgbClr val="262626"/>
                 </a:solidFill>
-                <a:latin typeface="Alibaba PuHuiTi 3.0 55 Regular" pitchFamily="34" charset="0"/>
-                <a:ea typeface="Alibaba PuHuiTi 3.0 55 Regular" pitchFamily="34" charset="-122"/>
-                <a:cs typeface="Alibaba PuHuiTi 3.0 55 Regular" pitchFamily="34" charset="-120"/>
+                <a:latin typeface="Alibaba PuHuiTi 3.0 85 Bold" pitchFamily="34" charset="0"/>
+                <a:ea typeface="Alibaba PuHuiTi 3.0 85 Bold" pitchFamily="34" charset="-122"/>
+                <a:cs typeface="Alibaba PuHuiTi 3.0 85 Bold" pitchFamily="34" charset="-120"/>
               </a:rPr>
               <a:t>8×8</a:t>
             </a:r>
@@ -11363,24 +11571,24 @@
       </p:sp>
       <p:sp>
         <p:nvSpPr>
-          <p:cNvPr id="12" name="Shape 6"/>
-          <p:cNvSpPr/>
-          <p:nvPr/>
-        </p:nvSpPr>
-        <p:spPr>
-          <a:xfrm>
-            <a:off x="2286000" y="5532120"/>
-            <a:ext cx="7589520" cy="502920"/>
+          <p:cNvPr id="14" name="Shape 8"/>
+          <p:cNvSpPr/>
+          <p:nvPr/>
+        </p:nvSpPr>
+        <p:spPr>
+          <a:xfrm>
+            <a:off x="2423160" y="5532120"/>
+            <a:ext cx="7360920" cy="475488"/>
           </a:xfrm>
           <a:prstGeom prst="roundRect">
             <a:avLst>
-              <a:gd name="adj" fmla="val 29091"/>
+              <a:gd name="adj" fmla="val 34615"/>
             </a:avLst>
           </a:prstGeom>
           <a:solidFill>
-            <a:srgbClr val="F7F4FF"/>
-          </a:solidFill>
-          <a:ln w="15240">
+            <a:srgbClr val="F6F3FF"/>
+          </a:solidFill>
+          <a:ln w="13970">
             <a:solidFill>
               <a:srgbClr val="8C64E1"/>
             </a:solidFill>
@@ -11390,23 +11598,25 @@
       </p:sp>
       <p:sp>
         <p:nvSpPr>
-          <p:cNvPr id="13" name="Text 7"/>
-          <p:cNvSpPr/>
-          <p:nvPr/>
-        </p:nvSpPr>
-        <p:spPr>
-          <a:xfrm>
-            <a:off x="2286000" y="5568696"/>
-            <a:ext cx="7589520" cy="457200"/>
-          </a:xfrm>
-          <a:prstGeom prst="rect">
-            <a:avLst/>
-          </a:prstGeom>
-          <a:noFill/>
-          <a:ln/>
-        </p:spPr>
-        <p:txBody>
-          <a:bodyPr wrap="square" rtlCol="0" anchor="ctr"/>
+          <p:cNvPr id="15" name="Text 9"/>
+          <p:cNvSpPr/>
+          <p:nvPr/>
+        </p:nvSpPr>
+        <p:spPr>
+          <a:xfrm>
+            <a:off x="2514600" y="5559552"/>
+            <a:ext cx="7178040" cy="420624"/>
+          </a:xfrm>
+          <a:prstGeom prst="rect">
+            <a:avLst/>
+          </a:prstGeom>
+          <a:noFill/>
+          <a:ln/>
+        </p:spPr>
+        <p:txBody>
+          <a:bodyPr wrap="square" rtlCol="0" anchor="ctr">
+            <a:normAutofit/>
+          </a:bodyPr>
           <a:lstStyle/>
           <a:p>
             <a:pPr algn="ctr" indent="0" marL="0">
@@ -11468,7 +11678,7 @@
         <p:spPr>
           <a:xfrm>
             <a:off x="0" y="0"/>
-            <a:ext cx="12191695" cy="101498"/>
+            <a:ext cx="12191695" cy="100584"/>
           </a:xfrm>
           <a:prstGeom prst="rect">
             <a:avLst/>
@@ -11492,8 +11702,8 @@
         </p:nvSpPr>
         <p:spPr>
           <a:xfrm>
-            <a:off x="0" y="6756502"/>
-            <a:ext cx="12191695" cy="101498"/>
+            <a:off x="0" y="6757416"/>
+            <a:ext cx="12191695" cy="100584"/>
           </a:xfrm>
           <a:prstGeom prst="rect">
             <a:avLst/>
@@ -11517,8 +11727,8 @@
         </p:nvSpPr>
         <p:spPr>
           <a:xfrm>
-            <a:off x="608076" y="502920"/>
-            <a:ext cx="10972800" cy="685800"/>
+            <a:off x="594360" y="438912"/>
+            <a:ext cx="11064240" cy="621792"/>
           </a:xfrm>
           <a:prstGeom prst="rect">
             <a:avLst/>
@@ -11536,7 +11746,7 @@
               <a:buNone/>
             </a:pPr>
             <a:r>
-              <a:rPr lang="en-US" sz="3400" b="1" dirty="0">
+              <a:rPr lang="en-US" sz="3000" b="1" dirty="0">
                 <a:solidFill>
                   <a:srgbClr val="262626"/>
                 </a:solidFill>
@@ -11546,7 +11756,7 @@
               </a:rPr>
               <a:t>Q2 分辨率越高，图像一定越清晰吗？</a:t>
             </a:r>
-            <a:endParaRPr lang="en-US" sz="3400" dirty="0"/>
+            <a:endParaRPr lang="en-US" sz="3000" dirty="0"/>
           </a:p>
         </p:txBody>
       </p:sp>
@@ -11559,17 +11769,17 @@
         <p:spPr>
           <a:xfrm>
             <a:off x="2011680" y="2103120"/>
-            <a:ext cx="8138160" cy="1371600"/>
+            <a:ext cx="8138160" cy="1234440"/>
           </a:xfrm>
           <a:prstGeom prst="roundRect">
             <a:avLst>
-              <a:gd name="adj" fmla="val 8000"/>
+              <a:gd name="adj" fmla="val 8889"/>
             </a:avLst>
           </a:prstGeom>
           <a:solidFill>
             <a:srgbClr val="FFFFFF"/>
           </a:solidFill>
-          <a:ln w="15240">
+          <a:ln w="13970">
             <a:solidFill>
               <a:srgbClr val="8C64E1"/>
             </a:solidFill>
@@ -11585,8 +11795,8 @@
         </p:nvSpPr>
         <p:spPr>
           <a:xfrm>
-            <a:off x="2148840" y="2212848"/>
-            <a:ext cx="7863840" cy="1152144"/>
+            <a:off x="2121408" y="2194560"/>
+            <a:ext cx="7918704" cy="1051560"/>
           </a:xfrm>
           <a:prstGeom prst="rect">
             <a:avLst/>
@@ -11604,7 +11814,7 @@
               <a:buNone/>
             </a:pPr>
             <a:r>
-              <a:rPr lang="en-US" sz="2800" b="1" dirty="0">
+              <a:rPr lang="en-US" sz="2700" b="1" dirty="0">
                 <a:solidFill>
                   <a:srgbClr val="262626"/>
                 </a:solidFill>
@@ -11612,16 +11822,16 @@
                 <a:ea typeface="Alibaba PuHuiTi 3.0 85 Bold" pitchFamily="34" charset="-122"/>
                 <a:cs typeface="Alibaba PuHuiTi 3.0 85 Bold" pitchFamily="34" charset="-120"/>
               </a:rPr>
-              <a:t>1920×1080 的图片</a:t>
-            </a:r>
-            <a:endParaRPr lang="en-US" sz="2800" dirty="0"/>
+              <a:t>1600×1200 的图片</a:t>
+            </a:r>
+            <a:endParaRPr lang="en-US" sz="2700" dirty="0"/>
           </a:p>
           <a:p>
             <a:pPr algn="ctr" indent="0" marL="0">
               <a:buNone/>
             </a:pPr>
             <a:r>
-              <a:rPr lang="en-US" sz="2800" b="1" dirty="0">
+              <a:rPr lang="en-US" sz="2700" b="1" dirty="0">
                 <a:solidFill>
                   <a:srgbClr val="262626"/>
                 </a:solidFill>
@@ -11631,7 +11841,7 @@
               </a:rPr>
               <a:t>一定比 800×600 更清晰？</a:t>
             </a:r>
-            <a:endParaRPr lang="en-US" sz="2800" dirty="0"/>
+            <a:endParaRPr lang="en-US" sz="2700" dirty="0"/>
           </a:p>
         </p:txBody>
       </p:sp>
@@ -11643,7 +11853,7 @@
         </p:nvSpPr>
         <p:spPr>
           <a:xfrm>
-            <a:off x="3474720" y="3886200"/>
+            <a:off x="3474720" y="4069080"/>
             <a:ext cx="5303520" cy="411480"/>
           </a:xfrm>
           <a:prstGeom prst="rect">
@@ -11662,15 +11872,15 @@
               <a:buNone/>
             </a:pPr>
             <a:r>
-              <a:rPr lang="en-US" sz="2400" dirty="0">
+              <a:rPr lang="en-US" sz="2400" b="1" dirty="0">
                 <a:solidFill>
                   <a:srgbClr val="8C64E1"/>
                 </a:solidFill>
-                <a:latin typeface="Alibaba PuHuiTi 3.0 55 Regular" pitchFamily="34" charset="0"/>
-                <a:ea typeface="Alibaba PuHuiTi 3.0 55 Regular" pitchFamily="34" charset="-122"/>
-                <a:cs typeface="Alibaba PuHuiTi 3.0 55 Regular" pitchFamily="34" charset="-120"/>
-              </a:rPr>
-              <a:t>先判断，再看反例。</a:t>
+                <a:latin typeface="Alibaba PuHuiTi 3.0 85 Bold" pitchFamily="34" charset="0"/>
+                <a:ea typeface="Alibaba PuHuiTi 3.0 85 Bold" pitchFamily="34" charset="-122"/>
+                <a:cs typeface="Alibaba PuHuiTi 3.0 85 Bold" pitchFamily="34" charset="-120"/>
+              </a:rPr>
+              <a:t>先判断，再看证据。</a:t>
             </a:r>
             <a:endParaRPr lang="en-US" sz="2400" dirty="0"/>
           </a:p>
@@ -11717,7 +11927,7 @@
         <p:spPr>
           <a:xfrm>
             <a:off x="0" y="0"/>
-            <a:ext cx="12191695" cy="101498"/>
+            <a:ext cx="12191695" cy="100584"/>
           </a:xfrm>
           <a:prstGeom prst="rect">
             <a:avLst/>
@@ -11741,8 +11951,8 @@
         </p:nvSpPr>
         <p:spPr>
           <a:xfrm>
-            <a:off x="0" y="6756502"/>
-            <a:ext cx="12191695" cy="101498"/>
+            <a:off x="0" y="6757416"/>
+            <a:ext cx="12191695" cy="100584"/>
           </a:xfrm>
           <a:prstGeom prst="rect">
             <a:avLst/>
@@ -11766,8 +11976,8 @@
         </p:nvSpPr>
         <p:spPr>
           <a:xfrm>
-            <a:off x="608076" y="502920"/>
-            <a:ext cx="10972800" cy="685800"/>
+            <a:off x="594360" y="438912"/>
+            <a:ext cx="11064240" cy="621792"/>
           </a:xfrm>
           <a:prstGeom prst="rect">
             <a:avLst/>
@@ -11785,7 +11995,7 @@
               <a:buNone/>
             </a:pPr>
             <a:r>
-              <a:rPr lang="en-US" sz="3400" b="1" dirty="0">
+              <a:rPr lang="en-US" sz="3000" b="1" dirty="0">
                 <a:solidFill>
                   <a:srgbClr val="262626"/>
                 </a:solidFill>
@@ -11793,15 +12003,83 @@
                 <a:ea typeface="Alibaba PuHuiTi 3.0 115 Black" pitchFamily="34" charset="-122"/>
                 <a:cs typeface="Alibaba PuHuiTi 3.0 115 Black" pitchFamily="34" charset="-120"/>
               </a:rPr>
-              <a:t>Q2 反例：像素数更高，也可能更模糊</a:t>
-            </a:r>
-            <a:endParaRPr lang="en-US" sz="3400" dirty="0"/>
+              <a:t>Q2 分辨率越高，图像一定越清晰吗？</a:t>
+            </a:r>
+            <a:endParaRPr lang="en-US" sz="3000" dirty="0"/>
+          </a:p>
+        </p:txBody>
+      </p:sp>
+      <p:sp>
+        <p:nvSpPr>
+          <p:cNvPr id="6" name="Shape 3"/>
+          <p:cNvSpPr/>
+          <p:nvPr/>
+        </p:nvSpPr>
+        <p:spPr>
+          <a:xfrm>
+            <a:off x="3931920" y="1170432"/>
+            <a:ext cx="4297680" cy="411480"/>
+          </a:xfrm>
+          <a:prstGeom prst="roundRect">
+            <a:avLst>
+              <a:gd name="adj" fmla="val 40000"/>
+            </a:avLst>
+          </a:prstGeom>
+          <a:solidFill>
+            <a:srgbClr val="F6F3FF"/>
+          </a:solidFill>
+          <a:ln w="13970">
+            <a:solidFill>
+              <a:srgbClr val="8C64E1"/>
+            </a:solidFill>
+            <a:prstDash val="solid"/>
+          </a:ln>
+        </p:spPr>
+      </p:sp>
+      <p:sp>
+        <p:nvSpPr>
+          <p:cNvPr id="7" name="Text 4"/>
+          <p:cNvSpPr/>
+          <p:nvPr/>
+        </p:nvSpPr>
+        <p:spPr>
+          <a:xfrm>
+            <a:off x="4023360" y="1197864"/>
+            <a:ext cx="4114800" cy="356616"/>
+          </a:xfrm>
+          <a:prstGeom prst="rect">
+            <a:avLst/>
+          </a:prstGeom>
+          <a:noFill/>
+          <a:ln/>
+        </p:spPr>
+        <p:txBody>
+          <a:bodyPr wrap="square" rtlCol="0" anchor="ctr">
+            <a:normAutofit/>
+          </a:bodyPr>
+          <a:lstStyle/>
+          <a:p>
+            <a:pPr algn="ctr" indent="0" marL="0">
+              <a:buNone/>
+            </a:pPr>
+            <a:r>
+              <a:rPr lang="en-US" sz="1800" b="1" dirty="0">
+                <a:solidFill>
+                  <a:srgbClr val="8C64E1"/>
+                </a:solidFill>
+                <a:latin typeface="Alibaba PuHuiTi 3.0 85 Bold" pitchFamily="34" charset="0"/>
+                <a:ea typeface="Alibaba PuHuiTi 3.0 85 Bold" pitchFamily="34" charset="-122"/>
+                <a:cs typeface="Alibaba PuHuiTi 3.0 85 Bold" pitchFamily="34" charset="-120"/>
+              </a:rPr>
+              <a:t>证据：同场景、同 4:3 构图</a:t>
+            </a:r>
+            <a:endParaRPr lang="en-US" sz="1800" dirty="0"/>
           </a:p>
         </p:txBody>
       </p:sp>
       <p:pic>
         <p:nvPicPr>
-          <p:cNvPr id="6" name="Image 0" descr="/mnt/data/fix/1-2-encoding/1-2-3-image-encoding/assets/fallback/q2-high-pixels-blur.png">    </p:cNvPr>
+          <p:cNvPr id="8" name="Image 0" descr="/mnt/data/fix/1-2-encoding/1-2-3-image-encoding/assets/fallback/q2-high-pixels-blur.png">    </p:cNvPr>
           <p:cNvPicPr>
             <a:picLocks noChangeAspect="1"/>
           </p:cNvPicPr>
@@ -11814,8 +12092,8 @@
         </p:blipFill>
         <p:spPr>
           <a:xfrm>
-            <a:off x="822960" y="1508760"/>
-            <a:ext cx="4846320" cy="2743200"/>
+            <a:off x="868680" y="1828800"/>
+            <a:ext cx="4572000" cy="3429000"/>
           </a:xfrm>
           <a:prstGeom prst="rect">
             <a:avLst/>
@@ -11824,14 +12102,14 @@
       </p:pic>
       <p:sp>
         <p:nvSpPr>
-          <p:cNvPr id="7" name="Text 3"/>
-          <p:cNvSpPr/>
-          <p:nvPr/>
-        </p:nvSpPr>
-        <p:spPr>
-          <a:xfrm>
-            <a:off x="822960" y="4306824"/>
-            <a:ext cx="4846320" cy="256032"/>
+          <p:cNvPr id="9" name="Text 5"/>
+          <p:cNvSpPr/>
+          <p:nvPr/>
+        </p:nvSpPr>
+        <p:spPr>
+          <a:xfrm>
+            <a:off x="868680" y="5330952"/>
+            <a:ext cx="4572000" cy="274320"/>
           </a:xfrm>
           <a:prstGeom prst="rect">
             <a:avLst/>
@@ -11849,15 +12127,15 @@
               <a:buNone/>
             </a:pPr>
             <a:r>
-              <a:rPr lang="en-US" sz="1400" dirty="0">
+              <a:rPr lang="en-US" sz="1400" b="1" dirty="0">
                 <a:solidFill>
                   <a:srgbClr val="262626"/>
                 </a:solidFill>
-                <a:latin typeface="Alibaba PuHuiTi 3.0 55 Regular" pitchFamily="34" charset="0"/>
-                <a:ea typeface="Alibaba PuHuiTi 3.0 55 Regular" pitchFamily="34" charset="-122"/>
-                <a:cs typeface="Alibaba PuHuiTi 3.0 55 Regular" pitchFamily="34" charset="-120"/>
-              </a:rPr>
-              <a:t>1920×1080 · 高像素数但模糊</a:t>
+                <a:latin typeface="Alibaba PuHuiTi 3.0 85 Bold" pitchFamily="34" charset="0"/>
+                <a:ea typeface="Alibaba PuHuiTi 3.0 85 Bold" pitchFamily="34" charset="-122"/>
+                <a:cs typeface="Alibaba PuHuiTi 3.0 85 Bold" pitchFamily="34" charset="-120"/>
+              </a:rPr>
+              <a:t>1600×1200 · 高像素数但模糊</a:t>
             </a:r>
             <a:endParaRPr lang="en-US" sz="1400" dirty="0"/>
           </a:p>
@@ -11865,7 +12143,7 @@
       </p:sp>
       <p:pic>
         <p:nvPicPr>
-          <p:cNvPr id="8" name="Image 1" descr="/mnt/data/fix/1-2-encoding/1-2-3-image-encoding/assets/fallback/q2-low-pixels-sharp.png">    </p:cNvPr>
+          <p:cNvPr id="10" name="Image 1" descr="/mnt/data/fix/1-2-encoding/1-2-3-image-encoding/assets/fallback/q2-low-pixels-sharp.png">    </p:cNvPr>
           <p:cNvPicPr>
             <a:picLocks noChangeAspect="1"/>
           </p:cNvPicPr>
@@ -11878,8 +12156,8 @@
         </p:blipFill>
         <p:spPr>
           <a:xfrm>
-            <a:off x="6400800" y="1508760"/>
-            <a:ext cx="4114800" cy="2743200"/>
+            <a:off x="6492240" y="1828800"/>
+            <a:ext cx="4389120" cy="3291840"/>
           </a:xfrm>
           <a:prstGeom prst="rect">
             <a:avLst/>
@@ -11888,14 +12166,14 @@
       </p:pic>
       <p:sp>
         <p:nvSpPr>
-          <p:cNvPr id="9" name="Text 4"/>
-          <p:cNvSpPr/>
-          <p:nvPr/>
-        </p:nvSpPr>
-        <p:spPr>
-          <a:xfrm>
-            <a:off x="6400800" y="4306824"/>
-            <a:ext cx="4114800" cy="256032"/>
+          <p:cNvPr id="11" name="Text 6"/>
+          <p:cNvSpPr/>
+          <p:nvPr/>
+        </p:nvSpPr>
+        <p:spPr>
+          <a:xfrm>
+            <a:off x="6492240" y="5193792"/>
+            <a:ext cx="4389120" cy="274320"/>
           </a:xfrm>
           <a:prstGeom prst="rect">
             <a:avLst/>
@@ -11913,83 +12191,58 @@
               <a:buNone/>
             </a:pPr>
             <a:r>
-              <a:rPr lang="en-US" sz="1400" dirty="0">
+              <a:rPr lang="en-US" sz="1400" b="1" dirty="0">
                 <a:solidFill>
                   <a:srgbClr val="262626"/>
+                </a:solidFill>
+                <a:latin typeface="Alibaba PuHuiTi 3.0 85 Bold" pitchFamily="34" charset="0"/>
+                <a:ea typeface="Alibaba PuHuiTi 3.0 85 Bold" pitchFamily="34" charset="-122"/>
+                <a:cs typeface="Alibaba PuHuiTi 3.0 85 Bold" pitchFamily="34" charset="-120"/>
+              </a:rPr>
+              <a:t>800×600 · 较低像素数但清晰</a:t>
+            </a:r>
+            <a:endParaRPr lang="en-US" sz="1400" dirty="0"/>
+          </a:p>
+        </p:txBody>
+      </p:sp>
+      <p:sp>
+        <p:nvSpPr>
+          <p:cNvPr id="12" name="Text 7"/>
+          <p:cNvSpPr/>
+          <p:nvPr/>
+        </p:nvSpPr>
+        <p:spPr>
+          <a:xfrm>
+            <a:off x="1234440" y="5897880"/>
+            <a:ext cx="9784080" cy="320040"/>
+          </a:xfrm>
+          <a:prstGeom prst="rect">
+            <a:avLst/>
+          </a:prstGeom>
+          <a:noFill/>
+          <a:ln/>
+        </p:spPr>
+        <p:txBody>
+          <a:bodyPr wrap="square" rtlCol="0" anchor="ctr">
+            <a:normAutofit/>
+          </a:bodyPr>
+          <a:lstStyle/>
+          <a:p>
+            <a:pPr algn="ctr" indent="0" marL="0">
+              <a:buNone/>
+            </a:pPr>
+            <a:r>
+              <a:rPr lang="en-US" sz="1600" dirty="0">
+                <a:solidFill>
+                  <a:srgbClr val="686868"/>
                 </a:solidFill>
                 <a:latin typeface="Alibaba PuHuiTi 3.0 55 Regular" pitchFamily="34" charset="0"/>
                 <a:ea typeface="Alibaba PuHuiTi 3.0 55 Regular" pitchFamily="34" charset="-122"/>
                 <a:cs typeface="Alibaba PuHuiTi 3.0 55 Regular" pitchFamily="34" charset="-120"/>
               </a:rPr>
-              <a:t>800×600 · 较低像素数但清晰</a:t>
-            </a:r>
-            <a:endParaRPr lang="en-US" sz="1400" dirty="0"/>
-          </a:p>
-        </p:txBody>
-      </p:sp>
-      <p:sp>
-        <p:nvSpPr>
-          <p:cNvPr id="10" name="Shape 5"/>
-          <p:cNvSpPr/>
-          <p:nvPr/>
-        </p:nvSpPr>
-        <p:spPr>
-          <a:xfrm>
-            <a:off x="1371600" y="5303520"/>
-            <a:ext cx="9601200" cy="566928"/>
-          </a:xfrm>
-          <a:prstGeom prst="roundRect">
-            <a:avLst>
-              <a:gd name="adj" fmla="val 25806"/>
-            </a:avLst>
-          </a:prstGeom>
-          <a:solidFill>
-            <a:srgbClr val="F7F4FF"/>
-          </a:solidFill>
-          <a:ln w="15240">
-            <a:solidFill>
-              <a:srgbClr val="8C64E1"/>
-            </a:solidFill>
-            <a:prstDash val="solid"/>
-          </a:ln>
-        </p:spPr>
-      </p:sp>
-      <p:sp>
-        <p:nvSpPr>
-          <p:cNvPr id="11" name="Text 6"/>
-          <p:cNvSpPr/>
-          <p:nvPr/>
-        </p:nvSpPr>
-        <p:spPr>
-          <a:xfrm>
-            <a:off x="1371600" y="5340096"/>
-            <a:ext cx="9601200" cy="521208"/>
-          </a:xfrm>
-          <a:prstGeom prst="rect">
-            <a:avLst/>
-          </a:prstGeom>
-          <a:noFill/>
-          <a:ln/>
-        </p:spPr>
-        <p:txBody>
-          <a:bodyPr wrap="square" rtlCol="0" anchor="ctr"/>
-          <a:lstStyle/>
-          <a:p>
-            <a:pPr algn="ctr" indent="0" marL="0">
-              <a:buNone/>
-            </a:pPr>
-            <a:r>
-              <a:rPr lang="en-US" sz="2000" b="1" dirty="0">
-                <a:solidFill>
-                  <a:srgbClr val="8C64E1"/>
-                </a:solidFill>
-                <a:latin typeface="Alibaba PuHuiTi 3.0 85 Bold" pitchFamily="34" charset="0"/>
-                <a:ea typeface="Alibaba PuHuiTi 3.0 85 Bold" pitchFamily="34" charset="-122"/>
-                <a:cs typeface="Alibaba PuHuiTi 3.0 85 Bold" pitchFamily="34" charset="-120"/>
-              </a:rPr>
-              <a:t>结论：Resolution 不是图像质量的唯一决定因素</a:t>
-            </a:r>
-            <a:endParaRPr lang="en-US" sz="2000" dirty="0"/>
+              <a:t>结论：在其他条件相同时，更多采样通常保留更多细节；但 resolution 不是质量的唯一决定因素。</a:t>
+            </a:r>
+            <a:endParaRPr lang="en-US" sz="1600" dirty="0"/>
           </a:p>
         </p:txBody>
       </p:sp>
@@ -12034,7 +12287,7 @@
         <p:spPr>
           <a:xfrm>
             <a:off x="0" y="0"/>
-            <a:ext cx="12191695" cy="101498"/>
+            <a:ext cx="12191695" cy="100584"/>
           </a:xfrm>
           <a:prstGeom prst="rect">
             <a:avLst/>
@@ -12058,8 +12311,8 @@
         </p:nvSpPr>
         <p:spPr>
           <a:xfrm>
-            <a:off x="0" y="6756502"/>
-            <a:ext cx="12191695" cy="101498"/>
+            <a:off x="0" y="6757416"/>
+            <a:ext cx="12191695" cy="100584"/>
           </a:xfrm>
           <a:prstGeom prst="rect">
             <a:avLst/>
@@ -12083,8 +12336,8 @@
         </p:nvSpPr>
         <p:spPr>
           <a:xfrm>
-            <a:off x="608076" y="502920"/>
-            <a:ext cx="10972800" cy="685800"/>
+            <a:off x="594360" y="438912"/>
+            <a:ext cx="11064240" cy="621792"/>
           </a:xfrm>
           <a:prstGeom prst="rect">
             <a:avLst/>
@@ -12102,7 +12355,7 @@
               <a:buNone/>
             </a:pPr>
             <a:r>
-              <a:rPr lang="en-US" sz="3400" b="1" dirty="0">
+              <a:rPr lang="en-US" sz="3000" b="1" dirty="0">
                 <a:solidFill>
                   <a:srgbClr val="262626"/>
                 </a:solidFill>
@@ -12112,7 +12365,7 @@
               </a:rPr>
               <a:t>Q3 像素数量完全一样，红绿接缝还会一直看得见吗？</a:t>
             </a:r>
-            <a:endParaRPr lang="en-US" sz="3400" dirty="0"/>
+            <a:endParaRPr lang="en-US" sz="3000" dirty="0"/>
           </a:p>
         </p:txBody>
       </p:sp>
@@ -12124,8 +12377,8 @@
         </p:nvSpPr>
         <p:spPr>
           <a:xfrm>
-            <a:off x="868680" y="1737360"/>
-            <a:ext cx="4937760" cy="1280160"/>
+            <a:off x="914400" y="1783080"/>
+            <a:ext cx="5577840" cy="1005840"/>
           </a:xfrm>
           <a:prstGeom prst="rect">
             <a:avLst/>
@@ -12145,11 +12398,11 @@
             <a:r>
               <a:rPr lang="en-US" sz="2400" b="1" dirty="0">
                 <a:solidFill>
-                  <a:srgbClr val="000000"/>
-                </a:solidFill>
-                <a:latin typeface="Alibaba PuHuiTi 3.0 55 Regular" pitchFamily="34" charset="0"/>
-                <a:ea typeface="Alibaba PuHuiTi 3.0 55 Regular" pitchFamily="34" charset="-122"/>
-                <a:cs typeface="Alibaba PuHuiTi 3.0 55 Regular" pitchFamily="34" charset="-120"/>
+                  <a:srgbClr val="262626"/>
+                </a:solidFill>
+                <a:latin typeface="Alibaba PuHuiTi 3.0 85 Bold" pitchFamily="34" charset="0"/>
+                <a:ea typeface="Alibaba PuHuiTi 3.0 85 Bold" pitchFamily="34" charset="-122"/>
+                <a:cs typeface="Alibaba PuHuiTi 3.0 85 Bold" pitchFamily="34" charset="-120"/>
               </a:rPr>
               <a:t>条件：pixel dimensions 不变。</a:t>
             </a:r>
@@ -12162,11 +12415,11 @@
             <a:r>
               <a:rPr lang="en-US" sz="2400" b="1" dirty="0">
                 <a:solidFill>
-                  <a:srgbClr val="000000"/>
-                </a:solidFill>
-                <a:latin typeface="Alibaba PuHuiTi 3.0 55 Regular" pitchFamily="34" charset="0"/>
-                <a:ea typeface="Alibaba PuHuiTi 3.0 55 Regular" pitchFamily="34" charset="-122"/>
-                <a:cs typeface="Alibaba PuHuiTi 3.0 55 Regular" pitchFamily="34" charset="-120"/>
+                  <a:srgbClr val="262626"/>
+                </a:solidFill>
+                <a:latin typeface="Alibaba PuHuiTi 3.0 85 Bold" pitchFamily="34" charset="0"/>
+                <a:ea typeface="Alibaba PuHuiTi 3.0 85 Bold" pitchFamily="34" charset="-122"/>
+                <a:cs typeface="Alibaba PuHuiTi 3.0 85 Bold" pitchFamily="34" charset="-120"/>
               </a:rPr>
               <a:t>只限制整幅图最多出现的颜色总数。</a:t>
             </a:r>
@@ -12182,18 +12435,18 @@
         </p:nvSpPr>
         <p:spPr>
           <a:xfrm>
-            <a:off x="6675120" y="1965960"/>
-            <a:ext cx="3749040" cy="1417320"/>
+            <a:off x="6903720" y="2057400"/>
+            <a:ext cx="3474720" cy="1143000"/>
           </a:xfrm>
           <a:prstGeom prst="roundRect">
             <a:avLst>
-              <a:gd name="adj" fmla="val 7742"/>
+              <a:gd name="adj" fmla="val 9600"/>
             </a:avLst>
           </a:prstGeom>
           <a:solidFill>
             <a:srgbClr val="FFFFFF"/>
           </a:solidFill>
-          <a:ln w="15240">
+          <a:ln w="13970">
             <a:solidFill>
               <a:srgbClr val="8C64E1"/>
             </a:solidFill>
@@ -12209,8 +12462,8 @@
         </p:nvSpPr>
         <p:spPr>
           <a:xfrm>
-            <a:off x="6812280" y="2075688"/>
-            <a:ext cx="3474720" cy="1197864"/>
+            <a:off x="7013448" y="2148840"/>
+            <a:ext cx="3255264" cy="960120"/>
           </a:xfrm>
           <a:prstGeom prst="rect">
             <a:avLst/>
@@ -12228,7 +12481,7 @@
               <a:buNone/>
             </a:pPr>
             <a:r>
-              <a:rPr lang="en-US" sz="2800" b="1" dirty="0">
+              <a:rPr lang="en-US" sz="2700" b="1" dirty="0">
                 <a:solidFill>
                   <a:srgbClr val="262626"/>
                 </a:solidFill>
@@ -12238,14 +12491,14 @@
               </a:rPr>
               <a:t>红绿接缝</a:t>
             </a:r>
-            <a:endParaRPr lang="en-US" sz="2800" dirty="0"/>
+            <a:endParaRPr lang="en-US" sz="2700" dirty="0"/>
           </a:p>
           <a:p>
             <a:pPr algn="ctr" indent="0" marL="0">
               <a:buNone/>
             </a:pPr>
             <a:r>
-              <a:rPr lang="en-US" sz="2800" b="1" dirty="0">
+              <a:rPr lang="en-US" sz="2700" b="1" dirty="0">
                 <a:solidFill>
                   <a:srgbClr val="262626"/>
                 </a:solidFill>
@@ -12255,7 +12508,7 @@
               </a:rPr>
               <a:t>会一直看得见吗？</a:t>
             </a:r>
-            <a:endParaRPr lang="en-US" sz="2800" dirty="0"/>
+            <a:endParaRPr lang="en-US" sz="2700" dirty="0"/>
           </a:p>
         </p:txBody>
       </p:sp>
@@ -12300,7 +12553,7 @@
         <p:spPr>
           <a:xfrm>
             <a:off x="0" y="0"/>
-            <a:ext cx="12191695" cy="101498"/>
+            <a:ext cx="12191695" cy="100584"/>
           </a:xfrm>
           <a:prstGeom prst="rect">
             <a:avLst/>
@@ -12324,8 +12577,8 @@
         </p:nvSpPr>
         <p:spPr>
           <a:xfrm>
-            <a:off x="0" y="6756502"/>
-            <a:ext cx="12191695" cy="101498"/>
+            <a:off x="0" y="6757416"/>
+            <a:ext cx="12191695" cy="100584"/>
           </a:xfrm>
           <a:prstGeom prst="rect">
             <a:avLst/>
@@ -12349,8 +12602,8 @@
         </p:nvSpPr>
         <p:spPr>
           <a:xfrm>
-            <a:off x="608076" y="502920"/>
-            <a:ext cx="10972800" cy="685800"/>
+            <a:off x="594360" y="438912"/>
+            <a:ext cx="11064240" cy="621792"/>
           </a:xfrm>
           <a:prstGeom prst="rect">
             <a:avLst/>
@@ -12368,7 +12621,7 @@
               <a:buNone/>
             </a:pPr>
             <a:r>
-              <a:rPr lang="en-US" sz="3400" b="1" dirty="0">
+              <a:rPr lang="en-US" sz="3000" b="1" dirty="0">
                 <a:solidFill>
                   <a:srgbClr val="262626"/>
                 </a:solidFill>
@@ -12376,15 +12629,83 @@
                 <a:ea typeface="Alibaba PuHuiTi 3.0 115 Black" pitchFamily="34" charset="-122"/>
                 <a:cs typeface="Alibaba PuHuiTi 3.0 115 Black" pitchFamily="34" charset="-120"/>
               </a:rPr>
-              <a:t>Q3 先看图：颜色种数减少，画面怎样变？</a:t>
-            </a:r>
-            <a:endParaRPr lang="en-US" sz="3400" dirty="0"/>
+              <a:t>Q3 像素数量完全一样，红绿接缝还会一直看得见吗？</a:t>
+            </a:r>
+            <a:endParaRPr lang="en-US" sz="3000" dirty="0"/>
+          </a:p>
+        </p:txBody>
+      </p:sp>
+      <p:sp>
+        <p:nvSpPr>
+          <p:cNvPr id="6" name="Shape 3"/>
+          <p:cNvSpPr/>
+          <p:nvPr/>
+        </p:nvSpPr>
+        <p:spPr>
+          <a:xfrm>
+            <a:off x="3977640" y="1170432"/>
+            <a:ext cx="4297680" cy="411480"/>
+          </a:xfrm>
+          <a:prstGeom prst="roundRect">
+            <a:avLst>
+              <a:gd name="adj" fmla="val 40000"/>
+            </a:avLst>
+          </a:prstGeom>
+          <a:solidFill>
+            <a:srgbClr val="F6F3FF"/>
+          </a:solidFill>
+          <a:ln w="13970">
+            <a:solidFill>
+              <a:srgbClr val="8C64E1"/>
+            </a:solidFill>
+            <a:prstDash val="solid"/>
+          </a:ln>
+        </p:spPr>
+      </p:sp>
+      <p:sp>
+        <p:nvSpPr>
+          <p:cNvPr id="7" name="Text 4"/>
+          <p:cNvSpPr/>
+          <p:nvPr/>
+        </p:nvSpPr>
+        <p:spPr>
+          <a:xfrm>
+            <a:off x="4069080" y="1197864"/>
+            <a:ext cx="4114800" cy="356616"/>
+          </a:xfrm>
+          <a:prstGeom prst="rect">
+            <a:avLst/>
+          </a:prstGeom>
+          <a:noFill/>
+          <a:ln/>
+        </p:spPr>
+        <p:txBody>
+          <a:bodyPr wrap="square" rtlCol="0" anchor="ctr">
+            <a:normAutofit/>
+          </a:bodyPr>
+          <a:lstStyle/>
+          <a:p>
+            <a:pPr algn="ctr" indent="0" marL="0">
+              <a:buNone/>
+            </a:pPr>
+            <a:r>
+              <a:rPr lang="en-US" sz="1800" b="1" dirty="0">
+                <a:solidFill>
+                  <a:srgbClr val="8C64E1"/>
+                </a:solidFill>
+                <a:latin typeface="Alibaba PuHuiTi 3.0 85 Bold" pitchFamily="34" charset="0"/>
+                <a:ea typeface="Alibaba PuHuiTi 3.0 85 Bold" pitchFamily="34" charset="-122"/>
+                <a:cs typeface="Alibaba PuHuiTi 3.0 85 Bold" pitchFamily="34" charset="-120"/>
+              </a:rPr>
+              <a:t>证据 A：先看图像现象</a:t>
+            </a:r>
+            <a:endParaRPr lang="en-US" sz="1800" dirty="0"/>
           </a:p>
         </p:txBody>
       </p:sp>
       <p:pic>
         <p:nvPicPr>
-          <p:cNvPr id="6" name="Image 0" descr="/mnt/data/fix/1-2-encoding/1-2-3-image-encoding/assets/fallback/quant-original.png">    </p:cNvPr>
+          <p:cNvPr id="8" name="Image 0" descr="/mnt/data/fix/1-2-encoding/1-2-3-image-encoding/assets/fallback/quant-original.png">    </p:cNvPr>
           <p:cNvPicPr>
             <a:picLocks noChangeAspect="1"/>
           </p:cNvPicPr>
@@ -12397,7 +12718,7 @@
         </p:blipFill>
         <p:spPr>
           <a:xfrm>
-            <a:off x="868680" y="1508760"/>
+            <a:off x="868680" y="1828800"/>
             <a:ext cx="2971800" cy="2971800"/>
           </a:xfrm>
           <a:prstGeom prst="rect">
@@ -12407,14 +12728,14 @@
       </p:pic>
       <p:sp>
         <p:nvSpPr>
-          <p:cNvPr id="7" name="Text 3"/>
-          <p:cNvSpPr/>
-          <p:nvPr/>
-        </p:nvSpPr>
-        <p:spPr>
-          <a:xfrm>
-            <a:off x="868680" y="4535424"/>
-            <a:ext cx="2971800" cy="256032"/>
+          <p:cNvPr id="9" name="Text 5"/>
+          <p:cNvSpPr/>
+          <p:nvPr/>
+        </p:nvSpPr>
+        <p:spPr>
+          <a:xfrm>
+            <a:off x="868680" y="4873752"/>
+            <a:ext cx="2971800" cy="274320"/>
           </a:xfrm>
           <a:prstGeom prst="rect">
             <a:avLst/>
@@ -12432,13 +12753,13 @@
               <a:buNone/>
             </a:pPr>
             <a:r>
-              <a:rPr lang="en-US" sz="1400" dirty="0">
+              <a:rPr lang="en-US" sz="1400" b="1" dirty="0">
                 <a:solidFill>
                   <a:srgbClr val="262626"/>
                 </a:solidFill>
-                <a:latin typeface="Alibaba PuHuiTi 3.0 55 Regular" pitchFamily="34" charset="0"/>
-                <a:ea typeface="Alibaba PuHuiTi 3.0 55 Regular" pitchFamily="34" charset="-122"/>
-                <a:cs typeface="Alibaba PuHuiTi 3.0 55 Regular" pitchFamily="34" charset="-120"/>
+                <a:latin typeface="Alibaba PuHuiTi 3.0 85 Bold" pitchFamily="34" charset="0"/>
+                <a:ea typeface="Alibaba PuHuiTi 3.0 85 Bold" pitchFamily="34" charset="-122"/>
+                <a:cs typeface="Alibaba PuHuiTi 3.0 85 Bold" pitchFamily="34" charset="-120"/>
               </a:rPr>
               <a:t>原图</a:t>
             </a:r>
@@ -12448,7 +12769,7 @@
       </p:sp>
       <p:pic>
         <p:nvPicPr>
-          <p:cNvPr id="8" name="Image 1" descr="/mnt/data/fix/1-2-encoding/1-2-3-image-encoding/assets/fallback/quant-16.png">    </p:cNvPr>
+          <p:cNvPr id="10" name="Image 1" descr="/mnt/data/fix/1-2-encoding/1-2-3-image-encoding/assets/fallback/quant-16.png">    </p:cNvPr>
           <p:cNvPicPr>
             <a:picLocks noChangeAspect="1"/>
           </p:cNvPicPr>
@@ -12461,7 +12782,7 @@
         </p:blipFill>
         <p:spPr>
           <a:xfrm>
-            <a:off x="4617720" y="1508760"/>
+            <a:off x="4617720" y="1828800"/>
             <a:ext cx="2971800" cy="2971800"/>
           </a:xfrm>
           <a:prstGeom prst="rect">
@@ -12471,14 +12792,14 @@
       </p:pic>
       <p:sp>
         <p:nvSpPr>
-          <p:cNvPr id="9" name="Text 4"/>
-          <p:cNvSpPr/>
-          <p:nvPr/>
-        </p:nvSpPr>
-        <p:spPr>
-          <a:xfrm>
-            <a:off x="4617720" y="4535424"/>
-            <a:ext cx="2971800" cy="256032"/>
+          <p:cNvPr id="11" name="Text 6"/>
+          <p:cNvSpPr/>
+          <p:nvPr/>
+        </p:nvSpPr>
+        <p:spPr>
+          <a:xfrm>
+            <a:off x="4617720" y="4873752"/>
+            <a:ext cx="2971800" cy="274320"/>
           </a:xfrm>
           <a:prstGeom prst="rect">
             <a:avLst/>
@@ -12496,13 +12817,13 @@
               <a:buNone/>
             </a:pPr>
             <a:r>
-              <a:rPr lang="en-US" sz="1400" dirty="0">
+              <a:rPr lang="en-US" sz="1400" b="1" dirty="0">
                 <a:solidFill>
                   <a:srgbClr val="262626"/>
                 </a:solidFill>
-                <a:latin typeface="Alibaba PuHuiTi 3.0 55 Regular" pitchFamily="34" charset="0"/>
-                <a:ea typeface="Alibaba PuHuiTi 3.0 55 Regular" pitchFamily="34" charset="-122"/>
-                <a:cs typeface="Alibaba PuHuiTi 3.0 55 Regular" pitchFamily="34" charset="-120"/>
+                <a:latin typeface="Alibaba PuHuiTi 3.0 85 Bold" pitchFamily="34" charset="0"/>
+                <a:ea typeface="Alibaba PuHuiTi 3.0 85 Bold" pitchFamily="34" charset="-122"/>
+                <a:cs typeface="Alibaba PuHuiTi 3.0 85 Bold" pitchFamily="34" charset="-120"/>
               </a:rPr>
               <a:t>最多 16 colors</a:t>
             </a:r>
@@ -12512,7 +12833,7 @@
       </p:sp>
       <p:pic>
         <p:nvPicPr>
-          <p:cNvPr id="10" name="Image 2" descr="/mnt/data/fix/1-2-encoding/1-2-3-image-encoding/assets/fallback/quant-2.png">    </p:cNvPr>
+          <p:cNvPr id="12" name="Image 2" descr="/mnt/data/fix/1-2-encoding/1-2-3-image-encoding/assets/fallback/quant-2.png">    </p:cNvPr>
           <p:cNvPicPr>
             <a:picLocks noChangeAspect="1"/>
           </p:cNvPicPr>
@@ -12525,7 +12846,7 @@
         </p:blipFill>
         <p:spPr>
           <a:xfrm>
-            <a:off x="8366760" y="1508760"/>
+            <a:off x="8366760" y="1828800"/>
             <a:ext cx="2971800" cy="2971800"/>
           </a:xfrm>
           <a:prstGeom prst="rect">
@@ -12535,14 +12856,14 @@
       </p:pic>
       <p:sp>
         <p:nvSpPr>
-          <p:cNvPr id="11" name="Text 5"/>
-          <p:cNvSpPr/>
-          <p:nvPr/>
-        </p:nvSpPr>
-        <p:spPr>
-          <a:xfrm>
-            <a:off x="8366760" y="4535424"/>
-            <a:ext cx="2971800" cy="256032"/>
+          <p:cNvPr id="13" name="Text 7"/>
+          <p:cNvSpPr/>
+          <p:nvPr/>
+        </p:nvSpPr>
+        <p:spPr>
+          <a:xfrm>
+            <a:off x="8366760" y="4873752"/>
+            <a:ext cx="2971800" cy="274320"/>
           </a:xfrm>
           <a:prstGeom prst="rect">
             <a:avLst/>
@@ -12560,58 +12881,17 @@
               <a:buNone/>
             </a:pPr>
             <a:r>
-              <a:rPr lang="en-US" sz="1400" dirty="0">
+              <a:rPr lang="en-US" sz="1400" b="1" dirty="0">
                 <a:solidFill>
                   <a:srgbClr val="262626"/>
                 </a:solidFill>
-                <a:latin typeface="Alibaba PuHuiTi 3.0 55 Regular" pitchFamily="34" charset="0"/>
-                <a:ea typeface="Alibaba PuHuiTi 3.0 55 Regular" pitchFamily="34" charset="-122"/>
-                <a:cs typeface="Alibaba PuHuiTi 3.0 55 Regular" pitchFamily="34" charset="-120"/>
+                <a:latin typeface="Alibaba PuHuiTi 3.0 85 Bold" pitchFamily="34" charset="0"/>
+                <a:ea typeface="Alibaba PuHuiTi 3.0 85 Bold" pitchFamily="34" charset="-122"/>
+                <a:cs typeface="Alibaba PuHuiTi 3.0 85 Bold" pitchFamily="34" charset="-120"/>
               </a:rPr>
               <a:t>最多 2 colors</a:t>
             </a:r>
             <a:endParaRPr lang="en-US" sz="1400" dirty="0"/>
-          </a:p>
-        </p:txBody>
-      </p:sp>
-      <p:sp>
-        <p:nvSpPr>
-          <p:cNvPr id="12" name="Text 6"/>
-          <p:cNvSpPr/>
-          <p:nvPr/>
-        </p:nvSpPr>
-        <p:spPr>
-          <a:xfrm>
-            <a:off x="1463040" y="5532120"/>
-            <a:ext cx="9326880" cy="320040"/>
-          </a:xfrm>
-          <a:prstGeom prst="rect">
-            <a:avLst/>
-          </a:prstGeom>
-          <a:noFill/>
-          <a:ln/>
-        </p:spPr>
-        <p:txBody>
-          <a:bodyPr wrap="square" rtlCol="0" anchor="ctr">
-            <a:normAutofit/>
-          </a:bodyPr>
-          <a:lstStyle/>
-          <a:p>
-            <a:pPr algn="ctr" indent="0" marL="0">
-              <a:buNone/>
-            </a:pPr>
-            <a:r>
-              <a:rPr lang="en-US" sz="1600" dirty="0">
-                <a:solidFill>
-                  <a:srgbClr val="808080"/>
-                </a:solidFill>
-                <a:latin typeface="Alibaba PuHuiTi 3.0 55 Regular" pitchFamily="34" charset="0"/>
-                <a:ea typeface="Alibaba PuHuiTi 3.0 55 Regular" pitchFamily="34" charset="-122"/>
-                <a:cs typeface="Alibaba PuHuiTi 3.0 55 Regular" pitchFamily="34" charset="-120"/>
-              </a:rPr>
-              <a:t>此页只看图像现象，不先公布 RGB 数值。</a:t>
-            </a:r>
-            <a:endParaRPr lang="en-US" sz="1600" dirty="0"/>
           </a:p>
         </p:txBody>
       </p:sp>

--- a/1-2-encoding/1-2-3-image-encoding/image-encoding-v1.pptx
+++ b/1-2-encoding/1-2-3-image-encoding/image-encoding-v1.pptx
@@ -1596,7 +1596,7 @@
             <a:r>
               <a:rPr lang="en-US" dirty="0"/>
               <a:t>【页面目的】显示 BM 标识和 pixel-data offset，不讲完整 BMP 规范。
-【逐字稿】文件开头 42 4D 对应 BM，说明这是按照 BMP 规则组织的文件。header 里 0x0A 位置的 36 00 00 00，教师已经预先解码为 offset 54。意思是像素数据从第54个 byte 开始。因此前面的 bytes 是格式信息：告诉软件如何解释后面的像素。</a:t>
+【逐字稿】文件开头 42 4D 对应 BM，说明这是按照 BMP 规则组织的文件。header 里 0x0A 位置的 36 00 00 00，教师已经预先解码为 offset 54。意思是像素数据从 offset 54 开始；按零起算，这是第 55 个 byte。因此前面的 bytes 是格式信息：告诉软件如何解释后面的像素。</a:t>
             </a:r>
             <a:endParaRPr lang="en-US" dirty="0"/>
           </a:p>
@@ -2860,9 +2860,9 @@
           <a:solidFill>
             <a:schemeClr val="tx1"/>
           </a:solidFill>
-          <a:latin typeface="+mj-lt"/>
-          <a:ea typeface="+mj-ea"/>
-          <a:cs typeface="+mj-cs"/>
+          <a:latin typeface="Alibaba PuHuiTi 3.0 115 Black"/>
+          <a:ea typeface="Alibaba PuHuiTi 3.0 115 Black"/>
+          <a:cs typeface="Alibaba PuHuiTi 3.0 115 Black"/>
         </a:defRPr>
       </a:lvl1pPr>
     </p:titleStyle>
@@ -2877,9 +2877,9 @@
           <a:solidFill>
             <a:schemeClr val="tx1"/>
           </a:solidFill>
-          <a:latin typeface="+mn-lt"/>
-          <a:ea typeface="+mn-ea"/>
-          <a:cs typeface="+mn-cs"/>
+          <a:latin typeface="Alibaba PuHuiTi 3.0 55 Regular"/>
+          <a:ea typeface="Alibaba PuHuiTi 3.0 55 Regular"/>
+          <a:cs typeface="Alibaba PuHuiTi 3.0 55 Regular"/>
         </a:defRPr>
       </a:lvl1pPr>
       <a:lvl2pPr marL="742950" indent="-285750" algn="l" defTabSz="914400" rtl="0" eaLnBrk="1" latinLnBrk="0" hangingPunct="1">
@@ -2892,9 +2892,9 @@
           <a:solidFill>
             <a:schemeClr val="tx1"/>
           </a:solidFill>
-          <a:latin typeface="+mn-lt"/>
-          <a:ea typeface="+mn-ea"/>
-          <a:cs typeface="+mn-cs"/>
+          <a:latin typeface="Alibaba PuHuiTi 3.0 55 Regular"/>
+          <a:ea typeface="Alibaba PuHuiTi 3.0 55 Regular"/>
+          <a:cs typeface="Alibaba PuHuiTi 3.0 55 Regular"/>
         </a:defRPr>
       </a:lvl2pPr>
       <a:lvl3pPr marL="1143000" indent="-228600" algn="l" defTabSz="914400" rtl="0" eaLnBrk="1" latinLnBrk="0" hangingPunct="1">
@@ -2907,9 +2907,9 @@
           <a:solidFill>
             <a:schemeClr val="tx1"/>
           </a:solidFill>
-          <a:latin typeface="+mn-lt"/>
-          <a:ea typeface="+mn-ea"/>
-          <a:cs typeface="+mn-cs"/>
+          <a:latin typeface="Alibaba PuHuiTi 3.0 55 Regular"/>
+          <a:ea typeface="Alibaba PuHuiTi 3.0 55 Regular"/>
+          <a:cs typeface="Alibaba PuHuiTi 3.0 55 Regular"/>
         </a:defRPr>
       </a:lvl3pPr>
       <a:lvl4pPr marL="1600200" indent="-228600" algn="l" defTabSz="914400" rtl="0" eaLnBrk="1" latinLnBrk="0" hangingPunct="1">
@@ -2922,9 +2922,9 @@
           <a:solidFill>
             <a:schemeClr val="tx1"/>
           </a:solidFill>
-          <a:latin typeface="+mn-lt"/>
-          <a:ea typeface="+mn-ea"/>
-          <a:cs typeface="+mn-cs"/>
+          <a:latin typeface="Alibaba PuHuiTi 3.0 55 Regular"/>
+          <a:ea typeface="Alibaba PuHuiTi 3.0 55 Regular"/>
+          <a:cs typeface="Alibaba PuHuiTi 3.0 55 Regular"/>
         </a:defRPr>
       </a:lvl4pPr>
       <a:lvl5pPr marL="2057400" indent="-228600" algn="l" defTabSz="914400" rtl="0" eaLnBrk="1" latinLnBrk="0" hangingPunct="1">
@@ -2937,9 +2937,9 @@
           <a:solidFill>
             <a:schemeClr val="tx1"/>
           </a:solidFill>
-          <a:latin typeface="+mn-lt"/>
-          <a:ea typeface="+mn-ea"/>
-          <a:cs typeface="+mn-cs"/>
+          <a:latin typeface="Alibaba PuHuiTi 3.0 55 Regular"/>
+          <a:ea typeface="Alibaba PuHuiTi 3.0 55 Regular"/>
+          <a:cs typeface="Alibaba PuHuiTi 3.0 55 Regular"/>
         </a:defRPr>
       </a:lvl5pPr>
       <a:lvl6pPr marL="2514600" indent="-228600" algn="l" defTabSz="914400" rtl="0" eaLnBrk="1" latinLnBrk="0" hangingPunct="1">
@@ -2952,9 +2952,9 @@
           <a:solidFill>
             <a:schemeClr val="tx1"/>
           </a:solidFill>
-          <a:latin typeface="+mn-lt"/>
-          <a:ea typeface="+mn-ea"/>
-          <a:cs typeface="+mn-cs"/>
+          <a:latin typeface="Alibaba PuHuiTi 3.0 55 Regular"/>
+          <a:ea typeface="Alibaba PuHuiTi 3.0 55 Regular"/>
+          <a:cs typeface="Alibaba PuHuiTi 3.0 55 Regular"/>
         </a:defRPr>
       </a:lvl6pPr>
       <a:lvl7pPr marL="2971800" indent="-228600" algn="l" defTabSz="914400" rtl="0" eaLnBrk="1" latinLnBrk="0" hangingPunct="1">
@@ -2967,9 +2967,9 @@
           <a:solidFill>
             <a:schemeClr val="tx1"/>
           </a:solidFill>
-          <a:latin typeface="+mn-lt"/>
-          <a:ea typeface="+mn-ea"/>
-          <a:cs typeface="+mn-cs"/>
+          <a:latin typeface="Alibaba PuHuiTi 3.0 55 Regular"/>
+          <a:ea typeface="Alibaba PuHuiTi 3.0 55 Regular"/>
+          <a:cs typeface="Alibaba PuHuiTi 3.0 55 Regular"/>
         </a:defRPr>
       </a:lvl7pPr>
       <a:lvl8pPr marL="3429000" indent="-228600" algn="l" defTabSz="914400" rtl="0" eaLnBrk="1" latinLnBrk="0" hangingPunct="1">
@@ -2982,9 +2982,9 @@
           <a:solidFill>
             <a:schemeClr val="tx1"/>
           </a:solidFill>
-          <a:latin typeface="+mn-lt"/>
-          <a:ea typeface="+mn-ea"/>
-          <a:cs typeface="+mn-cs"/>
+          <a:latin typeface="Alibaba PuHuiTi 3.0 55 Regular"/>
+          <a:ea typeface="Alibaba PuHuiTi 3.0 55 Regular"/>
+          <a:cs typeface="Alibaba PuHuiTi 3.0 55 Regular"/>
         </a:defRPr>
       </a:lvl8pPr>
       <a:lvl9pPr marL="3886200" indent="-228600" algn="l" defTabSz="914400" rtl="0" eaLnBrk="1" latinLnBrk="0" hangingPunct="1">
@@ -2997,9 +2997,9 @@
           <a:solidFill>
             <a:schemeClr val="tx1"/>
           </a:solidFill>
-          <a:latin typeface="+mn-lt"/>
-          <a:ea typeface="+mn-ea"/>
-          <a:cs typeface="+mn-cs"/>
+          <a:latin typeface="Alibaba PuHuiTi 3.0 55 Regular"/>
+          <a:ea typeface="Alibaba PuHuiTi 3.0 55 Regular"/>
+          <a:cs typeface="Alibaba PuHuiTi 3.0 55 Regular"/>
         </a:defRPr>
       </a:lvl9pPr>
     </p:bodyStyle>
@@ -3012,9 +3012,9 @@
           <a:solidFill>
             <a:schemeClr val="tx1"/>
           </a:solidFill>
-          <a:latin typeface="+mn-lt"/>
-          <a:ea typeface="+mn-ea"/>
-          <a:cs typeface="+mn-cs"/>
+          <a:latin typeface="Alibaba PuHuiTi 3.0 55 Regular"/>
+          <a:ea typeface="Alibaba PuHuiTi 3.0 55 Regular"/>
+          <a:cs typeface="Alibaba PuHuiTi 3.0 55 Regular"/>
         </a:defRPr>
       </a:lvl1pPr>
       <a:lvl2pPr marL="457200" algn="l" defTabSz="914400" rtl="0" eaLnBrk="1" latinLnBrk="0" hangingPunct="1">
@@ -3022,9 +3022,9 @@
           <a:solidFill>
             <a:schemeClr val="tx1"/>
           </a:solidFill>
-          <a:latin typeface="+mn-lt"/>
-          <a:ea typeface="+mn-ea"/>
-          <a:cs typeface="+mn-cs"/>
+          <a:latin typeface="Alibaba PuHuiTi 3.0 55 Regular"/>
+          <a:ea typeface="Alibaba PuHuiTi 3.0 55 Regular"/>
+          <a:cs typeface="Alibaba PuHuiTi 3.0 55 Regular"/>
         </a:defRPr>
       </a:lvl2pPr>
       <a:lvl3pPr marL="914400" algn="l" defTabSz="914400" rtl="0" eaLnBrk="1" latinLnBrk="0" hangingPunct="1">
@@ -3032,9 +3032,9 @@
           <a:solidFill>
             <a:schemeClr val="tx1"/>
           </a:solidFill>
-          <a:latin typeface="+mn-lt"/>
-          <a:ea typeface="+mn-ea"/>
-          <a:cs typeface="+mn-cs"/>
+          <a:latin typeface="Alibaba PuHuiTi 3.0 55 Regular"/>
+          <a:ea typeface="Alibaba PuHuiTi 3.0 55 Regular"/>
+          <a:cs typeface="Alibaba PuHuiTi 3.0 55 Regular"/>
         </a:defRPr>
       </a:lvl3pPr>
       <a:lvl4pPr marL="1371600" algn="l" defTabSz="914400" rtl="0" eaLnBrk="1" latinLnBrk="0" hangingPunct="1">
@@ -3042,9 +3042,9 @@
           <a:solidFill>
             <a:schemeClr val="tx1"/>
           </a:solidFill>
-          <a:latin typeface="+mn-lt"/>
-          <a:ea typeface="+mn-ea"/>
-          <a:cs typeface="+mn-cs"/>
+          <a:latin typeface="Alibaba PuHuiTi 3.0 55 Regular"/>
+          <a:ea typeface="Alibaba PuHuiTi 3.0 55 Regular"/>
+          <a:cs typeface="Alibaba PuHuiTi 3.0 55 Regular"/>
         </a:defRPr>
       </a:lvl4pPr>
       <a:lvl5pPr marL="1828800" algn="l" defTabSz="914400" rtl="0" eaLnBrk="1" latinLnBrk="0" hangingPunct="1">
@@ -3052,9 +3052,9 @@
           <a:solidFill>
             <a:schemeClr val="tx1"/>
           </a:solidFill>
-          <a:latin typeface="+mn-lt"/>
-          <a:ea typeface="+mn-ea"/>
-          <a:cs typeface="+mn-cs"/>
+          <a:latin typeface="Alibaba PuHuiTi 3.0 55 Regular"/>
+          <a:ea typeface="Alibaba PuHuiTi 3.0 55 Regular"/>
+          <a:cs typeface="Alibaba PuHuiTi 3.0 55 Regular"/>
         </a:defRPr>
       </a:lvl5pPr>
       <a:lvl6pPr marL="2286000" algn="l" defTabSz="914400" rtl="0" eaLnBrk="1" latinLnBrk="0" hangingPunct="1">
@@ -3062,9 +3062,9 @@
           <a:solidFill>
             <a:schemeClr val="tx1"/>
           </a:solidFill>
-          <a:latin typeface="+mn-lt"/>
-          <a:ea typeface="+mn-ea"/>
-          <a:cs typeface="+mn-cs"/>
+          <a:latin typeface="Alibaba PuHuiTi 3.0 55 Regular"/>
+          <a:ea typeface="Alibaba PuHuiTi 3.0 55 Regular"/>
+          <a:cs typeface="Alibaba PuHuiTi 3.0 55 Regular"/>
         </a:defRPr>
       </a:lvl6pPr>
       <a:lvl7pPr marL="2743200" algn="l" defTabSz="914400" rtl="0" eaLnBrk="1" latinLnBrk="0" hangingPunct="1">
@@ -3072,9 +3072,9 @@
           <a:solidFill>
             <a:schemeClr val="tx1"/>
           </a:solidFill>
-          <a:latin typeface="+mn-lt"/>
-          <a:ea typeface="+mn-ea"/>
-          <a:cs typeface="+mn-cs"/>
+          <a:latin typeface="Alibaba PuHuiTi 3.0 55 Regular"/>
+          <a:ea typeface="Alibaba PuHuiTi 3.0 55 Regular"/>
+          <a:cs typeface="Alibaba PuHuiTi 3.0 55 Regular"/>
         </a:defRPr>
       </a:lvl7pPr>
       <a:lvl8pPr marL="3200400" algn="l" defTabSz="914400" rtl="0" eaLnBrk="1" latinLnBrk="0" hangingPunct="1">
@@ -3082,9 +3082,9 @@
           <a:solidFill>
             <a:schemeClr val="tx1"/>
           </a:solidFill>
-          <a:latin typeface="+mn-lt"/>
-          <a:ea typeface="+mn-ea"/>
-          <a:cs typeface="+mn-cs"/>
+          <a:latin typeface="Alibaba PuHuiTi 3.0 55 Regular"/>
+          <a:ea typeface="Alibaba PuHuiTi 3.0 55 Regular"/>
+          <a:cs typeface="Alibaba PuHuiTi 3.0 55 Regular"/>
         </a:defRPr>
       </a:lvl8pPr>
       <a:lvl9pPr marL="3657600" algn="l" defTabSz="914400" rtl="0" eaLnBrk="1" latinLnBrk="0" hangingPunct="1">
@@ -3092,9 +3092,9 @@
           <a:solidFill>
             <a:schemeClr val="tx1"/>
           </a:solidFill>
-          <a:latin typeface="+mn-lt"/>
-          <a:ea typeface="+mn-ea"/>
-          <a:cs typeface="+mn-cs"/>
+          <a:latin typeface="Alibaba PuHuiTi 3.0 55 Regular"/>
+          <a:ea typeface="Alibaba PuHuiTi 3.0 55 Regular"/>
+          <a:cs typeface="Alibaba PuHuiTi 3.0 55 Regular"/>
         </a:defRPr>
       </a:lvl9pPr>
     </p:otherStyle>
@@ -3134,8 +3134,8 @@
         </p:nvSpPr>
         <p:spPr>
           <a:xfrm>
-            <a:off x="-36576" y="45720"/>
-            <a:ext cx="12271248" cy="73152"/>
+            <a:off x="0" y="0"/>
+            <a:ext cx="12192000" cy="101600"/>
           </a:xfrm>
           <a:prstGeom prst="rect">
             <a:avLst/>
@@ -3143,11 +3143,8 @@
           <a:solidFill>
             <a:srgbClr val="6251B1"/>
           </a:solidFill>
-          <a:ln w="12700">
-            <a:solidFill>
-              <a:srgbClr val="6251B1"/>
-            </a:solidFill>
-            <a:prstDash val="solid"/>
+          <a:ln>
+            <a:noFill/>
           </a:ln>
         </p:spPr>
       </p:sp>
@@ -3159,8 +3156,8 @@
         </p:nvSpPr>
         <p:spPr>
           <a:xfrm>
-            <a:off x="-36576" y="6739128"/>
-            <a:ext cx="12271248" cy="73152"/>
+            <a:off x="0" y="6756400"/>
+            <a:ext cx="12192000" cy="101600"/>
           </a:xfrm>
           <a:prstGeom prst="rect">
             <a:avLst/>
@@ -3168,11 +3165,8 @@
           <a:solidFill>
             <a:srgbClr val="6251B1"/>
           </a:solidFill>
-          <a:ln w="12700">
-            <a:solidFill>
-              <a:srgbClr val="6251B1"/>
-            </a:solidFill>
-            <a:prstDash val="solid"/>
+          <a:ln>
+            <a:noFill/>
           </a:ln>
         </p:spPr>
       </p:sp>
@@ -3205,9 +3199,9 @@
                 <a:solidFill>
                   <a:srgbClr val="262626"/>
                 </a:solidFill>
-                <a:latin typeface="Alibaba PuHuiTi 3.0" pitchFamily="34" charset="0"/>
-                <a:ea typeface="Alibaba PuHuiTi 3.0" pitchFamily="34" charset="-122"/>
-                <a:cs typeface="Alibaba PuHuiTi 3.0" pitchFamily="34" charset="-120"/>
+                <a:latin typeface="Alibaba PuHuiTi 3.0 115 Black" pitchFamily="34" charset="0"/>
+                <a:ea typeface="Alibaba PuHuiTi 3.0 115 Black" pitchFamily="34" charset="-122"/>
+                <a:cs typeface="Alibaba PuHuiTi 3.0 115 Black" pitchFamily="34" charset="-120"/>
               </a:rPr>
               <a:t>图像编码</a:t>
             </a:r>
@@ -3244,9 +3238,9 @@
                 <a:solidFill>
                   <a:srgbClr val="808080"/>
                 </a:solidFill>
-                <a:latin typeface="Alibaba PuHuiTi 3.0" pitchFamily="34" charset="0"/>
-                <a:ea typeface="Alibaba PuHuiTi 3.0" pitchFamily="34" charset="-122"/>
-                <a:cs typeface="Alibaba PuHuiTi 3.0" pitchFamily="34" charset="-120"/>
+                <a:latin typeface="Alibaba PuHuiTi 3.0 55 Regular" pitchFamily="34" charset="0"/>
+                <a:ea typeface="Alibaba PuHuiTi 3.0 55 Regular" pitchFamily="34" charset="-122"/>
+                <a:cs typeface="Alibaba PuHuiTi 3.0 55 Regular" pitchFamily="34" charset="-120"/>
               </a:rPr>
               <a:t>Sampling · Quantization · Encoding</a:t>
             </a:r>
@@ -3283,9 +3277,9 @@
                 <a:solidFill>
                   <a:srgbClr val="666666"/>
                 </a:solidFill>
-                <a:latin typeface="Alibaba PuHuiTi 3.0" pitchFamily="34" charset="0"/>
-                <a:ea typeface="Alibaba PuHuiTi 3.0" pitchFamily="34" charset="-122"/>
-                <a:cs typeface="Alibaba PuHuiTi 3.0" pitchFamily="34" charset="-120"/>
+                <a:latin typeface="Alibaba PuHuiTi 3.0 55 Regular" pitchFamily="34" charset="0"/>
+                <a:ea typeface="Alibaba PuHuiTi 3.0 55 Regular" pitchFamily="34" charset="-122"/>
+                <a:cs typeface="Alibaba PuHuiTi 3.0 55 Regular" pitchFamily="34" charset="-120"/>
               </a:rPr>
               <a:t>从一张图片到 pixels、colors、bits 和 bytes</a:t>
             </a:r>
@@ -3333,8 +3327,8 @@
         </p:nvSpPr>
         <p:spPr>
           <a:xfrm>
-            <a:off x="-36576" y="45720"/>
-            <a:ext cx="12271248" cy="73152"/>
+            <a:off x="0" y="0"/>
+            <a:ext cx="12192000" cy="101600"/>
           </a:xfrm>
           <a:prstGeom prst="rect">
             <a:avLst/>
@@ -3342,11 +3336,8 @@
           <a:solidFill>
             <a:srgbClr val="6251B1"/>
           </a:solidFill>
-          <a:ln w="12700">
-            <a:solidFill>
-              <a:srgbClr val="6251B1"/>
-            </a:solidFill>
-            <a:prstDash val="solid"/>
+          <a:ln>
+            <a:noFill/>
           </a:ln>
         </p:spPr>
       </p:sp>
@@ -3358,8 +3349,8 @@
         </p:nvSpPr>
         <p:spPr>
           <a:xfrm>
-            <a:off x="-36576" y="6739128"/>
-            <a:ext cx="12271248" cy="73152"/>
+            <a:off x="0" y="6756400"/>
+            <a:ext cx="12192000" cy="101600"/>
           </a:xfrm>
           <a:prstGeom prst="rect">
             <a:avLst/>
@@ -3367,11 +3358,8 @@
           <a:solidFill>
             <a:srgbClr val="6251B1"/>
           </a:solidFill>
-          <a:ln w="12700">
-            <a:solidFill>
-              <a:srgbClr val="6251B1"/>
-            </a:solidFill>
-            <a:prstDash val="solid"/>
+          <a:ln>
+            <a:noFill/>
           </a:ln>
         </p:spPr>
       </p:sp>
@@ -3383,8 +3371,8 @@
         </p:nvSpPr>
         <p:spPr>
           <a:xfrm>
-            <a:off x="608076" y="438912"/>
-            <a:ext cx="10972800" cy="566928"/>
+            <a:off x="608076" y="608076"/>
+            <a:ext cx="10972800" cy="704088"/>
           </a:xfrm>
           <a:prstGeom prst="rect">
             <a:avLst/>
@@ -3394,11 +3382,93 @@
         </p:spPr>
         <p:txBody>
           <a:bodyPr wrap="square" lIns="0" tIns="0" rIns="0" bIns="0" rtlCol="0" anchor="ctr">
+            <a:noAutofit/>
+          </a:bodyPr>
+          <a:lstStyle/>
+          <a:p>
+            <a:pPr indent="0" marL="0">
+              <a:buNone/>
+            </a:pPr>
+            <a:r>
+              <a:rPr lang="en-US" sz="3600" b="1" dirty="0">
+                <a:solidFill>
+                  <a:srgbClr val="262626"/>
+                </a:solidFill>
+                <a:latin typeface="Alibaba PuHuiTi 3.0 115 Black" pitchFamily="34" charset="0"/>
+                <a:ea typeface="Alibaba PuHuiTi 3.0 115 Black" pitchFamily="34" charset="-122"/>
+                <a:cs typeface="Alibaba PuHuiTi 3.0 115 Black" pitchFamily="34" charset="-120"/>
+              </a:rPr>
+              <a:t>Q3 像素数量完全一样，红绿接缝还会一直看得见吗？</a:t>
+            </a:r>
+            <a:endParaRPr lang="en-US" sz="3000" dirty="0"/>
+          </a:p>
+        </p:txBody>
+      </p:sp>
+      <p:sp>
+        <p:nvSpPr>
+          <p:cNvPr id="6" name="Text 3"/>
+          <p:cNvSpPr/>
+          <p:nvPr/>
+        </p:nvSpPr>
+        <p:spPr>
+          <a:xfrm>
+            <a:off x="868680" y="2057400"/>
+            <a:ext cx="10424160" cy="548640"/>
+          </a:xfrm>
+          <a:prstGeom prst="rect">
+            <a:avLst/>
+          </a:prstGeom>
+          <a:noFill/>
+          <a:ln/>
+        </p:spPr>
+        <p:txBody>
+          <a:bodyPr wrap="square" lIns="635" tIns="635" rIns="635" bIns="635" rtlCol="0" anchor="ctr">
             <a:normAutofit/>
           </a:bodyPr>
           <a:lstStyle/>
           <a:p>
-            <a:pPr indent="0" marL="0">
+            <a:pPr algn="ctr" indent="0" marL="0">
+              <a:buNone/>
+            </a:pPr>
+            <a:r>
+              <a:rPr lang="en-US" sz="2600" b="1" dirty="0">
+                <a:solidFill>
+                  <a:srgbClr val="262626"/>
+                </a:solidFill>
+                <a:latin typeface="Alibaba PuHuiTi 3.0 115 Black" pitchFamily="34" charset="0"/>
+                <a:ea typeface="Alibaba PuHuiTi 3.0 115 Black" pitchFamily="34" charset="-122"/>
+                <a:cs typeface="Alibaba PuHuiTi 3.0 115 Black" pitchFamily="34" charset="-120"/>
+              </a:rPr>
+              <a:t>条件：pixel dimensions 不变，只限制整幅图最多出现的颜色总数。</a:t>
+            </a:r>
+            <a:endParaRPr lang="en-US" sz="2600" dirty="0"/>
+          </a:p>
+        </p:txBody>
+      </p:sp>
+      <p:sp>
+        <p:nvSpPr>
+          <p:cNvPr id="7" name="Text 4"/>
+          <p:cNvSpPr/>
+          <p:nvPr/>
+        </p:nvSpPr>
+        <p:spPr>
+          <a:xfrm>
+            <a:off x="868680" y="2971800"/>
+            <a:ext cx="10424160" cy="502920"/>
+          </a:xfrm>
+          <a:prstGeom prst="rect">
+            <a:avLst/>
+          </a:prstGeom>
+          <a:noFill/>
+          <a:ln/>
+        </p:spPr>
+        <p:txBody>
+          <a:bodyPr wrap="square" lIns="635" tIns="635" rIns="635" bIns="635" rtlCol="0" anchor="ctr">
+            <a:normAutofit/>
+          </a:bodyPr>
+          <a:lstStyle/>
+          <a:p>
+            <a:pPr algn="ctr" indent="0" marL="0">
               <a:buNone/>
             </a:pPr>
             <a:r>
@@ -3406,91 +3476,9 @@
                 <a:solidFill>
                   <a:srgbClr val="262626"/>
                 </a:solidFill>
-                <a:latin typeface="Alibaba PuHuiTi 3.0" pitchFamily="34" charset="0"/>
-                <a:ea typeface="Alibaba PuHuiTi 3.0" pitchFamily="34" charset="-122"/>
-                <a:cs typeface="Alibaba PuHuiTi 3.0" pitchFamily="34" charset="-120"/>
-              </a:rPr>
-              <a:t>Q3 像素数量完全一样，红绿接缝还会一直看得见吗？</a:t>
-            </a:r>
-            <a:endParaRPr lang="en-US" sz="3000" dirty="0"/>
-          </a:p>
-        </p:txBody>
-      </p:sp>
-      <p:sp>
-        <p:nvSpPr>
-          <p:cNvPr id="6" name="Text 3"/>
-          <p:cNvSpPr/>
-          <p:nvPr/>
-        </p:nvSpPr>
-        <p:spPr>
-          <a:xfrm>
-            <a:off x="868680" y="2057400"/>
-            <a:ext cx="10424160" cy="548640"/>
-          </a:xfrm>
-          <a:prstGeom prst="rect">
-            <a:avLst/>
-          </a:prstGeom>
-          <a:noFill/>
-          <a:ln/>
-        </p:spPr>
-        <p:txBody>
-          <a:bodyPr wrap="square" lIns="635" tIns="635" rIns="635" bIns="635" rtlCol="0" anchor="ctr">
-            <a:normAutofit/>
-          </a:bodyPr>
-          <a:lstStyle/>
-          <a:p>
-            <a:pPr algn="ctr" indent="0" marL="0">
-              <a:buNone/>
-            </a:pPr>
-            <a:r>
-              <a:rPr lang="en-US" sz="2600" b="1" dirty="0">
-                <a:solidFill>
-                  <a:srgbClr val="262626"/>
-                </a:solidFill>
-                <a:latin typeface="Alibaba PuHuiTi 3.0" pitchFamily="34" charset="0"/>
-                <a:ea typeface="Alibaba PuHuiTi 3.0" pitchFamily="34" charset="-122"/>
-                <a:cs typeface="Alibaba PuHuiTi 3.0" pitchFamily="34" charset="-120"/>
-              </a:rPr>
-              <a:t>条件：pixel dimensions 不变，只限制整幅图最多出现的颜色总数。</a:t>
-            </a:r>
-            <a:endParaRPr lang="en-US" sz="2600" dirty="0"/>
-          </a:p>
-        </p:txBody>
-      </p:sp>
-      <p:sp>
-        <p:nvSpPr>
-          <p:cNvPr id="7" name="Text 4"/>
-          <p:cNvSpPr/>
-          <p:nvPr/>
-        </p:nvSpPr>
-        <p:spPr>
-          <a:xfrm>
-            <a:off x="868680" y="2971800"/>
-            <a:ext cx="10424160" cy="502920"/>
-          </a:xfrm>
-          <a:prstGeom prst="rect">
-            <a:avLst/>
-          </a:prstGeom>
-          <a:noFill/>
-          <a:ln/>
-        </p:spPr>
-        <p:txBody>
-          <a:bodyPr wrap="square" lIns="635" tIns="635" rIns="635" bIns="635" rtlCol="0" anchor="ctr">
-            <a:normAutofit/>
-          </a:bodyPr>
-          <a:lstStyle/>
-          <a:p>
-            <a:pPr algn="ctr" indent="0" marL="0">
-              <a:buNone/>
-            </a:pPr>
-            <a:r>
-              <a:rPr lang="en-US" sz="3000" b="1" dirty="0">
-                <a:solidFill>
-                  <a:srgbClr val="262626"/>
-                </a:solidFill>
-                <a:latin typeface="Alibaba PuHuiTi 3.0" pitchFamily="34" charset="0"/>
-                <a:ea typeface="Alibaba PuHuiTi 3.0" pitchFamily="34" charset="-122"/>
-                <a:cs typeface="Alibaba PuHuiTi 3.0" pitchFamily="34" charset="-120"/>
+                <a:latin typeface="Alibaba PuHuiTi 3.0 115 Black" pitchFamily="34" charset="0"/>
+                <a:ea typeface="Alibaba PuHuiTi 3.0 115 Black" pitchFamily="34" charset="-122"/>
+                <a:cs typeface="Alibaba PuHuiTi 3.0 115 Black" pitchFamily="34" charset="-120"/>
               </a:rPr>
               <a:t>预测：红绿接缝还会一直看得见吗？为什么？</a:t>
             </a:r>
@@ -3538,8 +3526,8 @@
         </p:nvSpPr>
         <p:spPr>
           <a:xfrm>
-            <a:off x="-36576" y="45720"/>
-            <a:ext cx="12271248" cy="73152"/>
+            <a:off x="0" y="0"/>
+            <a:ext cx="12192000" cy="101600"/>
           </a:xfrm>
           <a:prstGeom prst="rect">
             <a:avLst/>
@@ -3547,11 +3535,8 @@
           <a:solidFill>
             <a:srgbClr val="6251B1"/>
           </a:solidFill>
-          <a:ln w="12700">
-            <a:solidFill>
-              <a:srgbClr val="6251B1"/>
-            </a:solidFill>
-            <a:prstDash val="solid"/>
+          <a:ln>
+            <a:noFill/>
           </a:ln>
         </p:spPr>
       </p:sp>
@@ -3563,8 +3548,8 @@
         </p:nvSpPr>
         <p:spPr>
           <a:xfrm>
-            <a:off x="-36576" y="6739128"/>
-            <a:ext cx="12271248" cy="73152"/>
+            <a:off x="0" y="6756400"/>
+            <a:ext cx="12192000" cy="101600"/>
           </a:xfrm>
           <a:prstGeom prst="rect">
             <a:avLst/>
@@ -3572,11 +3557,8 @@
           <a:solidFill>
             <a:srgbClr val="6251B1"/>
           </a:solidFill>
-          <a:ln w="12700">
-            <a:solidFill>
-              <a:srgbClr val="6251B1"/>
-            </a:solidFill>
-            <a:prstDash val="solid"/>
+          <a:ln>
+            <a:noFill/>
           </a:ln>
         </p:spPr>
       </p:sp>
@@ -3588,8 +3570,8 @@
         </p:nvSpPr>
         <p:spPr>
           <a:xfrm>
-            <a:off x="608076" y="438912"/>
-            <a:ext cx="10972800" cy="566928"/>
+            <a:off x="608076" y="608076"/>
+            <a:ext cx="10972800" cy="704088"/>
           </a:xfrm>
           <a:prstGeom prst="rect">
             <a:avLst/>
@@ -3599,7 +3581,7 @@
         </p:spPr>
         <p:txBody>
           <a:bodyPr wrap="square" lIns="0" tIns="0" rIns="0" bIns="0" rtlCol="0" anchor="ctr">
-            <a:normAutofit/>
+            <a:noAutofit/>
           </a:bodyPr>
           <a:lstStyle/>
           <a:p>
@@ -3607,13 +3589,13 @@
               <a:buNone/>
             </a:pPr>
             <a:r>
-              <a:rPr lang="en-US" sz="3000" b="1" dirty="0">
+              <a:rPr lang="en-US" sz="3600" b="1" dirty="0">
                 <a:solidFill>
                   <a:srgbClr val="262626"/>
                 </a:solidFill>
-                <a:latin typeface="Alibaba PuHuiTi 3.0" pitchFamily="34" charset="0"/>
-                <a:ea typeface="Alibaba PuHuiTi 3.0" pitchFamily="34" charset="-122"/>
-                <a:cs typeface="Alibaba PuHuiTi 3.0" pitchFamily="34" charset="-120"/>
+                <a:latin typeface="Alibaba PuHuiTi 3.0 115 Black" pitchFamily="34" charset="0"/>
+                <a:ea typeface="Alibaba PuHuiTi 3.0 115 Black" pitchFamily="34" charset="-122"/>
+                <a:cs typeface="Alibaba PuHuiTi 3.0 115 Black" pitchFamily="34" charset="-120"/>
               </a:rPr>
               <a:t>Q3 像素数量完全一样，红绿接缝还会一直看得见吗？</a:t>
             </a:r>
@@ -3636,7 +3618,7 @@
         </p:blipFill>
         <p:spPr>
           <a:xfrm>
-            <a:off x="822960" y="1417320"/>
+            <a:off x="822960" y="1490472"/>
             <a:ext cx="3154680" cy="3154680"/>
           </a:xfrm>
           <a:prstGeom prst="rect">
@@ -3652,7 +3634,7 @@
         </p:nvSpPr>
         <p:spPr>
           <a:xfrm>
-            <a:off x="822960" y="4645152"/>
+            <a:off x="822960" y="4718304"/>
             <a:ext cx="3154680" cy="320040"/>
           </a:xfrm>
           <a:prstGeom prst="rect">
@@ -3675,9 +3657,9 @@
                 <a:solidFill>
                   <a:srgbClr val="262626"/>
                 </a:solidFill>
-                <a:latin typeface="Alibaba PuHuiTi 3.0" pitchFamily="34" charset="0"/>
-                <a:ea typeface="Alibaba PuHuiTi 3.0" pitchFamily="34" charset="-122"/>
-                <a:cs typeface="Alibaba PuHuiTi 3.0" pitchFamily="34" charset="-120"/>
+                <a:latin typeface="Alibaba PuHuiTi 3.0 55 Regular" pitchFamily="34" charset="0"/>
+                <a:ea typeface="Alibaba PuHuiTi 3.0 55 Regular" pitchFamily="34" charset="-122"/>
+                <a:cs typeface="Alibaba PuHuiTi 3.0 55 Regular" pitchFamily="34" charset="-120"/>
               </a:rPr>
               <a:t>原图</a:t>
             </a:r>
@@ -3700,7 +3682,7 @@
         </p:blipFill>
         <p:spPr>
           <a:xfrm>
-            <a:off x="4526280" y="1417320"/>
+            <a:off x="4526280" y="1490472"/>
             <a:ext cx="3154680" cy="3154680"/>
           </a:xfrm>
           <a:prstGeom prst="rect">
@@ -3716,7 +3698,7 @@
         </p:nvSpPr>
         <p:spPr>
           <a:xfrm>
-            <a:off x="4526280" y="4645152"/>
+            <a:off x="4526280" y="4718304"/>
             <a:ext cx="3154680" cy="320040"/>
           </a:xfrm>
           <a:prstGeom prst="rect">
@@ -3739,9 +3721,9 @@
                 <a:solidFill>
                   <a:srgbClr val="262626"/>
                 </a:solidFill>
-                <a:latin typeface="Alibaba PuHuiTi 3.0" pitchFamily="34" charset="0"/>
-                <a:ea typeface="Alibaba PuHuiTi 3.0" pitchFamily="34" charset="-122"/>
-                <a:cs typeface="Alibaba PuHuiTi 3.0" pitchFamily="34" charset="-120"/>
+                <a:latin typeface="Alibaba PuHuiTi 3.0 55 Regular" pitchFamily="34" charset="0"/>
+                <a:ea typeface="Alibaba PuHuiTi 3.0 55 Regular" pitchFamily="34" charset="-122"/>
+                <a:cs typeface="Alibaba PuHuiTi 3.0 55 Regular" pitchFamily="34" charset="-120"/>
               </a:rPr>
               <a:t>最多 16 colors</a:t>
             </a:r>
@@ -3764,7 +3746,7 @@
         </p:blipFill>
         <p:spPr>
           <a:xfrm>
-            <a:off x="8229600" y="1417320"/>
+            <a:off x="8229600" y="1490472"/>
             <a:ext cx="3154680" cy="3154680"/>
           </a:xfrm>
           <a:prstGeom prst="rect">
@@ -3780,7 +3762,7 @@
         </p:nvSpPr>
         <p:spPr>
           <a:xfrm>
-            <a:off x="8229600" y="4645152"/>
+            <a:off x="8229600" y="4718304"/>
             <a:ext cx="3154680" cy="320040"/>
           </a:xfrm>
           <a:prstGeom prst="rect">
@@ -3803,9 +3785,9 @@
                 <a:solidFill>
                   <a:srgbClr val="262626"/>
                 </a:solidFill>
-                <a:latin typeface="Alibaba PuHuiTi 3.0" pitchFamily="34" charset="0"/>
-                <a:ea typeface="Alibaba PuHuiTi 3.0" pitchFamily="34" charset="-122"/>
-                <a:cs typeface="Alibaba PuHuiTi 3.0" pitchFamily="34" charset="-120"/>
+                <a:latin typeface="Alibaba PuHuiTi 3.0 55 Regular" pitchFamily="34" charset="0"/>
+                <a:ea typeface="Alibaba PuHuiTi 3.0 55 Regular" pitchFamily="34" charset="-122"/>
+                <a:cs typeface="Alibaba PuHuiTi 3.0 55 Regular" pitchFamily="34" charset="-120"/>
               </a:rPr>
               <a:t>最多 2 colors</a:t>
             </a:r>
@@ -3821,7 +3803,7 @@
         </p:nvSpPr>
         <p:spPr>
           <a:xfrm>
-            <a:off x="822960" y="5577840"/>
+            <a:off x="822960" y="5650992"/>
             <a:ext cx="10561320" cy="457200"/>
           </a:xfrm>
           <a:prstGeom prst="rect">
@@ -3844,9 +3826,9 @@
                 <a:solidFill>
                   <a:srgbClr val="262626"/>
                 </a:solidFill>
-                <a:latin typeface="Alibaba PuHuiTi 3.0" pitchFamily="34" charset="0"/>
-                <a:ea typeface="Alibaba PuHuiTi 3.0" pitchFamily="34" charset="-122"/>
-                <a:cs typeface="Alibaba PuHuiTi 3.0" pitchFamily="34" charset="-120"/>
+                <a:latin typeface="Alibaba PuHuiTi 3.0 115 Black" pitchFamily="34" charset="0"/>
+                <a:ea typeface="Alibaba PuHuiTi 3.0 115 Black" pitchFamily="34" charset="-122"/>
+                <a:cs typeface="Alibaba PuHuiTi 3.0 115 Black" pitchFamily="34" charset="-120"/>
               </a:rPr>
               <a:t>只看图像现象：红绿接缝还在吗？</a:t>
             </a:r>
@@ -3894,8 +3876,8 @@
         </p:nvSpPr>
         <p:spPr>
           <a:xfrm>
-            <a:off x="-36576" y="45720"/>
-            <a:ext cx="12271248" cy="73152"/>
+            <a:off x="0" y="0"/>
+            <a:ext cx="12192000" cy="101600"/>
           </a:xfrm>
           <a:prstGeom prst="rect">
             <a:avLst/>
@@ -3903,11 +3885,8 @@
           <a:solidFill>
             <a:srgbClr val="6251B1"/>
           </a:solidFill>
-          <a:ln w="12700">
-            <a:solidFill>
-              <a:srgbClr val="6251B1"/>
-            </a:solidFill>
-            <a:prstDash val="solid"/>
+          <a:ln>
+            <a:noFill/>
           </a:ln>
         </p:spPr>
       </p:sp>
@@ -3919,8 +3898,8 @@
         </p:nvSpPr>
         <p:spPr>
           <a:xfrm>
-            <a:off x="-36576" y="6739128"/>
-            <a:ext cx="12271248" cy="73152"/>
+            <a:off x="0" y="6756400"/>
+            <a:ext cx="12192000" cy="101600"/>
           </a:xfrm>
           <a:prstGeom prst="rect">
             <a:avLst/>
@@ -3928,11 +3907,8 @@
           <a:solidFill>
             <a:srgbClr val="6251B1"/>
           </a:solidFill>
-          <a:ln w="12700">
-            <a:solidFill>
-              <a:srgbClr val="6251B1"/>
-            </a:solidFill>
-            <a:prstDash val="solid"/>
+          <a:ln>
+            <a:noFill/>
           </a:ln>
         </p:spPr>
       </p:sp>
@@ -3944,8 +3920,8 @@
         </p:nvSpPr>
         <p:spPr>
           <a:xfrm>
-            <a:off x="608076" y="438912"/>
-            <a:ext cx="10972800" cy="566928"/>
+            <a:off x="608076" y="608076"/>
+            <a:ext cx="10972800" cy="704088"/>
           </a:xfrm>
           <a:prstGeom prst="rect">
             <a:avLst/>
@@ -3955,7 +3931,7 @@
         </p:spPr>
         <p:txBody>
           <a:bodyPr wrap="square" lIns="0" tIns="0" rIns="0" bIns="0" rtlCol="0" anchor="ctr">
-            <a:normAutofit/>
+            <a:noAutofit/>
           </a:bodyPr>
           <a:lstStyle/>
           <a:p>
@@ -3963,13 +3939,13 @@
               <a:buNone/>
             </a:pPr>
             <a:r>
-              <a:rPr lang="en-US" sz="3000" b="1" dirty="0">
+              <a:rPr lang="en-US" sz="3600" b="1" dirty="0">
                 <a:solidFill>
                   <a:srgbClr val="262626"/>
                 </a:solidFill>
-                <a:latin typeface="Alibaba PuHuiTi 3.0" pitchFamily="34" charset="0"/>
-                <a:ea typeface="Alibaba PuHuiTi 3.0" pitchFamily="34" charset="-122"/>
-                <a:cs typeface="Alibaba PuHuiTi 3.0" pitchFamily="34" charset="-120"/>
+                <a:latin typeface="Alibaba PuHuiTi 3.0 115 Black" pitchFamily="34" charset="0"/>
+                <a:ea typeface="Alibaba PuHuiTi 3.0 115 Black" pitchFamily="34" charset="-122"/>
+                <a:cs typeface="Alibaba PuHuiTi 3.0 115 Black" pitchFamily="34" charset="-120"/>
               </a:rPr>
               <a:t>Q3 像素数量完全一样，红绿接缝还会一直看得见吗？</a:t>
             </a:r>
@@ -4019,9 +3995,9 @@
                           <a:solidFill>
                             <a:srgbClr val="262626"/>
                           </a:solidFill>
-                          <a:latin typeface="Alibaba PuHuiTi 3.0" pitchFamily="34" charset="0"/>
-                          <a:ea typeface="Alibaba PuHuiTi 3.0" pitchFamily="34" charset="-122"/>
-                          <a:cs typeface="Alibaba PuHuiTi 3.0" pitchFamily="34" charset="-120"/>
+                          <a:latin typeface="Alibaba PuHuiTi 3.0 85 Bold" pitchFamily="34" charset="0"/>
+                          <a:ea typeface="Alibaba PuHuiTi 3.0 85 Bold" pitchFamily="34" charset="-122"/>
+                          <a:cs typeface="Alibaba PuHuiTi 3.0 85 Bold" pitchFamily="34" charset="-120"/>
                         </a:rPr>
                         <a:t>版本</a:t>
                       </a:r>
@@ -4087,9 +4063,9 @@
                           <a:solidFill>
                             <a:srgbClr val="262626"/>
                           </a:solidFill>
-                          <a:latin typeface="Alibaba PuHuiTi 3.0" pitchFamily="34" charset="0"/>
-                          <a:ea typeface="Alibaba PuHuiTi 3.0" pitchFamily="34" charset="-122"/>
-                          <a:cs typeface="Alibaba PuHuiTi 3.0" pitchFamily="34" charset="-120"/>
+                          <a:latin typeface="Alibaba PuHuiTi 3.0 85 Bold" pitchFamily="34" charset="0"/>
+                          <a:ea typeface="Alibaba PuHuiTi 3.0 85 Bold" pitchFamily="34" charset="-122"/>
+                          <a:cs typeface="Alibaba PuHuiTi 3.0 85 Bold" pitchFamily="34" charset="-120"/>
                         </a:rPr>
                         <a:t>left (72,40)</a:t>
                       </a:r>
@@ -4155,9 +4131,9 @@
                           <a:solidFill>
                             <a:srgbClr val="262626"/>
                           </a:solidFill>
-                          <a:latin typeface="Alibaba PuHuiTi 3.0" pitchFamily="34" charset="0"/>
-                          <a:ea typeface="Alibaba PuHuiTi 3.0" pitchFamily="34" charset="-122"/>
-                          <a:cs typeface="Alibaba PuHuiTi 3.0" pitchFamily="34" charset="-120"/>
+                          <a:latin typeface="Alibaba PuHuiTi 3.0 85 Bold" pitchFamily="34" charset="0"/>
+                          <a:ea typeface="Alibaba PuHuiTi 3.0 85 Bold" pitchFamily="34" charset="-122"/>
+                          <a:cs typeface="Alibaba PuHuiTi 3.0 85 Bold" pitchFamily="34" charset="-120"/>
                         </a:rPr>
                         <a:t>right (73,40)</a:t>
                       </a:r>
@@ -4223,9 +4199,9 @@
                           <a:solidFill>
                             <a:srgbClr val="262626"/>
                           </a:solidFill>
-                          <a:latin typeface="Alibaba PuHuiTi 3.0" pitchFamily="34" charset="0"/>
-                          <a:ea typeface="Alibaba PuHuiTi 3.0" pitchFamily="34" charset="-122"/>
-                          <a:cs typeface="Alibaba PuHuiTi 3.0" pitchFamily="34" charset="-120"/>
+                          <a:latin typeface="Alibaba PuHuiTi 3.0 85 Bold" pitchFamily="34" charset="0"/>
+                          <a:ea typeface="Alibaba PuHuiTi 3.0 85 Bold" pitchFamily="34" charset="-122"/>
+                          <a:cs typeface="Alibaba PuHuiTi 3.0 85 Bold" pitchFamily="34" charset="-120"/>
                         </a:rPr>
                         <a:t>是否相同</a:t>
                       </a:r>
@@ -4293,9 +4269,9 @@
                           <a:solidFill>
                             <a:srgbClr val="262626"/>
                           </a:solidFill>
-                          <a:latin typeface="Alibaba PuHuiTi 3.0" pitchFamily="34" charset="0"/>
-                          <a:ea typeface="Alibaba PuHuiTi 3.0" pitchFamily="34" charset="-122"/>
-                          <a:cs typeface="Alibaba PuHuiTi 3.0" pitchFamily="34" charset="-120"/>
+                          <a:latin typeface="Alibaba PuHuiTi 3.0 85 Bold" pitchFamily="34" charset="0"/>
+                          <a:ea typeface="Alibaba PuHuiTi 3.0 85 Bold" pitchFamily="34" charset="-122"/>
+                          <a:cs typeface="Alibaba PuHuiTi 3.0 85 Bold" pitchFamily="34" charset="-120"/>
                         </a:rPr>
                         <a:t>16 colors</a:t>
                       </a:r>
@@ -4361,9 +4337,9 @@
                           <a:solidFill>
                             <a:srgbClr val="262626"/>
                           </a:solidFill>
-                          <a:latin typeface="Alibaba PuHuiTi 3.0" pitchFamily="34" charset="0"/>
-                          <a:ea typeface="Alibaba PuHuiTi 3.0" pitchFamily="34" charset="-122"/>
-                          <a:cs typeface="Alibaba PuHuiTi 3.0" pitchFamily="34" charset="-120"/>
+                          <a:latin typeface="Alibaba PuHuiTi 3.0 85 Bold" pitchFamily="34" charset="0"/>
+                          <a:ea typeface="Alibaba PuHuiTi 3.0 85 Bold" pitchFamily="34" charset="-122"/>
+                          <a:cs typeface="Alibaba PuHuiTi 3.0 85 Bold" pitchFamily="34" charset="-120"/>
                         </a:rPr>
                         <a:t>(255, 0, 0)</a:t>
                       </a:r>
@@ -4429,9 +4405,9 @@
                           <a:solidFill>
                             <a:srgbClr val="262626"/>
                           </a:solidFill>
-                          <a:latin typeface="Alibaba PuHuiTi 3.0" pitchFamily="34" charset="0"/>
-                          <a:ea typeface="Alibaba PuHuiTi 3.0" pitchFamily="34" charset="-122"/>
-                          <a:cs typeface="Alibaba PuHuiTi 3.0" pitchFamily="34" charset="-120"/>
+                          <a:latin typeface="Alibaba PuHuiTi 3.0 85 Bold" pitchFamily="34" charset="0"/>
+                          <a:ea typeface="Alibaba PuHuiTi 3.0 85 Bold" pitchFamily="34" charset="-122"/>
+                          <a:cs typeface="Alibaba PuHuiTi 3.0 85 Bold" pitchFamily="34" charset="-120"/>
                         </a:rPr>
                         <a:t>(0, 255, 0)</a:t>
                       </a:r>
@@ -4497,9 +4473,9 @@
                           <a:solidFill>
                             <a:srgbClr val="262626"/>
                           </a:solidFill>
-                          <a:latin typeface="Alibaba PuHuiTi 3.0" pitchFamily="34" charset="0"/>
-                          <a:ea typeface="Alibaba PuHuiTi 3.0" pitchFamily="34" charset="-122"/>
-                          <a:cs typeface="Alibaba PuHuiTi 3.0" pitchFamily="34" charset="-120"/>
+                          <a:latin typeface="Alibaba PuHuiTi 3.0 85 Bold" pitchFamily="34" charset="0"/>
+                          <a:ea typeface="Alibaba PuHuiTi 3.0 85 Bold" pitchFamily="34" charset="-122"/>
+                          <a:cs typeface="Alibaba PuHuiTi 3.0 85 Bold" pitchFamily="34" charset="-120"/>
                         </a:rPr>
                         <a:t>不同</a:t>
                       </a:r>
@@ -4567,9 +4543,9 @@
                           <a:solidFill>
                             <a:srgbClr val="262626"/>
                           </a:solidFill>
-                          <a:latin typeface="Alibaba PuHuiTi 3.0" pitchFamily="34" charset="0"/>
-                          <a:ea typeface="Alibaba PuHuiTi 3.0" pitchFamily="34" charset="-122"/>
-                          <a:cs typeface="Alibaba PuHuiTi 3.0" pitchFamily="34" charset="-120"/>
+                          <a:latin typeface="Alibaba PuHuiTi 3.0 85 Bold" pitchFamily="34" charset="0"/>
+                          <a:ea typeface="Alibaba PuHuiTi 3.0 85 Bold" pitchFamily="34" charset="-122"/>
+                          <a:cs typeface="Alibaba PuHuiTi 3.0 85 Bold" pitchFamily="34" charset="-120"/>
                         </a:rPr>
                         <a:t>2 colors</a:t>
                       </a:r>
@@ -4635,9 +4611,9 @@
                           <a:solidFill>
                             <a:srgbClr val="262626"/>
                           </a:solidFill>
-                          <a:latin typeface="Alibaba PuHuiTi 3.0" pitchFamily="34" charset="0"/>
-                          <a:ea typeface="Alibaba PuHuiTi 3.0" pitchFamily="34" charset="-122"/>
-                          <a:cs typeface="Alibaba PuHuiTi 3.0" pitchFamily="34" charset="-120"/>
+                          <a:latin typeface="Alibaba PuHuiTi 3.0 85 Bold" pitchFamily="34" charset="0"/>
+                          <a:ea typeface="Alibaba PuHuiTi 3.0 85 Bold" pitchFamily="34" charset="-122"/>
+                          <a:cs typeface="Alibaba PuHuiTi 3.0 85 Bold" pitchFamily="34" charset="-120"/>
                         </a:rPr>
                         <a:t>(71, 42, 71)</a:t>
                       </a:r>
@@ -4703,9 +4679,9 @@
                           <a:solidFill>
                             <a:srgbClr val="262626"/>
                           </a:solidFill>
-                          <a:latin typeface="Alibaba PuHuiTi 3.0" pitchFamily="34" charset="0"/>
-                          <a:ea typeface="Alibaba PuHuiTi 3.0" pitchFamily="34" charset="-122"/>
-                          <a:cs typeface="Alibaba PuHuiTi 3.0" pitchFamily="34" charset="-120"/>
+                          <a:latin typeface="Alibaba PuHuiTi 3.0 85 Bold" pitchFamily="34" charset="0"/>
+                          <a:ea typeface="Alibaba PuHuiTi 3.0 85 Bold" pitchFamily="34" charset="-122"/>
+                          <a:cs typeface="Alibaba PuHuiTi 3.0 85 Bold" pitchFamily="34" charset="-120"/>
                         </a:rPr>
                         <a:t>(71, 42, 71)</a:t>
                       </a:r>
@@ -4771,9 +4747,9 @@
                           <a:solidFill>
                             <a:srgbClr val="262626"/>
                           </a:solidFill>
-                          <a:latin typeface="Alibaba PuHuiTi 3.0" pitchFamily="34" charset="0"/>
-                          <a:ea typeface="Alibaba PuHuiTi 3.0" pitchFamily="34" charset="-122"/>
-                          <a:cs typeface="Alibaba PuHuiTi 3.0" pitchFamily="34" charset="-120"/>
+                          <a:latin typeface="Alibaba PuHuiTi 3.0 85 Bold" pitchFamily="34" charset="0"/>
+                          <a:ea typeface="Alibaba PuHuiTi 3.0 85 Bold" pitchFamily="34" charset="-122"/>
+                          <a:cs typeface="Alibaba PuHuiTi 3.0 85 Bold" pitchFamily="34" charset="-120"/>
                         </a:rPr>
                         <a:t>相同</a:t>
                       </a:r>
@@ -4889,9 +4865,9 @@
                 <a:solidFill>
                   <a:srgbClr val="262626"/>
                 </a:solidFill>
-                <a:latin typeface="Alibaba PuHuiTi 3.0" pitchFamily="34" charset="0"/>
-                <a:ea typeface="Alibaba PuHuiTi 3.0" pitchFamily="34" charset="-122"/>
-                <a:cs typeface="Alibaba PuHuiTi 3.0" pitchFamily="34" charset="-120"/>
+                <a:latin typeface="Alibaba PuHuiTi 3.0 115 Black" pitchFamily="34" charset="0"/>
+                <a:ea typeface="Alibaba PuHuiTi 3.0 115 Black" pitchFamily="34" charset="-122"/>
+                <a:cs typeface="Alibaba PuHuiTi 3.0 115 Black" pitchFamily="34" charset="-120"/>
               </a:rPr>
               <a:t>pixel positions 没有减少，但视觉边界可能因为颜色被合并而消失。</a:t>
             </a:r>
@@ -4939,8 +4915,8 @@
         </p:nvSpPr>
         <p:spPr>
           <a:xfrm>
-            <a:off x="-36576" y="45720"/>
-            <a:ext cx="12271248" cy="73152"/>
+            <a:off x="0" y="0"/>
+            <a:ext cx="12192000" cy="101600"/>
           </a:xfrm>
           <a:prstGeom prst="rect">
             <a:avLst/>
@@ -4948,11 +4924,8 @@
           <a:solidFill>
             <a:srgbClr val="6251B1"/>
           </a:solidFill>
-          <a:ln w="12700">
-            <a:solidFill>
-              <a:srgbClr val="6251B1"/>
-            </a:solidFill>
-            <a:prstDash val="solid"/>
+          <a:ln>
+            <a:noFill/>
           </a:ln>
         </p:spPr>
       </p:sp>
@@ -4964,8 +4937,8 @@
         </p:nvSpPr>
         <p:spPr>
           <a:xfrm>
-            <a:off x="-36576" y="6739128"/>
-            <a:ext cx="12271248" cy="73152"/>
+            <a:off x="0" y="6756400"/>
+            <a:ext cx="12192000" cy="101600"/>
           </a:xfrm>
           <a:prstGeom prst="rect">
             <a:avLst/>
@@ -4973,11 +4946,8 @@
           <a:solidFill>
             <a:srgbClr val="6251B1"/>
           </a:solidFill>
-          <a:ln w="12700">
-            <a:solidFill>
-              <a:srgbClr val="6251B1"/>
-            </a:solidFill>
-            <a:prstDash val="solid"/>
+          <a:ln>
+            <a:noFill/>
           </a:ln>
         </p:spPr>
       </p:sp>
@@ -4989,8 +4959,8 @@
         </p:nvSpPr>
         <p:spPr>
           <a:xfrm>
-            <a:off x="608076" y="438912"/>
-            <a:ext cx="10972800" cy="566928"/>
+            <a:off x="608076" y="608076"/>
+            <a:ext cx="10972800" cy="704088"/>
           </a:xfrm>
           <a:prstGeom prst="rect">
             <a:avLst/>
@@ -5000,7 +4970,7 @@
         </p:spPr>
         <p:txBody>
           <a:bodyPr wrap="square" lIns="0" tIns="0" rIns="0" bIns="0" rtlCol="0" anchor="ctr">
-            <a:normAutofit/>
+            <a:noAutofit/>
           </a:bodyPr>
           <a:lstStyle/>
           <a:p>
@@ -5008,13 +4978,13 @@
               <a:buNone/>
             </a:pPr>
             <a:r>
-              <a:rPr lang="en-US" sz="3000" b="1" dirty="0">
+              <a:rPr lang="en-US" sz="3600" b="1" dirty="0">
                 <a:solidFill>
                   <a:srgbClr val="262626"/>
                 </a:solidFill>
-                <a:latin typeface="Alibaba PuHuiTi 3.0" pitchFamily="34" charset="0"/>
-                <a:ea typeface="Alibaba PuHuiTi 3.0" pitchFamily="34" charset="-122"/>
-                <a:cs typeface="Alibaba PuHuiTi 3.0" pitchFamily="34" charset="-120"/>
+                <a:latin typeface="Alibaba PuHuiTi 3.0 115 Black" pitchFamily="34" charset="0"/>
+                <a:ea typeface="Alibaba PuHuiTi 3.0 115 Black" pitchFamily="34" charset="-122"/>
+                <a:cs typeface="Alibaba PuHuiTi 3.0 115 Black" pitchFamily="34" charset="-120"/>
               </a:rPr>
               <a:t>Q4 如果只允许 16 种颜色，最少需要几 bit？</a:t>
             </a:r>
@@ -5053,9 +5023,9 @@
                 <a:solidFill>
                   <a:srgbClr val="262626"/>
                 </a:solidFill>
-                <a:latin typeface="Alibaba PuHuiTi 3.0" pitchFamily="34" charset="0"/>
-                <a:ea typeface="Alibaba PuHuiTi 3.0" pitchFamily="34" charset="-122"/>
-                <a:cs typeface="Alibaba PuHuiTi 3.0" pitchFamily="34" charset="-120"/>
+                <a:latin typeface="Alibaba PuHuiTi 3.0 115 Black" pitchFamily="34" charset="0"/>
+                <a:ea typeface="Alibaba PuHuiTi 3.0 115 Black" pitchFamily="34" charset="-122"/>
+                <a:cs typeface="Alibaba PuHuiTi 3.0 115 Black" pitchFamily="34" charset="-120"/>
               </a:rPr>
               <a:t>给 16 种颜色各分配一个不同的、固定长度的二进制标签。</a:t>
             </a:r>
@@ -5094,9 +5064,9 @@
                 <a:solidFill>
                   <a:srgbClr val="262626"/>
                 </a:solidFill>
-                <a:latin typeface="Alibaba PuHuiTi 3.0" pitchFamily="34" charset="0"/>
-                <a:ea typeface="Alibaba PuHuiTi 3.0" pitchFamily="34" charset="-122"/>
-                <a:cs typeface="Alibaba PuHuiTi 3.0" pitchFamily="34" charset="-120"/>
+                <a:latin typeface="Alibaba PuHuiTi 3.0 115 Black" pitchFamily="34" charset="0"/>
+                <a:ea typeface="Alibaba PuHuiTi 3.0 115 Black" pitchFamily="34" charset="-122"/>
+                <a:cs typeface="Alibaba PuHuiTi 3.0 115 Black" pitchFamily="34" charset="-120"/>
               </a:rPr>
               <a:t>2 bit、3 bit 够吗？怎样判断？</a:t>
             </a:r>
@@ -5144,8 +5114,8 @@
         </p:nvSpPr>
         <p:spPr>
           <a:xfrm>
-            <a:off x="-36576" y="45720"/>
-            <a:ext cx="12271248" cy="73152"/>
+            <a:off x="0" y="0"/>
+            <a:ext cx="12192000" cy="101600"/>
           </a:xfrm>
           <a:prstGeom prst="rect">
             <a:avLst/>
@@ -5153,11 +5123,8 @@
           <a:solidFill>
             <a:srgbClr val="6251B1"/>
           </a:solidFill>
-          <a:ln w="12700">
-            <a:solidFill>
-              <a:srgbClr val="6251B1"/>
-            </a:solidFill>
-            <a:prstDash val="solid"/>
+          <a:ln>
+            <a:noFill/>
           </a:ln>
         </p:spPr>
       </p:sp>
@@ -5169,8 +5136,8 @@
         </p:nvSpPr>
         <p:spPr>
           <a:xfrm>
-            <a:off x="-36576" y="6739128"/>
-            <a:ext cx="12271248" cy="73152"/>
+            <a:off x="0" y="6756400"/>
+            <a:ext cx="12192000" cy="101600"/>
           </a:xfrm>
           <a:prstGeom prst="rect">
             <a:avLst/>
@@ -5178,11 +5145,8 @@
           <a:solidFill>
             <a:srgbClr val="6251B1"/>
           </a:solidFill>
-          <a:ln w="12700">
-            <a:solidFill>
-              <a:srgbClr val="6251B1"/>
-            </a:solidFill>
-            <a:prstDash val="solid"/>
+          <a:ln>
+            <a:noFill/>
           </a:ln>
         </p:spPr>
       </p:sp>
@@ -5194,8 +5158,8 @@
         </p:nvSpPr>
         <p:spPr>
           <a:xfrm>
-            <a:off x="608076" y="438912"/>
-            <a:ext cx="10972800" cy="566928"/>
+            <a:off x="608076" y="608076"/>
+            <a:ext cx="10972800" cy="704088"/>
           </a:xfrm>
           <a:prstGeom prst="rect">
             <a:avLst/>
@@ -5205,7 +5169,7 @@
         </p:spPr>
         <p:txBody>
           <a:bodyPr wrap="square" lIns="0" tIns="0" rIns="0" bIns="0" rtlCol="0" anchor="ctr">
-            <a:normAutofit/>
+            <a:noAutofit/>
           </a:bodyPr>
           <a:lstStyle/>
           <a:p>
@@ -5213,13 +5177,13 @@
               <a:buNone/>
             </a:pPr>
             <a:r>
-              <a:rPr lang="en-US" sz="3000" b="1" dirty="0">
+              <a:rPr lang="en-US" sz="3600" b="1" dirty="0">
                 <a:solidFill>
                   <a:srgbClr val="262626"/>
                 </a:solidFill>
-                <a:latin typeface="Alibaba PuHuiTi 3.0" pitchFamily="34" charset="0"/>
-                <a:ea typeface="Alibaba PuHuiTi 3.0" pitchFamily="34" charset="-122"/>
-                <a:cs typeface="Alibaba PuHuiTi 3.0" pitchFamily="34" charset="-120"/>
+                <a:latin typeface="Alibaba PuHuiTi 3.0 115 Black" pitchFamily="34" charset="0"/>
+                <a:ea typeface="Alibaba PuHuiTi 3.0 115 Black" pitchFamily="34" charset="-122"/>
+                <a:cs typeface="Alibaba PuHuiTi 3.0 115 Black" pitchFamily="34" charset="-120"/>
               </a:rPr>
               <a:t>Q4 如果只允许 16 种颜色，最少需要几 bit？</a:t>
             </a:r>
@@ -5242,7 +5206,7 @@
           </p:nvPr>
         </p:nvGraphicFramePr>
         <p:xfrm>
-          <a:off x="2057400" y="1463040"/>
+          <a:off x="2057400" y="1490472"/>
           <a:ext cx="3474720" cy="3108960"/>
         </p:xfrm>
         <a:graphic>
@@ -5267,9 +5231,9 @@
                           <a:solidFill>
                             <a:srgbClr val="262626"/>
                           </a:solidFill>
-                          <a:latin typeface="Alibaba PuHuiTi 3.0" pitchFamily="34" charset="0"/>
-                          <a:ea typeface="Alibaba PuHuiTi 3.0" pitchFamily="34" charset="-122"/>
-                          <a:cs typeface="Alibaba PuHuiTi 3.0" pitchFamily="34" charset="-120"/>
+                          <a:latin typeface="Alibaba PuHuiTi 3.0 85 Bold" pitchFamily="34" charset="0"/>
+                          <a:ea typeface="Alibaba PuHuiTi 3.0 85 Bold" pitchFamily="34" charset="-122"/>
+                          <a:cs typeface="Alibaba PuHuiTi 3.0 85 Bold" pitchFamily="34" charset="-120"/>
                         </a:rPr>
                         <a:t>bit 数</a:t>
                       </a:r>
@@ -5335,9 +5299,9 @@
                           <a:solidFill>
                             <a:srgbClr val="262626"/>
                           </a:solidFill>
-                          <a:latin typeface="Alibaba PuHuiTi 3.0" pitchFamily="34" charset="0"/>
-                          <a:ea typeface="Alibaba PuHuiTi 3.0" pitchFamily="34" charset="-122"/>
-                          <a:cs typeface="Alibaba PuHuiTi 3.0" pitchFamily="34" charset="-120"/>
+                          <a:latin typeface="Alibaba PuHuiTi 3.0 85 Bold" pitchFamily="34" charset="0"/>
+                          <a:ea typeface="Alibaba PuHuiTi 3.0 85 Bold" pitchFamily="34" charset="-122"/>
+                          <a:cs typeface="Alibaba PuHuiTi 3.0 85 Bold" pitchFamily="34" charset="-120"/>
                         </a:rPr>
                         <a:t>可表示状态数</a:t>
                       </a:r>
@@ -5405,9 +5369,9 @@
                           <a:solidFill>
                             <a:srgbClr val="262626"/>
                           </a:solidFill>
-                          <a:latin typeface="Alibaba PuHuiTi 3.0" pitchFamily="34" charset="0"/>
-                          <a:ea typeface="Alibaba PuHuiTi 3.0" pitchFamily="34" charset="-122"/>
-                          <a:cs typeface="Alibaba PuHuiTi 3.0" pitchFamily="34" charset="-120"/>
+                          <a:latin typeface="Alibaba PuHuiTi 3.0 85 Bold" pitchFamily="34" charset="0"/>
+                          <a:ea typeface="Alibaba PuHuiTi 3.0 85 Bold" pitchFamily="34" charset="-122"/>
+                          <a:cs typeface="Alibaba PuHuiTi 3.0 85 Bold" pitchFamily="34" charset="-120"/>
                         </a:rPr>
                         <a:t>1</a:t>
                       </a:r>
@@ -5473,9 +5437,9 @@
                           <a:solidFill>
                             <a:srgbClr val="262626"/>
                           </a:solidFill>
-                          <a:latin typeface="Alibaba PuHuiTi 3.0" pitchFamily="34" charset="0"/>
-                          <a:ea typeface="Alibaba PuHuiTi 3.0" pitchFamily="34" charset="-122"/>
-                          <a:cs typeface="Alibaba PuHuiTi 3.0" pitchFamily="34" charset="-120"/>
+                          <a:latin typeface="Alibaba PuHuiTi 3.0 85 Bold" pitchFamily="34" charset="0"/>
+                          <a:ea typeface="Alibaba PuHuiTi 3.0 85 Bold" pitchFamily="34" charset="-122"/>
+                          <a:cs typeface="Alibaba PuHuiTi 3.0 85 Bold" pitchFamily="34" charset="-120"/>
                         </a:rPr>
                         <a:t>2</a:t>
                       </a:r>
@@ -5543,9 +5507,9 @@
                           <a:solidFill>
                             <a:srgbClr val="262626"/>
                           </a:solidFill>
-                          <a:latin typeface="Alibaba PuHuiTi 3.0" pitchFamily="34" charset="0"/>
-                          <a:ea typeface="Alibaba PuHuiTi 3.0" pitchFamily="34" charset="-122"/>
-                          <a:cs typeface="Alibaba PuHuiTi 3.0" pitchFamily="34" charset="-120"/>
+                          <a:latin typeface="Alibaba PuHuiTi 3.0 85 Bold" pitchFamily="34" charset="0"/>
+                          <a:ea typeface="Alibaba PuHuiTi 3.0 85 Bold" pitchFamily="34" charset="-122"/>
+                          <a:cs typeface="Alibaba PuHuiTi 3.0 85 Bold" pitchFamily="34" charset="-120"/>
                         </a:rPr>
                         <a:t>2</a:t>
                       </a:r>
@@ -5611,9 +5575,9 @@
                           <a:solidFill>
                             <a:srgbClr val="262626"/>
                           </a:solidFill>
-                          <a:latin typeface="Alibaba PuHuiTi 3.0" pitchFamily="34" charset="0"/>
-                          <a:ea typeface="Alibaba PuHuiTi 3.0" pitchFamily="34" charset="-122"/>
-                          <a:cs typeface="Alibaba PuHuiTi 3.0" pitchFamily="34" charset="-120"/>
+                          <a:latin typeface="Alibaba PuHuiTi 3.0 85 Bold" pitchFamily="34" charset="0"/>
+                          <a:ea typeface="Alibaba PuHuiTi 3.0 85 Bold" pitchFamily="34" charset="-122"/>
+                          <a:cs typeface="Alibaba PuHuiTi 3.0 85 Bold" pitchFamily="34" charset="-120"/>
                         </a:rPr>
                         <a:t>4</a:t>
                       </a:r>
@@ -5681,9 +5645,9 @@
                           <a:solidFill>
                             <a:srgbClr val="262626"/>
                           </a:solidFill>
-                          <a:latin typeface="Alibaba PuHuiTi 3.0" pitchFamily="34" charset="0"/>
-                          <a:ea typeface="Alibaba PuHuiTi 3.0" pitchFamily="34" charset="-122"/>
-                          <a:cs typeface="Alibaba PuHuiTi 3.0" pitchFamily="34" charset="-120"/>
+                          <a:latin typeface="Alibaba PuHuiTi 3.0 85 Bold" pitchFamily="34" charset="0"/>
+                          <a:ea typeface="Alibaba PuHuiTi 3.0 85 Bold" pitchFamily="34" charset="-122"/>
+                          <a:cs typeface="Alibaba PuHuiTi 3.0 85 Bold" pitchFamily="34" charset="-120"/>
                         </a:rPr>
                         <a:t>3</a:t>
                       </a:r>
@@ -5749,9 +5713,9 @@
                           <a:solidFill>
                             <a:srgbClr val="262626"/>
                           </a:solidFill>
-                          <a:latin typeface="Alibaba PuHuiTi 3.0" pitchFamily="34" charset="0"/>
-                          <a:ea typeface="Alibaba PuHuiTi 3.0" pitchFamily="34" charset="-122"/>
-                          <a:cs typeface="Alibaba PuHuiTi 3.0" pitchFamily="34" charset="-120"/>
+                          <a:latin typeface="Alibaba PuHuiTi 3.0 85 Bold" pitchFamily="34" charset="0"/>
+                          <a:ea typeface="Alibaba PuHuiTi 3.0 85 Bold" pitchFamily="34" charset="-122"/>
+                          <a:cs typeface="Alibaba PuHuiTi 3.0 85 Bold" pitchFamily="34" charset="-120"/>
                         </a:rPr>
                         <a:t>8</a:t>
                       </a:r>
@@ -5819,9 +5783,9 @@
                           <a:solidFill>
                             <a:srgbClr val="262626"/>
                           </a:solidFill>
-                          <a:latin typeface="Alibaba PuHuiTi 3.0" pitchFamily="34" charset="0"/>
-                          <a:ea typeface="Alibaba PuHuiTi 3.0" pitchFamily="34" charset="-122"/>
-                          <a:cs typeface="Alibaba PuHuiTi 3.0" pitchFamily="34" charset="-120"/>
+                          <a:latin typeface="Alibaba PuHuiTi 3.0 85 Bold" pitchFamily="34" charset="0"/>
+                          <a:ea typeface="Alibaba PuHuiTi 3.0 85 Bold" pitchFamily="34" charset="-122"/>
+                          <a:cs typeface="Alibaba PuHuiTi 3.0 85 Bold" pitchFamily="34" charset="-120"/>
                         </a:rPr>
                         <a:t>4</a:t>
                       </a:r>
@@ -5887,9 +5851,9 @@
                           <a:solidFill>
                             <a:srgbClr val="262626"/>
                           </a:solidFill>
-                          <a:latin typeface="Alibaba PuHuiTi 3.0" pitchFamily="34" charset="0"/>
-                          <a:ea typeface="Alibaba PuHuiTi 3.0" pitchFamily="34" charset="-122"/>
-                          <a:cs typeface="Alibaba PuHuiTi 3.0" pitchFamily="34" charset="-120"/>
+                          <a:latin typeface="Alibaba PuHuiTi 3.0 85 Bold" pitchFamily="34" charset="0"/>
+                          <a:ea typeface="Alibaba PuHuiTi 3.0 85 Bold" pitchFamily="34" charset="-122"/>
+                          <a:cs typeface="Alibaba PuHuiTi 3.0 85 Bold" pitchFamily="34" charset="-120"/>
                         </a:rPr>
                         <a:t>16</a:t>
                       </a:r>
@@ -5955,7 +5919,7 @@
         </p:nvSpPr>
         <p:spPr>
           <a:xfrm>
-            <a:off x="6035040" y="1965960"/>
+            <a:off x="6035040" y="1993392"/>
             <a:ext cx="4480560" cy="1737360"/>
           </a:xfrm>
           <a:prstGeom prst="roundRect">
@@ -5982,7 +5946,7 @@
         </p:nvSpPr>
         <p:spPr>
           <a:xfrm>
-            <a:off x="6199632" y="2075688"/>
+            <a:off x="6199632" y="2103120"/>
             <a:ext cx="4151376" cy="1517904"/>
           </a:xfrm>
           <a:prstGeom prst="rect">
@@ -6005,9 +5969,9 @@
                 <a:solidFill>
                   <a:srgbClr val="262626"/>
                 </a:solidFill>
-                <a:latin typeface="Alibaba PuHuiTi 3.0" pitchFamily="34" charset="0"/>
-                <a:ea typeface="Alibaba PuHuiTi 3.0" pitchFamily="34" charset="-122"/>
-                <a:cs typeface="Alibaba PuHuiTi 3.0" pitchFamily="34" charset="-120"/>
+                <a:latin typeface="Alibaba PuHuiTi 3.0 115 Black" pitchFamily="34" charset="0"/>
+                <a:ea typeface="Alibaba PuHuiTi 3.0 115 Black" pitchFamily="34" charset="-122"/>
+                <a:cs typeface="Alibaba PuHuiTi 3.0 115 Black" pitchFamily="34" charset="-120"/>
               </a:rPr>
               <a:t>可表示状态数 = 2^b</a:t>
             </a:r>
@@ -6022,9 +5986,9 @@
                 <a:solidFill>
                   <a:srgbClr val="262626"/>
                 </a:solidFill>
-                <a:latin typeface="Alibaba PuHuiTi 3.0" pitchFamily="34" charset="0"/>
-                <a:ea typeface="Alibaba PuHuiTi 3.0" pitchFamily="34" charset="-122"/>
-                <a:cs typeface="Alibaba PuHuiTi 3.0" pitchFamily="34" charset="-120"/>
+                <a:latin typeface="Alibaba PuHuiTi 3.0 115 Black" pitchFamily="34" charset="0"/>
+                <a:ea typeface="Alibaba PuHuiTi 3.0 115 Black" pitchFamily="34" charset="-122"/>
+                <a:cs typeface="Alibaba PuHuiTi 3.0 115 Black" pitchFamily="34" charset="-120"/>
               </a:rPr>
               <a:t>16 个状态 → 最少 4 bit</a:t>
             </a:r>
@@ -6072,8 +6036,8 @@
         </p:nvSpPr>
         <p:spPr>
           <a:xfrm>
-            <a:off x="-36576" y="45720"/>
-            <a:ext cx="12271248" cy="73152"/>
+            <a:off x="0" y="0"/>
+            <a:ext cx="12192000" cy="101600"/>
           </a:xfrm>
           <a:prstGeom prst="rect">
             <a:avLst/>
@@ -6081,11 +6045,8 @@
           <a:solidFill>
             <a:srgbClr val="6251B1"/>
           </a:solidFill>
-          <a:ln w="12700">
-            <a:solidFill>
-              <a:srgbClr val="6251B1"/>
-            </a:solidFill>
-            <a:prstDash val="solid"/>
+          <a:ln>
+            <a:noFill/>
           </a:ln>
         </p:spPr>
       </p:sp>
@@ -6097,8 +6058,8 @@
         </p:nvSpPr>
         <p:spPr>
           <a:xfrm>
-            <a:off x="-36576" y="6739128"/>
-            <a:ext cx="12271248" cy="73152"/>
+            <a:off x="0" y="6756400"/>
+            <a:ext cx="12192000" cy="101600"/>
           </a:xfrm>
           <a:prstGeom prst="rect">
             <a:avLst/>
@@ -6106,11 +6067,8 @@
           <a:solidFill>
             <a:srgbClr val="6251B1"/>
           </a:solidFill>
-          <a:ln w="12700">
-            <a:solidFill>
-              <a:srgbClr val="6251B1"/>
-            </a:solidFill>
-            <a:prstDash val="solid"/>
+          <a:ln>
+            <a:noFill/>
           </a:ln>
         </p:spPr>
       </p:sp>
@@ -6122,8 +6080,8 @@
         </p:nvSpPr>
         <p:spPr>
           <a:xfrm>
-            <a:off x="608076" y="438912"/>
-            <a:ext cx="10972800" cy="566928"/>
+            <a:off x="608076" y="608076"/>
+            <a:ext cx="10972800" cy="704088"/>
           </a:xfrm>
           <a:prstGeom prst="rect">
             <a:avLst/>
@@ -6133,7 +6091,7 @@
         </p:spPr>
         <p:txBody>
           <a:bodyPr wrap="square" lIns="0" tIns="0" rIns="0" bIns="0" rtlCol="0" anchor="ctr">
-            <a:normAutofit/>
+            <a:noAutofit/>
           </a:bodyPr>
           <a:lstStyle/>
           <a:p>
@@ -6141,13 +6099,13 @@
               <a:buNone/>
             </a:pPr>
             <a:r>
-              <a:rPr lang="en-US" sz="3000" b="1" dirty="0">
+              <a:rPr lang="en-US" sz="3600" b="1" dirty="0">
                 <a:solidFill>
                   <a:srgbClr val="262626"/>
                 </a:solidFill>
-                <a:latin typeface="Alibaba PuHuiTi 3.0" pitchFamily="34" charset="0"/>
-                <a:ea typeface="Alibaba PuHuiTi 3.0" pitchFamily="34" charset="-122"/>
-                <a:cs typeface="Alibaba PuHuiTi 3.0" pitchFamily="34" charset="-120"/>
+                <a:latin typeface="Alibaba PuHuiTi 3.0 115 Black" pitchFamily="34" charset="0"/>
+                <a:ea typeface="Alibaba PuHuiTi 3.0 115 Black" pitchFamily="34" charset="-122"/>
+                <a:cs typeface="Alibaba PuHuiTi 3.0 115 Black" pitchFamily="34" charset="-120"/>
               </a:rPr>
               <a:t>Q5 “24-bit color” 是 24 种颜色吗？</a:t>
             </a:r>
@@ -6186,9 +6144,9 @@
                 <a:solidFill>
                   <a:srgbClr val="262626"/>
                 </a:solidFill>
-                <a:latin typeface="Alibaba PuHuiTi 3.0" pitchFamily="34" charset="0"/>
-                <a:ea typeface="Alibaba PuHuiTi 3.0" pitchFamily="34" charset="-122"/>
-                <a:cs typeface="Alibaba PuHuiTi 3.0" pitchFamily="34" charset="-120"/>
+                <a:latin typeface="Alibaba PuHuiTi 3.0 115 Black" pitchFamily="34" charset="0"/>
+                <a:ea typeface="Alibaba PuHuiTi 3.0 115 Black" pitchFamily="34" charset="-122"/>
+                <a:cs typeface="Alibaba PuHuiTi 3.0 115 Black" pitchFamily="34" charset="-120"/>
               </a:rPr>
               <a:t>先投票：</a:t>
             </a:r>
@@ -6227,9 +6185,9 @@
                 <a:solidFill>
                   <a:srgbClr val="262626"/>
                 </a:solidFill>
-                <a:latin typeface="Alibaba PuHuiTi 3.0" pitchFamily="34" charset="0"/>
-                <a:ea typeface="Alibaba PuHuiTi 3.0" pitchFamily="34" charset="-122"/>
-                <a:cs typeface="Alibaba PuHuiTi 3.0" pitchFamily="34" charset="-120"/>
+                <a:latin typeface="Alibaba PuHuiTi 3.0 115 Black" pitchFamily="34" charset="0"/>
+                <a:ea typeface="Alibaba PuHuiTi 3.0 115 Black" pitchFamily="34" charset="-122"/>
+                <a:cs typeface="Alibaba PuHuiTi 3.0 115 Black" pitchFamily="34" charset="-120"/>
               </a:rPr>
               <a:t>A. 24 种　　B. 256 种　　C. 2^24 种　　D. 现在还不能确定</a:t>
             </a:r>
@@ -6277,8 +6235,8 @@
         </p:nvSpPr>
         <p:spPr>
           <a:xfrm>
-            <a:off x="-36576" y="45720"/>
-            <a:ext cx="12271248" cy="73152"/>
+            <a:off x="0" y="0"/>
+            <a:ext cx="12192000" cy="101600"/>
           </a:xfrm>
           <a:prstGeom prst="rect">
             <a:avLst/>
@@ -6286,11 +6244,8 @@
           <a:solidFill>
             <a:srgbClr val="6251B1"/>
           </a:solidFill>
-          <a:ln w="12700">
-            <a:solidFill>
-              <a:srgbClr val="6251B1"/>
-            </a:solidFill>
-            <a:prstDash val="solid"/>
+          <a:ln>
+            <a:noFill/>
           </a:ln>
         </p:spPr>
       </p:sp>
@@ -6302,8 +6257,8 @@
         </p:nvSpPr>
         <p:spPr>
           <a:xfrm>
-            <a:off x="-36576" y="6739128"/>
-            <a:ext cx="12271248" cy="73152"/>
+            <a:off x="0" y="6756400"/>
+            <a:ext cx="12192000" cy="101600"/>
           </a:xfrm>
           <a:prstGeom prst="rect">
             <a:avLst/>
@@ -6311,11 +6266,8 @@
           <a:solidFill>
             <a:srgbClr val="6251B1"/>
           </a:solidFill>
-          <a:ln w="12700">
-            <a:solidFill>
-              <a:srgbClr val="6251B1"/>
-            </a:solidFill>
-            <a:prstDash val="solid"/>
+          <a:ln>
+            <a:noFill/>
           </a:ln>
         </p:spPr>
       </p:sp>
@@ -6327,8 +6279,8 @@
         </p:nvSpPr>
         <p:spPr>
           <a:xfrm>
-            <a:off x="608076" y="438912"/>
-            <a:ext cx="10972800" cy="566928"/>
+            <a:off x="608076" y="608076"/>
+            <a:ext cx="10972800" cy="704088"/>
           </a:xfrm>
           <a:prstGeom prst="rect">
             <a:avLst/>
@@ -6338,7 +6290,7 @@
         </p:spPr>
         <p:txBody>
           <a:bodyPr wrap="square" lIns="0" tIns="0" rIns="0" bIns="0" rtlCol="0" anchor="ctr">
-            <a:normAutofit/>
+            <a:noAutofit/>
           </a:bodyPr>
           <a:lstStyle/>
           <a:p>
@@ -6346,13 +6298,13 @@
               <a:buNone/>
             </a:pPr>
             <a:r>
-              <a:rPr lang="en-US" sz="3000" b="1" dirty="0">
+              <a:rPr lang="en-US" sz="3600" b="1" dirty="0">
                 <a:solidFill>
                   <a:srgbClr val="262626"/>
                 </a:solidFill>
-                <a:latin typeface="Alibaba PuHuiTi 3.0" pitchFamily="34" charset="0"/>
-                <a:ea typeface="Alibaba PuHuiTi 3.0" pitchFamily="34" charset="-122"/>
-                <a:cs typeface="Alibaba PuHuiTi 3.0" pitchFamily="34" charset="-120"/>
+                <a:latin typeface="Alibaba PuHuiTi 3.0 115 Black" pitchFamily="34" charset="0"/>
+                <a:ea typeface="Alibaba PuHuiTi 3.0 115 Black" pitchFamily="34" charset="-122"/>
+                <a:cs typeface="Alibaba PuHuiTi 3.0 115 Black" pitchFamily="34" charset="-120"/>
               </a:rPr>
               <a:t>Q5 “24-bit color” 是 24 种颜色吗？</a:t>
             </a:r>
@@ -6418,9 +6370,9 @@
                 <a:solidFill>
                   <a:srgbClr val="262626"/>
                 </a:solidFill>
-                <a:latin typeface="Alibaba PuHuiTi 3.0" pitchFamily="34" charset="0"/>
-                <a:ea typeface="Alibaba PuHuiTi 3.0" pitchFamily="34" charset="-122"/>
-                <a:cs typeface="Alibaba PuHuiTi 3.0" pitchFamily="34" charset="-120"/>
+                <a:latin typeface="Alibaba PuHuiTi 3.0 85 Bold" pitchFamily="34" charset="0"/>
+                <a:ea typeface="Alibaba PuHuiTi 3.0 85 Bold" pitchFamily="34" charset="-122"/>
+                <a:cs typeface="Alibaba PuHuiTi 3.0 85 Bold" pitchFamily="34" charset="-120"/>
               </a:rPr>
               <a:t>R: 8 bits → 0..255</a:t>
             </a:r>
@@ -6486,9 +6438,9 @@
                 <a:solidFill>
                   <a:srgbClr val="262626"/>
                 </a:solidFill>
-                <a:latin typeface="Alibaba PuHuiTi 3.0" pitchFamily="34" charset="0"/>
-                <a:ea typeface="Alibaba PuHuiTi 3.0" pitchFamily="34" charset="-122"/>
-                <a:cs typeface="Alibaba PuHuiTi 3.0" pitchFamily="34" charset="-120"/>
+                <a:latin typeface="Alibaba PuHuiTi 3.0 85 Bold" pitchFamily="34" charset="0"/>
+                <a:ea typeface="Alibaba PuHuiTi 3.0 85 Bold" pitchFamily="34" charset="-122"/>
+                <a:cs typeface="Alibaba PuHuiTi 3.0 85 Bold" pitchFamily="34" charset="-120"/>
               </a:rPr>
               <a:t>G: 8 bits → 0..255</a:t>
             </a:r>
@@ -6554,9 +6506,9 @@
                 <a:solidFill>
                   <a:srgbClr val="262626"/>
                 </a:solidFill>
-                <a:latin typeface="Alibaba PuHuiTi 3.0" pitchFamily="34" charset="0"/>
-                <a:ea typeface="Alibaba PuHuiTi 3.0" pitchFamily="34" charset="-122"/>
-                <a:cs typeface="Alibaba PuHuiTi 3.0" pitchFamily="34" charset="-120"/>
+                <a:latin typeface="Alibaba PuHuiTi 3.0 85 Bold" pitchFamily="34" charset="0"/>
+                <a:ea typeface="Alibaba PuHuiTi 3.0 85 Bold" pitchFamily="34" charset="-122"/>
+                <a:cs typeface="Alibaba PuHuiTi 3.0 85 Bold" pitchFamily="34" charset="-120"/>
               </a:rPr>
               <a:t>B: 8 bits → 0..255</a:t>
             </a:r>
@@ -6622,9 +6574,9 @@
                 <a:solidFill>
                   <a:srgbClr val="262626"/>
                 </a:solidFill>
-                <a:latin typeface="Alibaba PuHuiTi 3.0" pitchFamily="34" charset="0"/>
-                <a:ea typeface="Alibaba PuHuiTi 3.0" pitchFamily="34" charset="-122"/>
-                <a:cs typeface="Alibaba PuHuiTi 3.0" pitchFamily="34" charset="-120"/>
+                <a:latin typeface="Alibaba PuHuiTi 3.0 115 Black" pitchFamily="34" charset="0"/>
+                <a:ea typeface="Alibaba PuHuiTi 3.0 115 Black" pitchFamily="34" charset="-122"/>
+                <a:cs typeface="Alibaba PuHuiTi 3.0 115 Black" pitchFamily="34" charset="-120"/>
               </a:rPr>
               <a:t>8 + 8 + 8 = 24 bits/pixel</a:t>
             </a:r>
@@ -6639,9 +6591,9 @@
                 <a:solidFill>
                   <a:srgbClr val="262626"/>
                 </a:solidFill>
-                <a:latin typeface="Alibaba PuHuiTi 3.0" pitchFamily="34" charset="0"/>
-                <a:ea typeface="Alibaba PuHuiTi 3.0" pitchFamily="34" charset="-122"/>
-                <a:cs typeface="Alibaba PuHuiTi 3.0" pitchFamily="34" charset="-120"/>
+                <a:latin typeface="Alibaba PuHuiTi 3.0 115 Black" pitchFamily="34" charset="0"/>
+                <a:ea typeface="Alibaba PuHuiTi 3.0 115 Black" pitchFamily="34" charset="-122"/>
+                <a:cs typeface="Alibaba PuHuiTi 3.0 115 Black" pitchFamily="34" charset="-120"/>
               </a:rPr>
               <a:t>256^3 = 2^24 = 16,777,216</a:t>
             </a:r>
@@ -6689,8 +6641,8 @@
         </p:nvSpPr>
         <p:spPr>
           <a:xfrm>
-            <a:off x="-36576" y="45720"/>
-            <a:ext cx="12271248" cy="73152"/>
+            <a:off x="0" y="0"/>
+            <a:ext cx="12192000" cy="101600"/>
           </a:xfrm>
           <a:prstGeom prst="rect">
             <a:avLst/>
@@ -6698,11 +6650,8 @@
           <a:solidFill>
             <a:srgbClr val="6251B1"/>
           </a:solidFill>
-          <a:ln w="12700">
-            <a:solidFill>
-              <a:srgbClr val="6251B1"/>
-            </a:solidFill>
-            <a:prstDash val="solid"/>
+          <a:ln>
+            <a:noFill/>
           </a:ln>
         </p:spPr>
       </p:sp>
@@ -6714,8 +6663,8 @@
         </p:nvSpPr>
         <p:spPr>
           <a:xfrm>
-            <a:off x="-36576" y="6739128"/>
-            <a:ext cx="12271248" cy="73152"/>
+            <a:off x="0" y="6756400"/>
+            <a:ext cx="12192000" cy="101600"/>
           </a:xfrm>
           <a:prstGeom prst="rect">
             <a:avLst/>
@@ -6723,11 +6672,8 @@
           <a:solidFill>
             <a:srgbClr val="6251B1"/>
           </a:solidFill>
-          <a:ln w="12700">
-            <a:solidFill>
-              <a:srgbClr val="6251B1"/>
-            </a:solidFill>
-            <a:prstDash val="solid"/>
+          <a:ln>
+            <a:noFill/>
           </a:ln>
         </p:spPr>
       </p:sp>
@@ -6739,8 +6685,8 @@
         </p:nvSpPr>
         <p:spPr>
           <a:xfrm>
-            <a:off x="608076" y="438912"/>
-            <a:ext cx="10972800" cy="566928"/>
+            <a:off x="608076" y="608076"/>
+            <a:ext cx="10972800" cy="704088"/>
           </a:xfrm>
           <a:prstGeom prst="rect">
             <a:avLst/>
@@ -6750,7 +6696,7 @@
         </p:spPr>
         <p:txBody>
           <a:bodyPr wrap="square" lIns="0" tIns="0" rIns="0" bIns="0" rtlCol="0" anchor="ctr">
-            <a:normAutofit/>
+            <a:noAutofit/>
           </a:bodyPr>
           <a:lstStyle/>
           <a:p>
@@ -6758,13 +6704,13 @@
               <a:buNone/>
             </a:pPr>
             <a:r>
-              <a:rPr lang="en-US" sz="3000" b="1" dirty="0">
+              <a:rPr lang="en-US" sz="3600" b="1" dirty="0">
                 <a:solidFill>
                   <a:srgbClr val="262626"/>
                 </a:solidFill>
-                <a:latin typeface="Alibaba PuHuiTi 3.0" pitchFamily="34" charset="0"/>
-                <a:ea typeface="Alibaba PuHuiTi 3.0" pitchFamily="34" charset="-122"/>
-                <a:cs typeface="Alibaba PuHuiTi 3.0" pitchFamily="34" charset="-120"/>
+                <a:latin typeface="Alibaba PuHuiTi 3.0 115 Black" pitchFamily="34" charset="0"/>
+                <a:ea typeface="Alibaba PuHuiTi 3.0 115 Black" pitchFamily="34" charset="-122"/>
+                <a:cs typeface="Alibaba PuHuiTi 3.0 115 Black" pitchFamily="34" charset="-120"/>
               </a:rPr>
               <a:t>Q6 一个 RGB 像素怎样变成 0 和 1？</a:t>
             </a:r>
@@ -6803,9 +6749,9 @@
                 <a:solidFill>
                   <a:srgbClr val="262626"/>
                 </a:solidFill>
-                <a:latin typeface="Alibaba PuHuiTi 3.0" pitchFamily="34" charset="0"/>
-                <a:ea typeface="Alibaba PuHuiTi 3.0" pitchFamily="34" charset="-122"/>
-                <a:cs typeface="Alibaba PuHuiTi 3.0" pitchFamily="34" charset="-120"/>
+                <a:latin typeface="Alibaba PuHuiTi 3.0 115 Black" pitchFamily="34" charset="0"/>
+                <a:ea typeface="Alibaba PuHuiTi 3.0 115 Black" pitchFamily="34" charset="-122"/>
+                <a:cs typeface="Alibaba PuHuiTi 3.0 115 Black" pitchFamily="34" charset="-120"/>
               </a:rPr>
               <a:t>RGB = (255, 128, 0)</a:t>
             </a:r>
@@ -6844,9 +6790,9 @@
                 <a:solidFill>
                   <a:srgbClr val="262626"/>
                 </a:solidFill>
-                <a:latin typeface="Alibaba PuHuiTi 3.0" pitchFamily="34" charset="0"/>
-                <a:ea typeface="Alibaba PuHuiTi 3.0" pitchFamily="34" charset="-122"/>
-                <a:cs typeface="Alibaba PuHuiTi 3.0" pitchFamily="34" charset="-120"/>
+                <a:latin typeface="Alibaba PuHuiTi 3.0 55 Regular" pitchFamily="34" charset="0"/>
+                <a:ea typeface="Alibaba PuHuiTi 3.0 55 Regular" pitchFamily="34" charset="-122"/>
+                <a:cs typeface="Alibaba PuHuiTi 3.0 55 Regular" pitchFamily="34" charset="-120"/>
               </a:rPr>
               <a:t>先预测：255、128、0 的 8-bit binary 分别是什么？</a:t>
             </a:r>
@@ -6894,8 +6840,8 @@
         </p:nvSpPr>
         <p:spPr>
           <a:xfrm>
-            <a:off x="-36576" y="45720"/>
-            <a:ext cx="12271248" cy="73152"/>
+            <a:off x="0" y="0"/>
+            <a:ext cx="12192000" cy="101600"/>
           </a:xfrm>
           <a:prstGeom prst="rect">
             <a:avLst/>
@@ -6903,11 +6849,8 @@
           <a:solidFill>
             <a:srgbClr val="6251B1"/>
           </a:solidFill>
-          <a:ln w="12700">
-            <a:solidFill>
-              <a:srgbClr val="6251B1"/>
-            </a:solidFill>
-            <a:prstDash val="solid"/>
+          <a:ln>
+            <a:noFill/>
           </a:ln>
         </p:spPr>
       </p:sp>
@@ -6919,8 +6862,8 @@
         </p:nvSpPr>
         <p:spPr>
           <a:xfrm>
-            <a:off x="-36576" y="6739128"/>
-            <a:ext cx="12271248" cy="73152"/>
+            <a:off x="0" y="6756400"/>
+            <a:ext cx="12192000" cy="101600"/>
           </a:xfrm>
           <a:prstGeom prst="rect">
             <a:avLst/>
@@ -6928,11 +6871,8 @@
           <a:solidFill>
             <a:srgbClr val="6251B1"/>
           </a:solidFill>
-          <a:ln w="12700">
-            <a:solidFill>
-              <a:srgbClr val="6251B1"/>
-            </a:solidFill>
-            <a:prstDash val="solid"/>
+          <a:ln>
+            <a:noFill/>
           </a:ln>
         </p:spPr>
       </p:sp>
@@ -6944,8 +6884,8 @@
         </p:nvSpPr>
         <p:spPr>
           <a:xfrm>
-            <a:off x="608076" y="438912"/>
-            <a:ext cx="10972800" cy="566928"/>
+            <a:off x="608076" y="608076"/>
+            <a:ext cx="10972800" cy="704088"/>
           </a:xfrm>
           <a:prstGeom prst="rect">
             <a:avLst/>
@@ -6955,7 +6895,7 @@
         </p:spPr>
         <p:txBody>
           <a:bodyPr wrap="square" lIns="0" tIns="0" rIns="0" bIns="0" rtlCol="0" anchor="ctr">
-            <a:normAutofit/>
+            <a:noAutofit/>
           </a:bodyPr>
           <a:lstStyle/>
           <a:p>
@@ -6963,13 +6903,13 @@
               <a:buNone/>
             </a:pPr>
             <a:r>
-              <a:rPr lang="en-US" sz="3000" b="1" dirty="0">
+              <a:rPr lang="en-US" sz="3600" b="1" dirty="0">
                 <a:solidFill>
                   <a:srgbClr val="262626"/>
                 </a:solidFill>
-                <a:latin typeface="Alibaba PuHuiTi 3.0" pitchFamily="34" charset="0"/>
-                <a:ea typeface="Alibaba PuHuiTi 3.0" pitchFamily="34" charset="-122"/>
-                <a:cs typeface="Alibaba PuHuiTi 3.0" pitchFamily="34" charset="-120"/>
+                <a:latin typeface="Alibaba PuHuiTi 3.0 115 Black" pitchFamily="34" charset="0"/>
+                <a:ea typeface="Alibaba PuHuiTi 3.0 115 Black" pitchFamily="34" charset="-122"/>
+                <a:cs typeface="Alibaba PuHuiTi 3.0 115 Black" pitchFamily="34" charset="-120"/>
               </a:rPr>
               <a:t>Q6 一个 RGB 像素怎样变成 0 和 1？</a:t>
             </a:r>
@@ -7018,9 +6958,9 @@
                           <a:solidFill>
                             <a:srgbClr val="262626"/>
                           </a:solidFill>
-                          <a:latin typeface="Alibaba PuHuiTi 3.0" pitchFamily="34" charset="0"/>
-                          <a:ea typeface="Alibaba PuHuiTi 3.0" pitchFamily="34" charset="-122"/>
-                          <a:cs typeface="Alibaba PuHuiTi 3.0" pitchFamily="34" charset="-120"/>
+                          <a:latin typeface="Alibaba PuHuiTi 3.0 85 Bold" pitchFamily="34" charset="0"/>
+                          <a:ea typeface="Alibaba PuHuiTi 3.0 85 Bold" pitchFamily="34" charset="-122"/>
+                          <a:cs typeface="Alibaba PuHuiTi 3.0 85 Bold" pitchFamily="34" charset="-120"/>
                         </a:rPr>
                         <a:t>通道</a:t>
                       </a:r>
@@ -7086,9 +7026,9 @@
                           <a:solidFill>
                             <a:srgbClr val="262626"/>
                           </a:solidFill>
-                          <a:latin typeface="Alibaba PuHuiTi 3.0" pitchFamily="34" charset="0"/>
-                          <a:ea typeface="Alibaba PuHuiTi 3.0" pitchFamily="34" charset="-122"/>
-                          <a:cs typeface="Alibaba PuHuiTi 3.0" pitchFamily="34" charset="-120"/>
+                          <a:latin typeface="Alibaba PuHuiTi 3.0 85 Bold" pitchFamily="34" charset="0"/>
+                          <a:ea typeface="Alibaba PuHuiTi 3.0 85 Bold" pitchFamily="34" charset="-122"/>
+                          <a:cs typeface="Alibaba PuHuiTi 3.0 85 Bold" pitchFamily="34" charset="-120"/>
                         </a:rPr>
                         <a:t>十进制</a:t>
                       </a:r>
@@ -7154,9 +7094,9 @@
                           <a:solidFill>
                             <a:srgbClr val="262626"/>
                           </a:solidFill>
-                          <a:latin typeface="Alibaba PuHuiTi 3.0" pitchFamily="34" charset="0"/>
-                          <a:ea typeface="Alibaba PuHuiTi 3.0" pitchFamily="34" charset="-122"/>
-                          <a:cs typeface="Alibaba PuHuiTi 3.0" pitchFamily="34" charset="-120"/>
+                          <a:latin typeface="Alibaba PuHuiTi 3.0 85 Bold" pitchFamily="34" charset="0"/>
+                          <a:ea typeface="Alibaba PuHuiTi 3.0 85 Bold" pitchFamily="34" charset="-122"/>
+                          <a:cs typeface="Alibaba PuHuiTi 3.0 85 Bold" pitchFamily="34" charset="-120"/>
                         </a:rPr>
                         <a:t>8-bit binary</a:t>
                       </a:r>
@@ -7224,9 +7164,9 @@
                           <a:solidFill>
                             <a:srgbClr val="262626"/>
                           </a:solidFill>
-                          <a:latin typeface="Alibaba PuHuiTi 3.0" pitchFamily="34" charset="0"/>
-                          <a:ea typeface="Alibaba PuHuiTi 3.0" pitchFamily="34" charset="-122"/>
-                          <a:cs typeface="Alibaba PuHuiTi 3.0" pitchFamily="34" charset="-120"/>
+                          <a:latin typeface="Alibaba PuHuiTi 3.0 85 Bold" pitchFamily="34" charset="0"/>
+                          <a:ea typeface="Alibaba PuHuiTi 3.0 85 Bold" pitchFamily="34" charset="-122"/>
+                          <a:cs typeface="Alibaba PuHuiTi 3.0 85 Bold" pitchFamily="34" charset="-120"/>
                         </a:rPr>
                         <a:t>R</a:t>
                       </a:r>
@@ -7292,9 +7232,9 @@
                           <a:solidFill>
                             <a:srgbClr val="262626"/>
                           </a:solidFill>
-                          <a:latin typeface="Alibaba PuHuiTi 3.0" pitchFamily="34" charset="0"/>
-                          <a:ea typeface="Alibaba PuHuiTi 3.0" pitchFamily="34" charset="-122"/>
-                          <a:cs typeface="Alibaba PuHuiTi 3.0" pitchFamily="34" charset="-120"/>
+                          <a:latin typeface="Alibaba PuHuiTi 3.0 85 Bold" pitchFamily="34" charset="0"/>
+                          <a:ea typeface="Alibaba PuHuiTi 3.0 85 Bold" pitchFamily="34" charset="-122"/>
+                          <a:cs typeface="Alibaba PuHuiTi 3.0 85 Bold" pitchFamily="34" charset="-120"/>
                         </a:rPr>
                         <a:t>255</a:t>
                       </a:r>
@@ -7360,9 +7300,9 @@
                           <a:solidFill>
                             <a:srgbClr val="262626"/>
                           </a:solidFill>
-                          <a:latin typeface="Alibaba PuHuiTi 3.0" pitchFamily="34" charset="0"/>
-                          <a:ea typeface="Alibaba PuHuiTi 3.0" pitchFamily="34" charset="-122"/>
-                          <a:cs typeface="Alibaba PuHuiTi 3.0" pitchFamily="34" charset="-120"/>
+                          <a:latin typeface="Alibaba PuHuiTi 3.0 85 Bold" pitchFamily="34" charset="0"/>
+                          <a:ea typeface="Alibaba PuHuiTi 3.0 85 Bold" pitchFamily="34" charset="-122"/>
+                          <a:cs typeface="Alibaba PuHuiTi 3.0 85 Bold" pitchFamily="34" charset="-120"/>
                         </a:rPr>
                         <a:t>11111111</a:t>
                       </a:r>
@@ -7430,9 +7370,9 @@
                           <a:solidFill>
                             <a:srgbClr val="262626"/>
                           </a:solidFill>
-                          <a:latin typeface="Alibaba PuHuiTi 3.0" pitchFamily="34" charset="0"/>
-                          <a:ea typeface="Alibaba PuHuiTi 3.0" pitchFamily="34" charset="-122"/>
-                          <a:cs typeface="Alibaba PuHuiTi 3.0" pitchFamily="34" charset="-120"/>
+                          <a:latin typeface="Alibaba PuHuiTi 3.0 85 Bold" pitchFamily="34" charset="0"/>
+                          <a:ea typeface="Alibaba PuHuiTi 3.0 85 Bold" pitchFamily="34" charset="-122"/>
+                          <a:cs typeface="Alibaba PuHuiTi 3.0 85 Bold" pitchFamily="34" charset="-120"/>
                         </a:rPr>
                         <a:t>G</a:t>
                       </a:r>
@@ -7498,9 +7438,9 @@
                           <a:solidFill>
                             <a:srgbClr val="262626"/>
                           </a:solidFill>
-                          <a:latin typeface="Alibaba PuHuiTi 3.0" pitchFamily="34" charset="0"/>
-                          <a:ea typeface="Alibaba PuHuiTi 3.0" pitchFamily="34" charset="-122"/>
-                          <a:cs typeface="Alibaba PuHuiTi 3.0" pitchFamily="34" charset="-120"/>
+                          <a:latin typeface="Alibaba PuHuiTi 3.0 85 Bold" pitchFamily="34" charset="0"/>
+                          <a:ea typeface="Alibaba PuHuiTi 3.0 85 Bold" pitchFamily="34" charset="-122"/>
+                          <a:cs typeface="Alibaba PuHuiTi 3.0 85 Bold" pitchFamily="34" charset="-120"/>
                         </a:rPr>
                         <a:t>128</a:t>
                       </a:r>
@@ -7566,9 +7506,9 @@
                           <a:solidFill>
                             <a:srgbClr val="262626"/>
                           </a:solidFill>
-                          <a:latin typeface="Alibaba PuHuiTi 3.0" pitchFamily="34" charset="0"/>
-                          <a:ea typeface="Alibaba PuHuiTi 3.0" pitchFamily="34" charset="-122"/>
-                          <a:cs typeface="Alibaba PuHuiTi 3.0" pitchFamily="34" charset="-120"/>
+                          <a:latin typeface="Alibaba PuHuiTi 3.0 85 Bold" pitchFamily="34" charset="0"/>
+                          <a:ea typeface="Alibaba PuHuiTi 3.0 85 Bold" pitchFamily="34" charset="-122"/>
+                          <a:cs typeface="Alibaba PuHuiTi 3.0 85 Bold" pitchFamily="34" charset="-120"/>
                         </a:rPr>
                         <a:t>10000000</a:t>
                       </a:r>
@@ -7636,9 +7576,9 @@
                           <a:solidFill>
                             <a:srgbClr val="262626"/>
                           </a:solidFill>
-                          <a:latin typeface="Alibaba PuHuiTi 3.0" pitchFamily="34" charset="0"/>
-                          <a:ea typeface="Alibaba PuHuiTi 3.0" pitchFamily="34" charset="-122"/>
-                          <a:cs typeface="Alibaba PuHuiTi 3.0" pitchFamily="34" charset="-120"/>
+                          <a:latin typeface="Alibaba PuHuiTi 3.0 85 Bold" pitchFamily="34" charset="0"/>
+                          <a:ea typeface="Alibaba PuHuiTi 3.0 85 Bold" pitchFamily="34" charset="-122"/>
+                          <a:cs typeface="Alibaba PuHuiTi 3.0 85 Bold" pitchFamily="34" charset="-120"/>
                         </a:rPr>
                         <a:t>B</a:t>
                       </a:r>
@@ -7704,9 +7644,9 @@
                           <a:solidFill>
                             <a:srgbClr val="262626"/>
                           </a:solidFill>
-                          <a:latin typeface="Alibaba PuHuiTi 3.0" pitchFamily="34" charset="0"/>
-                          <a:ea typeface="Alibaba PuHuiTi 3.0" pitchFamily="34" charset="-122"/>
-                          <a:cs typeface="Alibaba PuHuiTi 3.0" pitchFamily="34" charset="-120"/>
+                          <a:latin typeface="Alibaba PuHuiTi 3.0 85 Bold" pitchFamily="34" charset="0"/>
+                          <a:ea typeface="Alibaba PuHuiTi 3.0 85 Bold" pitchFamily="34" charset="-122"/>
+                          <a:cs typeface="Alibaba PuHuiTi 3.0 85 Bold" pitchFamily="34" charset="-120"/>
                         </a:rPr>
                         <a:t>0</a:t>
                       </a:r>
@@ -7772,9 +7712,9 @@
                           <a:solidFill>
                             <a:srgbClr val="262626"/>
                           </a:solidFill>
-                          <a:latin typeface="Alibaba PuHuiTi 3.0" pitchFamily="34" charset="0"/>
-                          <a:ea typeface="Alibaba PuHuiTi 3.0" pitchFamily="34" charset="-122"/>
-                          <a:cs typeface="Alibaba PuHuiTi 3.0" pitchFamily="34" charset="-120"/>
+                          <a:latin typeface="Alibaba PuHuiTi 3.0 85 Bold" pitchFamily="34" charset="0"/>
+                          <a:ea typeface="Alibaba PuHuiTi 3.0 85 Bold" pitchFamily="34" charset="-122"/>
+                          <a:cs typeface="Alibaba PuHuiTi 3.0 85 Bold" pitchFamily="34" charset="-120"/>
                         </a:rPr>
                         <a:t>00000000</a:t>
                       </a:r>
@@ -7890,9 +7830,9 @@
                 <a:solidFill>
                   <a:srgbClr val="262626"/>
                 </a:solidFill>
-                <a:latin typeface="Alibaba PuHuiTi 3.0" pitchFamily="34" charset="0"/>
-                <a:ea typeface="Alibaba PuHuiTi 3.0" pitchFamily="34" charset="-122"/>
-                <a:cs typeface="Alibaba PuHuiTi 3.0" pitchFamily="34" charset="-120"/>
+                <a:latin typeface="Alibaba PuHuiTi 3.0 115 Black" pitchFamily="34" charset="0"/>
+                <a:ea typeface="Alibaba PuHuiTi 3.0 115 Black" pitchFamily="34" charset="-122"/>
+                <a:cs typeface="Alibaba PuHuiTi 3.0 115 Black" pitchFamily="34" charset="-120"/>
               </a:rPr>
               <a:t>Encoding：按约定把数值表示并组织成 bits / bytes。</a:t>
             </a:r>
@@ -7940,8 +7880,8 @@
         </p:nvSpPr>
         <p:spPr>
           <a:xfrm>
-            <a:off x="-36576" y="45720"/>
-            <a:ext cx="12271248" cy="73152"/>
+            <a:off x="0" y="0"/>
+            <a:ext cx="12192000" cy="101600"/>
           </a:xfrm>
           <a:prstGeom prst="rect">
             <a:avLst/>
@@ -7949,11 +7889,8 @@
           <a:solidFill>
             <a:srgbClr val="6251B1"/>
           </a:solidFill>
-          <a:ln w="12700">
-            <a:solidFill>
-              <a:srgbClr val="6251B1"/>
-            </a:solidFill>
-            <a:prstDash val="solid"/>
+          <a:ln>
+            <a:noFill/>
           </a:ln>
         </p:spPr>
       </p:sp>
@@ -7965,8 +7902,8 @@
         </p:nvSpPr>
         <p:spPr>
           <a:xfrm>
-            <a:off x="-36576" y="6739128"/>
-            <a:ext cx="12271248" cy="73152"/>
+            <a:off x="0" y="6756400"/>
+            <a:ext cx="12192000" cy="101600"/>
           </a:xfrm>
           <a:prstGeom prst="rect">
             <a:avLst/>
@@ -7974,11 +7911,8 @@
           <a:solidFill>
             <a:srgbClr val="6251B1"/>
           </a:solidFill>
-          <a:ln w="12700">
-            <a:solidFill>
-              <a:srgbClr val="6251B1"/>
-            </a:solidFill>
-            <a:prstDash val="solid"/>
+          <a:ln>
+            <a:noFill/>
           </a:ln>
         </p:spPr>
       </p:sp>
@@ -7990,8 +7924,8 @@
         </p:nvSpPr>
         <p:spPr>
           <a:xfrm>
-            <a:off x="608076" y="438912"/>
-            <a:ext cx="10972800" cy="566928"/>
+            <a:off x="608076" y="608076"/>
+            <a:ext cx="10972800" cy="704088"/>
           </a:xfrm>
           <a:prstGeom prst="rect">
             <a:avLst/>
@@ -8001,11 +7935,93 @@
         </p:spPr>
         <p:txBody>
           <a:bodyPr wrap="square" lIns="0" tIns="0" rIns="0" bIns="0" rtlCol="0" anchor="ctr">
+            <a:noAutofit/>
+          </a:bodyPr>
+          <a:lstStyle/>
+          <a:p>
+            <a:pPr indent="0" marL="0">
+              <a:buNone/>
+            </a:pPr>
+            <a:r>
+              <a:rPr lang="en-US" sz="3600" b="1" dirty="0">
+                <a:solidFill>
+                  <a:srgbClr val="262626"/>
+                </a:solidFill>
+                <a:latin typeface="Alibaba PuHuiTi 3.0 115 Black" pitchFamily="34" charset="0"/>
+                <a:ea typeface="Alibaba PuHuiTi 3.0 115 Black" pitchFamily="34" charset="-122"/>
+                <a:cs typeface="Alibaba PuHuiTi 3.0 115 Black" pitchFamily="34" charset="-120"/>
+              </a:rPr>
+              <a:t>Q7 真实 BMP 文件中，像素数据之前有什么？</a:t>
+            </a:r>
+            <a:endParaRPr lang="en-US" sz="3000" dirty="0"/>
+          </a:p>
+        </p:txBody>
+      </p:sp>
+      <p:sp>
+        <p:nvSpPr>
+          <p:cNvPr id="6" name="Text 3"/>
+          <p:cNvSpPr/>
+          <p:nvPr/>
+        </p:nvSpPr>
+        <p:spPr>
+          <a:xfrm>
+            <a:off x="868680" y="2240280"/>
+            <a:ext cx="10424160" cy="411480"/>
+          </a:xfrm>
+          <a:prstGeom prst="rect">
+            <a:avLst/>
+          </a:prstGeom>
+          <a:noFill/>
+          <a:ln/>
+        </p:spPr>
+        <p:txBody>
+          <a:bodyPr wrap="square" lIns="635" tIns="635" rIns="635" bIns="635" rtlCol="0" anchor="ctr">
             <a:normAutofit/>
           </a:bodyPr>
           <a:lstStyle/>
           <a:p>
-            <a:pPr indent="0" marL="0">
+            <a:pPr algn="ctr" indent="0" marL="0">
+              <a:buNone/>
+            </a:pPr>
+            <a:r>
+              <a:rPr lang="en-US" sz="2400" b="1" dirty="0">
+                <a:solidFill>
+                  <a:srgbClr val="262626"/>
+                </a:solidFill>
+                <a:latin typeface="Alibaba PuHuiTi 3.0 115 Black" pitchFamily="34" charset="0"/>
+                <a:ea typeface="Alibaba PuHuiTi 3.0 115 Black" pitchFamily="34" charset="-122"/>
+                <a:cs typeface="Alibaba PuHuiTi 3.0 115 Black" pitchFamily="34" charset="-120"/>
+              </a:rPr>
+              <a:t>真实文件：assets/q7-3x2-24bit.bmp</a:t>
+            </a:r>
+            <a:endParaRPr lang="en-US" sz="2400" dirty="0"/>
+          </a:p>
+        </p:txBody>
+      </p:sp>
+      <p:sp>
+        <p:nvSpPr>
+          <p:cNvPr id="7" name="Text 4"/>
+          <p:cNvSpPr/>
+          <p:nvPr/>
+        </p:nvSpPr>
+        <p:spPr>
+          <a:xfrm>
+            <a:off x="868680" y="3063240"/>
+            <a:ext cx="10424160" cy="502920"/>
+          </a:xfrm>
+          <a:prstGeom prst="rect">
+            <a:avLst/>
+          </a:prstGeom>
+          <a:noFill/>
+          <a:ln/>
+        </p:spPr>
+        <p:txBody>
+          <a:bodyPr wrap="square" lIns="635" tIns="635" rIns="635" bIns="635" rtlCol="0" anchor="ctr">
+            <a:normAutofit/>
+          </a:bodyPr>
+          <a:lstStyle/>
+          <a:p>
+            <a:pPr algn="ctr" indent="0" marL="0">
               <a:buNone/>
             </a:pPr>
             <a:r>
@@ -8013,91 +8029,9 @@
                 <a:solidFill>
                   <a:srgbClr val="262626"/>
                 </a:solidFill>
-                <a:latin typeface="Alibaba PuHuiTi 3.0" pitchFamily="34" charset="0"/>
-                <a:ea typeface="Alibaba PuHuiTi 3.0" pitchFamily="34" charset="-122"/>
-                <a:cs typeface="Alibaba PuHuiTi 3.0" pitchFamily="34" charset="-120"/>
-              </a:rPr>
-              <a:t>Q7 真实 BMP 文件中，像素数据之前有什么？</a:t>
-            </a:r>
-            <a:endParaRPr lang="en-US" sz="3000" dirty="0"/>
-          </a:p>
-        </p:txBody>
-      </p:sp>
-      <p:sp>
-        <p:nvSpPr>
-          <p:cNvPr id="6" name="Text 3"/>
-          <p:cNvSpPr/>
-          <p:nvPr/>
-        </p:nvSpPr>
-        <p:spPr>
-          <a:xfrm>
-            <a:off x="868680" y="2240280"/>
-            <a:ext cx="10424160" cy="411480"/>
-          </a:xfrm>
-          <a:prstGeom prst="rect">
-            <a:avLst/>
-          </a:prstGeom>
-          <a:noFill/>
-          <a:ln/>
-        </p:spPr>
-        <p:txBody>
-          <a:bodyPr wrap="square" lIns="635" tIns="635" rIns="635" bIns="635" rtlCol="0" anchor="ctr">
-            <a:normAutofit/>
-          </a:bodyPr>
-          <a:lstStyle/>
-          <a:p>
-            <a:pPr algn="ctr" indent="0" marL="0">
-              <a:buNone/>
-            </a:pPr>
-            <a:r>
-              <a:rPr lang="en-US" sz="2400" b="1" dirty="0">
-                <a:solidFill>
-                  <a:srgbClr val="262626"/>
-                </a:solidFill>
-                <a:latin typeface="Alibaba PuHuiTi 3.0" pitchFamily="34" charset="0"/>
-                <a:ea typeface="Alibaba PuHuiTi 3.0" pitchFamily="34" charset="-122"/>
-                <a:cs typeface="Alibaba PuHuiTi 3.0" pitchFamily="34" charset="-120"/>
-              </a:rPr>
-              <a:t>真实文件：assets/q7-3x2-24bit.bmp</a:t>
-            </a:r>
-            <a:endParaRPr lang="en-US" sz="2400" dirty="0"/>
-          </a:p>
-        </p:txBody>
-      </p:sp>
-      <p:sp>
-        <p:nvSpPr>
-          <p:cNvPr id="7" name="Text 4"/>
-          <p:cNvSpPr/>
-          <p:nvPr/>
-        </p:nvSpPr>
-        <p:spPr>
-          <a:xfrm>
-            <a:off x="868680" y="3063240"/>
-            <a:ext cx="10424160" cy="502920"/>
-          </a:xfrm>
-          <a:prstGeom prst="rect">
-            <a:avLst/>
-          </a:prstGeom>
-          <a:noFill/>
-          <a:ln/>
-        </p:spPr>
-        <p:txBody>
-          <a:bodyPr wrap="square" lIns="635" tIns="635" rIns="635" bIns="635" rtlCol="0" anchor="ctr">
-            <a:normAutofit/>
-          </a:bodyPr>
-          <a:lstStyle/>
-          <a:p>
-            <a:pPr algn="ctr" indent="0" marL="0">
-              <a:buNone/>
-            </a:pPr>
-            <a:r>
-              <a:rPr lang="en-US" sz="3000" b="1" dirty="0">
-                <a:solidFill>
-                  <a:srgbClr val="262626"/>
-                </a:solidFill>
-                <a:latin typeface="Alibaba PuHuiTi 3.0" pitchFamily="34" charset="0"/>
-                <a:ea typeface="Alibaba PuHuiTi 3.0" pitchFamily="34" charset="-122"/>
-                <a:cs typeface="Alibaba PuHuiTi 3.0" pitchFamily="34" charset="-120"/>
+                <a:latin typeface="Alibaba PuHuiTi 3.0 115 Black" pitchFamily="34" charset="0"/>
+                <a:ea typeface="Alibaba PuHuiTi 3.0 115 Black" pitchFamily="34" charset="-122"/>
+                <a:cs typeface="Alibaba PuHuiTi 3.0 115 Black" pitchFamily="34" charset="-120"/>
               </a:rPr>
               <a:t>问题：pixel data 之前为什么还有一段 bytes？</a:t>
             </a:r>
@@ -8145,8 +8079,8 @@
         </p:nvSpPr>
         <p:spPr>
           <a:xfrm>
-            <a:off x="-36576" y="45720"/>
-            <a:ext cx="12271248" cy="73152"/>
+            <a:off x="0" y="0"/>
+            <a:ext cx="12192000" cy="101600"/>
           </a:xfrm>
           <a:prstGeom prst="rect">
             <a:avLst/>
@@ -8154,11 +8088,8 @@
           <a:solidFill>
             <a:srgbClr val="6251B1"/>
           </a:solidFill>
-          <a:ln w="12700">
-            <a:solidFill>
-              <a:srgbClr val="6251B1"/>
-            </a:solidFill>
-            <a:prstDash val="solid"/>
+          <a:ln>
+            <a:noFill/>
           </a:ln>
         </p:spPr>
       </p:sp>
@@ -8170,8 +8101,8 @@
         </p:nvSpPr>
         <p:spPr>
           <a:xfrm>
-            <a:off x="-36576" y="6739128"/>
-            <a:ext cx="12271248" cy="73152"/>
+            <a:off x="0" y="6756400"/>
+            <a:ext cx="12192000" cy="101600"/>
           </a:xfrm>
           <a:prstGeom prst="rect">
             <a:avLst/>
@@ -8179,11 +8110,8 @@
           <a:solidFill>
             <a:srgbClr val="6251B1"/>
           </a:solidFill>
-          <a:ln w="12700">
-            <a:solidFill>
-              <a:srgbClr val="6251B1"/>
-            </a:solidFill>
-            <a:prstDash val="solid"/>
+          <a:ln>
+            <a:noFill/>
           </a:ln>
         </p:spPr>
       </p:sp>
@@ -8195,8 +8123,8 @@
         </p:nvSpPr>
         <p:spPr>
           <a:xfrm>
-            <a:off x="608076" y="438912"/>
-            <a:ext cx="10972800" cy="566928"/>
+            <a:off x="608076" y="608076"/>
+            <a:ext cx="10972800" cy="704088"/>
           </a:xfrm>
           <a:prstGeom prst="rect">
             <a:avLst/>
@@ -8206,7 +8134,7 @@
         </p:spPr>
         <p:txBody>
           <a:bodyPr wrap="square" lIns="0" tIns="0" rIns="0" bIns="0" rtlCol="0" anchor="ctr">
-            <a:normAutofit/>
+            <a:noAutofit/>
           </a:bodyPr>
           <a:lstStyle/>
           <a:p>
@@ -8214,13 +8142,13 @@
               <a:buNone/>
             </a:pPr>
             <a:r>
-              <a:rPr lang="en-US" sz="3000" b="1" dirty="0">
+              <a:rPr lang="en-US" sz="3600" b="1" dirty="0">
                 <a:solidFill>
                   <a:srgbClr val="262626"/>
                 </a:solidFill>
-                <a:latin typeface="Alibaba PuHuiTi 3.0" pitchFamily="34" charset="0"/>
-                <a:ea typeface="Alibaba PuHuiTi 3.0" pitchFamily="34" charset="-122"/>
-                <a:cs typeface="Alibaba PuHuiTi 3.0" pitchFamily="34" charset="-120"/>
+                <a:latin typeface="Alibaba PuHuiTi 3.0 115 Black" pitchFamily="34" charset="0"/>
+                <a:ea typeface="Alibaba PuHuiTi 3.0 115 Black" pitchFamily="34" charset="-122"/>
+                <a:cs typeface="Alibaba PuHuiTi 3.0 115 Black" pitchFamily="34" charset="-120"/>
               </a:rPr>
               <a:t>Q0 这四种说法分别在描述图像的哪一层？</a:t>
             </a:r>
@@ -8286,9 +8214,9 @@
                 <a:solidFill>
                   <a:srgbClr val="262626"/>
                 </a:solidFill>
-                <a:latin typeface="Alibaba PuHuiTi 3.0" pitchFamily="34" charset="0"/>
-                <a:ea typeface="Alibaba PuHuiTi 3.0" pitchFamily="34" charset="-122"/>
-                <a:cs typeface="Alibaba PuHuiTi 3.0" pitchFamily="34" charset="-120"/>
+                <a:latin typeface="Alibaba PuHuiTi 3.0 85 Bold" pitchFamily="34" charset="0"/>
+                <a:ea typeface="Alibaba PuHuiTi 3.0 85 Bold" pitchFamily="34" charset="-122"/>
+                <a:cs typeface="Alibaba PuHuiTi 3.0 85 Bold" pitchFamily="34" charset="-120"/>
               </a:rPr>
               <a:t>很多 0 和 1</a:t>
             </a:r>
@@ -8354,9 +8282,9 @@
                 <a:solidFill>
                   <a:srgbClr val="262626"/>
                 </a:solidFill>
-                <a:latin typeface="Alibaba PuHuiTi 3.0" pitchFamily="34" charset="0"/>
-                <a:ea typeface="Alibaba PuHuiTi 3.0" pitchFamily="34" charset="-122"/>
-                <a:cs typeface="Alibaba PuHuiTi 3.0" pitchFamily="34" charset="-120"/>
+                <a:latin typeface="Alibaba PuHuiTi 3.0 85 Bold" pitchFamily="34" charset="0"/>
+                <a:ea typeface="Alibaba PuHuiTi 3.0 85 Bold" pitchFamily="34" charset="-122"/>
+                <a:cs typeface="Alibaba PuHuiTi 3.0 85 Bold" pitchFamily="34" charset="-120"/>
               </a:rPr>
               <a:t>很多像素 / 小方格</a:t>
             </a:r>
@@ -8422,9 +8350,9 @@
                 <a:solidFill>
                   <a:srgbClr val="262626"/>
                 </a:solidFill>
-                <a:latin typeface="Alibaba PuHuiTi 3.0" pitchFamily="34" charset="0"/>
-                <a:ea typeface="Alibaba PuHuiTi 3.0" pitchFamily="34" charset="-122"/>
-                <a:cs typeface="Alibaba PuHuiTi 3.0" pitchFamily="34" charset="-120"/>
+                <a:latin typeface="Alibaba PuHuiTi 3.0 85 Bold" pitchFamily="34" charset="0"/>
+                <a:ea typeface="Alibaba PuHuiTi 3.0 85 Bold" pitchFamily="34" charset="-122"/>
+                <a:cs typeface="Alibaba PuHuiTi 3.0 85 Bold" pitchFamily="34" charset="-120"/>
               </a:rPr>
               <a:t>很多数字</a:t>
             </a:r>
@@ -8490,9 +8418,9 @@
                 <a:solidFill>
                   <a:srgbClr val="262626"/>
                 </a:solidFill>
-                <a:latin typeface="Alibaba PuHuiTi 3.0" pitchFamily="34" charset="0"/>
-                <a:ea typeface="Alibaba PuHuiTi 3.0" pitchFamily="34" charset="-122"/>
-                <a:cs typeface="Alibaba PuHuiTi 3.0" pitchFamily="34" charset="-120"/>
+                <a:latin typeface="Alibaba PuHuiTi 3.0 85 Bold" pitchFamily="34" charset="0"/>
+                <a:ea typeface="Alibaba PuHuiTi 3.0 85 Bold" pitchFamily="34" charset="-122"/>
+                <a:cs typeface="Alibaba PuHuiTi 3.0 85 Bold" pitchFamily="34" charset="-120"/>
               </a:rPr>
               <a:t>很多颜色值</a:t>
             </a:r>
@@ -8531,9 +8459,9 @@
                 <a:solidFill>
                   <a:srgbClr val="262626"/>
                 </a:solidFill>
-                <a:latin typeface="Alibaba PuHuiTi 3.0" pitchFamily="34" charset="0"/>
-                <a:ea typeface="Alibaba PuHuiTi 3.0" pitchFamily="34" charset="-122"/>
-                <a:cs typeface="Alibaba PuHuiTi 3.0" pitchFamily="34" charset="-120"/>
+                <a:latin typeface="Alibaba PuHuiTi 3.0 115 Black" pitchFamily="34" charset="0"/>
+                <a:ea typeface="Alibaba PuHuiTi 3.0 115 Black" pitchFamily="34" charset="-122"/>
+                <a:cs typeface="Alibaba PuHuiTi 3.0 115 Black" pitchFamily="34" charset="-120"/>
               </a:rPr>
               <a:t>任务：先排序，学完后再修改。</a:t>
             </a:r>
@@ -8581,8 +8509,8 @@
         </p:nvSpPr>
         <p:spPr>
           <a:xfrm>
-            <a:off x="-36576" y="45720"/>
-            <a:ext cx="12271248" cy="73152"/>
+            <a:off x="0" y="0"/>
+            <a:ext cx="12192000" cy="101600"/>
           </a:xfrm>
           <a:prstGeom prst="rect">
             <a:avLst/>
@@ -8590,11 +8518,8 @@
           <a:solidFill>
             <a:srgbClr val="6251B1"/>
           </a:solidFill>
-          <a:ln w="12700">
-            <a:solidFill>
-              <a:srgbClr val="6251B1"/>
-            </a:solidFill>
-            <a:prstDash val="solid"/>
+          <a:ln>
+            <a:noFill/>
           </a:ln>
         </p:spPr>
       </p:sp>
@@ -8606,8 +8531,8 @@
         </p:nvSpPr>
         <p:spPr>
           <a:xfrm>
-            <a:off x="-36576" y="6739128"/>
-            <a:ext cx="12271248" cy="73152"/>
+            <a:off x="0" y="6756400"/>
+            <a:ext cx="12192000" cy="101600"/>
           </a:xfrm>
           <a:prstGeom prst="rect">
             <a:avLst/>
@@ -8615,11 +8540,8 @@
           <a:solidFill>
             <a:srgbClr val="6251B1"/>
           </a:solidFill>
-          <a:ln w="12700">
-            <a:solidFill>
-              <a:srgbClr val="6251B1"/>
-            </a:solidFill>
-            <a:prstDash val="solid"/>
+          <a:ln>
+            <a:noFill/>
           </a:ln>
         </p:spPr>
       </p:sp>
@@ -8631,8 +8553,8 @@
         </p:nvSpPr>
         <p:spPr>
           <a:xfrm>
-            <a:off x="608076" y="438912"/>
-            <a:ext cx="10972800" cy="566928"/>
+            <a:off x="608076" y="608076"/>
+            <a:ext cx="10972800" cy="704088"/>
           </a:xfrm>
           <a:prstGeom prst="rect">
             <a:avLst/>
@@ -8642,7 +8564,7 @@
         </p:spPr>
         <p:txBody>
           <a:bodyPr wrap="square" lIns="0" tIns="0" rIns="0" bIns="0" rtlCol="0" anchor="ctr">
-            <a:normAutofit/>
+            <a:noAutofit/>
           </a:bodyPr>
           <a:lstStyle/>
           <a:p>
@@ -8650,13 +8572,13 @@
               <a:buNone/>
             </a:pPr>
             <a:r>
-              <a:rPr lang="en-US" sz="3000" b="1" dirty="0">
+              <a:rPr lang="en-US" sz="3600" b="1" dirty="0">
                 <a:solidFill>
                   <a:srgbClr val="262626"/>
                 </a:solidFill>
-                <a:latin typeface="Alibaba PuHuiTi 3.0" pitchFamily="34" charset="0"/>
-                <a:ea typeface="Alibaba PuHuiTi 3.0" pitchFamily="34" charset="-122"/>
-                <a:cs typeface="Alibaba PuHuiTi 3.0" pitchFamily="34" charset="-120"/>
+                <a:latin typeface="Alibaba PuHuiTi 3.0 115 Black" pitchFamily="34" charset="0"/>
+                <a:ea typeface="Alibaba PuHuiTi 3.0 115 Black" pitchFamily="34" charset="-122"/>
+                <a:cs typeface="Alibaba PuHuiTi 3.0 115 Black" pitchFamily="34" charset="-120"/>
               </a:rPr>
               <a:t>Q7 真实 BMP 文件中，像素数据之前有什么？</a:t>
             </a:r>
@@ -8672,7 +8594,7 @@
         </p:nvSpPr>
         <p:spPr>
           <a:xfrm>
-            <a:off x="1005840" y="1371600"/>
+            <a:off x="1005840" y="1490472"/>
             <a:ext cx="4754880" cy="3474720"/>
           </a:xfrm>
           <a:prstGeom prst="roundRect">
@@ -8699,7 +8621,7 @@
         </p:nvSpPr>
         <p:spPr>
           <a:xfrm>
-            <a:off x="1234440" y="1645920"/>
+            <a:off x="1234440" y="1764792"/>
             <a:ext cx="4297680" cy="2926080"/>
           </a:xfrm>
           <a:prstGeom prst="rect">
@@ -8722,9 +8644,9 @@
                 <a:solidFill>
                   <a:srgbClr val="262626"/>
                 </a:solidFill>
-                <a:latin typeface="Alibaba PuHuiTi 3.0" pitchFamily="34" charset="0"/>
-                <a:ea typeface="Alibaba PuHuiTi 3.0" pitchFamily="34" charset="-122"/>
-                <a:cs typeface="Alibaba PuHuiTi 3.0" pitchFamily="34" charset="-120"/>
+                <a:latin typeface="Alibaba PuHuiTi 3.0 115 Black" pitchFamily="34" charset="0"/>
+                <a:ea typeface="Alibaba PuHuiTi 3.0 115 Black" pitchFamily="34" charset="-122"/>
+                <a:cs typeface="Alibaba PuHuiTi 3.0 115 Black" pitchFamily="34" charset="-120"/>
               </a:rPr>
               <a:t>42 4D  →  "BM"</a:t>
             </a:r>
@@ -8745,9 +8667,9 @@
                 <a:solidFill>
                   <a:srgbClr val="262626"/>
                 </a:solidFill>
-                <a:latin typeface="Alibaba PuHuiTi 3.0" pitchFamily="34" charset="0"/>
-                <a:ea typeface="Alibaba PuHuiTi 3.0" pitchFamily="34" charset="-122"/>
-                <a:cs typeface="Alibaba PuHuiTi 3.0" pitchFamily="34" charset="-120"/>
+                <a:latin typeface="Alibaba PuHuiTi 3.0 115 Black" pitchFamily="34" charset="0"/>
+                <a:ea typeface="Alibaba PuHuiTi 3.0 115 Black" pitchFamily="34" charset="-122"/>
+                <a:cs typeface="Alibaba PuHuiTi 3.0 115 Black" pitchFamily="34" charset="-120"/>
               </a:rPr>
               <a:t>header bytes at 0x0A:</a:t>
             </a:r>
@@ -8762,9 +8684,9 @@
                 <a:solidFill>
                   <a:srgbClr val="262626"/>
                 </a:solidFill>
-                <a:latin typeface="Alibaba PuHuiTi 3.0" pitchFamily="34" charset="0"/>
-                <a:ea typeface="Alibaba PuHuiTi 3.0" pitchFamily="34" charset="-122"/>
-                <a:cs typeface="Alibaba PuHuiTi 3.0" pitchFamily="34" charset="-120"/>
+                <a:latin typeface="Alibaba PuHuiTi 3.0 115 Black" pitchFamily="34" charset="0"/>
+                <a:ea typeface="Alibaba PuHuiTi 3.0 115 Black" pitchFamily="34" charset="-122"/>
+                <a:cs typeface="Alibaba PuHuiTi 3.0 115 Black" pitchFamily="34" charset="-120"/>
               </a:rPr>
               <a:t>36 00 00 00</a:t>
             </a:r>
@@ -8779,9 +8701,9 @@
                 <a:solidFill>
                   <a:srgbClr val="262626"/>
                 </a:solidFill>
-                <a:latin typeface="Alibaba PuHuiTi 3.0" pitchFamily="34" charset="0"/>
-                <a:ea typeface="Alibaba PuHuiTi 3.0" pitchFamily="34" charset="-122"/>
-                <a:cs typeface="Alibaba PuHuiTi 3.0" pitchFamily="34" charset="-120"/>
+                <a:latin typeface="Alibaba PuHuiTi 3.0 115 Black" pitchFamily="34" charset="0"/>
+                <a:ea typeface="Alibaba PuHuiTi 3.0 115 Black" pitchFamily="34" charset="-122"/>
+                <a:cs typeface="Alibaba PuHuiTi 3.0 115 Black" pitchFamily="34" charset="-120"/>
               </a:rPr>
               <a:t>↓</a:t>
             </a:r>
@@ -8796,9 +8718,9 @@
                 <a:solidFill>
                   <a:srgbClr val="262626"/>
                 </a:solidFill>
-                <a:latin typeface="Alibaba PuHuiTi 3.0" pitchFamily="34" charset="0"/>
-                <a:ea typeface="Alibaba PuHuiTi 3.0" pitchFamily="34" charset="-122"/>
-                <a:cs typeface="Alibaba PuHuiTi 3.0" pitchFamily="34" charset="-120"/>
+                <a:latin typeface="Alibaba PuHuiTi 3.0 115 Black" pitchFamily="34" charset="0"/>
+                <a:ea typeface="Alibaba PuHuiTi 3.0 115 Black" pitchFamily="34" charset="-122"/>
+                <a:cs typeface="Alibaba PuHuiTi 3.0 115 Black" pitchFamily="34" charset="-120"/>
               </a:rPr>
               <a:t>pixel-data offset = 54 bytes</a:t>
             </a:r>
@@ -8814,7 +8736,7 @@
         </p:nvSpPr>
         <p:spPr>
           <a:xfrm>
-            <a:off x="6217920" y="2148840"/>
+            <a:off x="6217920" y="2267712"/>
             <a:ext cx="4663440" cy="1645920"/>
           </a:xfrm>
           <a:prstGeom prst="roundRect">
@@ -8841,7 +8763,7 @@
         </p:nvSpPr>
         <p:spPr>
           <a:xfrm>
-            <a:off x="6382512" y="2258568"/>
+            <a:off x="6382512" y="2377440"/>
             <a:ext cx="4334256" cy="1426464"/>
           </a:xfrm>
           <a:prstGeom prst="rect">
@@ -8864,11 +8786,11 @@
                 <a:solidFill>
                   <a:srgbClr val="262626"/>
                 </a:solidFill>
-                <a:latin typeface="Alibaba PuHuiTi 3.0" pitchFamily="34" charset="0"/>
-                <a:ea typeface="Alibaba PuHuiTi 3.0" pitchFamily="34" charset="-122"/>
-                <a:cs typeface="Alibaba PuHuiTi 3.0" pitchFamily="34" charset="-120"/>
+                <a:latin typeface="Alibaba PuHuiTi 3.0 115 Black" pitchFamily="34" charset="0"/>
+                <a:ea typeface="Alibaba PuHuiTi 3.0 115 Black" pitchFamily="34" charset="-122"/>
+                <a:cs typeface="Alibaba PuHuiTi 3.0 115 Black" pitchFamily="34" charset="-120"/>
               </a:rPr>
-              <a:t>pixel values ≠ whole image file</a:t>
+              <a:t>pixel values ≠ 整个文件</a:t>
             </a:r>
             <a:endParaRPr lang="en-US" sz="2500" dirty="0"/>
           </a:p>
@@ -8881,11 +8803,11 @@
                 <a:solidFill>
                   <a:srgbClr val="262626"/>
                 </a:solidFill>
-                <a:latin typeface="Alibaba PuHuiTi 3.0" pitchFamily="34" charset="0"/>
-                <a:ea typeface="Alibaba PuHuiTi 3.0" pitchFamily="34" charset="-122"/>
-                <a:cs typeface="Alibaba PuHuiTi 3.0" pitchFamily="34" charset="-120"/>
+                <a:latin typeface="Alibaba PuHuiTi 3.0 115 Black" pitchFamily="34" charset="0"/>
+                <a:ea typeface="Alibaba PuHuiTi 3.0 115 Black" pitchFamily="34" charset="-122"/>
+                <a:cs typeface="Alibaba PuHuiTi 3.0 115 Black" pitchFamily="34" charset="-120"/>
               </a:rPr>
-              <a:t>文件还需要 header / image info。</a:t>
+              <a:t>文件还包含 header 等信息</a:t>
             </a:r>
             <a:endParaRPr lang="en-US" sz="2500" dirty="0"/>
           </a:p>
@@ -8931,8 +8853,8 @@
         </p:nvSpPr>
         <p:spPr>
           <a:xfrm>
-            <a:off x="-36576" y="45720"/>
-            <a:ext cx="12271248" cy="73152"/>
+            <a:off x="0" y="0"/>
+            <a:ext cx="12192000" cy="101600"/>
           </a:xfrm>
           <a:prstGeom prst="rect">
             <a:avLst/>
@@ -8940,11 +8862,8 @@
           <a:solidFill>
             <a:srgbClr val="6251B1"/>
           </a:solidFill>
-          <a:ln w="12700">
-            <a:solidFill>
-              <a:srgbClr val="6251B1"/>
-            </a:solidFill>
-            <a:prstDash val="solid"/>
+          <a:ln>
+            <a:noFill/>
           </a:ln>
         </p:spPr>
       </p:sp>
@@ -8956,8 +8875,8 @@
         </p:nvSpPr>
         <p:spPr>
           <a:xfrm>
-            <a:off x="-36576" y="6739128"/>
-            <a:ext cx="12271248" cy="73152"/>
+            <a:off x="0" y="6756400"/>
+            <a:ext cx="12192000" cy="101600"/>
           </a:xfrm>
           <a:prstGeom prst="rect">
             <a:avLst/>
@@ -8965,11 +8884,8 @@
           <a:solidFill>
             <a:srgbClr val="6251B1"/>
           </a:solidFill>
-          <a:ln w="12700">
-            <a:solidFill>
-              <a:srgbClr val="6251B1"/>
-            </a:solidFill>
-            <a:prstDash val="solid"/>
+          <a:ln>
+            <a:noFill/>
           </a:ln>
         </p:spPr>
       </p:sp>
@@ -8981,8 +8897,8 @@
         </p:nvSpPr>
         <p:spPr>
           <a:xfrm>
-            <a:off x="608076" y="438912"/>
-            <a:ext cx="10972800" cy="566928"/>
+            <a:off x="608076" y="608076"/>
+            <a:ext cx="10972800" cy="704088"/>
           </a:xfrm>
           <a:prstGeom prst="rect">
             <a:avLst/>
@@ -8992,7 +8908,7 @@
         </p:spPr>
         <p:txBody>
           <a:bodyPr wrap="square" lIns="0" tIns="0" rIns="0" bIns="0" rtlCol="0" anchor="ctr">
-            <a:normAutofit/>
+            <a:noAutofit/>
           </a:bodyPr>
           <a:lstStyle/>
           <a:p>
@@ -9000,13 +8916,13 @@
               <a:buNone/>
             </a:pPr>
             <a:r>
-              <a:rPr lang="en-US" sz="3000" b="1" dirty="0">
+              <a:rPr lang="en-US" sz="3600" b="1" dirty="0">
                 <a:solidFill>
                   <a:srgbClr val="262626"/>
                 </a:solidFill>
-                <a:latin typeface="Alibaba PuHuiTi 3.0" pitchFamily="34" charset="0"/>
-                <a:ea typeface="Alibaba PuHuiTi 3.0" pitchFamily="34" charset="-122"/>
-                <a:cs typeface="Alibaba PuHuiTi 3.0" pitchFamily="34" charset="-120"/>
+                <a:latin typeface="Alibaba PuHuiTi 3.0 115 Black" pitchFamily="34" charset="0"/>
+                <a:ea typeface="Alibaba PuHuiTi 3.0 115 Black" pitchFamily="34" charset="-122"/>
+                <a:cs typeface="Alibaba PuHuiTi 3.0 115 Black" pitchFamily="34" charset="-120"/>
               </a:rPr>
               <a:t>Q8 1920×1080、24-bit RGB，不压缩需要多大？</a:t>
             </a:r>
@@ -9072,9 +8988,9 @@
                 <a:solidFill>
                   <a:srgbClr val="262626"/>
                 </a:solidFill>
-                <a:latin typeface="Alibaba PuHuiTi 3.0" pitchFamily="34" charset="0"/>
-                <a:ea typeface="Alibaba PuHuiTi 3.0" pitchFamily="34" charset="-122"/>
-                <a:cs typeface="Alibaba PuHuiTi 3.0" pitchFamily="34" charset="-120"/>
+                <a:latin typeface="Alibaba PuHuiTi 3.0 115 Black" pitchFamily="34" charset="0"/>
+                <a:ea typeface="Alibaba PuHuiTi 3.0 115 Black" pitchFamily="34" charset="-122"/>
+                <a:cs typeface="Alibaba PuHuiTi 3.0 115 Black" pitchFamily="34" charset="-120"/>
               </a:rPr>
               <a:t>A. 约 2 MB</a:t>
             </a:r>
@@ -9140,9 +9056,9 @@
                 <a:solidFill>
                   <a:srgbClr val="262626"/>
                 </a:solidFill>
-                <a:latin typeface="Alibaba PuHuiTi 3.0" pitchFamily="34" charset="0"/>
-                <a:ea typeface="Alibaba PuHuiTi 3.0" pitchFamily="34" charset="-122"/>
-                <a:cs typeface="Alibaba PuHuiTi 3.0" pitchFamily="34" charset="-120"/>
+                <a:latin typeface="Alibaba PuHuiTi 3.0 115 Black" pitchFamily="34" charset="0"/>
+                <a:ea typeface="Alibaba PuHuiTi 3.0 115 Black" pitchFamily="34" charset="-122"/>
+                <a:cs typeface="Alibaba PuHuiTi 3.0 115 Black" pitchFamily="34" charset="-120"/>
               </a:rPr>
               <a:t>B. 约 6 MB</a:t>
             </a:r>
@@ -9208,9 +9124,9 @@
                 <a:solidFill>
                   <a:srgbClr val="262626"/>
                 </a:solidFill>
-                <a:latin typeface="Alibaba PuHuiTi 3.0" pitchFamily="34" charset="0"/>
-                <a:ea typeface="Alibaba PuHuiTi 3.0" pitchFamily="34" charset="-122"/>
-                <a:cs typeface="Alibaba PuHuiTi 3.0" pitchFamily="34" charset="-120"/>
+                <a:latin typeface="Alibaba PuHuiTi 3.0 115 Black" pitchFamily="34" charset="0"/>
+                <a:ea typeface="Alibaba PuHuiTi 3.0 115 Black" pitchFamily="34" charset="-122"/>
+                <a:cs typeface="Alibaba PuHuiTi 3.0 115 Black" pitchFamily="34" charset="-120"/>
               </a:rPr>
               <a:t>C. 约 24 MB</a:t>
             </a:r>
@@ -9276,9 +9192,9 @@
                 <a:solidFill>
                   <a:srgbClr val="262626"/>
                 </a:solidFill>
-                <a:latin typeface="Alibaba PuHuiTi 3.0" pitchFamily="34" charset="0"/>
-                <a:ea typeface="Alibaba PuHuiTi 3.0" pitchFamily="34" charset="-122"/>
-                <a:cs typeface="Alibaba PuHuiTi 3.0" pitchFamily="34" charset="-120"/>
+                <a:latin typeface="Alibaba PuHuiTi 3.0 115 Black" pitchFamily="34" charset="0"/>
+                <a:ea typeface="Alibaba PuHuiTi 3.0 115 Black" pitchFamily="34" charset="-122"/>
+                <a:cs typeface="Alibaba PuHuiTi 3.0 115 Black" pitchFamily="34" charset="-120"/>
               </a:rPr>
               <a:t>D. 约 48 MB</a:t>
             </a:r>
@@ -9326,8 +9242,8 @@
         </p:nvSpPr>
         <p:spPr>
           <a:xfrm>
-            <a:off x="-36576" y="45720"/>
-            <a:ext cx="12271248" cy="73152"/>
+            <a:off x="0" y="0"/>
+            <a:ext cx="12192000" cy="101600"/>
           </a:xfrm>
           <a:prstGeom prst="rect">
             <a:avLst/>
@@ -9335,11 +9251,8 @@
           <a:solidFill>
             <a:srgbClr val="6251B1"/>
           </a:solidFill>
-          <a:ln w="12700">
-            <a:solidFill>
-              <a:srgbClr val="6251B1"/>
-            </a:solidFill>
-            <a:prstDash val="solid"/>
+          <a:ln>
+            <a:noFill/>
           </a:ln>
         </p:spPr>
       </p:sp>
@@ -9351,8 +9264,8 @@
         </p:nvSpPr>
         <p:spPr>
           <a:xfrm>
-            <a:off x="-36576" y="6739128"/>
-            <a:ext cx="12271248" cy="73152"/>
+            <a:off x="0" y="6756400"/>
+            <a:ext cx="12192000" cy="101600"/>
           </a:xfrm>
           <a:prstGeom prst="rect">
             <a:avLst/>
@@ -9360,11 +9273,8 @@
           <a:solidFill>
             <a:srgbClr val="6251B1"/>
           </a:solidFill>
-          <a:ln w="12700">
-            <a:solidFill>
-              <a:srgbClr val="6251B1"/>
-            </a:solidFill>
-            <a:prstDash val="solid"/>
+          <a:ln>
+            <a:noFill/>
           </a:ln>
         </p:spPr>
       </p:sp>
@@ -9376,8 +9286,8 @@
         </p:nvSpPr>
         <p:spPr>
           <a:xfrm>
-            <a:off x="608076" y="438912"/>
-            <a:ext cx="10972800" cy="566928"/>
+            <a:off x="608076" y="608076"/>
+            <a:ext cx="10972800" cy="704088"/>
           </a:xfrm>
           <a:prstGeom prst="rect">
             <a:avLst/>
@@ -9387,7 +9297,7 @@
         </p:spPr>
         <p:txBody>
           <a:bodyPr wrap="square" lIns="0" tIns="0" rIns="0" bIns="0" rtlCol="0" anchor="ctr">
-            <a:normAutofit/>
+            <a:noAutofit/>
           </a:bodyPr>
           <a:lstStyle/>
           <a:p>
@@ -9395,13 +9305,13 @@
               <a:buNone/>
             </a:pPr>
             <a:r>
-              <a:rPr lang="en-US" sz="3000" b="1" dirty="0">
+              <a:rPr lang="en-US" sz="3600" b="1" dirty="0">
                 <a:solidFill>
                   <a:srgbClr val="262626"/>
                 </a:solidFill>
-                <a:latin typeface="Alibaba PuHuiTi 3.0" pitchFamily="34" charset="0"/>
-                <a:ea typeface="Alibaba PuHuiTi 3.0" pitchFamily="34" charset="-122"/>
-                <a:cs typeface="Alibaba PuHuiTi 3.0" pitchFamily="34" charset="-120"/>
+                <a:latin typeface="Alibaba PuHuiTi 3.0 115 Black" pitchFamily="34" charset="0"/>
+                <a:ea typeface="Alibaba PuHuiTi 3.0 115 Black" pitchFamily="34" charset="-122"/>
+                <a:cs typeface="Alibaba PuHuiTi 3.0 115 Black" pitchFamily="34" charset="-120"/>
               </a:rPr>
               <a:t>Q8 1920×1080、24-bit RGB，不压缩需要多大？</a:t>
             </a:r>
@@ -9417,7 +9327,7 @@
         </p:nvSpPr>
         <p:spPr>
           <a:xfrm>
-            <a:off x="914400" y="1417320"/>
+            <a:off x="914400" y="1490472"/>
             <a:ext cx="10332720" cy="502920"/>
           </a:xfrm>
           <a:prstGeom prst="rect">
@@ -9440,9 +9350,9 @@
                 <a:solidFill>
                   <a:srgbClr val="262626"/>
                 </a:solidFill>
-                <a:latin typeface="Alibaba PuHuiTi 3.0" pitchFamily="34" charset="0"/>
-                <a:ea typeface="Alibaba PuHuiTi 3.0" pitchFamily="34" charset="-122"/>
-                <a:cs typeface="Alibaba PuHuiTi 3.0" pitchFamily="34" charset="-120"/>
+                <a:latin typeface="Alibaba PuHuiTi 3.0 115 Black" pitchFamily="34" charset="0"/>
+                <a:ea typeface="Alibaba PuHuiTi 3.0 115 Black" pitchFamily="34" charset="-122"/>
+                <a:cs typeface="Alibaba PuHuiTi 3.0 115 Black" pitchFamily="34" charset="-120"/>
               </a:rPr>
               <a:t>1920 × 1080 = 2,073,600 pixels</a:t>
             </a:r>
@@ -9458,7 +9368,7 @@
         </p:nvSpPr>
         <p:spPr>
           <a:xfrm>
-            <a:off x="914400" y="2240280"/>
+            <a:off x="914400" y="2313432"/>
             <a:ext cx="10332720" cy="502920"/>
           </a:xfrm>
           <a:prstGeom prst="rect">
@@ -9481,9 +9391,9 @@
                 <a:solidFill>
                   <a:srgbClr val="262626"/>
                 </a:solidFill>
-                <a:latin typeface="Alibaba PuHuiTi 3.0" pitchFamily="34" charset="0"/>
-                <a:ea typeface="Alibaba PuHuiTi 3.0" pitchFamily="34" charset="-122"/>
-                <a:cs typeface="Alibaba PuHuiTi 3.0" pitchFamily="34" charset="-120"/>
+                <a:latin typeface="Alibaba PuHuiTi 3.0 115 Black" pitchFamily="34" charset="0"/>
+                <a:ea typeface="Alibaba PuHuiTi 3.0 115 Black" pitchFamily="34" charset="-122"/>
+                <a:cs typeface="Alibaba PuHuiTi 3.0 115 Black" pitchFamily="34" charset="-120"/>
               </a:rPr>
               <a:t>24 bits/pixel = 3 bytes/pixel</a:t>
             </a:r>
@@ -9499,7 +9409,7 @@
         </p:nvSpPr>
         <p:spPr>
           <a:xfrm>
-            <a:off x="914400" y="3063240"/>
+            <a:off x="914400" y="3136392"/>
             <a:ext cx="10332720" cy="502920"/>
           </a:xfrm>
           <a:prstGeom prst="rect">
@@ -9522,9 +9432,9 @@
                 <a:solidFill>
                   <a:srgbClr val="262626"/>
                 </a:solidFill>
-                <a:latin typeface="Alibaba PuHuiTi 3.0" pitchFamily="34" charset="0"/>
-                <a:ea typeface="Alibaba PuHuiTi 3.0" pitchFamily="34" charset="-122"/>
-                <a:cs typeface="Alibaba PuHuiTi 3.0" pitchFamily="34" charset="-120"/>
+                <a:latin typeface="Alibaba PuHuiTi 3.0 115 Black" pitchFamily="34" charset="0"/>
+                <a:ea typeface="Alibaba PuHuiTi 3.0 115 Black" pitchFamily="34" charset="-122"/>
+                <a:cs typeface="Alibaba PuHuiTi 3.0 115 Black" pitchFamily="34" charset="-120"/>
               </a:rPr>
               <a:t>2,073,600 × 3 = 6,220,800 bytes ≈ 6.22 MB</a:t>
             </a:r>
@@ -9540,7 +9450,7 @@
         </p:nvSpPr>
         <p:spPr>
           <a:xfrm>
-            <a:off x="2971800" y="4572000"/>
+            <a:off x="2971800" y="4645152"/>
             <a:ext cx="6217920" cy="777240"/>
           </a:xfrm>
           <a:prstGeom prst="roundRect">
@@ -9567,7 +9477,7 @@
         </p:nvSpPr>
         <p:spPr>
           <a:xfrm>
-            <a:off x="3136392" y="4681728"/>
+            <a:off x="3136392" y="4754880"/>
             <a:ext cx="5888736" cy="557784"/>
           </a:xfrm>
           <a:prstGeom prst="rect">
@@ -9590,9 +9500,9 @@
                 <a:solidFill>
                   <a:srgbClr val="262626"/>
                 </a:solidFill>
-                <a:latin typeface="Alibaba PuHuiTi 3.0" pitchFamily="34" charset="0"/>
-                <a:ea typeface="Alibaba PuHuiTi 3.0" pitchFamily="34" charset="-122"/>
-                <a:cs typeface="Alibaba PuHuiTi 3.0" pitchFamily="34" charset="-120"/>
+                <a:latin typeface="Alibaba PuHuiTi 3.0 115 Black" pitchFamily="34" charset="0"/>
+                <a:ea typeface="Alibaba PuHuiTi 3.0 115 Black" pitchFamily="34" charset="-122"/>
+                <a:cs typeface="Alibaba PuHuiTi 3.0 115 Black" pitchFamily="34" charset="-120"/>
               </a:rPr>
               <a:t>答案：B. 约 6 MB</a:t>
             </a:r>
@@ -9640,8 +9550,8 @@
         </p:nvSpPr>
         <p:spPr>
           <a:xfrm>
-            <a:off x="-36576" y="45720"/>
-            <a:ext cx="12271248" cy="73152"/>
+            <a:off x="0" y="0"/>
+            <a:ext cx="12192000" cy="101600"/>
           </a:xfrm>
           <a:prstGeom prst="rect">
             <a:avLst/>
@@ -9649,11 +9559,8 @@
           <a:solidFill>
             <a:srgbClr val="6251B1"/>
           </a:solidFill>
-          <a:ln w="12700">
-            <a:solidFill>
-              <a:srgbClr val="6251B1"/>
-            </a:solidFill>
-            <a:prstDash val="solid"/>
+          <a:ln>
+            <a:noFill/>
           </a:ln>
         </p:spPr>
       </p:sp>
@@ -9665,8 +9572,8 @@
         </p:nvSpPr>
         <p:spPr>
           <a:xfrm>
-            <a:off x="-36576" y="6739128"/>
-            <a:ext cx="12271248" cy="73152"/>
+            <a:off x="0" y="6756400"/>
+            <a:ext cx="12192000" cy="101600"/>
           </a:xfrm>
           <a:prstGeom prst="rect">
             <a:avLst/>
@@ -9674,11 +9581,8 @@
           <a:solidFill>
             <a:srgbClr val="6251B1"/>
           </a:solidFill>
-          <a:ln w="12700">
-            <a:solidFill>
-              <a:srgbClr val="6251B1"/>
-            </a:solidFill>
-            <a:prstDash val="solid"/>
+          <a:ln>
+            <a:noFill/>
           </a:ln>
         </p:spPr>
       </p:sp>
@@ -9690,8 +9594,8 @@
         </p:nvSpPr>
         <p:spPr>
           <a:xfrm>
-            <a:off x="608076" y="438912"/>
-            <a:ext cx="10972800" cy="566928"/>
+            <a:off x="608076" y="608076"/>
+            <a:ext cx="10972800" cy="704088"/>
           </a:xfrm>
           <a:prstGeom prst="rect">
             <a:avLst/>
@@ -9701,7 +9605,7 @@
         </p:spPr>
         <p:txBody>
           <a:bodyPr wrap="square" lIns="0" tIns="0" rIns="0" bIns="0" rtlCol="0" anchor="ctr">
-            <a:normAutofit/>
+            <a:noAutofit/>
           </a:bodyPr>
           <a:lstStyle/>
           <a:p>
@@ -9709,13 +9613,13 @@
               <a:buNone/>
             </a:pPr>
             <a:r>
-              <a:rPr lang="en-US" sz="3000" b="1" dirty="0">
+              <a:rPr lang="en-US" sz="3600" b="1" dirty="0">
                 <a:solidFill>
                   <a:srgbClr val="262626"/>
                 </a:solidFill>
-                <a:latin typeface="Alibaba PuHuiTi 3.0" pitchFamily="34" charset="0"/>
-                <a:ea typeface="Alibaba PuHuiTi 3.0" pitchFamily="34" charset="-122"/>
-                <a:cs typeface="Alibaba PuHuiTi 3.0" pitchFamily="34" charset="-120"/>
+                <a:latin typeface="Alibaba PuHuiTi 3.0 115 Black" pitchFamily="34" charset="0"/>
+                <a:ea typeface="Alibaba PuHuiTi 3.0 115 Black" pitchFamily="34" charset="-122"/>
+                <a:cs typeface="Alibaba PuHuiTi 3.0 115 Black" pitchFamily="34" charset="-120"/>
               </a:rPr>
               <a:t>Q9 宽和高都变成 2 倍，数据量变成几倍？</a:t>
             </a:r>
@@ -9754,9 +9658,9 @@
                 <a:solidFill>
                   <a:srgbClr val="262626"/>
                 </a:solidFill>
-                <a:latin typeface="Alibaba PuHuiTi 3.0" pitchFamily="34" charset="0"/>
-                <a:ea typeface="Alibaba PuHuiTi 3.0" pitchFamily="34" charset="-122"/>
-                <a:cs typeface="Alibaba PuHuiTi 3.0" pitchFamily="34" charset="-120"/>
+                <a:latin typeface="Alibaba PuHuiTi 3.0 115 Black" pitchFamily="34" charset="0"/>
+                <a:ea typeface="Alibaba PuHuiTi 3.0 115 Black" pitchFamily="34" charset="-122"/>
+                <a:cs typeface="Alibaba PuHuiTi 3.0 115 Black" pitchFamily="34" charset="-120"/>
               </a:rPr>
               <a:t>原图：800×600</a:t>
             </a:r>
@@ -9795,9 +9699,9 @@
                 <a:solidFill>
                   <a:srgbClr val="262626"/>
                 </a:solidFill>
-                <a:latin typeface="Alibaba PuHuiTi 3.0" pitchFamily="34" charset="0"/>
-                <a:ea typeface="Alibaba PuHuiTi 3.0" pitchFamily="34" charset="-122"/>
-                <a:cs typeface="Alibaba PuHuiTi 3.0" pitchFamily="34" charset="-120"/>
+                <a:latin typeface="Alibaba PuHuiTi 3.0 115 Black" pitchFamily="34" charset="0"/>
+                <a:ea typeface="Alibaba PuHuiTi 3.0 115 Black" pitchFamily="34" charset="-122"/>
+                <a:cs typeface="Alibaba PuHuiTi 3.0 115 Black" pitchFamily="34" charset="-120"/>
               </a:rPr>
               <a:t>新图：1600×1200</a:t>
             </a:r>
@@ -9836,9 +9740,9 @@
                 <a:solidFill>
                   <a:srgbClr val="262626"/>
                 </a:solidFill>
-                <a:latin typeface="Alibaba PuHuiTi 3.0" pitchFamily="34" charset="0"/>
-                <a:ea typeface="Alibaba PuHuiTi 3.0" pitchFamily="34" charset="-122"/>
-                <a:cs typeface="Alibaba PuHuiTi 3.0" pitchFamily="34" charset="-120"/>
+                <a:latin typeface="Alibaba PuHuiTi 3.0 55 Regular" pitchFamily="34" charset="0"/>
+                <a:ea typeface="Alibaba PuHuiTi 3.0 55 Regular" pitchFamily="34" charset="-122"/>
+                <a:cs typeface="Alibaba PuHuiTi 3.0 55 Regular" pitchFamily="34" charset="-120"/>
               </a:rPr>
               <a:t>bits per pixel 不变</a:t>
             </a:r>
@@ -9886,8 +9790,8 @@
         </p:nvSpPr>
         <p:spPr>
           <a:xfrm>
-            <a:off x="-36576" y="45720"/>
-            <a:ext cx="12271248" cy="73152"/>
+            <a:off x="0" y="0"/>
+            <a:ext cx="12192000" cy="101600"/>
           </a:xfrm>
           <a:prstGeom prst="rect">
             <a:avLst/>
@@ -9895,11 +9799,8 @@
           <a:solidFill>
             <a:srgbClr val="6251B1"/>
           </a:solidFill>
-          <a:ln w="12700">
-            <a:solidFill>
-              <a:srgbClr val="6251B1"/>
-            </a:solidFill>
-            <a:prstDash val="solid"/>
+          <a:ln>
+            <a:noFill/>
           </a:ln>
         </p:spPr>
       </p:sp>
@@ -9911,8 +9812,8 @@
         </p:nvSpPr>
         <p:spPr>
           <a:xfrm>
-            <a:off x="-36576" y="6739128"/>
-            <a:ext cx="12271248" cy="73152"/>
+            <a:off x="0" y="6756400"/>
+            <a:ext cx="12192000" cy="101600"/>
           </a:xfrm>
           <a:prstGeom prst="rect">
             <a:avLst/>
@@ -9920,11 +9821,8 @@
           <a:solidFill>
             <a:srgbClr val="6251B1"/>
           </a:solidFill>
-          <a:ln w="12700">
-            <a:solidFill>
-              <a:srgbClr val="6251B1"/>
-            </a:solidFill>
-            <a:prstDash val="solid"/>
+          <a:ln>
+            <a:noFill/>
           </a:ln>
         </p:spPr>
       </p:sp>
@@ -9936,8 +9834,8 @@
         </p:nvSpPr>
         <p:spPr>
           <a:xfrm>
-            <a:off x="608076" y="438912"/>
-            <a:ext cx="10972800" cy="566928"/>
+            <a:off x="608076" y="608076"/>
+            <a:ext cx="10972800" cy="704088"/>
           </a:xfrm>
           <a:prstGeom prst="rect">
             <a:avLst/>
@@ -9947,7 +9845,7 @@
         </p:spPr>
         <p:txBody>
           <a:bodyPr wrap="square" lIns="0" tIns="0" rIns="0" bIns="0" rtlCol="0" anchor="ctr">
-            <a:normAutofit/>
+            <a:noAutofit/>
           </a:bodyPr>
           <a:lstStyle/>
           <a:p>
@@ -9955,13 +9853,13 @@
               <a:buNone/>
             </a:pPr>
             <a:r>
-              <a:rPr lang="en-US" sz="3000" b="1" dirty="0">
+              <a:rPr lang="en-US" sz="3600" b="1" dirty="0">
                 <a:solidFill>
                   <a:srgbClr val="262626"/>
                 </a:solidFill>
-                <a:latin typeface="Alibaba PuHuiTi 3.0" pitchFamily="34" charset="0"/>
-                <a:ea typeface="Alibaba PuHuiTi 3.0" pitchFamily="34" charset="-122"/>
-                <a:cs typeface="Alibaba PuHuiTi 3.0" pitchFamily="34" charset="-120"/>
+                <a:latin typeface="Alibaba PuHuiTi 3.0 115 Black" pitchFamily="34" charset="0"/>
+                <a:ea typeface="Alibaba PuHuiTi 3.0 115 Black" pitchFamily="34" charset="-122"/>
+                <a:cs typeface="Alibaba PuHuiTi 3.0 115 Black" pitchFamily="34" charset="-120"/>
               </a:rPr>
               <a:t>Q9 宽和高都变成 2 倍，数据量变成几倍？</a:t>
             </a:r>
@@ -10027,9 +9925,9 @@
                 <a:solidFill>
                   <a:srgbClr val="262626"/>
                 </a:solidFill>
-                <a:latin typeface="Alibaba PuHuiTi 3.0" pitchFamily="34" charset="0"/>
-                <a:ea typeface="Alibaba PuHuiTi 3.0" pitchFamily="34" charset="-122"/>
-                <a:cs typeface="Alibaba PuHuiTi 3.0" pitchFamily="34" charset="-120"/>
+                <a:latin typeface="Alibaba PuHuiTi 3.0 115 Black" pitchFamily="34" charset="0"/>
+                <a:ea typeface="Alibaba PuHuiTi 3.0 115 Black" pitchFamily="34" charset="-122"/>
+                <a:cs typeface="Alibaba PuHuiTi 3.0 115 Black" pitchFamily="34" charset="-120"/>
               </a:rPr>
               <a:t>(1600 × 1200) / (800 × 600) = 4</a:t>
             </a:r>
@@ -10068,9 +9966,9 @@
                 <a:solidFill>
                   <a:srgbClr val="262626"/>
                 </a:solidFill>
-                <a:latin typeface="Alibaba PuHuiTi 3.0" pitchFamily="34" charset="0"/>
-                <a:ea typeface="Alibaba PuHuiTi 3.0" pitchFamily="34" charset="-122"/>
-                <a:cs typeface="Alibaba PuHuiTi 3.0" pitchFamily="34" charset="-120"/>
+                <a:latin typeface="Alibaba PuHuiTi 3.0 115 Black" pitchFamily="34" charset="0"/>
+                <a:ea typeface="Alibaba PuHuiTi 3.0 115 Black" pitchFamily="34" charset="-122"/>
+                <a:cs typeface="Alibaba PuHuiTi 3.0 115 Black" pitchFamily="34" charset="-120"/>
               </a:rPr>
               <a:t>宽 ×2，高 ×2，所以像素总数 ×4。</a:t>
             </a:r>
@@ -10118,8 +10016,8 @@
         </p:nvSpPr>
         <p:spPr>
           <a:xfrm>
-            <a:off x="-36576" y="45720"/>
-            <a:ext cx="12271248" cy="73152"/>
+            <a:off x="0" y="0"/>
+            <a:ext cx="12192000" cy="101600"/>
           </a:xfrm>
           <a:prstGeom prst="rect">
             <a:avLst/>
@@ -10127,11 +10025,8 @@
           <a:solidFill>
             <a:srgbClr val="6251B1"/>
           </a:solidFill>
-          <a:ln w="12700">
-            <a:solidFill>
-              <a:srgbClr val="6251B1"/>
-            </a:solidFill>
-            <a:prstDash val="solid"/>
+          <a:ln>
+            <a:noFill/>
           </a:ln>
         </p:spPr>
       </p:sp>
@@ -10143,8 +10038,8 @@
         </p:nvSpPr>
         <p:spPr>
           <a:xfrm>
-            <a:off x="-36576" y="6739128"/>
-            <a:ext cx="12271248" cy="73152"/>
+            <a:off x="0" y="6756400"/>
+            <a:ext cx="12192000" cy="101600"/>
           </a:xfrm>
           <a:prstGeom prst="rect">
             <a:avLst/>
@@ -10152,11 +10047,8 @@
           <a:solidFill>
             <a:srgbClr val="6251B1"/>
           </a:solidFill>
-          <a:ln w="12700">
-            <a:solidFill>
-              <a:srgbClr val="6251B1"/>
-            </a:solidFill>
-            <a:prstDash val="solid"/>
+          <a:ln>
+            <a:noFill/>
           </a:ln>
         </p:spPr>
       </p:sp>
@@ -10168,8 +10060,8 @@
         </p:nvSpPr>
         <p:spPr>
           <a:xfrm>
-            <a:off x="608076" y="438912"/>
-            <a:ext cx="10972800" cy="566928"/>
+            <a:off x="608076" y="608076"/>
+            <a:ext cx="10972800" cy="704088"/>
           </a:xfrm>
           <a:prstGeom prst="rect">
             <a:avLst/>
@@ -10179,7 +10071,7 @@
         </p:spPr>
         <p:txBody>
           <a:bodyPr wrap="square" lIns="0" tIns="0" rIns="0" bIns="0" rtlCol="0" anchor="ctr">
-            <a:normAutofit/>
+            <a:noAutofit/>
           </a:bodyPr>
           <a:lstStyle/>
           <a:p>
@@ -10187,13 +10079,13 @@
               <a:buNone/>
             </a:pPr>
             <a:r>
-              <a:rPr lang="en-US" sz="3000" b="1" dirty="0">
+              <a:rPr lang="en-US" sz="3600" b="1" dirty="0">
                 <a:solidFill>
                   <a:srgbClr val="262626"/>
                 </a:solidFill>
-                <a:latin typeface="Alibaba PuHuiTi 3.0" pitchFamily="34" charset="0"/>
-                <a:ea typeface="Alibaba PuHuiTi 3.0" pitchFamily="34" charset="-122"/>
-                <a:cs typeface="Alibaba PuHuiTi 3.0" pitchFamily="34" charset="-120"/>
+                <a:latin typeface="Alibaba PuHuiTi 3.0 115 Black" pitchFamily="34" charset="0"/>
+                <a:ea typeface="Alibaba PuHuiTi 3.0 115 Black" pitchFamily="34" charset="-122"/>
+                <a:cs typeface="Alibaba PuHuiTi 3.0 115 Black" pitchFamily="34" charset="-120"/>
               </a:rPr>
               <a:t>Q12 回看 Q0：这四种说法现在怎样排序？</a:t>
             </a:r>
@@ -10259,9 +10151,9 @@
                 <a:solidFill>
                   <a:srgbClr val="262626"/>
                 </a:solidFill>
-                <a:latin typeface="Alibaba PuHuiTi 3.0" pitchFamily="34" charset="0"/>
-                <a:ea typeface="Alibaba PuHuiTi 3.0" pitchFamily="34" charset="-122"/>
-                <a:cs typeface="Alibaba PuHuiTi 3.0" pitchFamily="34" charset="-120"/>
+                <a:latin typeface="Alibaba PuHuiTi 3.0 85 Bold" pitchFamily="34" charset="0"/>
+                <a:ea typeface="Alibaba PuHuiTi 3.0 85 Bold" pitchFamily="34" charset="-122"/>
+                <a:cs typeface="Alibaba PuHuiTi 3.0 85 Bold" pitchFamily="34" charset="-120"/>
               </a:rPr>
               <a:t>很多 0 和 1</a:t>
             </a:r>
@@ -10327,9 +10219,9 @@
                 <a:solidFill>
                   <a:srgbClr val="262626"/>
                 </a:solidFill>
-                <a:latin typeface="Alibaba PuHuiTi 3.0" pitchFamily="34" charset="0"/>
-                <a:ea typeface="Alibaba PuHuiTi 3.0" pitchFamily="34" charset="-122"/>
-                <a:cs typeface="Alibaba PuHuiTi 3.0" pitchFamily="34" charset="-120"/>
+                <a:latin typeface="Alibaba PuHuiTi 3.0 85 Bold" pitchFamily="34" charset="0"/>
+                <a:ea typeface="Alibaba PuHuiTi 3.0 85 Bold" pitchFamily="34" charset="-122"/>
+                <a:cs typeface="Alibaba PuHuiTi 3.0 85 Bold" pitchFamily="34" charset="-120"/>
               </a:rPr>
               <a:t>很多像素 / 小方格</a:t>
             </a:r>
@@ -10395,9 +10287,9 @@
                 <a:solidFill>
                   <a:srgbClr val="262626"/>
                 </a:solidFill>
-                <a:latin typeface="Alibaba PuHuiTi 3.0" pitchFamily="34" charset="0"/>
-                <a:ea typeface="Alibaba PuHuiTi 3.0" pitchFamily="34" charset="-122"/>
-                <a:cs typeface="Alibaba PuHuiTi 3.0" pitchFamily="34" charset="-120"/>
+                <a:latin typeface="Alibaba PuHuiTi 3.0 85 Bold" pitchFamily="34" charset="0"/>
+                <a:ea typeface="Alibaba PuHuiTi 3.0 85 Bold" pitchFamily="34" charset="-122"/>
+                <a:cs typeface="Alibaba PuHuiTi 3.0 85 Bold" pitchFamily="34" charset="-120"/>
               </a:rPr>
               <a:t>很多数字</a:t>
             </a:r>
@@ -10463,9 +10355,9 @@
                 <a:solidFill>
                   <a:srgbClr val="262626"/>
                 </a:solidFill>
-                <a:latin typeface="Alibaba PuHuiTi 3.0" pitchFamily="34" charset="0"/>
-                <a:ea typeface="Alibaba PuHuiTi 3.0" pitchFamily="34" charset="-122"/>
-                <a:cs typeface="Alibaba PuHuiTi 3.0" pitchFamily="34" charset="-120"/>
+                <a:latin typeface="Alibaba PuHuiTi 3.0 85 Bold" pitchFamily="34" charset="0"/>
+                <a:ea typeface="Alibaba PuHuiTi 3.0 85 Bold" pitchFamily="34" charset="-122"/>
+                <a:cs typeface="Alibaba PuHuiTi 3.0 85 Bold" pitchFamily="34" charset="-120"/>
               </a:rPr>
               <a:t>很多颜色值</a:t>
             </a:r>
@@ -10504,9 +10396,9 @@
                 <a:solidFill>
                   <a:srgbClr val="262626"/>
                 </a:solidFill>
-                <a:latin typeface="Alibaba PuHuiTi 3.0" pitchFamily="34" charset="0"/>
-                <a:ea typeface="Alibaba PuHuiTi 3.0" pitchFamily="34" charset="-122"/>
-                <a:cs typeface="Alibaba PuHuiTi 3.0" pitchFamily="34" charset="-120"/>
+                <a:latin typeface="Alibaba PuHuiTi 3.0 115 Black" pitchFamily="34" charset="0"/>
+                <a:ea typeface="Alibaba PuHuiTi 3.0 115 Black" pitchFamily="34" charset="-122"/>
+                <a:cs typeface="Alibaba PuHuiTi 3.0 115 Black" pitchFamily="34" charset="-120"/>
               </a:rPr>
               <a:t>先独立排序，再和同桌解释每一步发生了什么。</a:t>
             </a:r>
@@ -10554,8 +10446,8 @@
         </p:nvSpPr>
         <p:spPr>
           <a:xfrm>
-            <a:off x="-36576" y="45720"/>
-            <a:ext cx="12271248" cy="73152"/>
+            <a:off x="0" y="0"/>
+            <a:ext cx="12192000" cy="101600"/>
           </a:xfrm>
           <a:prstGeom prst="rect">
             <a:avLst/>
@@ -10563,11 +10455,8 @@
           <a:solidFill>
             <a:srgbClr val="6251B1"/>
           </a:solidFill>
-          <a:ln w="12700">
-            <a:solidFill>
-              <a:srgbClr val="6251B1"/>
-            </a:solidFill>
-            <a:prstDash val="solid"/>
+          <a:ln>
+            <a:noFill/>
           </a:ln>
         </p:spPr>
       </p:sp>
@@ -10579,8 +10468,8 @@
         </p:nvSpPr>
         <p:spPr>
           <a:xfrm>
-            <a:off x="-36576" y="6739128"/>
-            <a:ext cx="12271248" cy="73152"/>
+            <a:off x="0" y="6756400"/>
+            <a:ext cx="12192000" cy="101600"/>
           </a:xfrm>
           <a:prstGeom prst="rect">
             <a:avLst/>
@@ -10588,11 +10477,8 @@
           <a:solidFill>
             <a:srgbClr val="6251B1"/>
           </a:solidFill>
-          <a:ln w="12700">
-            <a:solidFill>
-              <a:srgbClr val="6251B1"/>
-            </a:solidFill>
-            <a:prstDash val="solid"/>
+          <a:ln>
+            <a:noFill/>
           </a:ln>
         </p:spPr>
       </p:sp>
@@ -10604,8 +10490,8 @@
         </p:nvSpPr>
         <p:spPr>
           <a:xfrm>
-            <a:off x="608076" y="438912"/>
-            <a:ext cx="10972800" cy="566928"/>
+            <a:off x="608076" y="608076"/>
+            <a:ext cx="10972800" cy="704088"/>
           </a:xfrm>
           <a:prstGeom prst="rect">
             <a:avLst/>
@@ -10615,7 +10501,7 @@
         </p:spPr>
         <p:txBody>
           <a:bodyPr wrap="square" lIns="0" tIns="0" rIns="0" bIns="0" rtlCol="0" anchor="ctr">
-            <a:normAutofit/>
+            <a:noAutofit/>
           </a:bodyPr>
           <a:lstStyle/>
           <a:p>
@@ -10623,13 +10509,13 @@
               <a:buNone/>
             </a:pPr>
             <a:r>
-              <a:rPr lang="en-US" sz="3000" b="1" dirty="0">
+              <a:rPr lang="en-US" sz="3600" b="1" dirty="0">
                 <a:solidFill>
                   <a:srgbClr val="262626"/>
                 </a:solidFill>
-                <a:latin typeface="Alibaba PuHuiTi 3.0" pitchFamily="34" charset="0"/>
-                <a:ea typeface="Alibaba PuHuiTi 3.0" pitchFamily="34" charset="-122"/>
-                <a:cs typeface="Alibaba PuHuiTi 3.0" pitchFamily="34" charset="-120"/>
+                <a:latin typeface="Alibaba PuHuiTi 3.0 115 Black" pitchFamily="34" charset="0"/>
+                <a:ea typeface="Alibaba PuHuiTi 3.0 115 Black" pitchFamily="34" charset="-122"/>
+                <a:cs typeface="Alibaba PuHuiTi 3.0 115 Black" pitchFamily="34" charset="-120"/>
               </a:rPr>
               <a:t>Q12 回看 Q0：这四种说法现在怎样排序？</a:t>
             </a:r>
@@ -10695,9 +10581,9 @@
                 <a:solidFill>
                   <a:srgbClr val="262626"/>
                 </a:solidFill>
-                <a:latin typeface="Alibaba PuHuiTi 3.0" pitchFamily="34" charset="0"/>
-                <a:ea typeface="Alibaba PuHuiTi 3.0" pitchFamily="34" charset="-122"/>
-                <a:cs typeface="Alibaba PuHuiTi 3.0" pitchFamily="34" charset="-120"/>
+                <a:latin typeface="Alibaba PuHuiTi 3.0 85 Bold" pitchFamily="34" charset="0"/>
+                <a:ea typeface="Alibaba PuHuiTi 3.0 85 Bold" pitchFamily="34" charset="-122"/>
+                <a:cs typeface="Alibaba PuHuiTi 3.0 85 Bold" pitchFamily="34" charset="-120"/>
               </a:rPr>
               <a:t>像素位置</a:t>
             </a:r>
@@ -10736,9 +10622,9 @@
                 <a:solidFill>
                   <a:srgbClr val="262626"/>
                 </a:solidFill>
-                <a:latin typeface="Alibaba PuHuiTi 3.0" pitchFamily="34" charset="0"/>
-                <a:ea typeface="Alibaba PuHuiTi 3.0" pitchFamily="34" charset="-122"/>
-                <a:cs typeface="Alibaba PuHuiTi 3.0" pitchFamily="34" charset="-120"/>
+                <a:latin typeface="Alibaba PuHuiTi 3.0 115 Black" pitchFamily="34" charset="0"/>
+                <a:ea typeface="Alibaba PuHuiTi 3.0 115 Black" pitchFamily="34" charset="-122"/>
+                <a:cs typeface="Alibaba PuHuiTi 3.0 115 Black" pitchFamily="34" charset="-120"/>
               </a:rPr>
               <a:t>→</a:t>
             </a:r>
@@ -10804,9 +10690,9 @@
                 <a:solidFill>
                   <a:srgbClr val="262626"/>
                 </a:solidFill>
-                <a:latin typeface="Alibaba PuHuiTi 3.0" pitchFamily="34" charset="0"/>
-                <a:ea typeface="Alibaba PuHuiTi 3.0" pitchFamily="34" charset="-122"/>
-                <a:cs typeface="Alibaba PuHuiTi 3.0" pitchFamily="34" charset="-120"/>
+                <a:latin typeface="Alibaba PuHuiTi 3.0 85 Bold" pitchFamily="34" charset="0"/>
+                <a:ea typeface="Alibaba PuHuiTi 3.0 85 Bold" pitchFamily="34" charset="-122"/>
+                <a:cs typeface="Alibaba PuHuiTi 3.0 85 Bold" pitchFamily="34" charset="-120"/>
               </a:rPr>
               <a:t>颜色值</a:t>
             </a:r>
@@ -10845,9 +10731,9 @@
                 <a:solidFill>
                   <a:srgbClr val="262626"/>
                 </a:solidFill>
-                <a:latin typeface="Alibaba PuHuiTi 3.0" pitchFamily="34" charset="0"/>
-                <a:ea typeface="Alibaba PuHuiTi 3.0" pitchFamily="34" charset="-122"/>
-                <a:cs typeface="Alibaba PuHuiTi 3.0" pitchFamily="34" charset="-120"/>
+                <a:latin typeface="Alibaba PuHuiTi 3.0 115 Black" pitchFamily="34" charset="0"/>
+                <a:ea typeface="Alibaba PuHuiTi 3.0 115 Black" pitchFamily="34" charset="-122"/>
+                <a:cs typeface="Alibaba PuHuiTi 3.0 115 Black" pitchFamily="34" charset="-120"/>
               </a:rPr>
               <a:t>→</a:t>
             </a:r>
@@ -10913,9 +10799,9 @@
                 <a:solidFill>
                   <a:srgbClr val="262626"/>
                 </a:solidFill>
-                <a:latin typeface="Alibaba PuHuiTi 3.0" pitchFamily="34" charset="0"/>
-                <a:ea typeface="Alibaba PuHuiTi 3.0" pitchFamily="34" charset="-122"/>
-                <a:cs typeface="Alibaba PuHuiTi 3.0" pitchFamily="34" charset="-120"/>
+                <a:latin typeface="Alibaba PuHuiTi 3.0 85 Bold" pitchFamily="34" charset="0"/>
+                <a:ea typeface="Alibaba PuHuiTi 3.0 85 Bold" pitchFamily="34" charset="-122"/>
+                <a:cs typeface="Alibaba PuHuiTi 3.0 85 Bold" pitchFamily="34" charset="-120"/>
               </a:rPr>
               <a:t>数字表示</a:t>
             </a:r>
@@ -10954,9 +10840,9 @@
                 <a:solidFill>
                   <a:srgbClr val="262626"/>
                 </a:solidFill>
-                <a:latin typeface="Alibaba PuHuiTi 3.0" pitchFamily="34" charset="0"/>
-                <a:ea typeface="Alibaba PuHuiTi 3.0" pitchFamily="34" charset="-122"/>
-                <a:cs typeface="Alibaba PuHuiTi 3.0" pitchFamily="34" charset="-120"/>
+                <a:latin typeface="Alibaba PuHuiTi 3.0 115 Black" pitchFamily="34" charset="0"/>
+                <a:ea typeface="Alibaba PuHuiTi 3.0 115 Black" pitchFamily="34" charset="-122"/>
+                <a:cs typeface="Alibaba PuHuiTi 3.0 115 Black" pitchFamily="34" charset="-120"/>
               </a:rPr>
               <a:t>→</a:t>
             </a:r>
@@ -11022,9 +10908,9 @@
                 <a:solidFill>
                   <a:srgbClr val="262626"/>
                 </a:solidFill>
-                <a:latin typeface="Alibaba PuHuiTi 3.0" pitchFamily="34" charset="0"/>
-                <a:ea typeface="Alibaba PuHuiTi 3.0" pitchFamily="34" charset="-122"/>
-                <a:cs typeface="Alibaba PuHuiTi 3.0" pitchFamily="34" charset="-120"/>
+                <a:latin typeface="Alibaba PuHuiTi 3.0 85 Bold" pitchFamily="34" charset="0"/>
+                <a:ea typeface="Alibaba PuHuiTi 3.0 85 Bold" pitchFamily="34" charset="-122"/>
+                <a:cs typeface="Alibaba PuHuiTi 3.0 85 Bold" pitchFamily="34" charset="-120"/>
               </a:rPr>
               <a:t>bits / bytes</a:t>
             </a:r>
@@ -11090,9 +10976,9 @@
                 <a:solidFill>
                   <a:srgbClr val="262626"/>
                 </a:solidFill>
-                <a:latin typeface="Alibaba PuHuiTi 3.0" pitchFamily="34" charset="0"/>
-                <a:ea typeface="Alibaba PuHuiTi 3.0" pitchFamily="34" charset="-122"/>
-                <a:cs typeface="Alibaba PuHuiTi 3.0" pitchFamily="34" charset="-120"/>
+                <a:latin typeface="Alibaba PuHuiTi 3.0 85 Bold" pitchFamily="34" charset="0"/>
+                <a:ea typeface="Alibaba PuHuiTi 3.0 85 Bold" pitchFamily="34" charset="-122"/>
+                <a:cs typeface="Alibaba PuHuiTi 3.0 85 Bold" pitchFamily="34" charset="-120"/>
               </a:rPr>
               <a:t>Sampling：在哪里取值？取多少位置？</a:t>
             </a:r>
@@ -11107,9 +10993,9 @@
                 <a:solidFill>
                   <a:srgbClr val="262626"/>
                 </a:solidFill>
-                <a:latin typeface="Alibaba PuHuiTi 3.0" pitchFamily="34" charset="0"/>
-                <a:ea typeface="Alibaba PuHuiTi 3.0" pitchFamily="34" charset="-122"/>
-                <a:cs typeface="Alibaba PuHuiTi 3.0" pitchFamily="34" charset="-120"/>
+                <a:latin typeface="Alibaba PuHuiTi 3.0 85 Bold" pitchFamily="34" charset="0"/>
+                <a:ea typeface="Alibaba PuHuiTi 3.0 85 Bold" pitchFamily="34" charset="-122"/>
+                <a:cs typeface="Alibaba PuHuiTi 3.0 85 Bold" pitchFamily="34" charset="-120"/>
               </a:rPr>
               <a:t>Quantization：每个位置允许哪些离散值？</a:t>
             </a:r>
@@ -11124,9 +11010,9 @@
                 <a:solidFill>
                   <a:srgbClr val="262626"/>
                 </a:solidFill>
-                <a:latin typeface="Alibaba PuHuiTi 3.0" pitchFamily="34" charset="0"/>
-                <a:ea typeface="Alibaba PuHuiTi 3.0" pitchFamily="34" charset="-122"/>
-                <a:cs typeface="Alibaba PuHuiTi 3.0" pitchFamily="34" charset="-120"/>
+                <a:latin typeface="Alibaba PuHuiTi 3.0 85 Bold" pitchFamily="34" charset="0"/>
+                <a:ea typeface="Alibaba PuHuiTi 3.0 85 Bold" pitchFamily="34" charset="-122"/>
+                <a:cs typeface="Alibaba PuHuiTi 3.0 85 Bold" pitchFamily="34" charset="-120"/>
               </a:rPr>
               <a:t>Encoding：这些值怎样表示并组织成 bits / bytes？</a:t>
             </a:r>
@@ -11165,9 +11051,9 @@
                 <a:solidFill>
                   <a:srgbClr val="262626"/>
                 </a:solidFill>
-                <a:latin typeface="Alibaba PuHuiTi 3.0" pitchFamily="34" charset="0"/>
-                <a:ea typeface="Alibaba PuHuiTi 3.0" pitchFamily="34" charset="-122"/>
-                <a:cs typeface="Alibaba PuHuiTi 3.0" pitchFamily="34" charset="-120"/>
+                <a:latin typeface="Alibaba PuHuiTi 3.0 115 Black" pitchFamily="34" charset="0"/>
+                <a:ea typeface="Alibaba PuHuiTi 3.0 115 Black" pitchFamily="34" charset="-122"/>
+                <a:cs typeface="Alibaba PuHuiTi 3.0 115 Black" pitchFamily="34" charset="-120"/>
               </a:rPr>
               <a:t>像素值数据量 = W × H × b bits</a:t>
             </a:r>
@@ -11206,9 +11092,9 @@
                 <a:solidFill>
                   <a:srgbClr val="262626"/>
                 </a:solidFill>
-                <a:latin typeface="Alibaba PuHuiTi 3.0" pitchFamily="34" charset="0"/>
-                <a:ea typeface="Alibaba PuHuiTi 3.0" pitchFamily="34" charset="-122"/>
-                <a:cs typeface="Alibaba PuHuiTi 3.0" pitchFamily="34" charset="-120"/>
+                <a:latin typeface="Alibaba PuHuiTi 3.0 115 Black" pitchFamily="34" charset="0"/>
+                <a:ea typeface="Alibaba PuHuiTi 3.0 115 Black" pitchFamily="34" charset="-122"/>
+                <a:cs typeface="Alibaba PuHuiTi 3.0 115 Black" pitchFamily="34" charset="-120"/>
               </a:rPr>
               <a:t>本课 24-bit RGB：W × H × 3 bytes</a:t>
             </a:r>
@@ -11256,8 +11142,8 @@
         </p:nvSpPr>
         <p:spPr>
           <a:xfrm>
-            <a:off x="-36576" y="45720"/>
-            <a:ext cx="12271248" cy="73152"/>
+            <a:off x="0" y="0"/>
+            <a:ext cx="12192000" cy="101600"/>
           </a:xfrm>
           <a:prstGeom prst="rect">
             <a:avLst/>
@@ -11265,11 +11151,8 @@
           <a:solidFill>
             <a:srgbClr val="6251B1"/>
           </a:solidFill>
-          <a:ln w="12700">
-            <a:solidFill>
-              <a:srgbClr val="6251B1"/>
-            </a:solidFill>
-            <a:prstDash val="solid"/>
+          <a:ln>
+            <a:noFill/>
           </a:ln>
         </p:spPr>
       </p:sp>
@@ -11281,8 +11164,8 @@
         </p:nvSpPr>
         <p:spPr>
           <a:xfrm>
-            <a:off x="-36576" y="6739128"/>
-            <a:ext cx="12271248" cy="73152"/>
+            <a:off x="0" y="6756400"/>
+            <a:ext cx="12192000" cy="101600"/>
           </a:xfrm>
           <a:prstGeom prst="rect">
             <a:avLst/>
@@ -11290,11 +11173,8 @@
           <a:solidFill>
             <a:srgbClr val="6251B1"/>
           </a:solidFill>
-          <a:ln w="12700">
-            <a:solidFill>
-              <a:srgbClr val="6251B1"/>
-            </a:solidFill>
-            <a:prstDash val="solid"/>
+          <a:ln>
+            <a:noFill/>
           </a:ln>
         </p:spPr>
       </p:sp>
@@ -11306,8 +11186,8 @@
         </p:nvSpPr>
         <p:spPr>
           <a:xfrm>
-            <a:off x="608076" y="438912"/>
-            <a:ext cx="10972800" cy="566928"/>
+            <a:off x="608076" y="608076"/>
+            <a:ext cx="10972800" cy="704088"/>
           </a:xfrm>
           <a:prstGeom prst="rect">
             <a:avLst/>
@@ -11317,11 +11197,52 @@
         </p:spPr>
         <p:txBody>
           <a:bodyPr wrap="square" lIns="0" tIns="0" rIns="0" bIns="0" rtlCol="0" anchor="ctr">
+            <a:noAutofit/>
+          </a:bodyPr>
+          <a:lstStyle/>
+          <a:p>
+            <a:pPr indent="0" marL="0">
+              <a:buNone/>
+            </a:pPr>
+            <a:r>
+              <a:rPr lang="en-US" sz="3600" b="1" dirty="0">
+                <a:solidFill>
+                  <a:srgbClr val="262626"/>
+                </a:solidFill>
+                <a:latin typeface="Alibaba PuHuiTi 3.0 115 Black" pitchFamily="34" charset="0"/>
+                <a:ea typeface="Alibaba PuHuiTi 3.0 115 Black" pitchFamily="34" charset="-122"/>
+                <a:cs typeface="Alibaba PuHuiTi 3.0 115 Black" pitchFamily="34" charset="-120"/>
+              </a:rPr>
+              <a:t>Q1 如果显示尺寸一样，为什么这些图片看起来不同？</a:t>
+            </a:r>
+            <a:endParaRPr lang="en-US" sz="3000" dirty="0"/>
+          </a:p>
+        </p:txBody>
+      </p:sp>
+      <p:sp>
+        <p:nvSpPr>
+          <p:cNvPr id="6" name="Text 3"/>
+          <p:cNvSpPr/>
+          <p:nvPr/>
+        </p:nvSpPr>
+        <p:spPr>
+          <a:xfrm>
+            <a:off x="868680" y="2331720"/>
+            <a:ext cx="10424160" cy="731520"/>
+          </a:xfrm>
+          <a:prstGeom prst="rect">
+            <a:avLst/>
+          </a:prstGeom>
+          <a:noFill/>
+          <a:ln/>
+        </p:spPr>
+        <p:txBody>
+          <a:bodyPr wrap="square" lIns="635" tIns="635" rIns="635" bIns="635" rtlCol="0" anchor="ctr">
             <a:normAutofit/>
           </a:bodyPr>
           <a:lstStyle/>
           <a:p>
-            <a:pPr indent="0" marL="0">
+            <a:pPr algn="ctr" indent="0" marL="0">
               <a:buNone/>
             </a:pPr>
             <a:r>
@@ -11329,50 +11250,9 @@
                 <a:solidFill>
                   <a:srgbClr val="262626"/>
                 </a:solidFill>
-                <a:latin typeface="Alibaba PuHuiTi 3.0" pitchFamily="34" charset="0"/>
-                <a:ea typeface="Alibaba PuHuiTi 3.0" pitchFamily="34" charset="-122"/>
-                <a:cs typeface="Alibaba PuHuiTi 3.0" pitchFamily="34" charset="-120"/>
-              </a:rPr>
-              <a:t>Q1 如果显示尺寸一样，为什么这些图片看起来不同？</a:t>
-            </a:r>
-            <a:endParaRPr lang="en-US" sz="3000" dirty="0"/>
-          </a:p>
-        </p:txBody>
-      </p:sp>
-      <p:sp>
-        <p:nvSpPr>
-          <p:cNvPr id="6" name="Text 3"/>
-          <p:cNvSpPr/>
-          <p:nvPr/>
-        </p:nvSpPr>
-        <p:spPr>
-          <a:xfrm>
-            <a:off x="868680" y="2331720"/>
-            <a:ext cx="10424160" cy="731520"/>
-          </a:xfrm>
-          <a:prstGeom prst="rect">
-            <a:avLst/>
-          </a:prstGeom>
-          <a:noFill/>
-          <a:ln/>
-        </p:spPr>
-        <p:txBody>
-          <a:bodyPr wrap="square" lIns="635" tIns="635" rIns="635" bIns="635" rtlCol="0" anchor="ctr">
-            <a:normAutofit/>
-          </a:bodyPr>
-          <a:lstStyle/>
-          <a:p>
-            <a:pPr algn="ctr" indent="0" marL="0">
-              <a:buNone/>
-            </a:pPr>
-            <a:r>
-              <a:rPr lang="en-US" sz="3000" b="1" dirty="0">
-                <a:solidFill>
-                  <a:srgbClr val="262626"/>
-                </a:solidFill>
-                <a:latin typeface="Alibaba PuHuiTi 3.0" pitchFamily="34" charset="0"/>
-                <a:ea typeface="Alibaba PuHuiTi 3.0" pitchFamily="34" charset="-122"/>
-                <a:cs typeface="Alibaba PuHuiTi 3.0" pitchFamily="34" charset="-120"/>
+                <a:latin typeface="Alibaba PuHuiTi 3.0 115 Black" pitchFamily="34" charset="0"/>
+                <a:ea typeface="Alibaba PuHuiTi 3.0 115 Black" pitchFamily="34" charset="-122"/>
+                <a:cs typeface="Alibaba PuHuiTi 3.0 115 Black" pitchFamily="34" charset="-120"/>
               </a:rPr>
               <a:t>先预测：哪一张保留最多细节？低像素数时最先丢失什么？</a:t>
             </a:r>
@@ -11411,9 +11291,9 @@
                 <a:solidFill>
                   <a:srgbClr val="666666"/>
                 </a:solidFill>
-                <a:latin typeface="Alibaba PuHuiTi 3.0" pitchFamily="34" charset="0"/>
-                <a:ea typeface="Alibaba PuHuiTi 3.0" pitchFamily="34" charset="-122"/>
-                <a:cs typeface="Alibaba PuHuiTi 3.0" pitchFamily="34" charset="-120"/>
+                <a:latin typeface="Alibaba PuHuiTi 3.0 55 Regular" pitchFamily="34" charset="0"/>
+                <a:ea typeface="Alibaba PuHuiTi 3.0 55 Regular" pitchFamily="34" charset="-122"/>
+                <a:cs typeface="Alibaba PuHuiTi 3.0 55 Regular" pitchFamily="34" charset="-120"/>
               </a:rPr>
               <a:t>不要急着看答案，先说出你的理由。</a:t>
             </a:r>
@@ -11461,8 +11341,8 @@
         </p:nvSpPr>
         <p:spPr>
           <a:xfrm>
-            <a:off x="-36576" y="45720"/>
-            <a:ext cx="12271248" cy="73152"/>
+            <a:off x="0" y="0"/>
+            <a:ext cx="12192000" cy="101600"/>
           </a:xfrm>
           <a:prstGeom prst="rect">
             <a:avLst/>
@@ -11470,11 +11350,8 @@
           <a:solidFill>
             <a:srgbClr val="6251B1"/>
           </a:solidFill>
-          <a:ln w="12700">
-            <a:solidFill>
-              <a:srgbClr val="6251B1"/>
-            </a:solidFill>
-            <a:prstDash val="solid"/>
+          <a:ln>
+            <a:noFill/>
           </a:ln>
         </p:spPr>
       </p:sp>
@@ -11486,8 +11363,8 @@
         </p:nvSpPr>
         <p:spPr>
           <a:xfrm>
-            <a:off x="-36576" y="6739128"/>
-            <a:ext cx="12271248" cy="73152"/>
+            <a:off x="0" y="6756400"/>
+            <a:ext cx="12192000" cy="101600"/>
           </a:xfrm>
           <a:prstGeom prst="rect">
             <a:avLst/>
@@ -11495,11 +11372,8 @@
           <a:solidFill>
             <a:srgbClr val="6251B1"/>
           </a:solidFill>
-          <a:ln w="12700">
-            <a:solidFill>
-              <a:srgbClr val="6251B1"/>
-            </a:solidFill>
-            <a:prstDash val="solid"/>
+          <a:ln>
+            <a:noFill/>
           </a:ln>
         </p:spPr>
       </p:sp>
@@ -11511,8 +11385,8 @@
         </p:nvSpPr>
         <p:spPr>
           <a:xfrm>
-            <a:off x="608076" y="438912"/>
-            <a:ext cx="10972800" cy="566928"/>
+            <a:off x="608076" y="608076"/>
+            <a:ext cx="10972800" cy="704088"/>
           </a:xfrm>
           <a:prstGeom prst="rect">
             <a:avLst/>
@@ -11522,7 +11396,7 @@
         </p:spPr>
         <p:txBody>
           <a:bodyPr wrap="square" lIns="0" tIns="0" rIns="0" bIns="0" rtlCol="0" anchor="ctr">
-            <a:normAutofit/>
+            <a:noAutofit/>
           </a:bodyPr>
           <a:lstStyle/>
           <a:p>
@@ -11530,13 +11404,13 @@
               <a:buNone/>
             </a:pPr>
             <a:r>
-              <a:rPr lang="en-US" sz="3000" b="1" dirty="0">
+              <a:rPr lang="en-US" sz="3600" b="1" dirty="0">
                 <a:solidFill>
                   <a:srgbClr val="262626"/>
                 </a:solidFill>
-                <a:latin typeface="Alibaba PuHuiTi 3.0" pitchFamily="34" charset="0"/>
-                <a:ea typeface="Alibaba PuHuiTi 3.0" pitchFamily="34" charset="-122"/>
-                <a:cs typeface="Alibaba PuHuiTi 3.0" pitchFamily="34" charset="-120"/>
+                <a:latin typeface="Alibaba PuHuiTi 3.0 115 Black" pitchFamily="34" charset="0"/>
+                <a:ea typeface="Alibaba PuHuiTi 3.0 115 Black" pitchFamily="34" charset="-122"/>
+                <a:cs typeface="Alibaba PuHuiTi 3.0 115 Black" pitchFamily="34" charset="-120"/>
               </a:rPr>
               <a:t>Q1 如果显示尺寸一样，为什么这些图片看起来不同？</a:t>
             </a:r>
@@ -11559,7 +11433,7 @@
         </p:blipFill>
         <p:spPr>
           <a:xfrm>
-            <a:off x="822960" y="1325880"/>
+            <a:off x="822960" y="1490472"/>
             <a:ext cx="3154680" cy="3154680"/>
           </a:xfrm>
           <a:prstGeom prst="rect">
@@ -11575,7 +11449,7 @@
         </p:nvSpPr>
         <p:spPr>
           <a:xfrm>
-            <a:off x="822960" y="4553712"/>
+            <a:off x="822960" y="4718304"/>
             <a:ext cx="3154680" cy="320040"/>
           </a:xfrm>
           <a:prstGeom prst="rect">
@@ -11598,9 +11472,9 @@
                 <a:solidFill>
                   <a:srgbClr val="262626"/>
                 </a:solidFill>
-                <a:latin typeface="Alibaba PuHuiTi 3.0" pitchFamily="34" charset="0"/>
-                <a:ea typeface="Alibaba PuHuiTi 3.0" pitchFamily="34" charset="-122"/>
-                <a:cs typeface="Alibaba PuHuiTi 3.0" pitchFamily="34" charset="-120"/>
+                <a:latin typeface="Alibaba PuHuiTi 3.0 55 Regular" pitchFamily="34" charset="0"/>
+                <a:ea typeface="Alibaba PuHuiTi 3.0 55 Regular" pitchFamily="34" charset="-122"/>
+                <a:cs typeface="Alibaba PuHuiTi 3.0 55 Regular" pitchFamily="34" charset="-120"/>
               </a:rPr>
               <a:t>256×256</a:t>
             </a:r>
@@ -11623,7 +11497,7 @@
         </p:blipFill>
         <p:spPr>
           <a:xfrm>
-            <a:off x="4526280" y="1325880"/>
+            <a:off x="4526280" y="1490472"/>
             <a:ext cx="3154680" cy="3154680"/>
           </a:xfrm>
           <a:prstGeom prst="rect">
@@ -11639,7 +11513,7 @@
         </p:nvSpPr>
         <p:spPr>
           <a:xfrm>
-            <a:off x="4526280" y="4553712"/>
+            <a:off x="4526280" y="4718304"/>
             <a:ext cx="3154680" cy="320040"/>
           </a:xfrm>
           <a:prstGeom prst="rect">
@@ -11662,9 +11536,9 @@
                 <a:solidFill>
                   <a:srgbClr val="262626"/>
                 </a:solidFill>
-                <a:latin typeface="Alibaba PuHuiTi 3.0" pitchFamily="34" charset="0"/>
-                <a:ea typeface="Alibaba PuHuiTi 3.0" pitchFamily="34" charset="-122"/>
-                <a:cs typeface="Alibaba PuHuiTi 3.0" pitchFamily="34" charset="-120"/>
+                <a:latin typeface="Alibaba PuHuiTi 3.0 55 Regular" pitchFamily="34" charset="0"/>
+                <a:ea typeface="Alibaba PuHuiTi 3.0 55 Regular" pitchFamily="34" charset="-122"/>
+                <a:cs typeface="Alibaba PuHuiTi 3.0 55 Regular" pitchFamily="34" charset="-120"/>
               </a:rPr>
               <a:t>64×64</a:t>
             </a:r>
@@ -11687,7 +11561,7 @@
         </p:blipFill>
         <p:spPr>
           <a:xfrm>
-            <a:off x="8229600" y="1325880"/>
+            <a:off x="8229600" y="1490472"/>
             <a:ext cx="3154680" cy="3154680"/>
           </a:xfrm>
           <a:prstGeom prst="rect">
@@ -11703,7 +11577,7 @@
         </p:nvSpPr>
         <p:spPr>
           <a:xfrm>
-            <a:off x="8229600" y="4553712"/>
+            <a:off x="8229600" y="4718304"/>
             <a:ext cx="3154680" cy="320040"/>
           </a:xfrm>
           <a:prstGeom prst="rect">
@@ -11726,9 +11600,9 @@
                 <a:solidFill>
                   <a:srgbClr val="262626"/>
                 </a:solidFill>
-                <a:latin typeface="Alibaba PuHuiTi 3.0" pitchFamily="34" charset="0"/>
-                <a:ea typeface="Alibaba PuHuiTi 3.0" pitchFamily="34" charset="-122"/>
-                <a:cs typeface="Alibaba PuHuiTi 3.0" pitchFamily="34" charset="-120"/>
+                <a:latin typeface="Alibaba PuHuiTi 3.0 55 Regular" pitchFamily="34" charset="0"/>
+                <a:ea typeface="Alibaba PuHuiTi 3.0 55 Regular" pitchFamily="34" charset="-122"/>
+                <a:cs typeface="Alibaba PuHuiTi 3.0 55 Regular" pitchFamily="34" charset="-120"/>
               </a:rPr>
               <a:t>32×32</a:t>
             </a:r>
@@ -11744,7 +11618,7 @@
         </p:nvSpPr>
         <p:spPr>
           <a:xfrm>
-            <a:off x="822960" y="5532120"/>
+            <a:off x="822960" y="5696712"/>
             <a:ext cx="10561320" cy="457200"/>
           </a:xfrm>
           <a:prstGeom prst="rect">
@@ -11767,9 +11641,9 @@
                 <a:solidFill>
                   <a:srgbClr val="262626"/>
                 </a:solidFill>
-                <a:latin typeface="Alibaba PuHuiTi 3.0" pitchFamily="34" charset="0"/>
-                <a:ea typeface="Alibaba PuHuiTi 3.0" pitchFamily="34" charset="-122"/>
-                <a:cs typeface="Alibaba PuHuiTi 3.0" pitchFamily="34" charset="-120"/>
+                <a:latin typeface="Alibaba PuHuiTi 3.0 115 Black" pitchFamily="34" charset="0"/>
+                <a:ea typeface="Alibaba PuHuiTi 3.0 115 Black" pitchFamily="34" charset="-122"/>
+                <a:cs typeface="Alibaba PuHuiTi 3.0 115 Black" pitchFamily="34" charset="-120"/>
               </a:rPr>
               <a:t>观察：显示尺寸相同，但图像内部的取样位置数量不同。</a:t>
             </a:r>
@@ -11817,8 +11691,8 @@
         </p:nvSpPr>
         <p:spPr>
           <a:xfrm>
-            <a:off x="-36576" y="45720"/>
-            <a:ext cx="12271248" cy="73152"/>
+            <a:off x="0" y="0"/>
+            <a:ext cx="12192000" cy="101600"/>
           </a:xfrm>
           <a:prstGeom prst="rect">
             <a:avLst/>
@@ -11826,11 +11700,8 @@
           <a:solidFill>
             <a:srgbClr val="6251B1"/>
           </a:solidFill>
-          <a:ln w="12700">
-            <a:solidFill>
-              <a:srgbClr val="6251B1"/>
-            </a:solidFill>
-            <a:prstDash val="solid"/>
+          <a:ln>
+            <a:noFill/>
           </a:ln>
         </p:spPr>
       </p:sp>
@@ -11842,8 +11713,8 @@
         </p:nvSpPr>
         <p:spPr>
           <a:xfrm>
-            <a:off x="-36576" y="6739128"/>
-            <a:ext cx="12271248" cy="73152"/>
+            <a:off x="0" y="6756400"/>
+            <a:ext cx="12192000" cy="101600"/>
           </a:xfrm>
           <a:prstGeom prst="rect">
             <a:avLst/>
@@ -11851,11 +11722,8 @@
           <a:solidFill>
             <a:srgbClr val="6251B1"/>
           </a:solidFill>
-          <a:ln w="12700">
-            <a:solidFill>
-              <a:srgbClr val="6251B1"/>
-            </a:solidFill>
-            <a:prstDash val="solid"/>
+          <a:ln>
+            <a:noFill/>
           </a:ln>
         </p:spPr>
       </p:sp>
@@ -11867,8 +11735,8 @@
         </p:nvSpPr>
         <p:spPr>
           <a:xfrm>
-            <a:off x="608076" y="438912"/>
-            <a:ext cx="10972800" cy="566928"/>
+            <a:off x="608076" y="608076"/>
+            <a:ext cx="10972800" cy="704088"/>
           </a:xfrm>
           <a:prstGeom prst="rect">
             <a:avLst/>
@@ -11878,7 +11746,7 @@
         </p:spPr>
         <p:txBody>
           <a:bodyPr wrap="square" lIns="0" tIns="0" rIns="0" bIns="0" rtlCol="0" anchor="ctr">
-            <a:normAutofit/>
+            <a:noAutofit/>
           </a:bodyPr>
           <a:lstStyle/>
           <a:p>
@@ -11886,13 +11754,13 @@
               <a:buNone/>
             </a:pPr>
             <a:r>
-              <a:rPr lang="en-US" sz="3000" b="1" dirty="0">
+              <a:rPr lang="en-US" sz="3600" b="1" dirty="0">
                 <a:solidFill>
                   <a:srgbClr val="262626"/>
                 </a:solidFill>
-                <a:latin typeface="Alibaba PuHuiTi 3.0" pitchFamily="34" charset="0"/>
-                <a:ea typeface="Alibaba PuHuiTi 3.0" pitchFamily="34" charset="-122"/>
-                <a:cs typeface="Alibaba PuHuiTi 3.0" pitchFamily="34" charset="-120"/>
+                <a:latin typeface="Alibaba PuHuiTi 3.0 115 Black" pitchFamily="34" charset="0"/>
+                <a:ea typeface="Alibaba PuHuiTi 3.0 115 Black" pitchFamily="34" charset="-122"/>
+                <a:cs typeface="Alibaba PuHuiTi 3.0 115 Black" pitchFamily="34" charset="-120"/>
               </a:rPr>
               <a:t>Q1 如果显示尺寸一样，为什么这些图片看起来不同？</a:t>
             </a:r>
@@ -11915,7 +11783,7 @@
         </p:blipFill>
         <p:spPr>
           <a:xfrm>
-            <a:off x="822960" y="1325880"/>
+            <a:off x="822960" y="1490472"/>
             <a:ext cx="3154680" cy="3154680"/>
           </a:xfrm>
           <a:prstGeom prst="rect">
@@ -11931,7 +11799,7 @@
         </p:nvSpPr>
         <p:spPr>
           <a:xfrm>
-            <a:off x="822960" y="4553712"/>
+            <a:off x="822960" y="4718304"/>
             <a:ext cx="3154680" cy="320040"/>
           </a:xfrm>
           <a:prstGeom prst="rect">
@@ -11954,9 +11822,9 @@
                 <a:solidFill>
                   <a:srgbClr val="262626"/>
                 </a:solidFill>
-                <a:latin typeface="Alibaba PuHuiTi 3.0" pitchFamily="34" charset="0"/>
-                <a:ea typeface="Alibaba PuHuiTi 3.0" pitchFamily="34" charset="-122"/>
-                <a:cs typeface="Alibaba PuHuiTi 3.0" pitchFamily="34" charset="-120"/>
+                <a:latin typeface="Alibaba PuHuiTi 3.0 55 Regular" pitchFamily="34" charset="0"/>
+                <a:ea typeface="Alibaba PuHuiTi 3.0 55 Regular" pitchFamily="34" charset="-122"/>
+                <a:cs typeface="Alibaba PuHuiTi 3.0 55 Regular" pitchFamily="34" charset="-120"/>
               </a:rPr>
               <a:t>32×32</a:t>
             </a:r>
@@ -11979,7 +11847,7 @@
         </p:blipFill>
         <p:spPr>
           <a:xfrm>
-            <a:off x="4526280" y="1325880"/>
+            <a:off x="4526280" y="1490472"/>
             <a:ext cx="3154680" cy="3154680"/>
           </a:xfrm>
           <a:prstGeom prst="rect">
@@ -11995,7 +11863,7 @@
         </p:nvSpPr>
         <p:spPr>
           <a:xfrm>
-            <a:off x="4526280" y="4553712"/>
+            <a:off x="4526280" y="4718304"/>
             <a:ext cx="3154680" cy="320040"/>
           </a:xfrm>
           <a:prstGeom prst="rect">
@@ -12018,9 +11886,9 @@
                 <a:solidFill>
                   <a:srgbClr val="262626"/>
                 </a:solidFill>
-                <a:latin typeface="Alibaba PuHuiTi 3.0" pitchFamily="34" charset="0"/>
-                <a:ea typeface="Alibaba PuHuiTi 3.0" pitchFamily="34" charset="-122"/>
-                <a:cs typeface="Alibaba PuHuiTi 3.0" pitchFamily="34" charset="-120"/>
+                <a:latin typeface="Alibaba PuHuiTi 3.0 55 Regular" pitchFamily="34" charset="0"/>
+                <a:ea typeface="Alibaba PuHuiTi 3.0 55 Regular" pitchFamily="34" charset="-122"/>
+                <a:cs typeface="Alibaba PuHuiTi 3.0 55 Regular" pitchFamily="34" charset="-120"/>
               </a:rPr>
               <a:t>16×16</a:t>
             </a:r>
@@ -12043,7 +11911,7 @@
         </p:blipFill>
         <p:spPr>
           <a:xfrm>
-            <a:off x="8229600" y="1325880"/>
+            <a:off x="8229600" y="1490472"/>
             <a:ext cx="3154680" cy="3154680"/>
           </a:xfrm>
           <a:prstGeom prst="rect">
@@ -12059,7 +11927,7 @@
         </p:nvSpPr>
         <p:spPr>
           <a:xfrm>
-            <a:off x="8229600" y="4553712"/>
+            <a:off x="8229600" y="4718304"/>
             <a:ext cx="3154680" cy="320040"/>
           </a:xfrm>
           <a:prstGeom prst="rect">
@@ -12082,9 +11950,9 @@
                 <a:solidFill>
                   <a:srgbClr val="262626"/>
                 </a:solidFill>
-                <a:latin typeface="Alibaba PuHuiTi 3.0" pitchFamily="34" charset="0"/>
-                <a:ea typeface="Alibaba PuHuiTi 3.0" pitchFamily="34" charset="-122"/>
-                <a:cs typeface="Alibaba PuHuiTi 3.0" pitchFamily="34" charset="-120"/>
+                <a:latin typeface="Alibaba PuHuiTi 3.0 55 Regular" pitchFamily="34" charset="0"/>
+                <a:ea typeface="Alibaba PuHuiTi 3.0 55 Regular" pitchFamily="34" charset="-122"/>
+                <a:cs typeface="Alibaba PuHuiTi 3.0 55 Regular" pitchFamily="34" charset="-120"/>
               </a:rPr>
               <a:t>8×8</a:t>
             </a:r>
@@ -12100,7 +11968,7 @@
         </p:nvSpPr>
         <p:spPr>
           <a:xfrm>
-            <a:off x="822960" y="5532120"/>
+            <a:off x="822960" y="5696712"/>
             <a:ext cx="10561320" cy="457200"/>
           </a:xfrm>
           <a:prstGeom prst="rect">
@@ -12123,9 +11991,9 @@
                 <a:solidFill>
                   <a:srgbClr val="262626"/>
                 </a:solidFill>
-                <a:latin typeface="Alibaba PuHuiTi 3.0" pitchFamily="34" charset="0"/>
-                <a:ea typeface="Alibaba PuHuiTi 3.0" pitchFamily="34" charset="-122"/>
-                <a:cs typeface="Alibaba PuHuiTi 3.0" pitchFamily="34" charset="-120"/>
+                <a:latin typeface="Alibaba PuHuiTi 3.0 115 Black" pitchFamily="34" charset="0"/>
+                <a:ea typeface="Alibaba PuHuiTi 3.0 115 Black" pitchFamily="34" charset="-122"/>
+                <a:cs typeface="Alibaba PuHuiTi 3.0 115 Black" pitchFamily="34" charset="-120"/>
               </a:rPr>
               <a:t>先描述证据：哪些结构变粗糙？哪些结构几乎认不出来？</a:t>
             </a:r>
@@ -12173,8 +12041,8 @@
         </p:nvSpPr>
         <p:spPr>
           <a:xfrm>
-            <a:off x="-36576" y="45720"/>
-            <a:ext cx="12271248" cy="73152"/>
+            <a:off x="0" y="0"/>
+            <a:ext cx="12192000" cy="101600"/>
           </a:xfrm>
           <a:prstGeom prst="rect">
             <a:avLst/>
@@ -12182,11 +12050,8 @@
           <a:solidFill>
             <a:srgbClr val="6251B1"/>
           </a:solidFill>
-          <a:ln w="12700">
-            <a:solidFill>
-              <a:srgbClr val="6251B1"/>
-            </a:solidFill>
-            <a:prstDash val="solid"/>
+          <a:ln>
+            <a:noFill/>
           </a:ln>
         </p:spPr>
       </p:sp>
@@ -12198,8 +12063,8 @@
         </p:nvSpPr>
         <p:spPr>
           <a:xfrm>
-            <a:off x="-36576" y="6739128"/>
-            <a:ext cx="12271248" cy="73152"/>
+            <a:off x="0" y="6756400"/>
+            <a:ext cx="12192000" cy="101600"/>
           </a:xfrm>
           <a:prstGeom prst="rect">
             <a:avLst/>
@@ -12207,11 +12072,8 @@
           <a:solidFill>
             <a:srgbClr val="6251B1"/>
           </a:solidFill>
-          <a:ln w="12700">
-            <a:solidFill>
-              <a:srgbClr val="6251B1"/>
-            </a:solidFill>
-            <a:prstDash val="solid"/>
+          <a:ln>
+            <a:noFill/>
           </a:ln>
         </p:spPr>
       </p:sp>
@@ -12223,8 +12085,8 @@
         </p:nvSpPr>
         <p:spPr>
           <a:xfrm>
-            <a:off x="608076" y="438912"/>
-            <a:ext cx="10972800" cy="566928"/>
+            <a:off x="608076" y="608076"/>
+            <a:ext cx="10972800" cy="704088"/>
           </a:xfrm>
           <a:prstGeom prst="rect">
             <a:avLst/>
@@ -12234,7 +12096,7 @@
         </p:spPr>
         <p:txBody>
           <a:bodyPr wrap="square" lIns="0" tIns="0" rIns="0" bIns="0" rtlCol="0" anchor="ctr">
-            <a:normAutofit/>
+            <a:noAutofit/>
           </a:bodyPr>
           <a:lstStyle/>
           <a:p>
@@ -12242,13 +12104,13 @@
               <a:buNone/>
             </a:pPr>
             <a:r>
-              <a:rPr lang="en-US" sz="3000" b="1" dirty="0">
+              <a:rPr lang="en-US" sz="3600" b="1" dirty="0">
                 <a:solidFill>
                   <a:srgbClr val="262626"/>
                 </a:solidFill>
-                <a:latin typeface="Alibaba PuHuiTi 3.0" pitchFamily="34" charset="0"/>
-                <a:ea typeface="Alibaba PuHuiTi 3.0" pitchFamily="34" charset="-122"/>
-                <a:cs typeface="Alibaba PuHuiTi 3.0" pitchFamily="34" charset="-120"/>
+                <a:latin typeface="Alibaba PuHuiTi 3.0 115 Black" pitchFamily="34" charset="0"/>
+                <a:ea typeface="Alibaba PuHuiTi 3.0 115 Black" pitchFamily="34" charset="-122"/>
+                <a:cs typeface="Alibaba PuHuiTi 3.0 115 Black" pitchFamily="34" charset="-120"/>
               </a:rPr>
               <a:t>Q1 如果显示尺寸一样，为什么这些图片看起来不同？</a:t>
             </a:r>
@@ -12271,7 +12133,7 @@
         </p:blipFill>
         <p:spPr>
           <a:xfrm>
-            <a:off x="822960" y="1325880"/>
+            <a:off x="822960" y="1490472"/>
             <a:ext cx="2743200" cy="2743200"/>
           </a:xfrm>
           <a:prstGeom prst="rect">
@@ -12287,7 +12149,7 @@
         </p:nvSpPr>
         <p:spPr>
           <a:xfrm>
-            <a:off x="822960" y="4142232"/>
+            <a:off x="822960" y="4306824"/>
             <a:ext cx="2743200" cy="320040"/>
           </a:xfrm>
           <a:prstGeom prst="rect">
@@ -12310,9 +12172,9 @@
                 <a:solidFill>
                   <a:srgbClr val="262626"/>
                 </a:solidFill>
-                <a:latin typeface="Alibaba PuHuiTi 3.0" pitchFamily="34" charset="0"/>
-                <a:ea typeface="Alibaba PuHuiTi 3.0" pitchFamily="34" charset="-122"/>
-                <a:cs typeface="Alibaba PuHuiTi 3.0" pitchFamily="34" charset="-120"/>
+                <a:latin typeface="Alibaba PuHuiTi 3.0 55 Regular" pitchFamily="34" charset="0"/>
+                <a:ea typeface="Alibaba PuHuiTi 3.0 55 Regular" pitchFamily="34" charset="-122"/>
+                <a:cs typeface="Alibaba PuHuiTi 3.0 55 Regular" pitchFamily="34" charset="-120"/>
               </a:rPr>
               <a:t>32×32</a:t>
             </a:r>
@@ -12335,7 +12197,7 @@
         </p:blipFill>
         <p:spPr>
           <a:xfrm>
-            <a:off x="3886200" y="1325880"/>
+            <a:off x="3886200" y="1490472"/>
             <a:ext cx="2743200" cy="2743200"/>
           </a:xfrm>
           <a:prstGeom prst="rect">
@@ -12351,7 +12213,7 @@
         </p:nvSpPr>
         <p:spPr>
           <a:xfrm>
-            <a:off x="3886200" y="4142232"/>
+            <a:off x="3886200" y="4306824"/>
             <a:ext cx="2743200" cy="320040"/>
           </a:xfrm>
           <a:prstGeom prst="rect">
@@ -12374,9 +12236,9 @@
                 <a:solidFill>
                   <a:srgbClr val="262626"/>
                 </a:solidFill>
-                <a:latin typeface="Alibaba PuHuiTi 3.0" pitchFamily="34" charset="0"/>
-                <a:ea typeface="Alibaba PuHuiTi 3.0" pitchFamily="34" charset="-122"/>
-                <a:cs typeface="Alibaba PuHuiTi 3.0" pitchFamily="34" charset="-120"/>
+                <a:latin typeface="Alibaba PuHuiTi 3.0 55 Regular" pitchFamily="34" charset="0"/>
+                <a:ea typeface="Alibaba PuHuiTi 3.0 55 Regular" pitchFamily="34" charset="-122"/>
+                <a:cs typeface="Alibaba PuHuiTi 3.0 55 Regular" pitchFamily="34" charset="-120"/>
               </a:rPr>
               <a:t>16×16</a:t>
             </a:r>
@@ -12399,7 +12261,7 @@
         </p:blipFill>
         <p:spPr>
           <a:xfrm>
-            <a:off x="6949440" y="1325880"/>
+            <a:off x="6949440" y="1490472"/>
             <a:ext cx="2743200" cy="2743200"/>
           </a:xfrm>
           <a:prstGeom prst="rect">
@@ -12415,7 +12277,7 @@
         </p:nvSpPr>
         <p:spPr>
           <a:xfrm>
-            <a:off x="6949440" y="4142232"/>
+            <a:off x="6949440" y="4306824"/>
             <a:ext cx="2743200" cy="320040"/>
           </a:xfrm>
           <a:prstGeom prst="rect">
@@ -12438,9 +12300,9 @@
                 <a:solidFill>
                   <a:srgbClr val="262626"/>
                 </a:solidFill>
-                <a:latin typeface="Alibaba PuHuiTi 3.0" pitchFamily="34" charset="0"/>
-                <a:ea typeface="Alibaba PuHuiTi 3.0" pitchFamily="34" charset="-122"/>
-                <a:cs typeface="Alibaba PuHuiTi 3.0" pitchFamily="34" charset="-120"/>
+                <a:latin typeface="Alibaba PuHuiTi 3.0 55 Regular" pitchFamily="34" charset="0"/>
+                <a:ea typeface="Alibaba PuHuiTi 3.0 55 Regular" pitchFamily="34" charset="-122"/>
+                <a:cs typeface="Alibaba PuHuiTi 3.0 55 Regular" pitchFamily="34" charset="-120"/>
               </a:rPr>
               <a:t>8×8</a:t>
             </a:r>
@@ -12456,7 +12318,7 @@
         </p:nvSpPr>
         <p:spPr>
           <a:xfrm>
-            <a:off x="868680" y="4983480"/>
+            <a:off x="868680" y="5148072"/>
             <a:ext cx="10424160" cy="868680"/>
           </a:xfrm>
           <a:prstGeom prst="roundRect">
@@ -12483,7 +12345,7 @@
         </p:nvSpPr>
         <p:spPr>
           <a:xfrm>
-            <a:off x="1033272" y="5093208"/>
+            <a:off x="1033272" y="5257800"/>
             <a:ext cx="10094976" cy="649224"/>
           </a:xfrm>
           <a:prstGeom prst="rect">
@@ -12506,9 +12368,9 @@
                 <a:solidFill>
                   <a:srgbClr val="262626"/>
                 </a:solidFill>
-                <a:latin typeface="Alibaba PuHuiTi 3.0" pitchFamily="34" charset="0"/>
-                <a:ea typeface="Alibaba PuHuiTi 3.0" pitchFamily="34" charset="-122"/>
-                <a:cs typeface="Alibaba PuHuiTi 3.0" pitchFamily="34" charset="-120"/>
+                <a:latin typeface="Alibaba PuHuiTi 3.0 115 Black" pitchFamily="34" charset="0"/>
+                <a:ea typeface="Alibaba PuHuiTi 3.0 115 Black" pitchFamily="34" charset="-122"/>
+                <a:cs typeface="Alibaba PuHuiTi 3.0 115 Black" pitchFamily="34" charset="-120"/>
               </a:rPr>
               <a:t>Sampling：在哪里取样？取多少个位置？</a:t>
             </a:r>
@@ -12523,9 +12385,9 @@
                 <a:solidFill>
                   <a:srgbClr val="262626"/>
                 </a:solidFill>
-                <a:latin typeface="Alibaba PuHuiTi 3.0" pitchFamily="34" charset="0"/>
-                <a:ea typeface="Alibaba PuHuiTi 3.0" pitchFamily="34" charset="-122"/>
-                <a:cs typeface="Alibaba PuHuiTi 3.0" pitchFamily="34" charset="-120"/>
+                <a:latin typeface="Alibaba PuHuiTi 3.0 115 Black" pitchFamily="34" charset="0"/>
+                <a:ea typeface="Alibaba PuHuiTi 3.0 115 Black" pitchFamily="34" charset="-122"/>
+                <a:cs typeface="Alibaba PuHuiTi 3.0 115 Black" pitchFamily="34" charset="-120"/>
               </a:rPr>
               <a:t>Resolution：本课中指宽 × 高的像素尺寸。</a:t>
             </a:r>
@@ -12573,8 +12435,8 @@
         </p:nvSpPr>
         <p:spPr>
           <a:xfrm>
-            <a:off x="-36576" y="45720"/>
-            <a:ext cx="12271248" cy="73152"/>
+            <a:off x="0" y="0"/>
+            <a:ext cx="12192000" cy="101600"/>
           </a:xfrm>
           <a:prstGeom prst="rect">
             <a:avLst/>
@@ -12582,11 +12444,8 @@
           <a:solidFill>
             <a:srgbClr val="6251B1"/>
           </a:solidFill>
-          <a:ln w="12700">
-            <a:solidFill>
-              <a:srgbClr val="6251B1"/>
-            </a:solidFill>
-            <a:prstDash val="solid"/>
+          <a:ln>
+            <a:noFill/>
           </a:ln>
         </p:spPr>
       </p:sp>
@@ -12598,8 +12457,8 @@
         </p:nvSpPr>
         <p:spPr>
           <a:xfrm>
-            <a:off x="-36576" y="6739128"/>
-            <a:ext cx="12271248" cy="73152"/>
+            <a:off x="0" y="6756400"/>
+            <a:ext cx="12192000" cy="101600"/>
           </a:xfrm>
           <a:prstGeom prst="rect">
             <a:avLst/>
@@ -12607,11 +12466,8 @@
           <a:solidFill>
             <a:srgbClr val="6251B1"/>
           </a:solidFill>
-          <a:ln w="12700">
-            <a:solidFill>
-              <a:srgbClr val="6251B1"/>
-            </a:solidFill>
-            <a:prstDash val="solid"/>
+          <a:ln>
+            <a:noFill/>
           </a:ln>
         </p:spPr>
       </p:sp>
@@ -12623,8 +12479,8 @@
         </p:nvSpPr>
         <p:spPr>
           <a:xfrm>
-            <a:off x="608076" y="438912"/>
-            <a:ext cx="10972800" cy="566928"/>
+            <a:off x="608076" y="608076"/>
+            <a:ext cx="10972800" cy="704088"/>
           </a:xfrm>
           <a:prstGeom prst="rect">
             <a:avLst/>
@@ -12634,11 +12490,52 @@
         </p:spPr>
         <p:txBody>
           <a:bodyPr wrap="square" lIns="0" tIns="0" rIns="0" bIns="0" rtlCol="0" anchor="ctr">
+            <a:noAutofit/>
+          </a:bodyPr>
+          <a:lstStyle/>
+          <a:p>
+            <a:pPr indent="0" marL="0">
+              <a:buNone/>
+            </a:pPr>
+            <a:r>
+              <a:rPr lang="en-US" sz="3600" b="1" dirty="0">
+                <a:solidFill>
+                  <a:srgbClr val="262626"/>
+                </a:solidFill>
+                <a:latin typeface="Alibaba PuHuiTi 3.0 115 Black" pitchFamily="34" charset="0"/>
+                <a:ea typeface="Alibaba PuHuiTi 3.0 115 Black" pitchFamily="34" charset="-122"/>
+                <a:cs typeface="Alibaba PuHuiTi 3.0 115 Black" pitchFamily="34" charset="-120"/>
+              </a:rPr>
+              <a:t>Q2 分辨率越高，图像一定越清晰吗？</a:t>
+            </a:r>
+            <a:endParaRPr lang="en-US" sz="3000" dirty="0"/>
+          </a:p>
+        </p:txBody>
+      </p:sp>
+      <p:sp>
+        <p:nvSpPr>
+          <p:cNvPr id="6" name="Text 3"/>
+          <p:cNvSpPr/>
+          <p:nvPr/>
+        </p:nvSpPr>
+        <p:spPr>
+          <a:xfrm>
+            <a:off x="868680" y="2331720"/>
+            <a:ext cx="10424160" cy="731520"/>
+          </a:xfrm>
+          <a:prstGeom prst="rect">
+            <a:avLst/>
+          </a:prstGeom>
+          <a:noFill/>
+          <a:ln/>
+        </p:spPr>
+        <p:txBody>
+          <a:bodyPr wrap="square" lIns="635" tIns="635" rIns="635" bIns="635" rtlCol="0" anchor="ctr">
             <a:normAutofit/>
           </a:bodyPr>
           <a:lstStyle/>
           <a:p>
-            <a:pPr indent="0" marL="0">
+            <a:pPr algn="ctr" indent="0" marL="0">
               <a:buNone/>
             </a:pPr>
             <a:r>
@@ -12646,50 +12543,9 @@
                 <a:solidFill>
                   <a:srgbClr val="262626"/>
                 </a:solidFill>
-                <a:latin typeface="Alibaba PuHuiTi 3.0" pitchFamily="34" charset="0"/>
-                <a:ea typeface="Alibaba PuHuiTi 3.0" pitchFamily="34" charset="-122"/>
-                <a:cs typeface="Alibaba PuHuiTi 3.0" pitchFamily="34" charset="-120"/>
-              </a:rPr>
-              <a:t>Q2 分辨率越高，图像一定越清晰吗？</a:t>
-            </a:r>
-            <a:endParaRPr lang="en-US" sz="3000" dirty="0"/>
-          </a:p>
-        </p:txBody>
-      </p:sp>
-      <p:sp>
-        <p:nvSpPr>
-          <p:cNvPr id="6" name="Text 3"/>
-          <p:cNvSpPr/>
-          <p:nvPr/>
-        </p:nvSpPr>
-        <p:spPr>
-          <a:xfrm>
-            <a:off x="868680" y="2331720"/>
-            <a:ext cx="10424160" cy="731520"/>
-          </a:xfrm>
-          <a:prstGeom prst="rect">
-            <a:avLst/>
-          </a:prstGeom>
-          <a:noFill/>
-          <a:ln/>
-        </p:spPr>
-        <p:txBody>
-          <a:bodyPr wrap="square" lIns="635" tIns="635" rIns="635" bIns="635" rtlCol="0" anchor="ctr">
-            <a:normAutofit/>
-          </a:bodyPr>
-          <a:lstStyle/>
-          <a:p>
-            <a:pPr algn="ctr" indent="0" marL="0">
-              <a:buNone/>
-            </a:pPr>
-            <a:r>
-              <a:rPr lang="en-US" sz="3000" b="1" dirty="0">
-                <a:solidFill>
-                  <a:srgbClr val="262626"/>
-                </a:solidFill>
-                <a:latin typeface="Alibaba PuHuiTi 3.0" pitchFamily="34" charset="0"/>
-                <a:ea typeface="Alibaba PuHuiTi 3.0" pitchFamily="34" charset="-122"/>
-                <a:cs typeface="Alibaba PuHuiTi 3.0" pitchFamily="34" charset="-120"/>
+                <a:latin typeface="Alibaba PuHuiTi 3.0 115 Black" pitchFamily="34" charset="0"/>
+                <a:ea typeface="Alibaba PuHuiTi 3.0 115 Black" pitchFamily="34" charset="-122"/>
+                <a:cs typeface="Alibaba PuHuiTi 3.0 115 Black" pitchFamily="34" charset="-120"/>
               </a:rPr>
               <a:t>先判断：1600×1200 的图片一定比 800×600 更清晰吗？</a:t>
             </a:r>
@@ -12728,9 +12584,9 @@
                 <a:solidFill>
                   <a:srgbClr val="262626"/>
                 </a:solidFill>
-                <a:latin typeface="Alibaba PuHuiTi 3.0" pitchFamily="34" charset="0"/>
-                <a:ea typeface="Alibaba PuHuiTi 3.0" pitchFamily="34" charset="-122"/>
-                <a:cs typeface="Alibaba PuHuiTi 3.0" pitchFamily="34" charset="-120"/>
+                <a:latin typeface="Alibaba PuHuiTi 3.0 55 Regular" pitchFamily="34" charset="0"/>
+                <a:ea typeface="Alibaba PuHuiTi 3.0 55 Regular" pitchFamily="34" charset="-122"/>
+                <a:cs typeface="Alibaba PuHuiTi 3.0 55 Regular" pitchFamily="34" charset="-120"/>
               </a:rPr>
               <a:t>A. 一定　　B. 不一定　　C. 需要看条件</a:t>
             </a:r>
@@ -12778,8 +12634,8 @@
         </p:nvSpPr>
         <p:spPr>
           <a:xfrm>
-            <a:off x="-36576" y="45720"/>
-            <a:ext cx="12271248" cy="73152"/>
+            <a:off x="0" y="0"/>
+            <a:ext cx="12192000" cy="101600"/>
           </a:xfrm>
           <a:prstGeom prst="rect">
             <a:avLst/>
@@ -12787,11 +12643,8 @@
           <a:solidFill>
             <a:srgbClr val="6251B1"/>
           </a:solidFill>
-          <a:ln w="12700">
-            <a:solidFill>
-              <a:srgbClr val="6251B1"/>
-            </a:solidFill>
-            <a:prstDash val="solid"/>
+          <a:ln>
+            <a:noFill/>
           </a:ln>
         </p:spPr>
       </p:sp>
@@ -12803,8 +12656,8 @@
         </p:nvSpPr>
         <p:spPr>
           <a:xfrm>
-            <a:off x="-36576" y="6739128"/>
-            <a:ext cx="12271248" cy="73152"/>
+            <a:off x="0" y="6756400"/>
+            <a:ext cx="12192000" cy="101600"/>
           </a:xfrm>
           <a:prstGeom prst="rect">
             <a:avLst/>
@@ -12812,11 +12665,8 @@
           <a:solidFill>
             <a:srgbClr val="6251B1"/>
           </a:solidFill>
-          <a:ln w="12700">
-            <a:solidFill>
-              <a:srgbClr val="6251B1"/>
-            </a:solidFill>
-            <a:prstDash val="solid"/>
+          <a:ln>
+            <a:noFill/>
           </a:ln>
         </p:spPr>
       </p:sp>
@@ -12828,8 +12678,8 @@
         </p:nvSpPr>
         <p:spPr>
           <a:xfrm>
-            <a:off x="608076" y="438912"/>
-            <a:ext cx="10972800" cy="566928"/>
+            <a:off x="608076" y="608076"/>
+            <a:ext cx="10972800" cy="704088"/>
           </a:xfrm>
           <a:prstGeom prst="rect">
             <a:avLst/>
@@ -12839,7 +12689,7 @@
         </p:spPr>
         <p:txBody>
           <a:bodyPr wrap="square" lIns="0" tIns="0" rIns="0" bIns="0" rtlCol="0" anchor="ctr">
-            <a:normAutofit/>
+            <a:noAutofit/>
           </a:bodyPr>
           <a:lstStyle/>
           <a:p>
@@ -12847,13 +12697,13 @@
               <a:buNone/>
             </a:pPr>
             <a:r>
-              <a:rPr lang="en-US" sz="3000" b="1" dirty="0">
+              <a:rPr lang="en-US" sz="3600" b="1" dirty="0">
                 <a:solidFill>
                   <a:srgbClr val="262626"/>
                 </a:solidFill>
-                <a:latin typeface="Alibaba PuHuiTi 3.0" pitchFamily="34" charset="0"/>
-                <a:ea typeface="Alibaba PuHuiTi 3.0" pitchFamily="34" charset="-122"/>
-                <a:cs typeface="Alibaba PuHuiTi 3.0" pitchFamily="34" charset="-120"/>
+                <a:latin typeface="Alibaba PuHuiTi 3.0 115 Black" pitchFamily="34" charset="0"/>
+                <a:ea typeface="Alibaba PuHuiTi 3.0 115 Black" pitchFamily="34" charset="-122"/>
+                <a:cs typeface="Alibaba PuHuiTi 3.0 115 Black" pitchFamily="34" charset="-120"/>
               </a:rPr>
               <a:t>Q2 分辨率越高，图像一定越清晰吗？</a:t>
             </a:r>
@@ -12876,7 +12726,7 @@
         </p:blipFill>
         <p:spPr>
           <a:xfrm>
-            <a:off x="777240" y="1417320"/>
+            <a:off x="777240" y="1490472"/>
             <a:ext cx="5074920" cy="3794760"/>
           </a:xfrm>
           <a:prstGeom prst="rect">
@@ -12892,7 +12742,7 @@
         </p:nvSpPr>
         <p:spPr>
           <a:xfrm>
-            <a:off x="777240" y="5285232"/>
+            <a:off x="777240" y="5358384"/>
             <a:ext cx="5074920" cy="320040"/>
           </a:xfrm>
           <a:prstGeom prst="rect">
@@ -12915,9 +12765,9 @@
                 <a:solidFill>
                   <a:srgbClr val="262626"/>
                 </a:solidFill>
-                <a:latin typeface="Alibaba PuHuiTi 3.0" pitchFamily="34" charset="0"/>
-                <a:ea typeface="Alibaba PuHuiTi 3.0" pitchFamily="34" charset="-122"/>
-                <a:cs typeface="Alibaba PuHuiTi 3.0" pitchFamily="34" charset="-120"/>
+                <a:latin typeface="Alibaba PuHuiTi 3.0 55 Regular" pitchFamily="34" charset="0"/>
+                <a:ea typeface="Alibaba PuHuiTi 3.0 55 Regular" pitchFamily="34" charset="-122"/>
+                <a:cs typeface="Alibaba PuHuiTi 3.0 55 Regular" pitchFamily="34" charset="-120"/>
               </a:rPr>
               <a:t>1600×1200 · Gaussian blur simulation</a:t>
             </a:r>
@@ -12940,7 +12790,7 @@
         </p:blipFill>
         <p:spPr>
           <a:xfrm>
-            <a:off x="6355080" y="1417320"/>
+            <a:off x="6355080" y="1490472"/>
             <a:ext cx="5074920" cy="3794760"/>
           </a:xfrm>
           <a:prstGeom prst="rect">
@@ -12956,7 +12806,7 @@
         </p:nvSpPr>
         <p:spPr>
           <a:xfrm>
-            <a:off x="6355080" y="5285232"/>
+            <a:off x="6355080" y="5358384"/>
             <a:ext cx="5074920" cy="320040"/>
           </a:xfrm>
           <a:prstGeom prst="rect">
@@ -12979,9 +12829,9 @@
                 <a:solidFill>
                   <a:srgbClr val="262626"/>
                 </a:solidFill>
-                <a:latin typeface="Alibaba PuHuiTi 3.0" pitchFamily="34" charset="0"/>
-                <a:ea typeface="Alibaba PuHuiTi 3.0" pitchFamily="34" charset="-122"/>
-                <a:cs typeface="Alibaba PuHuiTi 3.0" pitchFamily="34" charset="-120"/>
+                <a:latin typeface="Alibaba PuHuiTi 3.0 55 Regular" pitchFamily="34" charset="0"/>
+                <a:ea typeface="Alibaba PuHuiTi 3.0 55 Regular" pitchFamily="34" charset="-122"/>
+                <a:cs typeface="Alibaba PuHuiTi 3.0 55 Regular" pitchFamily="34" charset="-120"/>
               </a:rPr>
               <a:t>800×600 · same scene, sharp</a:t>
             </a:r>
@@ -12997,7 +12847,7 @@
         </p:nvSpPr>
         <p:spPr>
           <a:xfrm>
-            <a:off x="868680" y="5687568"/>
+            <a:off x="868680" y="5760720"/>
             <a:ext cx="10424160" cy="365760"/>
           </a:xfrm>
           <a:prstGeom prst="rect">
@@ -13020,9 +12870,9 @@
                 <a:solidFill>
                   <a:srgbClr val="262626"/>
                 </a:solidFill>
-                <a:latin typeface="Alibaba PuHuiTi 3.0" pitchFamily="34" charset="0"/>
-                <a:ea typeface="Alibaba PuHuiTi 3.0" pitchFamily="34" charset="-122"/>
-                <a:cs typeface="Alibaba PuHuiTi 3.0" pitchFamily="34" charset="-120"/>
+                <a:latin typeface="Alibaba PuHuiTi 3.0 115 Black" pitchFamily="34" charset="0"/>
+                <a:ea typeface="Alibaba PuHuiTi 3.0 115 Black" pitchFamily="34" charset="-122"/>
+                <a:cs typeface="Alibaba PuHuiTi 3.0 115 Black" pitchFamily="34" charset="-120"/>
               </a:rPr>
               <a:t>先观察：哪张更容易看清边缘和细节？</a:t>
             </a:r>
@@ -13070,8 +12920,8 @@
         </p:nvSpPr>
         <p:spPr>
           <a:xfrm>
-            <a:off x="-36576" y="45720"/>
-            <a:ext cx="12271248" cy="73152"/>
+            <a:off x="0" y="0"/>
+            <a:ext cx="12192000" cy="101600"/>
           </a:xfrm>
           <a:prstGeom prst="rect">
             <a:avLst/>
@@ -13079,11 +12929,8 @@
           <a:solidFill>
             <a:srgbClr val="6251B1"/>
           </a:solidFill>
-          <a:ln w="12700">
-            <a:solidFill>
-              <a:srgbClr val="6251B1"/>
-            </a:solidFill>
-            <a:prstDash val="solid"/>
+          <a:ln>
+            <a:noFill/>
           </a:ln>
         </p:spPr>
       </p:sp>
@@ -13095,8 +12942,8 @@
         </p:nvSpPr>
         <p:spPr>
           <a:xfrm>
-            <a:off x="-36576" y="6739128"/>
-            <a:ext cx="12271248" cy="73152"/>
+            <a:off x="0" y="6756400"/>
+            <a:ext cx="12192000" cy="101600"/>
           </a:xfrm>
           <a:prstGeom prst="rect">
             <a:avLst/>
@@ -13104,11 +12951,8 @@
           <a:solidFill>
             <a:srgbClr val="6251B1"/>
           </a:solidFill>
-          <a:ln w="12700">
-            <a:solidFill>
-              <a:srgbClr val="6251B1"/>
-            </a:solidFill>
-            <a:prstDash val="solid"/>
+          <a:ln>
+            <a:noFill/>
           </a:ln>
         </p:spPr>
       </p:sp>
@@ -13120,8 +12964,8 @@
         </p:nvSpPr>
         <p:spPr>
           <a:xfrm>
-            <a:off x="608076" y="438912"/>
-            <a:ext cx="10972800" cy="566928"/>
+            <a:off x="608076" y="608076"/>
+            <a:ext cx="10972800" cy="704088"/>
           </a:xfrm>
           <a:prstGeom prst="rect">
             <a:avLst/>
@@ -13131,7 +12975,7 @@
         </p:spPr>
         <p:txBody>
           <a:bodyPr wrap="square" lIns="0" tIns="0" rIns="0" bIns="0" rtlCol="0" anchor="ctr">
-            <a:normAutofit/>
+            <a:noAutofit/>
           </a:bodyPr>
           <a:lstStyle/>
           <a:p>
@@ -13139,13 +12983,13 @@
               <a:buNone/>
             </a:pPr>
             <a:r>
-              <a:rPr lang="en-US" sz="3000" b="1" dirty="0">
+              <a:rPr lang="en-US" sz="3600" b="1" dirty="0">
                 <a:solidFill>
                   <a:srgbClr val="262626"/>
                 </a:solidFill>
-                <a:latin typeface="Alibaba PuHuiTi 3.0" pitchFamily="34" charset="0"/>
-                <a:ea typeface="Alibaba PuHuiTi 3.0" pitchFamily="34" charset="-122"/>
-                <a:cs typeface="Alibaba PuHuiTi 3.0" pitchFamily="34" charset="-120"/>
+                <a:latin typeface="Alibaba PuHuiTi 3.0 115 Black" pitchFamily="34" charset="0"/>
+                <a:ea typeface="Alibaba PuHuiTi 3.0 115 Black" pitchFamily="34" charset="-122"/>
+                <a:cs typeface="Alibaba PuHuiTi 3.0 115 Black" pitchFamily="34" charset="-120"/>
               </a:rPr>
               <a:t>Q2 分辨率越高，图像一定越清晰吗？</a:t>
             </a:r>
@@ -13168,7 +13012,7 @@
         </p:blipFill>
         <p:spPr>
           <a:xfrm>
-            <a:off x="777240" y="1280160"/>
+            <a:off x="777240" y="1490472"/>
             <a:ext cx="4480560" cy="3337560"/>
           </a:xfrm>
           <a:prstGeom prst="rect">
@@ -13184,7 +13028,7 @@
         </p:nvSpPr>
         <p:spPr>
           <a:xfrm>
-            <a:off x="777240" y="4690872"/>
+            <a:off x="777240" y="4901184"/>
             <a:ext cx="4480560" cy="320040"/>
           </a:xfrm>
           <a:prstGeom prst="rect">
@@ -13207,9 +13051,9 @@
                 <a:solidFill>
                   <a:srgbClr val="262626"/>
                 </a:solidFill>
-                <a:latin typeface="Alibaba PuHuiTi 3.0" pitchFamily="34" charset="0"/>
-                <a:ea typeface="Alibaba PuHuiTi 3.0" pitchFamily="34" charset="-122"/>
-                <a:cs typeface="Alibaba PuHuiTi 3.0" pitchFamily="34" charset="-120"/>
+                <a:latin typeface="Alibaba PuHuiTi 3.0 55 Regular" pitchFamily="34" charset="0"/>
+                <a:ea typeface="Alibaba PuHuiTi 3.0 55 Regular" pitchFamily="34" charset="-122"/>
+                <a:cs typeface="Alibaba PuHuiTi 3.0 55 Regular" pitchFamily="34" charset="-120"/>
               </a:rPr>
               <a:t>1600×1200 · Gaussian blur simulation</a:t>
             </a:r>
@@ -13232,7 +13076,7 @@
         </p:blipFill>
         <p:spPr>
           <a:xfrm>
-            <a:off x="5532120" y="1280160"/>
+            <a:off x="5532120" y="1490472"/>
             <a:ext cx="4480560" cy="3337560"/>
           </a:xfrm>
           <a:prstGeom prst="rect">
@@ -13248,7 +13092,7 @@
         </p:nvSpPr>
         <p:spPr>
           <a:xfrm>
-            <a:off x="5532120" y="4690872"/>
+            <a:off x="5532120" y="4901184"/>
             <a:ext cx="4480560" cy="320040"/>
           </a:xfrm>
           <a:prstGeom prst="rect">
@@ -13271,9 +13115,9 @@
                 <a:solidFill>
                   <a:srgbClr val="262626"/>
                 </a:solidFill>
-                <a:latin typeface="Alibaba PuHuiTi 3.0" pitchFamily="34" charset="0"/>
-                <a:ea typeface="Alibaba PuHuiTi 3.0" pitchFamily="34" charset="-122"/>
-                <a:cs typeface="Alibaba PuHuiTi 3.0" pitchFamily="34" charset="-120"/>
+                <a:latin typeface="Alibaba PuHuiTi 3.0 55 Regular" pitchFamily="34" charset="0"/>
+                <a:ea typeface="Alibaba PuHuiTi 3.0 55 Regular" pitchFamily="34" charset="-122"/>
+                <a:cs typeface="Alibaba PuHuiTi 3.0 55 Regular" pitchFamily="34" charset="-120"/>
               </a:rPr>
               <a:t>800×600 · same scene, sharp</a:t>
             </a:r>
@@ -13289,7 +13133,7 @@
         </p:nvSpPr>
         <p:spPr>
           <a:xfrm>
-            <a:off x="822960" y="5166360"/>
+            <a:off x="822960" y="5376672"/>
             <a:ext cx="10515600" cy="868680"/>
           </a:xfrm>
           <a:prstGeom prst="roundRect">
@@ -13316,7 +13160,7 @@
         </p:nvSpPr>
         <p:spPr>
           <a:xfrm>
-            <a:off x="987552" y="5276088"/>
+            <a:off x="987552" y="5486400"/>
             <a:ext cx="10186416" cy="649224"/>
           </a:xfrm>
           <a:prstGeom prst="rect">
@@ -13339,9 +13183,9 @@
                 <a:solidFill>
                   <a:srgbClr val="262626"/>
                 </a:solidFill>
-                <a:latin typeface="Alibaba PuHuiTi 3.0" pitchFamily="34" charset="0"/>
-                <a:ea typeface="Alibaba PuHuiTi 3.0" pitchFamily="34" charset="-122"/>
-                <a:cs typeface="Alibaba PuHuiTi 3.0" pitchFamily="34" charset="-120"/>
+                <a:latin typeface="Alibaba PuHuiTi 3.0 85 Bold" pitchFamily="34" charset="0"/>
+                <a:ea typeface="Alibaba PuHuiTi 3.0 85 Bold" pitchFamily="34" charset="-122"/>
+                <a:cs typeface="Alibaba PuHuiTi 3.0 85 Bold" pitchFamily="34" charset="-120"/>
               </a:rPr>
               <a:t>结论：高 pixel count 不自动等于高质量。</a:t>
             </a:r>
@@ -13356,9 +13200,9 @@
                 <a:solidFill>
                   <a:srgbClr val="262626"/>
                 </a:solidFill>
-                <a:latin typeface="Alibaba PuHuiTi 3.0" pitchFamily="34" charset="0"/>
-                <a:ea typeface="Alibaba PuHuiTi 3.0" pitchFamily="34" charset="-122"/>
-                <a:cs typeface="Alibaba PuHuiTi 3.0" pitchFamily="34" charset="-120"/>
+                <a:latin typeface="Alibaba PuHuiTi 3.0 85 Bold" pitchFamily="34" charset="0"/>
+                <a:ea typeface="Alibaba PuHuiTi 3.0 85 Bold" pitchFamily="34" charset="-122"/>
+                <a:cs typeface="Alibaba PuHuiTi 3.0 85 Bold" pitchFamily="34" charset="-120"/>
               </a:rPr>
               <a:t>在同一场景、同一范围、其他条件相同时，更多采样通常保留更多细节。</a:t>
             </a:r>
@@ -13417,9 +13261,9 @@
     </a:clrScheme>
     <a:fontScheme name="Office">
       <a:majorFont>
-        <a:latin typeface="Alibaba PuHuiTi 3.0"/>
-        <a:ea typeface=""/>
-        <a:cs typeface=""/>
+        <a:latin typeface="Alibaba PuHuiTi 3.0 115 Black"/>
+        <a:ea typeface="Alibaba PuHuiTi 3.0 115 Black"/>
+        <a:cs typeface="Alibaba PuHuiTi 3.0 115 Black"/>
         <a:font script="Jpan" typeface="游ゴシック Light"/>
         <a:font script="Hang" typeface="맑은 고딕"/>
         <a:font script="Hans" typeface="等线 Light"/>
@@ -13469,9 +13313,9 @@
         <a:font script="Tfng" typeface="Ebrima"/>
       </a:majorFont>
       <a:minorFont>
-        <a:latin typeface="Alibaba PuHuiTi 3.0"/>
-        <a:ea typeface=""/>
-        <a:cs typeface=""/>
+        <a:latin typeface="Alibaba PuHuiTi 3.0 55 Regular"/>
+        <a:ea typeface="Alibaba PuHuiTi 3.0 55 Regular"/>
+        <a:cs typeface="Alibaba PuHuiTi 3.0 55 Regular"/>
         <a:font script="Jpan" typeface="游ゴシック"/>
         <a:font script="Hang" typeface="맑은 고딕"/>
         <a:font script="Hans" typeface="等线"/>
